--- a/decks/web-scraping-toolkit.pptx
+++ b/decks/web-scraping-toolkit.pptx
@@ -12,9 +12,17 @@
     <p:sldId id="260" r:id="rId6"/>
     <p:sldId id="261" r:id="rId7"/>
     <p:sldId id="262" r:id="rId8"/>
+    <p:sldId id="263" r:id="rId9"/>
+    <p:sldId id="264" r:id="rId10"/>
+    <p:sldId id="265" r:id="rId11"/>
+    <p:sldId id="266" r:id="rId12"/>
+    <p:sldId id="267" r:id="rId13"/>
+    <p:sldId id="268" r:id="rId14"/>
+    <p:sldId id="269" r:id="rId15"/>
+    <p:sldId id="270" r:id="rId16"/>
   </p:sldIdLst>
   <p:notesMasterIdLst>
-    <p:notesMasterId r:id="rId9"/>
+    <p:notesMasterId r:id="rId17"/>
   </p:notesMasterIdLst>
   <p:sldSz cx="12191695" cy="6858000"/>
   <p:notesSz cx="6858000" cy="12191695"/>
@@ -111,6 +119,900 @@
     </a:lvl9pPr>
   </p:defaultTextStyle>
 </p:presentation>
+</file>
+
+<file path=ppt/charts/chart13.xml><?xml version="1.0" encoding="utf-8"?>
+<c:chartSpace xmlns:c="http://schemas.openxmlformats.org/drawingml/2006/chart" xmlns:a="http://schemas.openxmlformats.org/drawingml/2006/main" xmlns:r="http://schemas.openxmlformats.org/officeDocument/2006/relationships">
+  <c:date1904 val="0"/>
+  <c:roundedCorners val="1"/>
+  <c:chart>
+    <c:autoTitleDeleted val="1"/>
+    <c:plotArea>
+      <c:layout/>
+      <c:barChart>
+        <c:barDir val="col"/>
+        <c:grouping val="clustered"/>
+        <c:varyColors val="0"/>
+        <c:ser>
+          <c:idx val="0"/>
+          <c:order val="0"/>
+          <c:tx>
+            <c:strRef>
+              <c:f>Sheet1!$B$1</c:f>
+              <c:strCache>
+                <c:ptCount val="1"/>
+                <c:pt idx="0">
+                  <c:v>Flags per month</c:v>
+                </c:pt>
+              </c:strCache>
+            </c:strRef>
+          </c:tx>
+          <c:spPr>
+            <a:solidFill>
+              <a:srgbClr val="3B82F6"/>
+            </a:solidFill>
+            <a:effectLst/>
+          </c:spPr>
+          <c:invertIfNegative val="0"/>
+          <c:dLbls>
+            <c:numFmt formatCode="#,##0" sourceLinked="0"/>
+            <c:txPr>
+              <a:bodyPr/>
+              <a:lstStyle/>
+              <a:p>
+                <a:pPr>
+                  <a:defRPr b="0" i="0" strike="noStrike" sz="1000" u="none">
+                    <a:solidFill>
+                      <a:srgbClr val="E2E8F0"/>
+                    </a:solidFill>
+                    <a:latin typeface="Segoe UI"/>
+                  </a:defRPr>
+                </a:pPr>
+              </a:p>
+            </c:txPr>
+            <c:showLegendKey val="0"/>
+            <c:showVal val="1"/>
+            <c:showCatName val="0"/>
+            <c:showSerName val="0"/>
+            <c:showPercent val="0"/>
+            <c:showBubbleSize val="0"/>
+            <c:showLeaderLines val="0"/>
+          </c:dLbls>
+          <c:dPt>
+            <c:idx val="0"/>
+            <c:invertIfNegative val="0"/>
+            <c:bubble3D val="0"/>
+            <c:spPr>
+              <a:solidFill>
+                <a:srgbClr val="3B82F6"/>
+              </a:solidFill>
+              <a:effectLst/>
+            </c:spPr>
+          </c:dPt>
+          <c:dPt>
+            <c:idx val="1"/>
+            <c:invertIfNegative val="0"/>
+            <c:bubble3D val="0"/>
+            <c:spPr>
+              <a:solidFill>
+                <a:srgbClr val="06B6D4"/>
+              </a:solidFill>
+              <a:effectLst/>
+            </c:spPr>
+          </c:dPt>
+          <c:dPt>
+            <c:idx val="2"/>
+            <c:invertIfNegative val="0"/>
+            <c:bubble3D val="0"/>
+            <c:spPr>
+              <a:solidFill>
+                <a:srgbClr val="22D3A0"/>
+              </a:solidFill>
+              <a:effectLst/>
+            </c:spPr>
+          </c:dPt>
+          <c:dPt>
+            <c:idx val="3"/>
+            <c:invertIfNegative val="0"/>
+            <c:bubble3D val="0"/>
+            <c:spPr>
+              <a:solidFill>
+                <a:srgbClr val="F59E0B"/>
+              </a:solidFill>
+              <a:effectLst/>
+            </c:spPr>
+          </c:dPt>
+          <c:dPt>
+            <c:idx val="4"/>
+            <c:invertIfNegative val="0"/>
+            <c:bubble3D val="0"/>
+            <c:spPr>
+              <a:solidFill>
+                <a:srgbClr val="3B82F6"/>
+              </a:solidFill>
+              <a:effectLst/>
+            </c:spPr>
+          </c:dPt>
+          <c:cat>
+            <c:multiLvlStrRef>
+              <c:f>Sheet1!$A$2:$A$6</c:f>
+              <c:multiLvlStrCache>
+                <c:ptCount val="5"/>
+                <c:lvl>
+                  <c:pt idx="0">
+                    <c:v>Row-count drops</c:v>
+                  </c:pt>
+                  <c:pt idx="1">
+                    <c:v>Schema drift</c:v>
+                  </c:pt>
+                  <c:pt idx="2">
+                    <c:v>Sanity outliers</c:v>
+                  </c:pt>
+                  <c:pt idx="3">
+                    <c:v>Empty responses</c:v>
+                  </c:pt>
+                  <c:pt idx="4">
+                    <c:v>Latency spikes</c:v>
+                  </c:pt>
+                </c:lvl>
+              </c:multiLvlStrCache>
+            </c:multiLvlStrRef>
+          </c:cat>
+          <c:val>
+            <c:numRef>
+              <c:f>Sheet1!$B$2:$B$6</c:f>
+              <c:numCache>
+                <c:formatCode>General</c:formatCode>
+                <c:ptCount val="5"/>
+                <c:pt idx="0">
+                  <c:v>12</c:v>
+                </c:pt>
+                <c:pt idx="1">
+                  <c:v>8</c:v>
+                </c:pt>
+                <c:pt idx="2">
+                  <c:v>6</c:v>
+                </c:pt>
+                <c:pt idx="3">
+                  <c:v>4</c:v>
+                </c:pt>
+                <c:pt idx="4">
+                  <c:v>3</c:v>
+                </c:pt>
+              </c:numCache>
+            </c:numRef>
+          </c:val>
+        </c:ser>
+        <c:dLbls>
+          <c:numFmt formatCode="#,##0" sourceLinked="0"/>
+          <c:txPr>
+            <a:bodyPr/>
+            <a:lstStyle/>
+            <a:p>
+              <a:pPr>
+                <a:defRPr b="0" i="0" strike="noStrike" sz="1000" u="none">
+                  <a:solidFill>
+                    <a:srgbClr val="E2E8F0"/>
+                  </a:solidFill>
+                  <a:latin typeface="Segoe UI"/>
+                </a:defRPr>
+              </a:pPr>
+            </a:p>
+          </c:txPr>
+          <c:showLegendKey val="0"/>
+          <c:showVal val="1"/>
+          <c:showCatName val="0"/>
+          <c:showSerName val="0"/>
+          <c:showPercent val="0"/>
+          <c:showBubbleSize val="0"/>
+          <c:showLeaderLines val="0"/>
+        </c:dLbls>
+        <c:gapWidth val="55"/>
+        <c:overlap val="0"/>
+        <c:axId val="2094734554"/>
+        <c:axId val="2094734552"/>
+        <c:axId val="2094734556"/>
+      </c:barChart>
+      <c:catAx>
+        <c:axId val="2094734554"/>
+        <c:scaling>
+          <c:orientation val="minMax"/>
+        </c:scaling>
+        <c:delete val="0"/>
+        <c:axPos val="b"/>
+        <c:numFmt formatCode="General" sourceLinked="1"/>
+        <c:majorTickMark val="out"/>
+        <c:minorTickMark val="none"/>
+        <c:tickLblPos val="low"/>
+        <c:spPr>
+          <a:ln w="12700" cap="flat">
+            <a:solidFill>
+              <a:srgbClr val="24365A"/>
+            </a:solidFill>
+            <a:prstDash val="solid"/>
+            <a:round/>
+          </a:ln>
+        </c:spPr>
+        <c:txPr>
+          <a:bodyPr/>
+          <a:lstStyle/>
+          <a:p>
+            <a:pPr>
+              <a:defRPr sz="1100" b="0" i="0" u="none" strike="noStrike">
+                <a:solidFill>
+                  <a:srgbClr val="94A3B8"/>
+                </a:solidFill>
+                <a:latin typeface="Segoe UI"/>
+              </a:defRPr>
+            </a:pPr>
+            <a:endParaRPr lang="en-US"/>
+          </a:p>
+        </c:txPr>
+        <c:crossAx val="2094734552"/>
+        <c:crosses val="autoZero"/>
+        <c:auto val="1"/>
+        <c:lblAlgn val="ctr"/>
+        <c:noMultiLvlLbl val="1"/>
+      </c:catAx>
+      <c:valAx>
+        <c:axId val="2094734552"/>
+        <c:scaling>
+          <c:orientation val="minMax"/>
+        </c:scaling>
+        <c:delete val="0"/>
+        <c:axPos val="l"/>
+        <c:majorGridlines>
+          <c:spPr>
+            <a:ln w="12700" cap="flat">
+              <a:solidFill>
+                <a:srgbClr val="18243D"/>
+              </a:solidFill>
+              <a:prstDash val="solid"/>
+              <a:round/>
+            </a:ln>
+          </c:spPr>
+        </c:majorGridlines>
+        <c:numFmt formatCode="General" sourceLinked="0"/>
+        <c:majorTickMark val="out"/>
+        <c:minorTickMark val="none"/>
+        <c:tickLblPos val="nextTo"/>
+        <c:spPr>
+          <a:ln w="12700" cap="flat">
+            <a:solidFill>
+              <a:srgbClr val="24365A"/>
+            </a:solidFill>
+            <a:prstDash val="solid"/>
+            <a:round/>
+          </a:ln>
+        </c:spPr>
+        <c:txPr>
+          <a:bodyPr/>
+          <a:lstStyle/>
+          <a:p>
+            <a:pPr>
+              <a:defRPr sz="1000" b="0" i="0" u="none" strike="noStrike">
+                <a:solidFill>
+                  <a:srgbClr val="94A3B8"/>
+                </a:solidFill>
+                <a:latin typeface="Segoe UI"/>
+              </a:defRPr>
+            </a:pPr>
+            <a:endParaRPr lang="en-US"/>
+          </a:p>
+        </c:txPr>
+        <c:crossAx val="2094734554"/>
+        <c:crosses val="autoZero"/>
+        <c:crossBetween val="between"/>
+      </c:valAx>
+      <c:spPr>
+        <a:solidFill>
+          <a:srgbClr val="0D1420"/>
+        </a:solidFill>
+        <a:ln>
+          <a:noFill/>
+        </a:ln>
+        <a:effectLst/>
+      </c:spPr>
+    </c:plotArea>
+    <c:plotVisOnly val="1"/>
+    <c:dispBlanksAs val="span"/>
+  </c:chart>
+  <c:spPr>
+    <a:solidFill>
+      <a:srgbClr val="0D1420"/>
+    </a:solidFill>
+    <a:ln w="12700" cap="flat">
+      <a:solidFill>
+        <a:srgbClr val="24365A"/>
+      </a:solidFill>
+    </a:ln>
+    <a:effectLst/>
+  </c:spPr>
+  <c:externalData r:id="rId1">
+    <c:autoUpdate val="0"/>
+  </c:externalData>
+</c:chartSpace>
+</file>
+
+<file path=ppt/charts/chart14.xml><?xml version="1.0" encoding="utf-8"?>
+<c:chartSpace xmlns:c="http://schemas.openxmlformats.org/drawingml/2006/chart" xmlns:a="http://schemas.openxmlformats.org/drawingml/2006/main" xmlns:r="http://schemas.openxmlformats.org/officeDocument/2006/relationships">
+  <c:date1904 val="0"/>
+  <c:roundedCorners val="1"/>
+  <c:chart>
+    <c:autoTitleDeleted val="1"/>
+    <c:plotArea>
+      <c:layout/>
+      <c:doughnutChart>
+        <c:varyColors val="1"/>
+        <c:ser>
+          <c:idx val="0"/>
+          <c:order val="0"/>
+          <c:tx>
+            <c:strRef>
+              <c:f>Sheet1!$B$1</c:f>
+              <c:strCache>
+                <c:ptCount val="1"/>
+                <c:pt idx="0">
+                  <c:v>Breakdown</c:v>
+                </c:pt>
+              </c:strCache>
+            </c:strRef>
+          </c:tx>
+          <c:spPr>
+            <a:solidFill>
+              <a:schemeClr val="accent1"/>
+            </a:solidFill>
+            <a:ln w="9525" cap="flat">
+              <a:solidFill>
+                <a:srgbClr val="F9F9F9"/>
+              </a:solidFill>
+              <a:prstDash val="solid"/>
+              <a:round/>
+            </a:ln>
+            <a:effectLst/>
+          </c:spPr>
+          <c:dPt>
+            <c:idx val="0"/>
+            <c:bubble3D val="0"/>
+            <c:spPr>
+              <a:solidFill>
+                <a:srgbClr val="3B82F6"/>
+              </a:solidFill>
+              <a:effectLst/>
+            </c:spPr>
+          </c:dPt>
+          <c:dPt>
+            <c:idx val="1"/>
+            <c:bubble3D val="0"/>
+            <c:spPr>
+              <a:solidFill>
+                <a:srgbClr val="06B6D4"/>
+              </a:solidFill>
+              <a:effectLst/>
+            </c:spPr>
+          </c:dPt>
+          <c:dPt>
+            <c:idx val="2"/>
+            <c:bubble3D val="0"/>
+            <c:spPr>
+              <a:solidFill>
+                <a:srgbClr val="22D3A0"/>
+              </a:solidFill>
+              <a:effectLst/>
+            </c:spPr>
+          </c:dPt>
+          <c:dPt>
+            <c:idx val="3"/>
+            <c:bubble3D val="0"/>
+            <c:spPr>
+              <a:solidFill>
+                <a:srgbClr val="F59E0B"/>
+              </a:solidFill>
+              <a:effectLst/>
+            </c:spPr>
+          </c:dPt>
+          <c:dLbls>
+            <c:dLbl>
+              <c:idx val="0"/>
+              <c:numFmt formatCode="0%" sourceLinked="0"/>
+              <c:spPr/>
+              <c:txPr>
+                <a:bodyPr/>
+                <a:lstStyle/>
+                <a:p>
+                  <a:pPr>
+                    <a:defRPr sz="1000" b="0" i="0" u="none" strike="noStrike">
+                      <a:solidFill>
+                        <a:srgbClr val="E2E8F0"/>
+                      </a:solidFill>
+                      <a:latin typeface="Segoe UI"/>
+                    </a:defRPr>
+                  </a:pPr>
+                </a:p>
+              </c:txPr>
+              <c:showLegendKey val="0"/>
+              <c:showVal val="0"/>
+              <c:showCatName val="0"/>
+              <c:showSerName val="0"/>
+              <c:showPercent val="1"/>
+              <c:showBubbleSize val="0"/>
+            </c:dLbl>
+            <c:dLbl>
+              <c:idx val="1"/>
+              <c:numFmt formatCode="0%" sourceLinked="0"/>
+              <c:spPr/>
+              <c:txPr>
+                <a:bodyPr/>
+                <a:lstStyle/>
+                <a:p>
+                  <a:pPr>
+                    <a:defRPr sz="1000" b="0" i="0" u="none" strike="noStrike">
+                      <a:solidFill>
+                        <a:srgbClr val="E2E8F0"/>
+                      </a:solidFill>
+                      <a:latin typeface="Segoe UI"/>
+                    </a:defRPr>
+                  </a:pPr>
+                </a:p>
+              </c:txPr>
+              <c:showLegendKey val="0"/>
+              <c:showVal val="0"/>
+              <c:showCatName val="0"/>
+              <c:showSerName val="0"/>
+              <c:showPercent val="1"/>
+              <c:showBubbleSize val="0"/>
+            </c:dLbl>
+            <c:dLbl>
+              <c:idx val="2"/>
+              <c:numFmt formatCode="0%" sourceLinked="0"/>
+              <c:spPr/>
+              <c:txPr>
+                <a:bodyPr/>
+                <a:lstStyle/>
+                <a:p>
+                  <a:pPr>
+                    <a:defRPr sz="1000" b="0" i="0" u="none" strike="noStrike">
+                      <a:solidFill>
+                        <a:srgbClr val="E2E8F0"/>
+                      </a:solidFill>
+                      <a:latin typeface="Segoe UI"/>
+                    </a:defRPr>
+                  </a:pPr>
+                </a:p>
+              </c:txPr>
+              <c:showLegendKey val="0"/>
+              <c:showVal val="0"/>
+              <c:showCatName val="0"/>
+              <c:showSerName val="0"/>
+              <c:showPercent val="1"/>
+              <c:showBubbleSize val="0"/>
+            </c:dLbl>
+            <c:dLbl>
+              <c:idx val="3"/>
+              <c:numFmt formatCode="0%" sourceLinked="0"/>
+              <c:spPr/>
+              <c:txPr>
+                <a:bodyPr/>
+                <a:lstStyle/>
+                <a:p>
+                  <a:pPr>
+                    <a:defRPr sz="1000" b="0" i="0" u="none" strike="noStrike">
+                      <a:solidFill>
+                        <a:srgbClr val="E2E8F0"/>
+                      </a:solidFill>
+                      <a:latin typeface="Segoe UI"/>
+                    </a:defRPr>
+                  </a:pPr>
+                </a:p>
+              </c:txPr>
+              <c:showLegendKey val="0"/>
+              <c:showVal val="0"/>
+              <c:showCatName val="0"/>
+              <c:showSerName val="0"/>
+              <c:showPercent val="1"/>
+              <c:showBubbleSize val="0"/>
+            </c:dLbl>
+            <c:numFmt formatCode="0%" sourceLinked="0"/>
+            <c:txPr>
+              <a:bodyPr/>
+              <a:lstStyle/>
+              <a:p>
+                <a:pPr>
+                  <a:defRPr sz="1800" b="0" i="0" u="none" strike="noStrike">
+                    <a:solidFill>
+                      <a:srgbClr val="000000"/>
+                    </a:solidFill>
+                    <a:latin typeface="Arial"/>
+                  </a:defRPr>
+                </a:pPr>
+              </a:p>
+            </c:txPr>
+            <c:showLegendKey val="0"/>
+            <c:showVal val="0"/>
+            <c:showCatName val="1"/>
+            <c:showSerName val="0"/>
+            <c:showPercent val="1"/>
+            <c:showBubbleSize val="0"/>
+            <c:showLeaderLines val="0"/>
+          </c:dLbls>
+          <c:cat>
+            <c:strRef>
+              <c:f>Sheet1!$A$2:$A$5</c:f>
+              <c:strCache>
+                <c:ptCount val="4"/>
+                <c:pt idx="0">
+                  <c:v>Clean parse</c:v>
+                </c:pt>
+                <c:pt idx="1">
+                  <c:v>Fallback path</c:v>
+                </c:pt>
+                <c:pt idx="2">
+                  <c:v>Partial with warning</c:v>
+                </c:pt>
+                <c:pt idx="3">
+                  <c:v>Skipped and logged</c:v>
+                </c:pt>
+              </c:strCache>
+            </c:strRef>
+          </c:cat>
+          <c:val>
+            <c:numRef>
+              <c:f>Sheet1!$B$2:$B$5</c:f>
+              <c:numCache>
+                <c:ptCount val="4"/>
+                <c:pt idx="0">
+                  <c:v>70</c:v>
+                </c:pt>
+                <c:pt idx="1">
+                  <c:v>15</c:v>
+                </c:pt>
+                <c:pt idx="2">
+                  <c:v>10</c:v>
+                </c:pt>
+                <c:pt idx="3">
+                  <c:v>5</c:v>
+                </c:pt>
+              </c:numCache>
+            </c:numRef>
+          </c:val>
+        </c:ser>
+        <c:firstSliceAng val="0"/>
+        <c:holeSize val="62"/>
+      </c:doughnutChart>
+      <c:spPr>
+        <a:solidFill>
+          <a:srgbClr val="0D1420"/>
+        </a:solidFill>
+        <a:ln>
+          <a:noFill/>
+        </a:ln>
+        <a:effectLst/>
+      </c:spPr>
+    </c:plotArea>
+    <c:legend>
+      <c:legendPos val="r"/>
+      <c:overlay val="0"/>
+      <c:txPr>
+        <a:bodyPr/>
+        <a:lstStyle/>
+        <a:p>
+          <a:pPr>
+            <a:defRPr sz="1100">
+              <a:solidFill>
+                <a:srgbClr val="CBD5E1"/>
+              </a:solidFill>
+              <a:latin typeface="Segoe UI"/>
+              <a:cs typeface="Segoe UI"/>
+            </a:defRPr>
+          </a:pPr>
+          <a:endParaRPr lang="en-US"/>
+        </a:p>
+      </c:txPr>
+    </c:legend>
+    <c:plotVisOnly val="1"/>
+    <c:dispBlanksAs val="span"/>
+  </c:chart>
+  <c:spPr>
+    <a:solidFill>
+      <a:srgbClr val="0D1420"/>
+    </a:solidFill>
+    <a:ln w="12700" cap="flat">
+      <a:solidFill>
+        <a:srgbClr val="24365A"/>
+      </a:solidFill>
+    </a:ln>
+    <a:effectLst/>
+  </c:spPr>
+  <c:externalData r:id="rId1">
+    <c:autoUpdate val="0"/>
+  </c:externalData>
+</c:chartSpace>
+</file>
+
+<file path=ppt/charts/chart15.xml><?xml version="1.0" encoding="utf-8"?>
+<c:chartSpace xmlns:c="http://schemas.openxmlformats.org/drawingml/2006/chart" xmlns:a="http://schemas.openxmlformats.org/drawingml/2006/main" xmlns:r="http://schemas.openxmlformats.org/officeDocument/2006/relationships">
+  <c:date1904 val="0"/>
+  <c:roundedCorners val="1"/>
+  <c:chart>
+    <c:autoTitleDeleted val="1"/>
+    <c:plotArea>
+      <c:layout/>
+      <c:lineChart>
+        <c:varyColors val="0"/>
+        <c:ser>
+          <c:idx val="0"/>
+          <c:order val="0"/>
+          <c:tx>
+            <c:strRef>
+              <c:f>Sheet1!$B$1</c:f>
+              <c:strCache>
+                <c:ptCount val="1"/>
+                <c:pt idx="0">
+                  <c:v>Clean extraction %</c:v>
+                </c:pt>
+              </c:strCache>
+            </c:strRef>
+          </c:tx>
+          <c:spPr>
+            <a:solidFill>
+              <a:srgbClr val="3B82F6"/>
+            </a:solidFill>
+            <a:ln w="31750" cap="flat">
+              <a:solidFill>
+                <a:srgbClr val="3B82F6"/>
+              </a:solidFill>
+              <a:prstDash val="solid"/>
+              <a:round/>
+            </a:ln>
+            <a:effectLst/>
+          </c:spPr>
+          <c:invertIfNegative val="0"/>
+          <c:dLbls>
+            <c:numFmt formatCode="#,##0" sourceLinked="0"/>
+            <c:txPr>
+              <a:bodyPr/>
+              <a:lstStyle/>
+              <a:p>
+                <a:pPr>
+                  <a:defRPr b="0" i="0" strike="noStrike" sz="1200" u="none">
+                    <a:solidFill>
+                      <a:srgbClr val="000000"/>
+                    </a:solidFill>
+                    <a:latin typeface="Arial"/>
+                  </a:defRPr>
+                </a:pPr>
+              </a:p>
+            </c:txPr>
+            <c:showLegendKey val="0"/>
+            <c:showVal val="0"/>
+            <c:showCatName val="0"/>
+            <c:showSerName val="0"/>
+            <c:showPercent val="0"/>
+            <c:showBubbleSize val="0"/>
+            <c:showLeaderLines val="0"/>
+          </c:dLbls>
+          <c:marker>
+            <c:symbol val="circle"/>
+            <c:size val="6"/>
+            <c:spPr>
+              <a:solidFill>
+                <a:srgbClr val="3B82F6"/>
+              </a:solidFill>
+              <a:ln w="9525" cap="flat">
+                <a:solidFill>
+                  <a:srgbClr val="3B82F6"/>
+                </a:solidFill>
+                <a:prstDash val="solid"/>
+                <a:round/>
+              </a:ln>
+              <a:effectLst/>
+            </c:spPr>
+          </c:marker>
+          <c:cat>
+            <c:multiLvlStrRef>
+              <c:f>Sheet1!$A$2:$A$7</c:f>
+              <c:multiLvlStrCache>
+                <c:ptCount val="6"/>
+                <c:lvl>
+                  <c:pt idx="0">
+                    <c:v>W1</c:v>
+                  </c:pt>
+                  <c:pt idx="1">
+                    <c:v>W2</c:v>
+                  </c:pt>
+                  <c:pt idx="2">
+                    <c:v>W3</c:v>
+                  </c:pt>
+                  <c:pt idx="3">
+                    <c:v>W4</c:v>
+                  </c:pt>
+                  <c:pt idx="4">
+                    <c:v>W5</c:v>
+                  </c:pt>
+                  <c:pt idx="5">
+                    <c:v>W6</c:v>
+                  </c:pt>
+                </c:lvl>
+              </c:multiLvlStrCache>
+            </c:multiLvlStrRef>
+          </c:cat>
+          <c:val>
+            <c:numRef>
+              <c:f>Sheet1!$B$2:$B$7</c:f>
+              <c:numCache>
+                <c:formatCode>General</c:formatCode>
+                <c:ptCount val="6"/>
+                <c:pt idx="0">
+                  <c:v>98</c:v>
+                </c:pt>
+                <c:pt idx="1">
+                  <c:v>97</c:v>
+                </c:pt>
+                <c:pt idx="2">
+                  <c:v>61</c:v>
+                </c:pt>
+                <c:pt idx="3">
+                  <c:v>89</c:v>
+                </c:pt>
+                <c:pt idx="4">
+                  <c:v>97</c:v>
+                </c:pt>
+                <c:pt idx="5">
+                  <c:v>98</c:v>
+                </c:pt>
+              </c:numCache>
+            </c:numRef>
+          </c:val>
+          <c:smooth val="0"/>
+        </c:ser>
+        <c:dLbls>
+          <c:numFmt formatCode="#,##0" sourceLinked="0"/>
+          <c:txPr>
+            <a:bodyPr/>
+            <a:lstStyle/>
+            <a:p>
+              <a:pPr>
+                <a:defRPr b="0" i="0" strike="noStrike" sz="1200" u="none">
+                  <a:solidFill>
+                    <a:srgbClr val="000000"/>
+                  </a:solidFill>
+                  <a:latin typeface="Arial"/>
+                </a:defRPr>
+              </a:pPr>
+            </a:p>
+          </c:txPr>
+          <c:showLegendKey val="0"/>
+          <c:showVal val="0"/>
+          <c:showCatName val="0"/>
+          <c:showSerName val="0"/>
+          <c:showPercent val="0"/>
+          <c:showBubbleSize val="0"/>
+          <c:showLeaderLines val="0"/>
+        </c:dLbls>
+        <c:marker val="1"/>
+        <c:axId val="2094734554"/>
+        <c:axId val="2094734552"/>
+        <c:axId val="2094734556"/>
+      </c:lineChart>
+      <c:catAx>
+        <c:axId val="2094734554"/>
+        <c:scaling>
+          <c:orientation val="minMax"/>
+        </c:scaling>
+        <c:delete val="0"/>
+        <c:axPos val="b"/>
+        <c:numFmt formatCode="General" sourceLinked="1"/>
+        <c:majorTickMark val="out"/>
+        <c:minorTickMark val="none"/>
+        <c:tickLblPos val="low"/>
+        <c:spPr>
+          <a:ln w="12700" cap="flat">
+            <a:solidFill>
+              <a:srgbClr val="24365A"/>
+            </a:solidFill>
+            <a:prstDash val="solid"/>
+            <a:round/>
+          </a:ln>
+        </c:spPr>
+        <c:txPr>
+          <a:bodyPr/>
+          <a:lstStyle/>
+          <a:p>
+            <a:pPr>
+              <a:defRPr sz="1100" b="0" i="0" u="none" strike="noStrike">
+                <a:solidFill>
+                  <a:srgbClr val="94A3B8"/>
+                </a:solidFill>
+                <a:latin typeface="Segoe UI"/>
+              </a:defRPr>
+            </a:pPr>
+            <a:endParaRPr lang="en-US"/>
+          </a:p>
+        </c:txPr>
+        <c:crossAx val="2094734552"/>
+        <c:crosses val="autoZero"/>
+        <c:auto val="1"/>
+        <c:lblAlgn val="ctr"/>
+        <c:noMultiLvlLbl val="1"/>
+      </c:catAx>
+      <c:valAx>
+        <c:axId val="2094734552"/>
+        <c:scaling>
+          <c:orientation val="minMax"/>
+        </c:scaling>
+        <c:delete val="0"/>
+        <c:axPos val="l"/>
+        <c:majorGridlines>
+          <c:spPr>
+            <a:ln w="12700" cap="flat">
+              <a:solidFill>
+                <a:srgbClr val="18243D"/>
+              </a:solidFill>
+              <a:prstDash val="solid"/>
+              <a:round/>
+            </a:ln>
+          </c:spPr>
+        </c:majorGridlines>
+        <c:numFmt formatCode="General" sourceLinked="0"/>
+        <c:majorTickMark val="out"/>
+        <c:minorTickMark val="none"/>
+        <c:tickLblPos val="nextTo"/>
+        <c:spPr>
+          <a:ln w="12700" cap="flat">
+            <a:solidFill>
+              <a:srgbClr val="24365A"/>
+            </a:solidFill>
+            <a:prstDash val="solid"/>
+            <a:round/>
+          </a:ln>
+        </c:spPr>
+        <c:txPr>
+          <a:bodyPr/>
+          <a:lstStyle/>
+          <a:p>
+            <a:pPr>
+              <a:defRPr sz="1000" b="0" i="0" u="none" strike="noStrike">
+                <a:solidFill>
+                  <a:srgbClr val="94A3B8"/>
+                </a:solidFill>
+                <a:latin typeface="Segoe UI"/>
+              </a:defRPr>
+            </a:pPr>
+            <a:endParaRPr lang="en-US"/>
+          </a:p>
+        </c:txPr>
+        <c:crossAx val="2094734554"/>
+        <c:crosses val="autoZero"/>
+        <c:crossBetween val="between"/>
+      </c:valAx>
+      <c:spPr>
+        <a:solidFill>
+          <a:srgbClr val="0D1420"/>
+        </a:solidFill>
+        <a:ln>
+          <a:noFill/>
+        </a:ln>
+        <a:effectLst/>
+      </c:spPr>
+    </c:plotArea>
+    <c:plotVisOnly val="1"/>
+    <c:dispBlanksAs val="span"/>
+  </c:chart>
+  <c:spPr>
+    <a:solidFill>
+      <a:srgbClr val="0D1420"/>
+    </a:solidFill>
+    <a:ln w="12700" cap="flat">
+      <a:solidFill>
+        <a:srgbClr val="24365A"/>
+      </a:solidFill>
+    </a:ln>
+    <a:effectLst/>
+  </c:spPr>
+  <c:externalData r:id="rId1">
+    <c:autoUpdate val="0"/>
+  </c:externalData>
+</c:chartSpace>
 </file>
 
 <file path=ppt/notesMasters/notesMaster1.xml><?xml version="1.0" encoding="utf-8"?>
@@ -550,6 +1452,534 @@
 </p:notes>
 </file>
 
+<file path=ppt/notesSlides/notesSlide10.xml><?xml version="1.0" encoding="utf-8"?>
+<p:notes xmlns:a="http://schemas.openxmlformats.org/drawingml/2006/main" xmlns:r="http://schemas.openxmlformats.org/officeDocument/2006/relationships" xmlns:p="http://schemas.openxmlformats.org/presentationml/2006/main">
+  <p:cSld>
+    <p:spTree>
+      <p:nvGrpSpPr>
+        <p:cNvPr id="1" name=""/>
+        <p:cNvGrpSpPr/>
+        <p:nvPr/>
+      </p:nvGrpSpPr>
+      <p:grpSpPr>
+        <a:xfrm>
+          <a:off x="0" y="0"/>
+          <a:ext cx="0" cy="0"/>
+          <a:chOff x="0" y="0"/>
+          <a:chExt cx="0" cy="0"/>
+        </a:xfrm>
+      </p:grpSpPr>
+      <p:sp>
+        <p:nvSpPr>
+          <p:cNvPr id="2" name="Slide Image Placeholder 1"/>
+          <p:cNvSpPr>
+            <a:spLocks noGrp="1" noRot="1" noChangeAspect="1"/>
+          </p:cNvSpPr>
+          <p:nvPr>
+            <p:ph type="sldImg"/>
+          </p:nvPr>
+        </p:nvSpPr>
+        <p:spPr/>
+      </p:sp>
+      <p:sp>
+        <p:nvSpPr>
+          <p:cNvPr id="3" name="Notes Placeholder 2"/>
+          <p:cNvSpPr>
+            <a:spLocks noGrp="1"/>
+          </p:cNvSpPr>
+          <p:nvPr>
+            <p:ph type="body" idx="1"/>
+          </p:nvPr>
+        </p:nvSpPr>
+        <p:spPr/>
+        <p:txBody>
+          <a:bodyPr/>
+          <a:lstStyle/>
+          <a:p>
+            <a:r>
+              <a:rPr lang="en-US" dirty="0"/>
+              <a:t/>
+            </a:r>
+            <a:endParaRPr lang="en-US" dirty="0"/>
+          </a:p>
+        </p:txBody>
+      </p:sp>
+      <p:sp>
+        <p:nvSpPr>
+          <p:cNvPr id="4" name="Slide Number Placeholder 3"/>
+          <p:cNvSpPr>
+            <a:spLocks noGrp="1"/>
+          </p:cNvSpPr>
+          <p:nvPr>
+            <p:ph type="sldNum" sz="quarter" idx="10"/>
+          </p:nvPr>
+        </p:nvSpPr>
+        <p:spPr/>
+        <p:txBody>
+          <a:bodyPr/>
+          <a:lstStyle/>
+          <a:p>
+            <a:fld id="{F7021451-1387-4CA6-816F-3879F97B5CBC}" type="slidenum">
+              <a:rPr lang="en-US"/>
+              <a:t>10</a:t>
+            </a:fld>
+            <a:endParaRPr lang="en-US"/>
+          </a:p>
+        </p:txBody>
+      </p:sp>
+    </p:spTree>
+    <p:extLst>
+      <p:ext uri="{BB962C8B-B14F-4D97-AF65-F5344CB8AC3E}">
+        <p14:creationId xmlns:p14="http://schemas.microsoft.com/office/powerpoint/2010/main" val="1024086991"/>
+      </p:ext>
+    </p:extLst>
+  </p:cSld>
+  <p:clrMapOvr>
+    <a:masterClrMapping/>
+  </p:clrMapOvr>
+</p:notes>
+</file>
+
+<file path=ppt/notesSlides/notesSlide11.xml><?xml version="1.0" encoding="utf-8"?>
+<p:notes xmlns:a="http://schemas.openxmlformats.org/drawingml/2006/main" xmlns:r="http://schemas.openxmlformats.org/officeDocument/2006/relationships" xmlns:p="http://schemas.openxmlformats.org/presentationml/2006/main">
+  <p:cSld>
+    <p:spTree>
+      <p:nvGrpSpPr>
+        <p:cNvPr id="1" name=""/>
+        <p:cNvGrpSpPr/>
+        <p:nvPr/>
+      </p:nvGrpSpPr>
+      <p:grpSpPr>
+        <a:xfrm>
+          <a:off x="0" y="0"/>
+          <a:ext cx="0" cy="0"/>
+          <a:chOff x="0" y="0"/>
+          <a:chExt cx="0" cy="0"/>
+        </a:xfrm>
+      </p:grpSpPr>
+      <p:sp>
+        <p:nvSpPr>
+          <p:cNvPr id="2" name="Slide Image Placeholder 1"/>
+          <p:cNvSpPr>
+            <a:spLocks noGrp="1" noRot="1" noChangeAspect="1"/>
+          </p:cNvSpPr>
+          <p:nvPr>
+            <p:ph type="sldImg"/>
+          </p:nvPr>
+        </p:nvSpPr>
+        <p:spPr/>
+      </p:sp>
+      <p:sp>
+        <p:nvSpPr>
+          <p:cNvPr id="3" name="Notes Placeholder 2"/>
+          <p:cNvSpPr>
+            <a:spLocks noGrp="1"/>
+          </p:cNvSpPr>
+          <p:nvPr>
+            <p:ph type="body" idx="1"/>
+          </p:nvPr>
+        </p:nvSpPr>
+        <p:spPr/>
+        <p:txBody>
+          <a:bodyPr/>
+          <a:lstStyle/>
+          <a:p>
+            <a:r>
+              <a:rPr lang="en-US" dirty="0"/>
+              <a:t/>
+            </a:r>
+            <a:endParaRPr lang="en-US" dirty="0"/>
+          </a:p>
+        </p:txBody>
+      </p:sp>
+      <p:sp>
+        <p:nvSpPr>
+          <p:cNvPr id="4" name="Slide Number Placeholder 3"/>
+          <p:cNvSpPr>
+            <a:spLocks noGrp="1"/>
+          </p:cNvSpPr>
+          <p:nvPr>
+            <p:ph type="sldNum" sz="quarter" idx="10"/>
+          </p:nvPr>
+        </p:nvSpPr>
+        <p:spPr/>
+        <p:txBody>
+          <a:bodyPr/>
+          <a:lstStyle/>
+          <a:p>
+            <a:fld id="{F7021451-1387-4CA6-816F-3879F97B5CBC}" type="slidenum">
+              <a:rPr lang="en-US"/>
+              <a:t>11</a:t>
+            </a:fld>
+            <a:endParaRPr lang="en-US"/>
+          </a:p>
+        </p:txBody>
+      </p:sp>
+    </p:spTree>
+    <p:extLst>
+      <p:ext uri="{BB962C8B-B14F-4D97-AF65-F5344CB8AC3E}">
+        <p14:creationId xmlns:p14="http://schemas.microsoft.com/office/powerpoint/2010/main" val="1024086991"/>
+      </p:ext>
+    </p:extLst>
+  </p:cSld>
+  <p:clrMapOvr>
+    <a:masterClrMapping/>
+  </p:clrMapOvr>
+</p:notes>
+</file>
+
+<file path=ppt/notesSlides/notesSlide12.xml><?xml version="1.0" encoding="utf-8"?>
+<p:notes xmlns:a="http://schemas.openxmlformats.org/drawingml/2006/main" xmlns:r="http://schemas.openxmlformats.org/officeDocument/2006/relationships" xmlns:p="http://schemas.openxmlformats.org/presentationml/2006/main">
+  <p:cSld>
+    <p:spTree>
+      <p:nvGrpSpPr>
+        <p:cNvPr id="1" name=""/>
+        <p:cNvGrpSpPr/>
+        <p:nvPr/>
+      </p:nvGrpSpPr>
+      <p:grpSpPr>
+        <a:xfrm>
+          <a:off x="0" y="0"/>
+          <a:ext cx="0" cy="0"/>
+          <a:chOff x="0" y="0"/>
+          <a:chExt cx="0" cy="0"/>
+        </a:xfrm>
+      </p:grpSpPr>
+      <p:sp>
+        <p:nvSpPr>
+          <p:cNvPr id="2" name="Slide Image Placeholder 1"/>
+          <p:cNvSpPr>
+            <a:spLocks noGrp="1" noRot="1" noChangeAspect="1"/>
+          </p:cNvSpPr>
+          <p:nvPr>
+            <p:ph type="sldImg"/>
+          </p:nvPr>
+        </p:nvSpPr>
+        <p:spPr/>
+      </p:sp>
+      <p:sp>
+        <p:nvSpPr>
+          <p:cNvPr id="3" name="Notes Placeholder 2"/>
+          <p:cNvSpPr>
+            <a:spLocks noGrp="1"/>
+          </p:cNvSpPr>
+          <p:nvPr>
+            <p:ph type="body" idx="1"/>
+          </p:nvPr>
+        </p:nvSpPr>
+        <p:spPr/>
+        <p:txBody>
+          <a:bodyPr/>
+          <a:lstStyle/>
+          <a:p>
+            <a:r>
+              <a:rPr lang="en-US" dirty="0"/>
+              <a:t/>
+            </a:r>
+            <a:endParaRPr lang="en-US" dirty="0"/>
+          </a:p>
+        </p:txBody>
+      </p:sp>
+      <p:sp>
+        <p:nvSpPr>
+          <p:cNvPr id="4" name="Slide Number Placeholder 3"/>
+          <p:cNvSpPr>
+            <a:spLocks noGrp="1"/>
+          </p:cNvSpPr>
+          <p:nvPr>
+            <p:ph type="sldNum" sz="quarter" idx="10"/>
+          </p:nvPr>
+        </p:nvSpPr>
+        <p:spPr/>
+        <p:txBody>
+          <a:bodyPr/>
+          <a:lstStyle/>
+          <a:p>
+            <a:fld id="{F7021451-1387-4CA6-816F-3879F97B5CBC}" type="slidenum">
+              <a:rPr lang="en-US"/>
+              <a:t>12</a:t>
+            </a:fld>
+            <a:endParaRPr lang="en-US"/>
+          </a:p>
+        </p:txBody>
+      </p:sp>
+    </p:spTree>
+    <p:extLst>
+      <p:ext uri="{BB962C8B-B14F-4D97-AF65-F5344CB8AC3E}">
+        <p14:creationId xmlns:p14="http://schemas.microsoft.com/office/powerpoint/2010/main" val="1024086991"/>
+      </p:ext>
+    </p:extLst>
+  </p:cSld>
+  <p:clrMapOvr>
+    <a:masterClrMapping/>
+  </p:clrMapOvr>
+</p:notes>
+</file>
+
+<file path=ppt/notesSlides/notesSlide13.xml><?xml version="1.0" encoding="utf-8"?>
+<p:notes xmlns:a="http://schemas.openxmlformats.org/drawingml/2006/main" xmlns:r="http://schemas.openxmlformats.org/officeDocument/2006/relationships" xmlns:p="http://schemas.openxmlformats.org/presentationml/2006/main">
+  <p:cSld>
+    <p:spTree>
+      <p:nvGrpSpPr>
+        <p:cNvPr id="1" name=""/>
+        <p:cNvGrpSpPr/>
+        <p:nvPr/>
+      </p:nvGrpSpPr>
+      <p:grpSpPr>
+        <a:xfrm>
+          <a:off x="0" y="0"/>
+          <a:ext cx="0" cy="0"/>
+          <a:chOff x="0" y="0"/>
+          <a:chExt cx="0" cy="0"/>
+        </a:xfrm>
+      </p:grpSpPr>
+      <p:sp>
+        <p:nvSpPr>
+          <p:cNvPr id="2" name="Slide Image Placeholder 1"/>
+          <p:cNvSpPr>
+            <a:spLocks noGrp="1" noRot="1" noChangeAspect="1"/>
+          </p:cNvSpPr>
+          <p:nvPr>
+            <p:ph type="sldImg"/>
+          </p:nvPr>
+        </p:nvSpPr>
+        <p:spPr/>
+      </p:sp>
+      <p:sp>
+        <p:nvSpPr>
+          <p:cNvPr id="3" name="Notes Placeholder 2"/>
+          <p:cNvSpPr>
+            <a:spLocks noGrp="1"/>
+          </p:cNvSpPr>
+          <p:nvPr>
+            <p:ph type="body" idx="1"/>
+          </p:nvPr>
+        </p:nvSpPr>
+        <p:spPr/>
+        <p:txBody>
+          <a:bodyPr/>
+          <a:lstStyle/>
+          <a:p>
+            <a:r>
+              <a:rPr lang="en-US" dirty="0"/>
+              <a:t/>
+            </a:r>
+            <a:endParaRPr lang="en-US" dirty="0"/>
+          </a:p>
+        </p:txBody>
+      </p:sp>
+      <p:sp>
+        <p:nvSpPr>
+          <p:cNvPr id="4" name="Slide Number Placeholder 3"/>
+          <p:cNvSpPr>
+            <a:spLocks noGrp="1"/>
+          </p:cNvSpPr>
+          <p:nvPr>
+            <p:ph type="sldNum" sz="quarter" idx="10"/>
+          </p:nvPr>
+        </p:nvSpPr>
+        <p:spPr/>
+        <p:txBody>
+          <a:bodyPr/>
+          <a:lstStyle/>
+          <a:p>
+            <a:fld id="{F7021451-1387-4CA6-816F-3879F97B5CBC}" type="slidenum">
+              <a:rPr lang="en-US"/>
+              <a:t>13</a:t>
+            </a:fld>
+            <a:endParaRPr lang="en-US"/>
+          </a:p>
+        </p:txBody>
+      </p:sp>
+    </p:spTree>
+    <p:extLst>
+      <p:ext uri="{BB962C8B-B14F-4D97-AF65-F5344CB8AC3E}">
+        <p14:creationId xmlns:p14="http://schemas.microsoft.com/office/powerpoint/2010/main" val="1024086991"/>
+      </p:ext>
+    </p:extLst>
+  </p:cSld>
+  <p:clrMapOvr>
+    <a:masterClrMapping/>
+  </p:clrMapOvr>
+</p:notes>
+</file>
+
+<file path=ppt/notesSlides/notesSlide14.xml><?xml version="1.0" encoding="utf-8"?>
+<p:notes xmlns:a="http://schemas.openxmlformats.org/drawingml/2006/main" xmlns:r="http://schemas.openxmlformats.org/officeDocument/2006/relationships" xmlns:p="http://schemas.openxmlformats.org/presentationml/2006/main">
+  <p:cSld>
+    <p:spTree>
+      <p:nvGrpSpPr>
+        <p:cNvPr id="1" name=""/>
+        <p:cNvGrpSpPr/>
+        <p:nvPr/>
+      </p:nvGrpSpPr>
+      <p:grpSpPr>
+        <a:xfrm>
+          <a:off x="0" y="0"/>
+          <a:ext cx="0" cy="0"/>
+          <a:chOff x="0" y="0"/>
+          <a:chExt cx="0" cy="0"/>
+        </a:xfrm>
+      </p:grpSpPr>
+      <p:sp>
+        <p:nvSpPr>
+          <p:cNvPr id="2" name="Slide Image Placeholder 1"/>
+          <p:cNvSpPr>
+            <a:spLocks noGrp="1" noRot="1" noChangeAspect="1"/>
+          </p:cNvSpPr>
+          <p:nvPr>
+            <p:ph type="sldImg"/>
+          </p:nvPr>
+        </p:nvSpPr>
+        <p:spPr/>
+      </p:sp>
+      <p:sp>
+        <p:nvSpPr>
+          <p:cNvPr id="3" name="Notes Placeholder 2"/>
+          <p:cNvSpPr>
+            <a:spLocks noGrp="1"/>
+          </p:cNvSpPr>
+          <p:nvPr>
+            <p:ph type="body" idx="1"/>
+          </p:nvPr>
+        </p:nvSpPr>
+        <p:spPr/>
+        <p:txBody>
+          <a:bodyPr/>
+          <a:lstStyle/>
+          <a:p>
+            <a:r>
+              <a:rPr lang="en-US" dirty="0"/>
+              <a:t/>
+            </a:r>
+            <a:endParaRPr lang="en-US" dirty="0"/>
+          </a:p>
+        </p:txBody>
+      </p:sp>
+      <p:sp>
+        <p:nvSpPr>
+          <p:cNvPr id="4" name="Slide Number Placeholder 3"/>
+          <p:cNvSpPr>
+            <a:spLocks noGrp="1"/>
+          </p:cNvSpPr>
+          <p:nvPr>
+            <p:ph type="sldNum" sz="quarter" idx="10"/>
+          </p:nvPr>
+        </p:nvSpPr>
+        <p:spPr/>
+        <p:txBody>
+          <a:bodyPr/>
+          <a:lstStyle/>
+          <a:p>
+            <a:fld id="{F7021451-1387-4CA6-816F-3879F97B5CBC}" type="slidenum">
+              <a:rPr lang="en-US"/>
+              <a:t>14</a:t>
+            </a:fld>
+            <a:endParaRPr lang="en-US"/>
+          </a:p>
+        </p:txBody>
+      </p:sp>
+    </p:spTree>
+    <p:extLst>
+      <p:ext uri="{BB962C8B-B14F-4D97-AF65-F5344CB8AC3E}">
+        <p14:creationId xmlns:p14="http://schemas.microsoft.com/office/powerpoint/2010/main" val="1024086991"/>
+      </p:ext>
+    </p:extLst>
+  </p:cSld>
+  <p:clrMapOvr>
+    <a:masterClrMapping/>
+  </p:clrMapOvr>
+</p:notes>
+</file>
+
+<file path=ppt/notesSlides/notesSlide15.xml><?xml version="1.0" encoding="utf-8"?>
+<p:notes xmlns:a="http://schemas.openxmlformats.org/drawingml/2006/main" xmlns:r="http://schemas.openxmlformats.org/officeDocument/2006/relationships" xmlns:p="http://schemas.openxmlformats.org/presentationml/2006/main">
+  <p:cSld>
+    <p:spTree>
+      <p:nvGrpSpPr>
+        <p:cNvPr id="1" name=""/>
+        <p:cNvGrpSpPr/>
+        <p:nvPr/>
+      </p:nvGrpSpPr>
+      <p:grpSpPr>
+        <a:xfrm>
+          <a:off x="0" y="0"/>
+          <a:ext cx="0" cy="0"/>
+          <a:chOff x="0" y="0"/>
+          <a:chExt cx="0" cy="0"/>
+        </a:xfrm>
+      </p:grpSpPr>
+      <p:sp>
+        <p:nvSpPr>
+          <p:cNvPr id="2" name="Slide Image Placeholder 1"/>
+          <p:cNvSpPr>
+            <a:spLocks noGrp="1" noRot="1" noChangeAspect="1"/>
+          </p:cNvSpPr>
+          <p:nvPr>
+            <p:ph type="sldImg"/>
+          </p:nvPr>
+        </p:nvSpPr>
+        <p:spPr/>
+      </p:sp>
+      <p:sp>
+        <p:nvSpPr>
+          <p:cNvPr id="3" name="Notes Placeholder 2"/>
+          <p:cNvSpPr>
+            <a:spLocks noGrp="1"/>
+          </p:cNvSpPr>
+          <p:nvPr>
+            <p:ph type="body" idx="1"/>
+          </p:nvPr>
+        </p:nvSpPr>
+        <p:spPr/>
+        <p:txBody>
+          <a:bodyPr/>
+          <a:lstStyle/>
+          <a:p>
+            <a:r>
+              <a:rPr lang="en-US" dirty="0"/>
+              <a:t/>
+            </a:r>
+            <a:endParaRPr lang="en-US" dirty="0"/>
+          </a:p>
+        </p:txBody>
+      </p:sp>
+      <p:sp>
+        <p:nvSpPr>
+          <p:cNvPr id="4" name="Slide Number Placeholder 3"/>
+          <p:cNvSpPr>
+            <a:spLocks noGrp="1"/>
+          </p:cNvSpPr>
+          <p:nvPr>
+            <p:ph type="sldNum" sz="quarter" idx="10"/>
+          </p:nvPr>
+        </p:nvSpPr>
+        <p:spPr/>
+        <p:txBody>
+          <a:bodyPr/>
+          <a:lstStyle/>
+          <a:p>
+            <a:fld id="{F7021451-1387-4CA6-816F-3879F97B5CBC}" type="slidenum">
+              <a:rPr lang="en-US"/>
+              <a:t>15</a:t>
+            </a:fld>
+            <a:endParaRPr lang="en-US"/>
+          </a:p>
+        </p:txBody>
+      </p:sp>
+    </p:spTree>
+    <p:extLst>
+      <p:ext uri="{BB962C8B-B14F-4D97-AF65-F5344CB8AC3E}">
+        <p14:creationId xmlns:p14="http://schemas.microsoft.com/office/powerpoint/2010/main" val="1024086991"/>
+      </p:ext>
+    </p:extLst>
+  </p:cSld>
+  <p:clrMapOvr>
+    <a:masterClrMapping/>
+  </p:clrMapOvr>
+</p:notes>
+</file>
+
 <file path=ppt/notesSlides/notesSlide2.xml><?xml version="1.0" encoding="utf-8"?>
 <p:notes xmlns:a="http://schemas.openxmlformats.org/drawingml/2006/main" xmlns:r="http://schemas.openxmlformats.org/officeDocument/2006/relationships" xmlns:p="http://schemas.openxmlformats.org/presentationml/2006/main">
   <p:cSld>
@@ -1060,6 +2490,182 @@
             <a:fld id="{F7021451-1387-4CA6-816F-3879F97B5CBC}" type="slidenum">
               <a:rPr lang="en-US"/>
               <a:t>7</a:t>
+            </a:fld>
+            <a:endParaRPr lang="en-US"/>
+          </a:p>
+        </p:txBody>
+      </p:sp>
+    </p:spTree>
+    <p:extLst>
+      <p:ext uri="{BB962C8B-B14F-4D97-AF65-F5344CB8AC3E}">
+        <p14:creationId xmlns:p14="http://schemas.microsoft.com/office/powerpoint/2010/main" val="1024086991"/>
+      </p:ext>
+    </p:extLst>
+  </p:cSld>
+  <p:clrMapOvr>
+    <a:masterClrMapping/>
+  </p:clrMapOvr>
+</p:notes>
+</file>
+
+<file path=ppt/notesSlides/notesSlide8.xml><?xml version="1.0" encoding="utf-8"?>
+<p:notes xmlns:a="http://schemas.openxmlformats.org/drawingml/2006/main" xmlns:r="http://schemas.openxmlformats.org/officeDocument/2006/relationships" xmlns:p="http://schemas.openxmlformats.org/presentationml/2006/main">
+  <p:cSld>
+    <p:spTree>
+      <p:nvGrpSpPr>
+        <p:cNvPr id="1" name=""/>
+        <p:cNvGrpSpPr/>
+        <p:nvPr/>
+      </p:nvGrpSpPr>
+      <p:grpSpPr>
+        <a:xfrm>
+          <a:off x="0" y="0"/>
+          <a:ext cx="0" cy="0"/>
+          <a:chOff x="0" y="0"/>
+          <a:chExt cx="0" cy="0"/>
+        </a:xfrm>
+      </p:grpSpPr>
+      <p:sp>
+        <p:nvSpPr>
+          <p:cNvPr id="2" name="Slide Image Placeholder 1"/>
+          <p:cNvSpPr>
+            <a:spLocks noGrp="1" noRot="1" noChangeAspect="1"/>
+          </p:cNvSpPr>
+          <p:nvPr>
+            <p:ph type="sldImg"/>
+          </p:nvPr>
+        </p:nvSpPr>
+        <p:spPr/>
+      </p:sp>
+      <p:sp>
+        <p:nvSpPr>
+          <p:cNvPr id="3" name="Notes Placeholder 2"/>
+          <p:cNvSpPr>
+            <a:spLocks noGrp="1"/>
+          </p:cNvSpPr>
+          <p:nvPr>
+            <p:ph type="body" idx="1"/>
+          </p:nvPr>
+        </p:nvSpPr>
+        <p:spPr/>
+        <p:txBody>
+          <a:bodyPr/>
+          <a:lstStyle/>
+          <a:p>
+            <a:r>
+              <a:rPr lang="en-US" dirty="0"/>
+              <a:t/>
+            </a:r>
+            <a:endParaRPr lang="en-US" dirty="0"/>
+          </a:p>
+        </p:txBody>
+      </p:sp>
+      <p:sp>
+        <p:nvSpPr>
+          <p:cNvPr id="4" name="Slide Number Placeholder 3"/>
+          <p:cNvSpPr>
+            <a:spLocks noGrp="1"/>
+          </p:cNvSpPr>
+          <p:nvPr>
+            <p:ph type="sldNum" sz="quarter" idx="10"/>
+          </p:nvPr>
+        </p:nvSpPr>
+        <p:spPr/>
+        <p:txBody>
+          <a:bodyPr/>
+          <a:lstStyle/>
+          <a:p>
+            <a:fld id="{F7021451-1387-4CA6-816F-3879F97B5CBC}" type="slidenum">
+              <a:rPr lang="en-US"/>
+              <a:t>8</a:t>
+            </a:fld>
+            <a:endParaRPr lang="en-US"/>
+          </a:p>
+        </p:txBody>
+      </p:sp>
+    </p:spTree>
+    <p:extLst>
+      <p:ext uri="{BB962C8B-B14F-4D97-AF65-F5344CB8AC3E}">
+        <p14:creationId xmlns:p14="http://schemas.microsoft.com/office/powerpoint/2010/main" val="1024086991"/>
+      </p:ext>
+    </p:extLst>
+  </p:cSld>
+  <p:clrMapOvr>
+    <a:masterClrMapping/>
+  </p:clrMapOvr>
+</p:notes>
+</file>
+
+<file path=ppt/notesSlides/notesSlide9.xml><?xml version="1.0" encoding="utf-8"?>
+<p:notes xmlns:a="http://schemas.openxmlformats.org/drawingml/2006/main" xmlns:r="http://schemas.openxmlformats.org/officeDocument/2006/relationships" xmlns:p="http://schemas.openxmlformats.org/presentationml/2006/main">
+  <p:cSld>
+    <p:spTree>
+      <p:nvGrpSpPr>
+        <p:cNvPr id="1" name=""/>
+        <p:cNvGrpSpPr/>
+        <p:nvPr/>
+      </p:nvGrpSpPr>
+      <p:grpSpPr>
+        <a:xfrm>
+          <a:off x="0" y="0"/>
+          <a:ext cx="0" cy="0"/>
+          <a:chOff x="0" y="0"/>
+          <a:chExt cx="0" cy="0"/>
+        </a:xfrm>
+      </p:grpSpPr>
+      <p:sp>
+        <p:nvSpPr>
+          <p:cNvPr id="2" name="Slide Image Placeholder 1"/>
+          <p:cNvSpPr>
+            <a:spLocks noGrp="1" noRot="1" noChangeAspect="1"/>
+          </p:cNvSpPr>
+          <p:nvPr>
+            <p:ph type="sldImg"/>
+          </p:nvPr>
+        </p:nvSpPr>
+        <p:spPr/>
+      </p:sp>
+      <p:sp>
+        <p:nvSpPr>
+          <p:cNvPr id="3" name="Notes Placeholder 2"/>
+          <p:cNvSpPr>
+            <a:spLocks noGrp="1"/>
+          </p:cNvSpPr>
+          <p:nvPr>
+            <p:ph type="body" idx="1"/>
+          </p:nvPr>
+        </p:nvSpPr>
+        <p:spPr/>
+        <p:txBody>
+          <a:bodyPr/>
+          <a:lstStyle/>
+          <a:p>
+            <a:r>
+              <a:rPr lang="en-US" dirty="0"/>
+              <a:t/>
+            </a:r>
+            <a:endParaRPr lang="en-US" dirty="0"/>
+          </a:p>
+        </p:txBody>
+      </p:sp>
+      <p:sp>
+        <p:nvSpPr>
+          <p:cNvPr id="4" name="Slide Number Placeholder 3"/>
+          <p:cNvSpPr>
+            <a:spLocks noGrp="1"/>
+          </p:cNvSpPr>
+          <p:nvPr>
+            <p:ph type="sldNum" sz="quarter" idx="10"/>
+          </p:nvPr>
+        </p:nvSpPr>
+        <p:spPr/>
+        <p:txBody>
+          <a:bodyPr/>
+          <a:lstStyle/>
+          <a:p>
+            <a:fld id="{F7021451-1387-4CA6-816F-3879F97B5CBC}" type="slidenum">
+              <a:rPr lang="en-US"/>
+              <a:t>9</a:t>
             </a:fld>
             <a:endParaRPr lang="en-US"/>
           </a:p>
@@ -1457,7 +3063,7 @@
         </p:nvSpPr>
         <p:spPr>
           <a:xfrm>
-            <a:off x="822960" y="1554480"/>
+            <a:off x="822960" y="1783080"/>
             <a:ext cx="10515600" cy="457200"/>
           </a:xfrm>
           <a:prstGeom prst="rect">
@@ -1482,7 +3088,7 @@
                 <a:ea typeface="Consolas" pitchFamily="34" charset="-122"/>
                 <a:cs typeface="Consolas" pitchFamily="34" charset="-120"/>
               </a:rPr>
-              <a:t>OPEN SOURCE · 4,398 LOC</a:t>
+              <a:t>ZALIN PLATFORM · OPEN SOURCE</a:t>
             </a:r>
             <a:endParaRPr lang="en-US" sz="1400" dirty="0"/>
           </a:p>
@@ -1497,7 +3103,7 @@
         <p:spPr>
           <a:xfrm>
             <a:off x="822960" y="2286000"/>
-            <a:ext cx="10515600" cy="1737360"/>
+            <a:ext cx="10607040" cy="1691640"/>
           </a:xfrm>
           <a:prstGeom prst="rect">
             <a:avLst/>
@@ -1513,7 +3119,7 @@
               <a:buNone/>
             </a:pPr>
             <a:r>
-              <a:rPr lang="en-US" sz="4400" b="1" dirty="0">
+              <a:rPr lang="en-US" sz="4100" b="1" dirty="0">
                 <a:solidFill>
                   <a:srgbClr val="FFFFFF"/>
                 </a:solidFill>
@@ -1523,7 +3129,7 @@
               </a:rPr>
               <a:t>Web Scraping Toolkit</a:t>
             </a:r>
-            <a:endParaRPr lang="en-US" sz="4400" dirty="0"/>
+            <a:endParaRPr lang="en-US" sz="4100" dirty="0"/>
           </a:p>
         </p:txBody>
       </p:sp>
@@ -1535,8 +3141,8 @@
         </p:nvSpPr>
         <p:spPr>
           <a:xfrm>
-            <a:off x="822960" y="4206240"/>
-            <a:ext cx="10515600" cy="914400"/>
+            <a:off x="822960" y="4023360"/>
+            <a:ext cx="10058400" cy="777240"/>
           </a:xfrm>
           <a:prstGeom prst="rect">
             <a:avLst/>
@@ -1552,7 +3158,7 @@
               <a:buNone/>
             </a:pPr>
             <a:r>
-              <a:rPr lang="en-US" sz="1600" dirty="0">
+              <a:rPr lang="en-US" sz="1700" dirty="0">
                 <a:solidFill>
                   <a:srgbClr val="94A3B8"/>
                 </a:solidFill>
@@ -1560,21 +3166,83 @@
                 <a:ea typeface="Segoe UI" pitchFamily="34" charset="-122"/>
                 <a:cs typeface="Segoe UI" pitchFamily="34" charset="-120"/>
               </a:rPr>
-              <a:t>Collection pipelines that survive contact with the real web · Rezalian Vatiady</a:t>
-            </a:r>
-            <a:endParaRPr lang="en-US" sz="1600" dirty="0"/>
-          </a:p>
-        </p:txBody>
-      </p:sp>
-      <p:sp>
-        <p:nvSpPr>
-          <p:cNvPr id="7" name="Text 5"/>
-          <p:cNvSpPr/>
-          <p:nvPr/>
-        </p:nvSpPr>
-        <p:spPr>
-          <a:xfrm>
-            <a:off x="10698480" y="6355080"/>
+              <a:t>Pipelines that survive contact with the real web</a:t>
+            </a:r>
+            <a:endParaRPr lang="en-US" sz="1700" dirty="0"/>
+          </a:p>
+        </p:txBody>
+      </p:sp>
+      <p:sp>
+        <p:nvSpPr>
+          <p:cNvPr id="7" name="Shape 5"/>
+          <p:cNvSpPr/>
+          <p:nvPr/>
+        </p:nvSpPr>
+        <p:spPr>
+          <a:xfrm>
+            <a:off x="822960" y="5440680"/>
+            <a:ext cx="4114800" cy="0"/>
+          </a:xfrm>
+          <a:prstGeom prst="line">
+            <a:avLst/>
+          </a:prstGeom>
+          <a:noFill/>
+          <a:ln w="31750">
+            <a:solidFill>
+              <a:srgbClr val="3B82F6"/>
+            </a:solidFill>
+            <a:prstDash val="solid"/>
+          </a:ln>
+        </p:spPr>
+      </p:sp>
+      <p:sp>
+        <p:nvSpPr>
+          <p:cNvPr id="8" name="Text 6"/>
+          <p:cNvSpPr/>
+          <p:nvPr/>
+        </p:nvSpPr>
+        <p:spPr>
+          <a:xfrm>
+            <a:off x="822960" y="5596128"/>
+            <a:ext cx="10058400" cy="457200"/>
+          </a:xfrm>
+          <a:prstGeom prst="rect">
+            <a:avLst/>
+          </a:prstGeom>
+          <a:noFill/>
+          <a:ln/>
+        </p:spPr>
+        <p:txBody>
+          <a:bodyPr wrap="square" rtlCol="0" anchor="ctr"/>
+          <a:lstStyle/>
+          <a:p>
+            <a:pPr indent="0" marL="0">
+              <a:buNone/>
+            </a:pPr>
+            <a:r>
+              <a:rPr lang="en-US" sz="1250" dirty="0">
+                <a:solidFill>
+                  <a:srgbClr val="64748B"/>
+                </a:solidFill>
+                <a:latin typeface="Segoe UI" pitchFamily="34" charset="0"/>
+                <a:ea typeface="Segoe UI" pitchFamily="34" charset="-122"/>
+                <a:cs typeface="Segoe UI" pitchFamily="34" charset="-120"/>
+              </a:rPr>
+              <a:t>Rezalian Vatiady · Zalin Labs · 2026</a:t>
+            </a:r>
+            <a:endParaRPr lang="en-US" sz="1250" dirty="0"/>
+          </a:p>
+        </p:txBody>
+      </p:sp>
+      <p:sp>
+        <p:nvSpPr>
+          <p:cNvPr id="9" name="Text 7"/>
+          <p:cNvSpPr/>
+          <p:nvPr/>
+        </p:nvSpPr>
+        <p:spPr>
+          <a:xfrm>
+            <a:off x="10698480" y="6382512"/>
             <a:ext cx="1188720" cy="365760"/>
           </a:xfrm>
           <a:prstGeom prst="rect">
@@ -1599,7 +3267,3971 @@
                 <a:ea typeface="Consolas" pitchFamily="34" charset="-122"/>
                 <a:cs typeface="Consolas" pitchFamily="34" charset="-120"/>
               </a:rPr>
-              <a:t>1 / 7</a:t>
+              <a:t>1 / 15</a:t>
+            </a:r>
+            <a:endParaRPr lang="en-US" sz="1000" dirty="0"/>
+          </a:p>
+        </p:txBody>
+      </p:sp>
+    </p:spTree>
+  </p:cSld>
+  <p:clrMapOvr>
+    <a:masterClrMapping/>
+  </p:clrMapOvr>
+</p:sld>
+</file>
+
+<file path=ppt/slides/slide10.xml><?xml version="1.0" encoding="utf-8"?>
+<p:sld xmlns:a="http://schemas.openxmlformats.org/drawingml/2006/main" xmlns:r="http://schemas.openxmlformats.org/officeDocument/2006/relationships" xmlns:p="http://schemas.openxmlformats.org/presentationml/2006/main">
+  <p:cSld name="Slide 10">
+    <p:bg>
+      <p:bgPr>
+        <a:solidFill>
+          <a:srgbClr val="0A0C12"/>
+        </a:solidFill>
+      </p:bgPr>
+    </p:bg>
+    <p:spTree>
+      <p:nvGrpSpPr>
+        <p:cNvPr id="1" name=""/>
+        <p:cNvGrpSpPr/>
+        <p:nvPr/>
+      </p:nvGrpSpPr>
+      <p:grpSpPr>
+        <a:xfrm>
+          <a:off x="0" y="0"/>
+          <a:ext cx="0" cy="0"/>
+          <a:chOff x="0" y="0"/>
+          <a:chExt cx="0" cy="0"/>
+        </a:xfrm>
+      </p:grpSpPr>
+      <p:sp>
+        <p:nvSpPr>
+          <p:cNvPr id="2" name="Shape 0"/>
+          <p:cNvSpPr/>
+          <p:nvPr/>
+        </p:nvSpPr>
+        <p:spPr>
+          <a:xfrm>
+            <a:off x="0" y="0"/>
+            <a:ext cx="7680960" cy="64008"/>
+          </a:xfrm>
+          <a:prstGeom prst="rect">
+            <a:avLst/>
+          </a:prstGeom>
+          <a:solidFill>
+            <a:srgbClr val="3B82F6"/>
+          </a:solidFill>
+          <a:ln/>
+        </p:spPr>
+      </p:sp>
+      <p:sp>
+        <p:nvSpPr>
+          <p:cNvPr id="3" name="Shape 1"/>
+          <p:cNvSpPr/>
+          <p:nvPr/>
+        </p:nvSpPr>
+        <p:spPr>
+          <a:xfrm>
+            <a:off x="7680960" y="0"/>
+            <a:ext cx="4510735" cy="64008"/>
+          </a:xfrm>
+          <a:prstGeom prst="rect">
+            <a:avLst/>
+          </a:prstGeom>
+          <a:solidFill>
+            <a:srgbClr val="06B6D4"/>
+          </a:solidFill>
+          <a:ln/>
+        </p:spPr>
+      </p:sp>
+      <p:sp>
+        <p:nvSpPr>
+          <p:cNvPr id="4" name="Text 2"/>
+          <p:cNvSpPr/>
+          <p:nvPr/>
+        </p:nvSpPr>
+        <p:spPr>
+          <a:xfrm>
+            <a:off x="822960" y="502920"/>
+            <a:ext cx="10515600" cy="365760"/>
+          </a:xfrm>
+          <a:prstGeom prst="rect">
+            <a:avLst/>
+          </a:prstGeom>
+          <a:noFill/>
+          <a:ln/>
+        </p:spPr>
+        <p:txBody>
+          <a:bodyPr wrap="square" rtlCol="0" anchor="ctr"/>
+          <a:lstStyle/>
+          <a:p>
+            <a:pPr indent="0" marL="0">
+              <a:buNone/>
+            </a:pPr>
+            <a:r>
+              <a:rPr lang="en-US" sz="1200" spc="300" kern="0" dirty="0">
+                <a:solidFill>
+                  <a:srgbClr val="06B6D4"/>
+                </a:solidFill>
+                <a:latin typeface="Consolas" pitchFamily="34" charset="0"/>
+                <a:ea typeface="Consolas" pitchFamily="34" charset="-122"/>
+                <a:cs typeface="Consolas" pitchFamily="34" charset="-120"/>
+              </a:rPr>
+              <a:t>RESILIENCE</a:t>
+            </a:r>
+            <a:endParaRPr lang="en-US" sz="1200" dirty="0"/>
+          </a:p>
+        </p:txBody>
+      </p:sp>
+      <p:sp>
+        <p:nvSpPr>
+          <p:cNvPr id="5" name="Text 3"/>
+          <p:cNvSpPr/>
+          <p:nvPr/>
+        </p:nvSpPr>
+        <p:spPr>
+          <a:xfrm>
+            <a:off x="822960" y="914400"/>
+            <a:ext cx="10561320" cy="868680"/>
+          </a:xfrm>
+          <a:prstGeom prst="rect">
+            <a:avLst/>
+          </a:prstGeom>
+          <a:noFill/>
+          <a:ln/>
+        </p:spPr>
+        <p:txBody>
+          <a:bodyPr wrap="square" rtlCol="0" anchor="ctr"/>
+          <a:lstStyle/>
+          <a:p>
+            <a:pPr indent="0" marL="0">
+              <a:buNone/>
+            </a:pPr>
+            <a:r>
+              <a:rPr lang="en-US" sz="2700" b="1" dirty="0">
+                <a:solidFill>
+                  <a:srgbClr val="FFFFFF"/>
+                </a:solidFill>
+                <a:latin typeface="Segoe UI" pitchFamily="34" charset="0"/>
+                <a:ea typeface="Segoe UI" pitchFamily="34" charset="-122"/>
+                <a:cs typeface="Segoe UI" pitchFamily="34" charset="-120"/>
+              </a:rPr>
+              <a:t>Anatomy of a markup change</a:t>
+            </a:r>
+            <a:endParaRPr lang="en-US" sz="2700" dirty="0"/>
+          </a:p>
+        </p:txBody>
+      </p:sp>
+      <p:sp>
+        <p:nvSpPr>
+          <p:cNvPr id="6" name="Shape 4"/>
+          <p:cNvSpPr/>
+          <p:nvPr/>
+        </p:nvSpPr>
+        <p:spPr>
+          <a:xfrm>
+            <a:off x="1371600" y="3035808"/>
+            <a:ext cx="9464040" cy="0"/>
+          </a:xfrm>
+          <a:prstGeom prst="line">
+            <a:avLst/>
+          </a:prstGeom>
+          <a:noFill/>
+          <a:ln w="25400">
+            <a:solidFill>
+              <a:srgbClr val="24365A"/>
+            </a:solidFill>
+            <a:prstDash val="solid"/>
+          </a:ln>
+        </p:spPr>
+      </p:sp>
+      <p:sp>
+        <p:nvSpPr>
+          <p:cNvPr id="7" name="Shape 5"/>
+          <p:cNvSpPr/>
+          <p:nvPr/>
+        </p:nvSpPr>
+        <p:spPr>
+          <a:xfrm>
+            <a:off x="1289304" y="2953512"/>
+            <a:ext cx="164592" cy="164592"/>
+          </a:xfrm>
+          <a:prstGeom prst="ellipse">
+            <a:avLst/>
+          </a:prstGeom>
+          <a:solidFill>
+            <a:srgbClr val="3B82F6"/>
+          </a:solidFill>
+          <a:ln w="19050">
+            <a:solidFill>
+              <a:srgbClr val="0A0C12"/>
+            </a:solidFill>
+            <a:prstDash val="solid"/>
+          </a:ln>
+        </p:spPr>
+      </p:sp>
+      <p:sp>
+        <p:nvSpPr>
+          <p:cNvPr id="8" name="Text 6"/>
+          <p:cNvSpPr/>
+          <p:nvPr/>
+        </p:nvSpPr>
+        <p:spPr>
+          <a:xfrm>
+            <a:off x="342900" y="2395728"/>
+            <a:ext cx="2057400" cy="365760"/>
+          </a:xfrm>
+          <a:prstGeom prst="rect">
+            <a:avLst/>
+          </a:prstGeom>
+          <a:noFill/>
+          <a:ln/>
+        </p:spPr>
+        <p:txBody>
+          <a:bodyPr wrap="square" rtlCol="0" anchor="ctr"/>
+          <a:lstStyle/>
+          <a:p>
+            <a:pPr algn="ctr" indent="0" marL="0">
+              <a:buNone/>
+            </a:pPr>
+            <a:r>
+              <a:rPr lang="en-US" sz="1100" b="1" dirty="0">
+                <a:solidFill>
+                  <a:srgbClr val="3B82F6"/>
+                </a:solidFill>
+                <a:latin typeface="Consolas" pitchFamily="34" charset="0"/>
+                <a:ea typeface="Consolas" pitchFamily="34" charset="-122"/>
+                <a:cs typeface="Consolas" pitchFamily="34" charset="-120"/>
+              </a:rPr>
+              <a:t>Hour 0</a:t>
+            </a:r>
+            <a:endParaRPr lang="en-US" sz="1100" dirty="0"/>
+          </a:p>
+        </p:txBody>
+      </p:sp>
+      <p:sp>
+        <p:nvSpPr>
+          <p:cNvPr id="9" name="Text 7"/>
+          <p:cNvSpPr/>
+          <p:nvPr/>
+        </p:nvSpPr>
+        <p:spPr>
+          <a:xfrm>
+            <a:off x="342900" y="3310128"/>
+            <a:ext cx="2057400" cy="566928"/>
+          </a:xfrm>
+          <a:prstGeom prst="rect">
+            <a:avLst/>
+          </a:prstGeom>
+          <a:noFill/>
+          <a:ln/>
+        </p:spPr>
+        <p:txBody>
+          <a:bodyPr wrap="square" rtlCol="0" anchor="ctr"/>
+          <a:lstStyle/>
+          <a:p>
+            <a:pPr algn="ctr" indent="0" marL="0">
+              <a:buNone/>
+            </a:pPr>
+            <a:r>
+              <a:rPr lang="en-US" sz="1250" b="1" dirty="0">
+                <a:solidFill>
+                  <a:srgbClr val="FFFFFF"/>
+                </a:solidFill>
+                <a:latin typeface="Segoe UI" pitchFamily="34" charset="0"/>
+                <a:ea typeface="Segoe UI" pitchFamily="34" charset="-122"/>
+                <a:cs typeface="Segoe UI" pitchFamily="34" charset="-120"/>
+              </a:rPr>
+              <a:t>Detection</a:t>
+            </a:r>
+            <a:endParaRPr lang="en-US" sz="1250" dirty="0"/>
+          </a:p>
+        </p:txBody>
+      </p:sp>
+      <p:sp>
+        <p:nvSpPr>
+          <p:cNvPr id="10" name="Text 8"/>
+          <p:cNvSpPr/>
+          <p:nvPr/>
+        </p:nvSpPr>
+        <p:spPr>
+          <a:xfrm>
+            <a:off x="342900" y="3895344"/>
+            <a:ext cx="2057400" cy="1234440"/>
+          </a:xfrm>
+          <a:prstGeom prst="rect">
+            <a:avLst/>
+          </a:prstGeom>
+          <a:noFill/>
+          <a:ln/>
+        </p:spPr>
+        <p:txBody>
+          <a:bodyPr wrap="square" rtlCol="0" anchor="ctr"/>
+          <a:lstStyle/>
+          <a:p>
+            <a:pPr algn="ctr" indent="0" marL="0">
+              <a:buNone/>
+            </a:pPr>
+            <a:r>
+              <a:rPr lang="en-US" sz="1000" dirty="0">
+                <a:solidFill>
+                  <a:srgbClr val="CBD5E1"/>
+                </a:solidFill>
+                <a:latin typeface="Segoe UI" pitchFamily="34" charset="0"/>
+                <a:ea typeface="Segoe UI" pitchFamily="34" charset="-122"/>
+                <a:cs typeface="Segoe UI" pitchFamily="34" charset="-120"/>
+              </a:rPr>
+              <a:t>Validation flags a row-count drop the day the site changes - not when a client calls.</a:t>
+            </a:r>
+            <a:endParaRPr lang="en-US" sz="1000" dirty="0"/>
+          </a:p>
+        </p:txBody>
+      </p:sp>
+      <p:sp>
+        <p:nvSpPr>
+          <p:cNvPr id="11" name="Shape 9"/>
+          <p:cNvSpPr/>
+          <p:nvPr/>
+        </p:nvSpPr>
+        <p:spPr>
+          <a:xfrm>
+            <a:off x="3655314" y="2953512"/>
+            <a:ext cx="164592" cy="164592"/>
+          </a:xfrm>
+          <a:prstGeom prst="ellipse">
+            <a:avLst/>
+          </a:prstGeom>
+          <a:solidFill>
+            <a:srgbClr val="06B6D4"/>
+          </a:solidFill>
+          <a:ln w="19050">
+            <a:solidFill>
+              <a:srgbClr val="0A0C12"/>
+            </a:solidFill>
+            <a:prstDash val="solid"/>
+          </a:ln>
+        </p:spPr>
+      </p:sp>
+      <p:sp>
+        <p:nvSpPr>
+          <p:cNvPr id="12" name="Text 10"/>
+          <p:cNvSpPr/>
+          <p:nvPr/>
+        </p:nvSpPr>
+        <p:spPr>
+          <a:xfrm>
+            <a:off x="2708910" y="2395728"/>
+            <a:ext cx="2057400" cy="365760"/>
+          </a:xfrm>
+          <a:prstGeom prst="rect">
+            <a:avLst/>
+          </a:prstGeom>
+          <a:noFill/>
+          <a:ln/>
+        </p:spPr>
+        <p:txBody>
+          <a:bodyPr wrap="square" rtlCol="0" anchor="ctr"/>
+          <a:lstStyle/>
+          <a:p>
+            <a:pPr algn="ctr" indent="0" marL="0">
+              <a:buNone/>
+            </a:pPr>
+            <a:r>
+              <a:rPr lang="en-US" sz="1100" b="1" dirty="0">
+                <a:solidFill>
+                  <a:srgbClr val="06B6D4"/>
+                </a:solidFill>
+                <a:latin typeface="Consolas" pitchFamily="34" charset="0"/>
+                <a:ea typeface="Consolas" pitchFamily="34" charset="-122"/>
+                <a:cs typeface="Consolas" pitchFamily="34" charset="-120"/>
+              </a:rPr>
+              <a:t>Hour 0</a:t>
+            </a:r>
+            <a:endParaRPr lang="en-US" sz="1100" dirty="0"/>
+          </a:p>
+        </p:txBody>
+      </p:sp>
+      <p:sp>
+        <p:nvSpPr>
+          <p:cNvPr id="13" name="Text 11"/>
+          <p:cNvSpPr/>
+          <p:nvPr/>
+        </p:nvSpPr>
+        <p:spPr>
+          <a:xfrm>
+            <a:off x="2708910" y="3310128"/>
+            <a:ext cx="2057400" cy="566928"/>
+          </a:xfrm>
+          <a:prstGeom prst="rect">
+            <a:avLst/>
+          </a:prstGeom>
+          <a:noFill/>
+          <a:ln/>
+        </p:spPr>
+        <p:txBody>
+          <a:bodyPr wrap="square" rtlCol="0" anchor="ctr"/>
+          <a:lstStyle/>
+          <a:p>
+            <a:pPr algn="ctr" indent="0" marL="0">
+              <a:buNone/>
+            </a:pPr>
+            <a:r>
+              <a:rPr lang="en-US" sz="1250" b="1" dirty="0">
+                <a:solidFill>
+                  <a:srgbClr val="FFFFFF"/>
+                </a:solidFill>
+                <a:latin typeface="Segoe UI" pitchFamily="34" charset="0"/>
+                <a:ea typeface="Segoe UI" pitchFamily="34" charset="-122"/>
+                <a:cs typeface="Segoe UI" pitchFamily="34" charset="-120"/>
+              </a:rPr>
+              <a:t>Containment</a:t>
+            </a:r>
+            <a:endParaRPr lang="en-US" sz="1250" dirty="0"/>
+          </a:p>
+        </p:txBody>
+      </p:sp>
+      <p:sp>
+        <p:nvSpPr>
+          <p:cNvPr id="14" name="Text 12"/>
+          <p:cNvSpPr/>
+          <p:nvPr/>
+        </p:nvSpPr>
+        <p:spPr>
+          <a:xfrm>
+            <a:off x="2708910" y="3895344"/>
+            <a:ext cx="2057400" cy="1234440"/>
+          </a:xfrm>
+          <a:prstGeom prst="rect">
+            <a:avLst/>
+          </a:prstGeom>
+          <a:noFill/>
+          <a:ln/>
+        </p:spPr>
+        <p:txBody>
+          <a:bodyPr wrap="square" rtlCol="0" anchor="ctr"/>
+          <a:lstStyle/>
+          <a:p>
+            <a:pPr algn="ctr" indent="0" marL="0">
+              <a:buNone/>
+            </a:pPr>
+            <a:r>
+              <a:rPr lang="en-US" sz="1000" dirty="0">
+                <a:solidFill>
+                  <a:srgbClr val="CBD5E1"/>
+                </a:solidFill>
+                <a:latin typeface="Segoe UI" pitchFamily="34" charset="0"/>
+                <a:ea typeface="Segoe UI" pitchFamily="34" charset="-122"/>
+                <a:cs typeface="Segoe UI" pitchFamily="34" charset="-120"/>
+              </a:rPr>
+              <a:t>Fallback selectors keep extracting while the primary path is broken.</a:t>
+            </a:r>
+            <a:endParaRPr lang="en-US" sz="1000" dirty="0"/>
+          </a:p>
+        </p:txBody>
+      </p:sp>
+      <p:sp>
+        <p:nvSpPr>
+          <p:cNvPr id="15" name="Shape 13"/>
+          <p:cNvSpPr/>
+          <p:nvPr/>
+        </p:nvSpPr>
+        <p:spPr>
+          <a:xfrm>
+            <a:off x="6021324" y="2953512"/>
+            <a:ext cx="164592" cy="164592"/>
+          </a:xfrm>
+          <a:prstGeom prst="ellipse">
+            <a:avLst/>
+          </a:prstGeom>
+          <a:solidFill>
+            <a:srgbClr val="3B82F6"/>
+          </a:solidFill>
+          <a:ln w="19050">
+            <a:solidFill>
+              <a:srgbClr val="0A0C12"/>
+            </a:solidFill>
+            <a:prstDash val="solid"/>
+          </a:ln>
+        </p:spPr>
+      </p:sp>
+      <p:sp>
+        <p:nvSpPr>
+          <p:cNvPr id="16" name="Text 14"/>
+          <p:cNvSpPr/>
+          <p:nvPr/>
+        </p:nvSpPr>
+        <p:spPr>
+          <a:xfrm>
+            <a:off x="5074920" y="2395728"/>
+            <a:ext cx="2057400" cy="365760"/>
+          </a:xfrm>
+          <a:prstGeom prst="rect">
+            <a:avLst/>
+          </a:prstGeom>
+          <a:noFill/>
+          <a:ln/>
+        </p:spPr>
+        <p:txBody>
+          <a:bodyPr wrap="square" rtlCol="0" anchor="ctr"/>
+          <a:lstStyle/>
+          <a:p>
+            <a:pPr algn="ctr" indent="0" marL="0">
+              <a:buNone/>
+            </a:pPr>
+            <a:r>
+              <a:rPr lang="en-US" sz="1100" b="1" dirty="0">
+                <a:solidFill>
+                  <a:srgbClr val="3B82F6"/>
+                </a:solidFill>
+                <a:latin typeface="Consolas" pitchFamily="34" charset="0"/>
+                <a:ea typeface="Consolas" pitchFamily="34" charset="-122"/>
+                <a:cs typeface="Consolas" pitchFamily="34" charset="-120"/>
+              </a:rPr>
+              <a:t>Hour 1</a:t>
+            </a:r>
+            <a:endParaRPr lang="en-US" sz="1100" dirty="0"/>
+          </a:p>
+        </p:txBody>
+      </p:sp>
+      <p:sp>
+        <p:nvSpPr>
+          <p:cNvPr id="17" name="Text 15"/>
+          <p:cNvSpPr/>
+          <p:nvPr/>
+        </p:nvSpPr>
+        <p:spPr>
+          <a:xfrm>
+            <a:off x="5074920" y="3310128"/>
+            <a:ext cx="2057400" cy="566928"/>
+          </a:xfrm>
+          <a:prstGeom prst="rect">
+            <a:avLst/>
+          </a:prstGeom>
+          <a:noFill/>
+          <a:ln/>
+        </p:spPr>
+        <p:txBody>
+          <a:bodyPr wrap="square" rtlCol="0" anchor="ctr"/>
+          <a:lstStyle/>
+          <a:p>
+            <a:pPr algn="ctr" indent="0" marL="0">
+              <a:buNone/>
+            </a:pPr>
+            <a:r>
+              <a:rPr lang="en-US" sz="1250" b="1" dirty="0">
+                <a:solidFill>
+                  <a:srgbClr val="FFFFFF"/>
+                </a:solidFill>
+                <a:latin typeface="Segoe UI" pitchFamily="34" charset="0"/>
+                <a:ea typeface="Segoe UI" pitchFamily="34" charset="-122"/>
+                <a:cs typeface="Segoe UI" pitchFamily="34" charset="-120"/>
+              </a:rPr>
+              <a:t>Diagnosis</a:t>
+            </a:r>
+            <a:endParaRPr lang="en-US" sz="1250" dirty="0"/>
+          </a:p>
+        </p:txBody>
+      </p:sp>
+      <p:sp>
+        <p:nvSpPr>
+          <p:cNvPr id="18" name="Text 16"/>
+          <p:cNvSpPr/>
+          <p:nvPr/>
+        </p:nvSpPr>
+        <p:spPr>
+          <a:xfrm>
+            <a:off x="5074920" y="3895344"/>
+            <a:ext cx="2057400" cy="1234440"/>
+          </a:xfrm>
+          <a:prstGeom prst="rect">
+            <a:avLst/>
+          </a:prstGeom>
+          <a:noFill/>
+          <a:ln/>
+        </p:spPr>
+        <p:txBody>
+          <a:bodyPr wrap="square" rtlCol="0" anchor="ctr"/>
+          <a:lstStyle/>
+          <a:p>
+            <a:pPr algn="ctr" indent="0" marL="0">
+              <a:buNone/>
+            </a:pPr>
+            <a:r>
+              <a:rPr lang="en-US" sz="1000" dirty="0">
+                <a:solidFill>
+                  <a:srgbClr val="CBD5E1"/>
+                </a:solidFill>
+                <a:latin typeface="Segoe UI" pitchFamily="34" charset="0"/>
+                <a:ea typeface="Segoe UI" pitchFamily="34" charset="-122"/>
+                <a:cs typeface="Segoe UI" pitchFamily="34" charset="-120"/>
+              </a:rPr>
+              <a:t>Structured run logs point straight at the anchor that moved.</a:t>
+            </a:r>
+            <a:endParaRPr lang="en-US" sz="1000" dirty="0"/>
+          </a:p>
+        </p:txBody>
+      </p:sp>
+      <p:sp>
+        <p:nvSpPr>
+          <p:cNvPr id="19" name="Shape 17"/>
+          <p:cNvSpPr/>
+          <p:nvPr/>
+        </p:nvSpPr>
+        <p:spPr>
+          <a:xfrm>
+            <a:off x="8387334" y="2953512"/>
+            <a:ext cx="164592" cy="164592"/>
+          </a:xfrm>
+          <a:prstGeom prst="ellipse">
+            <a:avLst/>
+          </a:prstGeom>
+          <a:solidFill>
+            <a:srgbClr val="06B6D4"/>
+          </a:solidFill>
+          <a:ln w="19050">
+            <a:solidFill>
+              <a:srgbClr val="0A0C12"/>
+            </a:solidFill>
+            <a:prstDash val="solid"/>
+          </a:ln>
+        </p:spPr>
+      </p:sp>
+      <p:sp>
+        <p:nvSpPr>
+          <p:cNvPr id="20" name="Text 18"/>
+          <p:cNvSpPr/>
+          <p:nvPr/>
+        </p:nvSpPr>
+        <p:spPr>
+          <a:xfrm>
+            <a:off x="7440930" y="2395728"/>
+            <a:ext cx="2057400" cy="365760"/>
+          </a:xfrm>
+          <a:prstGeom prst="rect">
+            <a:avLst/>
+          </a:prstGeom>
+          <a:noFill/>
+          <a:ln/>
+        </p:spPr>
+        <p:txBody>
+          <a:bodyPr wrap="square" rtlCol="0" anchor="ctr"/>
+          <a:lstStyle/>
+          <a:p>
+            <a:pPr algn="ctr" indent="0" marL="0">
+              <a:buNone/>
+            </a:pPr>
+            <a:r>
+              <a:rPr lang="en-US" sz="1100" b="1" dirty="0">
+                <a:solidFill>
+                  <a:srgbClr val="06B6D4"/>
+                </a:solidFill>
+                <a:latin typeface="Consolas" pitchFamily="34" charset="0"/>
+                <a:ea typeface="Consolas" pitchFamily="34" charset="-122"/>
+                <a:cs typeface="Consolas" pitchFamily="34" charset="-120"/>
+              </a:rPr>
+              <a:t>Day 1</a:t>
+            </a:r>
+            <a:endParaRPr lang="en-US" sz="1100" dirty="0"/>
+          </a:p>
+        </p:txBody>
+      </p:sp>
+      <p:sp>
+        <p:nvSpPr>
+          <p:cNvPr id="21" name="Text 19"/>
+          <p:cNvSpPr/>
+          <p:nvPr/>
+        </p:nvSpPr>
+        <p:spPr>
+          <a:xfrm>
+            <a:off x="7440930" y="3310128"/>
+            <a:ext cx="2057400" cy="566928"/>
+          </a:xfrm>
+          <a:prstGeom prst="rect">
+            <a:avLst/>
+          </a:prstGeom>
+          <a:noFill/>
+          <a:ln/>
+        </p:spPr>
+        <p:txBody>
+          <a:bodyPr wrap="square" rtlCol="0" anchor="ctr"/>
+          <a:lstStyle/>
+          <a:p>
+            <a:pPr algn="ctr" indent="0" marL="0">
+              <a:buNone/>
+            </a:pPr>
+            <a:r>
+              <a:rPr lang="en-US" sz="1250" b="1" dirty="0">
+                <a:solidFill>
+                  <a:srgbClr val="FFFFFF"/>
+                </a:solidFill>
+                <a:latin typeface="Segoe UI" pitchFamily="34" charset="0"/>
+                <a:ea typeface="Segoe UI" pitchFamily="34" charset="-122"/>
+                <a:cs typeface="Segoe UI" pitchFamily="34" charset="-120"/>
+              </a:rPr>
+              <a:t>Fix</a:t>
+            </a:r>
+            <a:endParaRPr lang="en-US" sz="1250" dirty="0"/>
+          </a:p>
+        </p:txBody>
+      </p:sp>
+      <p:sp>
+        <p:nvSpPr>
+          <p:cNvPr id="22" name="Text 20"/>
+          <p:cNvSpPr/>
+          <p:nvPr/>
+        </p:nvSpPr>
+        <p:spPr>
+          <a:xfrm>
+            <a:off x="7440930" y="3895344"/>
+            <a:ext cx="2057400" cy="1234440"/>
+          </a:xfrm>
+          <a:prstGeom prst="rect">
+            <a:avLst/>
+          </a:prstGeom>
+          <a:noFill/>
+          <a:ln/>
+        </p:spPr>
+        <p:txBody>
+          <a:bodyPr wrap="square" rtlCol="0" anchor="ctr"/>
+          <a:lstStyle/>
+          <a:p>
+            <a:pPr algn="ctr" indent="0" marL="0">
+              <a:buNone/>
+            </a:pPr>
+            <a:r>
+              <a:rPr lang="en-US" sz="1000" dirty="0">
+                <a:solidFill>
+                  <a:srgbClr val="CBD5E1"/>
+                </a:solidFill>
+                <a:latin typeface="Segoe UI" pitchFamily="34" charset="0"/>
+                <a:ea typeface="Segoe UI" pitchFamily="34" charset="-122"/>
+                <a:cs typeface="Segoe UI" pitchFamily="34" charset="-120"/>
+              </a:rPr>
+              <a:t>The patched selector ships as a normal code change, not an archaeology dig.</a:t>
+            </a:r>
+            <a:endParaRPr lang="en-US" sz="1000" dirty="0"/>
+          </a:p>
+        </p:txBody>
+      </p:sp>
+      <p:sp>
+        <p:nvSpPr>
+          <p:cNvPr id="23" name="Shape 21"/>
+          <p:cNvSpPr/>
+          <p:nvPr/>
+        </p:nvSpPr>
+        <p:spPr>
+          <a:xfrm>
+            <a:off x="10753344" y="2953512"/>
+            <a:ext cx="164592" cy="164592"/>
+          </a:xfrm>
+          <a:prstGeom prst="ellipse">
+            <a:avLst/>
+          </a:prstGeom>
+          <a:solidFill>
+            <a:srgbClr val="3B82F6"/>
+          </a:solidFill>
+          <a:ln w="19050">
+            <a:solidFill>
+              <a:srgbClr val="0A0C12"/>
+            </a:solidFill>
+            <a:prstDash val="solid"/>
+          </a:ln>
+        </p:spPr>
+      </p:sp>
+      <p:sp>
+        <p:nvSpPr>
+          <p:cNvPr id="24" name="Text 22"/>
+          <p:cNvSpPr/>
+          <p:nvPr/>
+        </p:nvSpPr>
+        <p:spPr>
+          <a:xfrm>
+            <a:off x="9806940" y="2395728"/>
+            <a:ext cx="2057400" cy="365760"/>
+          </a:xfrm>
+          <a:prstGeom prst="rect">
+            <a:avLst/>
+          </a:prstGeom>
+          <a:noFill/>
+          <a:ln/>
+        </p:spPr>
+        <p:txBody>
+          <a:bodyPr wrap="square" rtlCol="0" anchor="ctr"/>
+          <a:lstStyle/>
+          <a:p>
+            <a:pPr algn="ctr" indent="0" marL="0">
+              <a:buNone/>
+            </a:pPr>
+            <a:r>
+              <a:rPr lang="en-US" sz="1100" b="1" dirty="0">
+                <a:solidFill>
+                  <a:srgbClr val="3B82F6"/>
+                </a:solidFill>
+                <a:latin typeface="Consolas" pitchFamily="34" charset="0"/>
+                <a:ea typeface="Consolas" pitchFamily="34" charset="-122"/>
+                <a:cs typeface="Consolas" pitchFamily="34" charset="-120"/>
+              </a:rPr>
+              <a:t>Day 1</a:t>
+            </a:r>
+            <a:endParaRPr lang="en-US" sz="1100" dirty="0"/>
+          </a:p>
+        </p:txBody>
+      </p:sp>
+      <p:sp>
+        <p:nvSpPr>
+          <p:cNvPr id="25" name="Text 23"/>
+          <p:cNvSpPr/>
+          <p:nvPr/>
+        </p:nvSpPr>
+        <p:spPr>
+          <a:xfrm>
+            <a:off x="9806940" y="3310128"/>
+            <a:ext cx="2057400" cy="566928"/>
+          </a:xfrm>
+          <a:prstGeom prst="rect">
+            <a:avLst/>
+          </a:prstGeom>
+          <a:noFill/>
+          <a:ln/>
+        </p:spPr>
+        <p:txBody>
+          <a:bodyPr wrap="square" rtlCol="0" anchor="ctr"/>
+          <a:lstStyle/>
+          <a:p>
+            <a:pPr algn="ctr" indent="0" marL="0">
+              <a:buNone/>
+            </a:pPr>
+            <a:r>
+              <a:rPr lang="en-US" sz="1250" b="1" dirty="0">
+                <a:solidFill>
+                  <a:srgbClr val="FFFFFF"/>
+                </a:solidFill>
+                <a:latin typeface="Segoe UI" pitchFamily="34" charset="0"/>
+                <a:ea typeface="Segoe UI" pitchFamily="34" charset="-122"/>
+                <a:cs typeface="Segoe UI" pitchFamily="34" charset="-120"/>
+              </a:rPr>
+              <a:t>Verification</a:t>
+            </a:r>
+            <a:endParaRPr lang="en-US" sz="1250" dirty="0"/>
+          </a:p>
+        </p:txBody>
+      </p:sp>
+      <p:sp>
+        <p:nvSpPr>
+          <p:cNvPr id="26" name="Text 24"/>
+          <p:cNvSpPr/>
+          <p:nvPr/>
+        </p:nvSpPr>
+        <p:spPr>
+          <a:xfrm>
+            <a:off x="9806940" y="3895344"/>
+            <a:ext cx="2057400" cy="1234440"/>
+          </a:xfrm>
+          <a:prstGeom prst="rect">
+            <a:avLst/>
+          </a:prstGeom>
+          <a:noFill/>
+          <a:ln/>
+        </p:spPr>
+        <p:txBody>
+          <a:bodyPr wrap="square" rtlCol="0" anchor="ctr"/>
+          <a:lstStyle/>
+          <a:p>
+            <a:pPr algn="ctr" indent="0" marL="0">
+              <a:buNone/>
+            </a:pPr>
+            <a:r>
+              <a:rPr lang="en-US" sz="1000" dirty="0">
+                <a:solidFill>
+                  <a:srgbClr val="CBD5E1"/>
+                </a:solidFill>
+                <a:latin typeface="Segoe UI" pitchFamily="34" charset="0"/>
+                <a:ea typeface="Segoe UI" pitchFamily="34" charset="-122"/>
+                <a:cs typeface="Segoe UI" pitchFamily="34" charset="-120"/>
+              </a:rPr>
+              <a:t>The next runs return to clean extraction, and the incident is logged.</a:t>
+            </a:r>
+            <a:endParaRPr lang="en-US" sz="1000" dirty="0"/>
+          </a:p>
+        </p:txBody>
+      </p:sp>
+      <p:sp>
+        <p:nvSpPr>
+          <p:cNvPr id="27" name="Shape 25"/>
+          <p:cNvSpPr/>
+          <p:nvPr/>
+        </p:nvSpPr>
+        <p:spPr>
+          <a:xfrm>
+            <a:off x="822960" y="5961888"/>
+            <a:ext cx="10515600" cy="0"/>
+          </a:xfrm>
+          <a:prstGeom prst="line">
+            <a:avLst/>
+          </a:prstGeom>
+          <a:noFill/>
+          <a:ln w="12700">
+            <a:solidFill>
+              <a:srgbClr val="1E2D45"/>
+            </a:solidFill>
+            <a:prstDash val="solid"/>
+          </a:ln>
+        </p:spPr>
+      </p:sp>
+      <p:sp>
+        <p:nvSpPr>
+          <p:cNvPr id="28" name="Text 26"/>
+          <p:cNvSpPr/>
+          <p:nvPr/>
+        </p:nvSpPr>
+        <p:spPr>
+          <a:xfrm>
+            <a:off x="822960" y="6053328"/>
+            <a:ext cx="9692640" cy="457200"/>
+          </a:xfrm>
+          <a:prstGeom prst="rect">
+            <a:avLst/>
+          </a:prstGeom>
+          <a:noFill/>
+          <a:ln/>
+        </p:spPr>
+        <p:txBody>
+          <a:bodyPr wrap="square" rtlCol="0" anchor="ctr"/>
+          <a:lstStyle/>
+          <a:p>
+            <a:pPr indent="0" marL="0">
+              <a:buNone/>
+            </a:pPr>
+            <a:r>
+              <a:rPr lang="en-US" sz="1150" dirty="0">
+                <a:solidFill>
+                  <a:srgbClr val="64748B"/>
+                </a:solidFill>
+                <a:latin typeface="Segoe UI" pitchFamily="34" charset="0"/>
+                <a:ea typeface="Segoe UI" pitchFamily="34" charset="-122"/>
+                <a:cs typeface="Segoe UI" pitchFamily="34" charset="-120"/>
+              </a:rPr>
+              <a:t>Sites will change - the system is designed around that certainty.</a:t>
+            </a:r>
+            <a:endParaRPr lang="en-US" sz="1150" dirty="0"/>
+          </a:p>
+        </p:txBody>
+      </p:sp>
+      <p:sp>
+        <p:nvSpPr>
+          <p:cNvPr id="29" name="Text 27"/>
+          <p:cNvSpPr/>
+          <p:nvPr/>
+        </p:nvSpPr>
+        <p:spPr>
+          <a:xfrm>
+            <a:off x="10698480" y="6382512"/>
+            <a:ext cx="1188720" cy="365760"/>
+          </a:xfrm>
+          <a:prstGeom prst="rect">
+            <a:avLst/>
+          </a:prstGeom>
+          <a:noFill/>
+          <a:ln/>
+        </p:spPr>
+        <p:txBody>
+          <a:bodyPr wrap="square" rtlCol="0" anchor="ctr"/>
+          <a:lstStyle/>
+          <a:p>
+            <a:pPr algn="r" indent="0" marL="0">
+              <a:buNone/>
+            </a:pPr>
+            <a:r>
+              <a:rPr lang="en-US" sz="1000" dirty="0">
+                <a:solidFill>
+                  <a:srgbClr val="64748B"/>
+                </a:solidFill>
+                <a:latin typeface="Consolas" pitchFamily="34" charset="0"/>
+                <a:ea typeface="Consolas" pitchFamily="34" charset="-122"/>
+                <a:cs typeface="Consolas" pitchFamily="34" charset="-120"/>
+              </a:rPr>
+              <a:t>10 / 15</a:t>
+            </a:r>
+            <a:endParaRPr lang="en-US" sz="1000" dirty="0"/>
+          </a:p>
+        </p:txBody>
+      </p:sp>
+    </p:spTree>
+  </p:cSld>
+  <p:clrMapOvr>
+    <a:masterClrMapping/>
+  </p:clrMapOvr>
+</p:sld>
+</file>
+
+<file path=ppt/slides/slide11.xml><?xml version="1.0" encoding="utf-8"?>
+<p:sld xmlns:a="http://schemas.openxmlformats.org/drawingml/2006/main" xmlns:r="http://schemas.openxmlformats.org/officeDocument/2006/relationships" xmlns:p="http://schemas.openxmlformats.org/presentationml/2006/main">
+  <p:cSld name="Slide 11">
+    <p:bg>
+      <p:bgPr>
+        <a:solidFill>
+          <a:srgbClr val="0A0C12"/>
+        </a:solidFill>
+      </p:bgPr>
+    </p:bg>
+    <p:spTree>
+      <p:nvGrpSpPr>
+        <p:cNvPr id="1" name=""/>
+        <p:cNvGrpSpPr/>
+        <p:nvPr/>
+      </p:nvGrpSpPr>
+      <p:grpSpPr>
+        <a:xfrm>
+          <a:off x="0" y="0"/>
+          <a:ext cx="0" cy="0"/>
+          <a:chOff x="0" y="0"/>
+          <a:chExt cx="0" cy="0"/>
+        </a:xfrm>
+      </p:grpSpPr>
+      <p:sp>
+        <p:nvSpPr>
+          <p:cNvPr id="2" name="Shape 0"/>
+          <p:cNvSpPr/>
+          <p:nvPr/>
+        </p:nvSpPr>
+        <p:spPr>
+          <a:xfrm>
+            <a:off x="0" y="0"/>
+            <a:ext cx="7680960" cy="64008"/>
+          </a:xfrm>
+          <a:prstGeom prst="rect">
+            <a:avLst/>
+          </a:prstGeom>
+          <a:solidFill>
+            <a:srgbClr val="3B82F6"/>
+          </a:solidFill>
+          <a:ln/>
+        </p:spPr>
+      </p:sp>
+      <p:sp>
+        <p:nvSpPr>
+          <p:cNvPr id="3" name="Shape 1"/>
+          <p:cNvSpPr/>
+          <p:nvPr/>
+        </p:nvSpPr>
+        <p:spPr>
+          <a:xfrm>
+            <a:off x="7680960" y="0"/>
+            <a:ext cx="4510735" cy="64008"/>
+          </a:xfrm>
+          <a:prstGeom prst="rect">
+            <a:avLst/>
+          </a:prstGeom>
+          <a:solidFill>
+            <a:srgbClr val="06B6D4"/>
+          </a:solidFill>
+          <a:ln/>
+        </p:spPr>
+      </p:sp>
+      <p:sp>
+        <p:nvSpPr>
+          <p:cNvPr id="4" name="Text 2"/>
+          <p:cNvSpPr/>
+          <p:nvPr/>
+        </p:nvSpPr>
+        <p:spPr>
+          <a:xfrm>
+            <a:off x="822960" y="502920"/>
+            <a:ext cx="10515600" cy="365760"/>
+          </a:xfrm>
+          <a:prstGeom prst="rect">
+            <a:avLst/>
+          </a:prstGeom>
+          <a:noFill/>
+          <a:ln/>
+        </p:spPr>
+        <p:txBody>
+          <a:bodyPr wrap="square" rtlCol="0" anchor="ctr"/>
+          <a:lstStyle/>
+          <a:p>
+            <a:pPr indent="0" marL="0">
+              <a:buNone/>
+            </a:pPr>
+            <a:r>
+              <a:rPr lang="en-US" sz="1200" spc="300" kern="0" dirty="0">
+                <a:solidFill>
+                  <a:srgbClr val="06B6D4"/>
+                </a:solidFill>
+                <a:latin typeface="Consolas" pitchFamily="34" charset="0"/>
+                <a:ea typeface="Consolas" pitchFamily="34" charset="-122"/>
+                <a:cs typeface="Consolas" pitchFamily="34" charset="-120"/>
+              </a:rPr>
+              <a:t>THE DIFFERENCE</a:t>
+            </a:r>
+            <a:endParaRPr lang="en-US" sz="1200" dirty="0"/>
+          </a:p>
+        </p:txBody>
+      </p:sp>
+      <p:sp>
+        <p:nvSpPr>
+          <p:cNvPr id="5" name="Text 3"/>
+          <p:cNvSpPr/>
+          <p:nvPr/>
+        </p:nvSpPr>
+        <p:spPr>
+          <a:xfrm>
+            <a:off x="822960" y="914400"/>
+            <a:ext cx="10561320" cy="868680"/>
+          </a:xfrm>
+          <a:prstGeom prst="rect">
+            <a:avLst/>
+          </a:prstGeom>
+          <a:noFill/>
+          <a:ln/>
+        </p:spPr>
+        <p:txBody>
+          <a:bodyPr wrap="square" rtlCol="0" anchor="ctr"/>
+          <a:lstStyle/>
+          <a:p>
+            <a:pPr indent="0" marL="0">
+              <a:buNone/>
+            </a:pPr>
+            <a:r>
+              <a:rPr lang="en-US" sz="2700" b="1" dirty="0">
+                <a:solidFill>
+                  <a:srgbClr val="FFFFFF"/>
+                </a:solidFill>
+                <a:latin typeface="Segoe UI" pitchFamily="34" charset="0"/>
+                <a:ea typeface="Segoe UI" pitchFamily="34" charset="-122"/>
+                <a:cs typeface="Segoe UI" pitchFamily="34" charset="-120"/>
+              </a:rPr>
+              <a:t>A script you hope for vs a system you operate</a:t>
+            </a:r>
+            <a:endParaRPr lang="en-US" sz="2700" dirty="0"/>
+          </a:p>
+        </p:txBody>
+      </p:sp>
+      <p:sp>
+        <p:nvSpPr>
+          <p:cNvPr id="6" name="Shape 4"/>
+          <p:cNvSpPr/>
+          <p:nvPr/>
+        </p:nvSpPr>
+        <p:spPr>
+          <a:xfrm>
+            <a:off x="822960" y="2011680"/>
+            <a:ext cx="5074920" cy="3611880"/>
+          </a:xfrm>
+          <a:prstGeom prst="roundRect">
+            <a:avLst>
+              <a:gd name="adj" fmla="val 2025"/>
+            </a:avLst>
+          </a:prstGeom>
+          <a:solidFill>
+            <a:srgbClr val="111A2E"/>
+          </a:solidFill>
+          <a:ln w="12700">
+            <a:solidFill>
+              <a:srgbClr val="1E2D45"/>
+            </a:solidFill>
+            <a:prstDash val="solid"/>
+          </a:ln>
+        </p:spPr>
+      </p:sp>
+      <p:sp>
+        <p:nvSpPr>
+          <p:cNvPr id="7" name="Text 5"/>
+          <p:cNvSpPr/>
+          <p:nvPr/>
+        </p:nvSpPr>
+        <p:spPr>
+          <a:xfrm>
+            <a:off x="1097280" y="2240280"/>
+            <a:ext cx="4526280" cy="502920"/>
+          </a:xfrm>
+          <a:prstGeom prst="rect">
+            <a:avLst/>
+          </a:prstGeom>
+          <a:noFill/>
+          <a:ln/>
+        </p:spPr>
+        <p:txBody>
+          <a:bodyPr wrap="square" rtlCol="0" anchor="ctr"/>
+          <a:lstStyle/>
+          <a:p>
+            <a:pPr indent="0" marL="0">
+              <a:buNone/>
+            </a:pPr>
+            <a:r>
+              <a:rPr lang="en-US" sz="1650" b="1" dirty="0">
+                <a:solidFill>
+                  <a:srgbClr val="06B6D4"/>
+                </a:solidFill>
+                <a:latin typeface="Segoe UI" pitchFamily="34" charset="0"/>
+                <a:ea typeface="Segoe UI" pitchFamily="34" charset="-122"/>
+                <a:cs typeface="Segoe UI" pitchFamily="34" charset="-120"/>
+              </a:rPr>
+              <a:t>Script</a:t>
+            </a:r>
+            <a:endParaRPr lang="en-US" sz="1650" dirty="0"/>
+          </a:p>
+        </p:txBody>
+      </p:sp>
+      <p:sp>
+        <p:nvSpPr>
+          <p:cNvPr id="8" name="Text 6"/>
+          <p:cNvSpPr/>
+          <p:nvPr/>
+        </p:nvSpPr>
+        <p:spPr>
+          <a:xfrm>
+            <a:off x="1097280" y="2834640"/>
+            <a:ext cx="4553712" cy="2651760"/>
+          </a:xfrm>
+          <a:prstGeom prst="rect">
+            <a:avLst/>
+          </a:prstGeom>
+          <a:noFill/>
+          <a:ln/>
+        </p:spPr>
+        <p:txBody>
+          <a:bodyPr wrap="square" rtlCol="0" anchor="t"/>
+          <a:lstStyle/>
+          <a:p>
+            <a:pPr marL="342900" indent="-342900">
+              <a:lnSpc>
+                <a:spcPct val="112000"/>
+              </a:lnSpc>
+              <a:spcAft>
+                <a:spcPts val="900"/>
+              </a:spcAft>
+              <a:buSzPct val="100000"/>
+              <a:buChar char="▸"/>
+            </a:pPr>
+            <a:r>
+              <a:rPr lang="en-US" sz="1280" dirty="0">
+                <a:solidFill>
+                  <a:srgbClr val="CBD5E1"/>
+                </a:solidFill>
+                <a:latin typeface="Segoe UI" pitchFamily="34" charset="0"/>
+                <a:ea typeface="Segoe UI" pitchFamily="34" charset="-122"/>
+                <a:cs typeface="Segoe UI" pitchFamily="34" charset="-120"/>
+              </a:rPr>
+              <a:t>Written once, then prayed over</a:t>
+            </a:r>
+            <a:endParaRPr lang="en-US" sz="1280" dirty="0"/>
+          </a:p>
+          <a:p>
+            <a:pPr marL="342900" indent="-342900">
+              <a:lnSpc>
+                <a:spcPct val="112000"/>
+              </a:lnSpc>
+              <a:spcAft>
+                <a:spcPts val="900"/>
+              </a:spcAft>
+              <a:buSzPct val="100000"/>
+              <a:buChar char="▸"/>
+            </a:pPr>
+            <a:r>
+              <a:rPr lang="en-US" sz="1280" dirty="0">
+                <a:solidFill>
+                  <a:srgbClr val="CBD5E1"/>
+                </a:solidFill>
+                <a:latin typeface="Segoe UI" pitchFamily="34" charset="0"/>
+                <a:ea typeface="Segoe UI" pitchFamily="34" charset="-122"/>
+                <a:cs typeface="Segoe UI" pitchFamily="34" charset="-120"/>
+              </a:rPr>
+              <a:t>Fails loudly, or worse, returns empty</a:t>
+            </a:r>
+            <a:endParaRPr lang="en-US" sz="1280" dirty="0"/>
+          </a:p>
+          <a:p>
+            <a:pPr marL="342900" indent="-342900">
+              <a:lnSpc>
+                <a:spcPct val="112000"/>
+              </a:lnSpc>
+              <a:spcAft>
+                <a:spcPts val="900"/>
+              </a:spcAft>
+              <a:buSzPct val="100000"/>
+              <a:buChar char="▸"/>
+            </a:pPr>
+            <a:r>
+              <a:rPr lang="en-US" sz="1280" dirty="0">
+                <a:solidFill>
+                  <a:srgbClr val="CBD5E1"/>
+                </a:solidFill>
+                <a:latin typeface="Segoe UI" pitchFamily="34" charset="0"/>
+                <a:ea typeface="Segoe UI" pitchFamily="34" charset="-122"/>
+                <a:cs typeface="Segoe UI" pitchFamily="34" charset="-120"/>
+              </a:rPr>
+              <a:t>Debugging means scrolling terminal history</a:t>
+            </a:r>
+            <a:endParaRPr lang="en-US" sz="1280" dirty="0"/>
+          </a:p>
+          <a:p>
+            <a:pPr marL="342900" indent="-342900">
+              <a:lnSpc>
+                <a:spcPct val="112000"/>
+              </a:lnSpc>
+              <a:spcAft>
+                <a:spcPts val="900"/>
+              </a:spcAft>
+              <a:buSzPct val="100000"/>
+              <a:buChar char="▸"/>
+            </a:pPr>
+            <a:r>
+              <a:rPr lang="en-US" sz="1280" dirty="0">
+                <a:solidFill>
+                  <a:srgbClr val="CBD5E1"/>
+                </a:solidFill>
+                <a:latin typeface="Segoe UI" pitchFamily="34" charset="0"/>
+                <a:ea typeface="Segoe UI" pitchFamily="34" charset="-122"/>
+                <a:cs typeface="Segoe UI" pitchFamily="34" charset="-120"/>
+              </a:rPr>
+              <a:t>Nobody knows it broke until the data is wrong</a:t>
+            </a:r>
+            <a:endParaRPr lang="en-US" sz="1280" dirty="0"/>
+          </a:p>
+        </p:txBody>
+      </p:sp>
+      <p:sp>
+        <p:nvSpPr>
+          <p:cNvPr id="9" name="Shape 7"/>
+          <p:cNvSpPr/>
+          <p:nvPr/>
+        </p:nvSpPr>
+        <p:spPr>
+          <a:xfrm>
+            <a:off x="6291072" y="2011680"/>
+            <a:ext cx="5074920" cy="3611880"/>
+          </a:xfrm>
+          <a:prstGeom prst="roundRect">
+            <a:avLst>
+              <a:gd name="adj" fmla="val 2025"/>
+            </a:avLst>
+          </a:prstGeom>
+          <a:solidFill>
+            <a:srgbClr val="111A2E"/>
+          </a:solidFill>
+          <a:ln w="12700">
+            <a:solidFill>
+              <a:srgbClr val="1E2D45"/>
+            </a:solidFill>
+            <a:prstDash val="solid"/>
+          </a:ln>
+        </p:spPr>
+      </p:sp>
+      <p:sp>
+        <p:nvSpPr>
+          <p:cNvPr id="10" name="Text 8"/>
+          <p:cNvSpPr/>
+          <p:nvPr/>
+        </p:nvSpPr>
+        <p:spPr>
+          <a:xfrm>
+            <a:off x="6565392" y="2240280"/>
+            <a:ext cx="4526280" cy="502920"/>
+          </a:xfrm>
+          <a:prstGeom prst="rect">
+            <a:avLst/>
+          </a:prstGeom>
+          <a:noFill/>
+          <a:ln/>
+        </p:spPr>
+        <p:txBody>
+          <a:bodyPr wrap="square" rtlCol="0" anchor="ctr"/>
+          <a:lstStyle/>
+          <a:p>
+            <a:pPr indent="0" marL="0">
+              <a:buNone/>
+            </a:pPr>
+            <a:r>
+              <a:rPr lang="en-US" sz="1650" b="1" dirty="0">
+                <a:solidFill>
+                  <a:srgbClr val="93C5FD"/>
+                </a:solidFill>
+                <a:latin typeface="Segoe UI" pitchFamily="34" charset="0"/>
+                <a:ea typeface="Segoe UI" pitchFamily="34" charset="-122"/>
+                <a:cs typeface="Segoe UI" pitchFamily="34" charset="-120"/>
+              </a:rPr>
+              <a:t>System</a:t>
+            </a:r>
+            <a:endParaRPr lang="en-US" sz="1650" dirty="0"/>
+          </a:p>
+        </p:txBody>
+      </p:sp>
+      <p:sp>
+        <p:nvSpPr>
+          <p:cNvPr id="11" name="Text 9"/>
+          <p:cNvSpPr/>
+          <p:nvPr/>
+        </p:nvSpPr>
+        <p:spPr>
+          <a:xfrm>
+            <a:off x="6565392" y="2834640"/>
+            <a:ext cx="4553712" cy="2651760"/>
+          </a:xfrm>
+          <a:prstGeom prst="rect">
+            <a:avLst/>
+          </a:prstGeom>
+          <a:noFill/>
+          <a:ln/>
+        </p:spPr>
+        <p:txBody>
+          <a:bodyPr wrap="square" rtlCol="0" anchor="t"/>
+          <a:lstStyle/>
+          <a:p>
+            <a:pPr marL="342900" indent="-342900">
+              <a:lnSpc>
+                <a:spcPct val="112000"/>
+              </a:lnSpc>
+              <a:spcAft>
+                <a:spcPts val="900"/>
+              </a:spcAft>
+              <a:buSzPct val="100000"/>
+              <a:buChar char="▸"/>
+            </a:pPr>
+            <a:r>
+              <a:rPr lang="en-US" sz="1280" dirty="0">
+                <a:solidFill>
+                  <a:srgbClr val="CBD5E1"/>
+                </a:solidFill>
+                <a:latin typeface="Segoe UI" pitchFamily="34" charset="0"/>
+                <a:ea typeface="Segoe UI" pitchFamily="34" charset="-122"/>
+                <a:cs typeface="Segoe UI" pitchFamily="34" charset="-120"/>
+              </a:rPr>
+              <a:t>Validated on every run with defined expectations</a:t>
+            </a:r>
+            <a:endParaRPr lang="en-US" sz="1280" dirty="0"/>
+          </a:p>
+          <a:p>
+            <a:pPr marL="342900" indent="-342900">
+              <a:lnSpc>
+                <a:spcPct val="112000"/>
+              </a:lnSpc>
+              <a:spcAft>
+                <a:spcPts val="900"/>
+              </a:spcAft>
+              <a:buSzPct val="100000"/>
+              <a:buChar char="▸"/>
+            </a:pPr>
+            <a:r>
+              <a:rPr lang="en-US" sz="1280" dirty="0">
+                <a:solidFill>
+                  <a:srgbClr val="CBD5E1"/>
+                </a:solidFill>
+                <a:latin typeface="Segoe UI" pitchFamily="34" charset="0"/>
+                <a:ea typeface="Segoe UI" pitchFamily="34" charset="-122"/>
+                <a:cs typeface="Segoe UI" pitchFamily="34" charset="-120"/>
+              </a:rPr>
+              <a:t>Degrades gracefully and flags partial results</a:t>
+            </a:r>
+            <a:endParaRPr lang="en-US" sz="1280" dirty="0"/>
+          </a:p>
+          <a:p>
+            <a:pPr marL="342900" indent="-342900">
+              <a:lnSpc>
+                <a:spcPct val="112000"/>
+              </a:lnSpc>
+              <a:spcAft>
+                <a:spcPts val="900"/>
+              </a:spcAft>
+              <a:buSzPct val="100000"/>
+              <a:buChar char="▸"/>
+            </a:pPr>
+            <a:r>
+              <a:rPr lang="en-US" sz="1280" dirty="0">
+                <a:solidFill>
+                  <a:srgbClr val="CBD5E1"/>
+                </a:solidFill>
+                <a:latin typeface="Segoe UI" pitchFamily="34" charset="0"/>
+                <a:ea typeface="Segoe UI" pitchFamily="34" charset="-122"/>
+                <a:cs typeface="Segoe UI" pitchFamily="34" charset="-120"/>
+              </a:rPr>
+              <a:t>Structured logs: fetched, skipped, doubted</a:t>
+            </a:r>
+            <a:endParaRPr lang="en-US" sz="1280" dirty="0"/>
+          </a:p>
+          <a:p>
+            <a:pPr marL="342900" indent="-342900">
+              <a:lnSpc>
+                <a:spcPct val="112000"/>
+              </a:lnSpc>
+              <a:spcAft>
+                <a:spcPts val="900"/>
+              </a:spcAft>
+              <a:buSzPct val="100000"/>
+              <a:buChar char="▸"/>
+            </a:pPr>
+            <a:r>
+              <a:rPr lang="en-US" sz="1280" dirty="0">
+                <a:solidFill>
+                  <a:srgbClr val="CBD5E1"/>
+                </a:solidFill>
+                <a:latin typeface="Segoe UI" pitchFamily="34" charset="0"/>
+                <a:ea typeface="Segoe UI" pitchFamily="34" charset="-122"/>
+                <a:cs typeface="Segoe UI" pitchFamily="34" charset="-120"/>
+              </a:rPr>
+              <a:t>Freshness alarms page a human before the damage</a:t>
+            </a:r>
+            <a:endParaRPr lang="en-US" sz="1280" dirty="0"/>
+          </a:p>
+        </p:txBody>
+      </p:sp>
+      <p:sp>
+        <p:nvSpPr>
+          <p:cNvPr id="12" name="Shape 10"/>
+          <p:cNvSpPr/>
+          <p:nvPr/>
+        </p:nvSpPr>
+        <p:spPr>
+          <a:xfrm>
+            <a:off x="822960" y="5961888"/>
+            <a:ext cx="10515600" cy="0"/>
+          </a:xfrm>
+          <a:prstGeom prst="line">
+            <a:avLst/>
+          </a:prstGeom>
+          <a:noFill/>
+          <a:ln w="12700">
+            <a:solidFill>
+              <a:srgbClr val="1E2D45"/>
+            </a:solidFill>
+            <a:prstDash val="solid"/>
+          </a:ln>
+        </p:spPr>
+      </p:sp>
+      <p:sp>
+        <p:nvSpPr>
+          <p:cNvPr id="13" name="Text 11"/>
+          <p:cNvSpPr/>
+          <p:nvPr/>
+        </p:nvSpPr>
+        <p:spPr>
+          <a:xfrm>
+            <a:off x="822960" y="6053328"/>
+            <a:ext cx="9692640" cy="457200"/>
+          </a:xfrm>
+          <a:prstGeom prst="rect">
+            <a:avLst/>
+          </a:prstGeom>
+          <a:noFill/>
+          <a:ln/>
+        </p:spPr>
+        <p:txBody>
+          <a:bodyPr wrap="square" rtlCol="0" anchor="ctr"/>
+          <a:lstStyle/>
+          <a:p>
+            <a:pPr indent="0" marL="0">
+              <a:buNone/>
+            </a:pPr>
+            <a:r>
+              <a:rPr lang="en-US" sz="1150" dirty="0">
+                <a:solidFill>
+                  <a:srgbClr val="64748B"/>
+                </a:solidFill>
+                <a:latin typeface="Segoe UI" pitchFamily="34" charset="0"/>
+                <a:ea typeface="Segoe UI" pitchFamily="34" charset="-122"/>
+                <a:cs typeface="Segoe UI" pitchFamily="34" charset="-120"/>
+              </a:rPr>
+              <a:t>Clients do not buy scrapers - they buy data that keeps arriving.</a:t>
+            </a:r>
+            <a:endParaRPr lang="en-US" sz="1150" dirty="0"/>
+          </a:p>
+        </p:txBody>
+      </p:sp>
+      <p:sp>
+        <p:nvSpPr>
+          <p:cNvPr id="14" name="Text 12"/>
+          <p:cNvSpPr/>
+          <p:nvPr/>
+        </p:nvSpPr>
+        <p:spPr>
+          <a:xfrm>
+            <a:off x="10698480" y="6382512"/>
+            <a:ext cx="1188720" cy="365760"/>
+          </a:xfrm>
+          <a:prstGeom prst="rect">
+            <a:avLst/>
+          </a:prstGeom>
+          <a:noFill/>
+          <a:ln/>
+        </p:spPr>
+        <p:txBody>
+          <a:bodyPr wrap="square" rtlCol="0" anchor="ctr"/>
+          <a:lstStyle/>
+          <a:p>
+            <a:pPr algn="r" indent="0" marL="0">
+              <a:buNone/>
+            </a:pPr>
+            <a:r>
+              <a:rPr lang="en-US" sz="1000" dirty="0">
+                <a:solidFill>
+                  <a:srgbClr val="64748B"/>
+                </a:solidFill>
+                <a:latin typeface="Consolas" pitchFamily="34" charset="0"/>
+                <a:ea typeface="Consolas" pitchFamily="34" charset="-122"/>
+                <a:cs typeface="Consolas" pitchFamily="34" charset="-120"/>
+              </a:rPr>
+              <a:t>11 / 15</a:t>
+            </a:r>
+            <a:endParaRPr lang="en-US" sz="1000" dirty="0"/>
+          </a:p>
+        </p:txBody>
+      </p:sp>
+    </p:spTree>
+  </p:cSld>
+  <p:clrMapOvr>
+    <a:masterClrMapping/>
+  </p:clrMapOvr>
+</p:sld>
+</file>
+
+<file path=ppt/slides/slide12.xml><?xml version="1.0" encoding="utf-8"?>
+<p:sld xmlns:a="http://schemas.openxmlformats.org/drawingml/2006/main" xmlns:r="http://schemas.openxmlformats.org/officeDocument/2006/relationships" xmlns:p="http://schemas.openxmlformats.org/presentationml/2006/main">
+  <p:cSld name="Slide 12">
+    <p:bg>
+      <p:bgPr>
+        <a:solidFill>
+          <a:srgbClr val="0A0C12"/>
+        </a:solidFill>
+      </p:bgPr>
+    </p:bg>
+    <p:spTree>
+      <p:nvGrpSpPr>
+        <p:cNvPr id="1" name=""/>
+        <p:cNvGrpSpPr/>
+        <p:nvPr/>
+      </p:nvGrpSpPr>
+      <p:grpSpPr>
+        <a:xfrm>
+          <a:off x="0" y="0"/>
+          <a:ext cx="0" cy="0"/>
+          <a:chOff x="0" y="0"/>
+          <a:chExt cx="0" cy="0"/>
+        </a:xfrm>
+      </p:grpSpPr>
+      <p:sp>
+        <p:nvSpPr>
+          <p:cNvPr id="2" name="Shape 0"/>
+          <p:cNvSpPr/>
+          <p:nvPr/>
+        </p:nvSpPr>
+        <p:spPr>
+          <a:xfrm>
+            <a:off x="0" y="0"/>
+            <a:ext cx="7680960" cy="64008"/>
+          </a:xfrm>
+          <a:prstGeom prst="rect">
+            <a:avLst/>
+          </a:prstGeom>
+          <a:solidFill>
+            <a:srgbClr val="3B82F6"/>
+          </a:solidFill>
+          <a:ln/>
+        </p:spPr>
+      </p:sp>
+      <p:sp>
+        <p:nvSpPr>
+          <p:cNvPr id="3" name="Shape 1"/>
+          <p:cNvSpPr/>
+          <p:nvPr/>
+        </p:nvSpPr>
+        <p:spPr>
+          <a:xfrm>
+            <a:off x="7680960" y="0"/>
+            <a:ext cx="4510735" cy="64008"/>
+          </a:xfrm>
+          <a:prstGeom prst="rect">
+            <a:avLst/>
+          </a:prstGeom>
+          <a:solidFill>
+            <a:srgbClr val="06B6D4"/>
+          </a:solidFill>
+          <a:ln/>
+        </p:spPr>
+      </p:sp>
+      <p:sp>
+        <p:nvSpPr>
+          <p:cNvPr id="4" name="Text 2"/>
+          <p:cNvSpPr/>
+          <p:nvPr/>
+        </p:nvSpPr>
+        <p:spPr>
+          <a:xfrm>
+            <a:off x="822960" y="502920"/>
+            <a:ext cx="10515600" cy="365760"/>
+          </a:xfrm>
+          <a:prstGeom prst="rect">
+            <a:avLst/>
+          </a:prstGeom>
+          <a:noFill/>
+          <a:ln/>
+        </p:spPr>
+        <p:txBody>
+          <a:bodyPr wrap="square" rtlCol="0" anchor="ctr"/>
+          <a:lstStyle/>
+          <a:p>
+            <a:pPr indent="0" marL="0">
+              <a:buNone/>
+            </a:pPr>
+            <a:r>
+              <a:rPr lang="en-US" sz="1200" spc="300" kern="0" dirty="0">
+                <a:solidFill>
+                  <a:srgbClr val="06B6D4"/>
+                </a:solidFill>
+                <a:latin typeface="Consolas" pitchFamily="34" charset="0"/>
+                <a:ea typeface="Consolas" pitchFamily="34" charset="-122"/>
+                <a:cs typeface="Consolas" pitchFamily="34" charset="-120"/>
+              </a:rPr>
+              <a:t>PRINCIPLE 3</a:t>
+            </a:r>
+            <a:endParaRPr lang="en-US" sz="1200" dirty="0"/>
+          </a:p>
+        </p:txBody>
+      </p:sp>
+      <p:sp>
+        <p:nvSpPr>
+          <p:cNvPr id="5" name="Text 3"/>
+          <p:cNvSpPr/>
+          <p:nvPr/>
+        </p:nvSpPr>
+        <p:spPr>
+          <a:xfrm>
+            <a:off x="822960" y="914400"/>
+            <a:ext cx="10561320" cy="868680"/>
+          </a:xfrm>
+          <a:prstGeom prst="rect">
+            <a:avLst/>
+          </a:prstGeom>
+          <a:noFill/>
+          <a:ln/>
+        </p:spPr>
+        <p:txBody>
+          <a:bodyPr wrap="square" rtlCol="0" anchor="ctr"/>
+          <a:lstStyle/>
+          <a:p>
+            <a:pPr indent="0" marL="0">
+              <a:buNone/>
+            </a:pPr>
+            <a:r>
+              <a:rPr lang="en-US" sz="2700" b="1" dirty="0">
+                <a:solidFill>
+                  <a:srgbClr val="FFFFFF"/>
+                </a:solidFill>
+                <a:latin typeface="Segoe UI" pitchFamily="34" charset="0"/>
+                <a:ea typeface="Segoe UI" pitchFamily="34" charset="-122"/>
+                <a:cs typeface="Segoe UI" pitchFamily="34" charset="-120"/>
+              </a:rPr>
+              <a:t>Be a polite guest</a:t>
+            </a:r>
+            <a:endParaRPr lang="en-US" sz="2700" dirty="0"/>
+          </a:p>
+        </p:txBody>
+      </p:sp>
+      <p:sp>
+        <p:nvSpPr>
+          <p:cNvPr id="6" name="Text 4"/>
+          <p:cNvSpPr/>
+          <p:nvPr/>
+        </p:nvSpPr>
+        <p:spPr>
+          <a:xfrm>
+            <a:off x="868680" y="2011680"/>
+            <a:ext cx="10424160" cy="3566160"/>
+          </a:xfrm>
+          <a:prstGeom prst="rect">
+            <a:avLst/>
+          </a:prstGeom>
+          <a:noFill/>
+          <a:ln/>
+        </p:spPr>
+        <p:txBody>
+          <a:bodyPr wrap="square" rtlCol="0" anchor="t"/>
+          <a:lstStyle/>
+          <a:p>
+            <a:pPr marL="342900" indent="-342900">
+              <a:lnSpc>
+                <a:spcPct val="112000"/>
+              </a:lnSpc>
+              <a:spcAft>
+                <a:spcPts val="900"/>
+              </a:spcAft>
+              <a:buSzPct val="100000"/>
+              <a:buChar char="▸"/>
+            </a:pPr>
+            <a:r>
+              <a:rPr lang="en-US" sz="1600" dirty="0">
+                <a:solidFill>
+                  <a:srgbClr val="CBD5E1"/>
+                </a:solidFill>
+                <a:latin typeface="Segoe UI" pitchFamily="34" charset="0"/>
+                <a:ea typeface="Segoe UI" pitchFamily="34" charset="-122"/>
+                <a:cs typeface="Segoe UI" pitchFamily="34" charset="-120"/>
+              </a:rPr>
+              <a:t>Robots directives and terms of service are respected, not negotiated.</a:t>
+            </a:r>
+            <a:endParaRPr lang="en-US" sz="1600" dirty="0"/>
+          </a:p>
+          <a:p>
+            <a:pPr marL="342900" indent="-342900">
+              <a:lnSpc>
+                <a:spcPct val="112000"/>
+              </a:lnSpc>
+              <a:spcAft>
+                <a:spcPts val="900"/>
+              </a:spcAft>
+              <a:buSzPct val="100000"/>
+              <a:buChar char="▸"/>
+            </a:pPr>
+            <a:r>
+              <a:rPr lang="en-US" sz="1600" dirty="0">
+                <a:solidFill>
+                  <a:srgbClr val="CBD5E1"/>
+                </a:solidFill>
+                <a:latin typeface="Segoe UI" pitchFamily="34" charset="0"/>
+                <a:ea typeface="Segoe UI" pitchFamily="34" charset="-122"/>
+                <a:cs typeface="Segoe UI" pitchFamily="34" charset="-120"/>
+              </a:rPr>
+              <a:t>Rate-limiting is self-imposed before sites have to impose it.</a:t>
+            </a:r>
+            <a:endParaRPr lang="en-US" sz="1600" dirty="0"/>
+          </a:p>
+          <a:p>
+            <a:pPr marL="342900" indent="-342900">
+              <a:lnSpc>
+                <a:spcPct val="112000"/>
+              </a:lnSpc>
+              <a:spcAft>
+                <a:spcPts val="900"/>
+              </a:spcAft>
+              <a:buSzPct val="100000"/>
+              <a:buChar char="▸"/>
+            </a:pPr>
+            <a:r>
+              <a:rPr lang="en-US" sz="1600" dirty="0">
+                <a:solidFill>
+                  <a:srgbClr val="CBD5E1"/>
+                </a:solidFill>
+                <a:latin typeface="Segoe UI" pitchFamily="34" charset="0"/>
+                <a:ea typeface="Segoe UI" pitchFamily="34" charset="-122"/>
+                <a:cs typeface="Segoe UI" pitchFamily="34" charset="-120"/>
+              </a:rPr>
+              <a:t>Only public data is collected - no credentials, no pretending to be a user.</a:t>
+            </a:r>
+            <a:endParaRPr lang="en-US" sz="1600" dirty="0"/>
+          </a:p>
+          <a:p>
+            <a:pPr marL="342900" indent="-342900">
+              <a:lnSpc>
+                <a:spcPct val="112000"/>
+              </a:lnSpc>
+              <a:spcAft>
+                <a:spcPts val="900"/>
+              </a:spcAft>
+              <a:buSzPct val="100000"/>
+              <a:buChar char="▸"/>
+            </a:pPr>
+            <a:r>
+              <a:rPr lang="en-US" sz="1600" dirty="0">
+                <a:solidFill>
+                  <a:srgbClr val="CBD5E1"/>
+                </a:solidFill>
+                <a:latin typeface="Segoe UI" pitchFamily="34" charset="0"/>
+                <a:ea typeface="Segoe UI" pitchFamily="34" charset="-122"/>
+                <a:cs typeface="Segoe UI" pitchFamily="34" charset="-120"/>
+              </a:rPr>
+              <a:t>Sustainable scraping is slow, boring, and ethical - and it is the only kind that lasts.</a:t>
+            </a:r>
+            <a:endParaRPr lang="en-US" sz="1600" dirty="0"/>
+          </a:p>
+          <a:p>
+            <a:pPr marL="342900" indent="-342900">
+              <a:lnSpc>
+                <a:spcPct val="112000"/>
+              </a:lnSpc>
+              <a:spcAft>
+                <a:spcPts val="900"/>
+              </a:spcAft>
+              <a:buSzPct val="100000"/>
+              <a:buChar char="▸"/>
+            </a:pPr>
+            <a:r>
+              <a:rPr lang="en-US" sz="1600" dirty="0">
+                <a:solidFill>
+                  <a:srgbClr val="CBD5E1"/>
+                </a:solidFill>
+                <a:latin typeface="Segoe UI" pitchFamily="34" charset="0"/>
+                <a:ea typeface="Segoe UI" pitchFamily="34" charset="-122"/>
+                <a:cs typeface="Segoe UI" pitchFamily="34" charset="-120"/>
+              </a:rPr>
+              <a:t>Politeness is not just ethics; it is what keeps access working for months.</a:t>
+            </a:r>
+            <a:endParaRPr lang="en-US" sz="1600" dirty="0"/>
+          </a:p>
+        </p:txBody>
+      </p:sp>
+      <p:sp>
+        <p:nvSpPr>
+          <p:cNvPr id="7" name="Shape 5"/>
+          <p:cNvSpPr/>
+          <p:nvPr/>
+        </p:nvSpPr>
+        <p:spPr>
+          <a:xfrm>
+            <a:off x="822960" y="5961888"/>
+            <a:ext cx="10515600" cy="0"/>
+          </a:xfrm>
+          <a:prstGeom prst="line">
+            <a:avLst/>
+          </a:prstGeom>
+          <a:noFill/>
+          <a:ln w="12700">
+            <a:solidFill>
+              <a:srgbClr val="1E2D45"/>
+            </a:solidFill>
+            <a:prstDash val="solid"/>
+          </a:ln>
+        </p:spPr>
+      </p:sp>
+      <p:sp>
+        <p:nvSpPr>
+          <p:cNvPr id="8" name="Text 6"/>
+          <p:cNvSpPr/>
+          <p:nvPr/>
+        </p:nvSpPr>
+        <p:spPr>
+          <a:xfrm>
+            <a:off x="822960" y="6053328"/>
+            <a:ext cx="9692640" cy="457200"/>
+          </a:xfrm>
+          <a:prstGeom prst="rect">
+            <a:avLst/>
+          </a:prstGeom>
+          <a:noFill/>
+          <a:ln/>
+        </p:spPr>
+        <p:txBody>
+          <a:bodyPr wrap="square" rtlCol="0" anchor="ctr"/>
+          <a:lstStyle/>
+          <a:p>
+            <a:pPr indent="0" marL="0">
+              <a:buNone/>
+            </a:pPr>
+            <a:r>
+              <a:rPr lang="en-US" sz="1150" dirty="0">
+                <a:solidFill>
+                  <a:srgbClr val="64748B"/>
+                </a:solidFill>
+                <a:latin typeface="Segoe UI" pitchFamily="34" charset="0"/>
+                <a:ea typeface="Segoe UI" pitchFamily="34" charset="-122"/>
+                <a:cs typeface="Segoe UI" pitchFamily="34" charset="-120"/>
+              </a:rPr>
+              <a:t>Ethical collection is a feature clients can put their name on.</a:t>
+            </a:r>
+            <a:endParaRPr lang="en-US" sz="1150" dirty="0"/>
+          </a:p>
+        </p:txBody>
+      </p:sp>
+      <p:sp>
+        <p:nvSpPr>
+          <p:cNvPr id="9" name="Text 7"/>
+          <p:cNvSpPr/>
+          <p:nvPr/>
+        </p:nvSpPr>
+        <p:spPr>
+          <a:xfrm>
+            <a:off x="10698480" y="6382512"/>
+            <a:ext cx="1188720" cy="365760"/>
+          </a:xfrm>
+          <a:prstGeom prst="rect">
+            <a:avLst/>
+          </a:prstGeom>
+          <a:noFill/>
+          <a:ln/>
+        </p:spPr>
+        <p:txBody>
+          <a:bodyPr wrap="square" rtlCol="0" anchor="ctr"/>
+          <a:lstStyle/>
+          <a:p>
+            <a:pPr algn="r" indent="0" marL="0">
+              <a:buNone/>
+            </a:pPr>
+            <a:r>
+              <a:rPr lang="en-US" sz="1000" dirty="0">
+                <a:solidFill>
+                  <a:srgbClr val="64748B"/>
+                </a:solidFill>
+                <a:latin typeface="Consolas" pitchFamily="34" charset="0"/>
+                <a:ea typeface="Consolas" pitchFamily="34" charset="-122"/>
+                <a:cs typeface="Consolas" pitchFamily="34" charset="-120"/>
+              </a:rPr>
+              <a:t>12 / 15</a:t>
+            </a:r>
+            <a:endParaRPr lang="en-US" sz="1000" dirty="0"/>
+          </a:p>
+        </p:txBody>
+      </p:sp>
+    </p:spTree>
+  </p:cSld>
+  <p:clrMapOvr>
+    <a:masterClrMapping/>
+  </p:clrMapOvr>
+</p:sld>
+</file>
+
+<file path=ppt/slides/slide13.xml><?xml version="1.0" encoding="utf-8"?>
+<p:sld xmlns:a="http://schemas.openxmlformats.org/drawingml/2006/main" xmlns:r="http://schemas.openxmlformats.org/officeDocument/2006/relationships" xmlns:p="http://schemas.openxmlformats.org/presentationml/2006/main">
+  <p:cSld name="Slide 13">
+    <p:bg>
+      <p:bgPr>
+        <a:solidFill>
+          <a:srgbClr val="0A0C12"/>
+        </a:solidFill>
+      </p:bgPr>
+    </p:bg>
+    <p:spTree>
+      <p:nvGrpSpPr>
+        <p:cNvPr id="1" name=""/>
+        <p:cNvGrpSpPr/>
+        <p:nvPr/>
+      </p:nvGrpSpPr>
+      <p:grpSpPr>
+        <a:xfrm>
+          <a:off x="0" y="0"/>
+          <a:ext cx="0" cy="0"/>
+          <a:chOff x="0" y="0"/>
+          <a:chExt cx="0" cy="0"/>
+        </a:xfrm>
+      </p:grpSpPr>
+      <p:sp>
+        <p:nvSpPr>
+          <p:cNvPr id="2" name="Shape 0"/>
+          <p:cNvSpPr/>
+          <p:nvPr/>
+        </p:nvSpPr>
+        <p:spPr>
+          <a:xfrm>
+            <a:off x="0" y="0"/>
+            <a:ext cx="7680960" cy="64008"/>
+          </a:xfrm>
+          <a:prstGeom prst="rect">
+            <a:avLst/>
+          </a:prstGeom>
+          <a:solidFill>
+            <a:srgbClr val="3B82F6"/>
+          </a:solidFill>
+          <a:ln/>
+        </p:spPr>
+      </p:sp>
+      <p:sp>
+        <p:nvSpPr>
+          <p:cNvPr id="3" name="Shape 1"/>
+          <p:cNvSpPr/>
+          <p:nvPr/>
+        </p:nvSpPr>
+        <p:spPr>
+          <a:xfrm>
+            <a:off x="7680960" y="0"/>
+            <a:ext cx="4510735" cy="64008"/>
+          </a:xfrm>
+          <a:prstGeom prst="rect">
+            <a:avLst/>
+          </a:prstGeom>
+          <a:solidFill>
+            <a:srgbClr val="06B6D4"/>
+          </a:solidFill>
+          <a:ln/>
+        </p:spPr>
+      </p:sp>
+      <p:sp>
+        <p:nvSpPr>
+          <p:cNvPr id="4" name="Text 2"/>
+          <p:cNvSpPr/>
+          <p:nvPr/>
+        </p:nvSpPr>
+        <p:spPr>
+          <a:xfrm>
+            <a:off x="822960" y="502920"/>
+            <a:ext cx="10515600" cy="365760"/>
+          </a:xfrm>
+          <a:prstGeom prst="rect">
+            <a:avLst/>
+          </a:prstGeom>
+          <a:noFill/>
+          <a:ln/>
+        </p:spPr>
+        <p:txBody>
+          <a:bodyPr wrap="square" rtlCol="0" anchor="ctr"/>
+          <a:lstStyle/>
+          <a:p>
+            <a:pPr indent="0" marL="0">
+              <a:buNone/>
+            </a:pPr>
+            <a:r>
+              <a:rPr lang="en-US" sz="1200" spc="300" kern="0" dirty="0">
+                <a:solidFill>
+                  <a:srgbClr val="06B6D4"/>
+                </a:solidFill>
+                <a:latin typeface="Consolas" pitchFamily="34" charset="0"/>
+                <a:ea typeface="Consolas" pitchFamily="34" charset="-122"/>
+                <a:cs typeface="Consolas" pitchFamily="34" charset="-120"/>
+              </a:rPr>
+              <a:t>RESILIENCE</a:t>
+            </a:r>
+            <a:endParaRPr lang="en-US" sz="1200" dirty="0"/>
+          </a:p>
+        </p:txBody>
+      </p:sp>
+      <p:sp>
+        <p:nvSpPr>
+          <p:cNvPr id="5" name="Text 3"/>
+          <p:cNvSpPr/>
+          <p:nvPr/>
+        </p:nvSpPr>
+        <p:spPr>
+          <a:xfrm>
+            <a:off x="822960" y="914400"/>
+            <a:ext cx="10561320" cy="868680"/>
+          </a:xfrm>
+          <a:prstGeom prst="rect">
+            <a:avLst/>
+          </a:prstGeom>
+          <a:noFill/>
+          <a:ln/>
+        </p:spPr>
+        <p:txBody>
+          <a:bodyPr wrap="square" rtlCol="0" anchor="ctr"/>
+          <a:lstStyle/>
+          <a:p>
+            <a:pPr indent="0" marL="0">
+              <a:buNone/>
+            </a:pPr>
+            <a:r>
+              <a:rPr lang="en-US" sz="2700" b="1" dirty="0">
+                <a:solidFill>
+                  <a:srgbClr val="FFFFFF"/>
+                </a:solidFill>
+                <a:latin typeface="Segoe UI" pitchFamily="34" charset="0"/>
+                <a:ea typeface="Segoe UI" pitchFamily="34" charset="-122"/>
+                <a:cs typeface="Segoe UI" pitchFamily="34" charset="-120"/>
+              </a:rPr>
+              <a:t>Clean-extraction rate through a drift event</a:t>
+            </a:r>
+            <a:endParaRPr lang="en-US" sz="2700" dirty="0"/>
+          </a:p>
+        </p:txBody>
+      </p:sp>
+      <p:graphicFrame>
+        <p:nvGraphicFramePr>
+          <p:cNvPr id="6" name="Chart 0" descr=""/>
+          <p:cNvGraphicFramePr/>
+          <p:nvPr/>
+        </p:nvGraphicFramePr>
+        <p:xfrm>
+          <a:off x="822960" y="1874520"/>
+          <a:ext cx="10515600" cy="3337560"/>
+        </p:xfrm>
+        <a:graphic xmlns:a="http://schemas.openxmlformats.org/drawingml/2006/main">
+          <a:graphicData uri="http://schemas.openxmlformats.org/drawingml/2006/chart">
+            <c:chart xmlns:c="http://schemas.openxmlformats.org/drawingml/2006/chart" r:id="rId1"/>
+          </a:graphicData>
+        </a:graphic>
+      </p:graphicFrame>
+      <p:sp>
+        <p:nvSpPr>
+          <p:cNvPr id="7" name="Shape 4"/>
+          <p:cNvSpPr/>
+          <p:nvPr/>
+        </p:nvSpPr>
+        <p:spPr>
+          <a:xfrm>
+            <a:off x="822960" y="5413248"/>
+            <a:ext cx="10515600" cy="0"/>
+          </a:xfrm>
+          <a:prstGeom prst="line">
+            <a:avLst/>
+          </a:prstGeom>
+          <a:noFill/>
+          <a:ln w="12700">
+            <a:solidFill>
+              <a:srgbClr val="1E2D45"/>
+            </a:solidFill>
+            <a:prstDash val="solid"/>
+          </a:ln>
+        </p:spPr>
+      </p:sp>
+      <p:sp>
+        <p:nvSpPr>
+          <p:cNvPr id="8" name="Text 5"/>
+          <p:cNvSpPr/>
+          <p:nvPr/>
+        </p:nvSpPr>
+        <p:spPr>
+          <a:xfrm>
+            <a:off x="822960" y="5504688"/>
+            <a:ext cx="10424160" cy="411480"/>
+          </a:xfrm>
+          <a:prstGeom prst="rect">
+            <a:avLst/>
+          </a:prstGeom>
+          <a:noFill/>
+          <a:ln/>
+        </p:spPr>
+        <p:txBody>
+          <a:bodyPr wrap="square" rtlCol="0" anchor="ctr"/>
+          <a:lstStyle/>
+          <a:p>
+            <a:pPr indent="0" marL="0">
+              <a:buNone/>
+            </a:pPr>
+            <a:r>
+              <a:rPr lang="en-US" sz="1300" i="1" dirty="0">
+                <a:solidFill>
+                  <a:srgbClr val="06B6D4"/>
+                </a:solidFill>
+                <a:latin typeface="Segoe UI" pitchFamily="34" charset="0"/>
+                <a:ea typeface="Segoe UI" pitchFamily="34" charset="-122"/>
+                <a:cs typeface="Segoe UI" pitchFamily="34" charset="-120"/>
+              </a:rPr>
+              <a:t>→  When markup drifts, fallbacks hold extraction above zero while the fix ships - and validation flags the drift the day it happens.</a:t>
+            </a:r>
+            <a:endParaRPr lang="en-US" sz="1300" dirty="0"/>
+          </a:p>
+        </p:txBody>
+      </p:sp>
+      <p:sp>
+        <p:nvSpPr>
+          <p:cNvPr id="9" name="Shape 6"/>
+          <p:cNvSpPr/>
+          <p:nvPr/>
+        </p:nvSpPr>
+        <p:spPr>
+          <a:xfrm>
+            <a:off x="822960" y="5961888"/>
+            <a:ext cx="10515600" cy="0"/>
+          </a:xfrm>
+          <a:prstGeom prst="line">
+            <a:avLst/>
+          </a:prstGeom>
+          <a:noFill/>
+          <a:ln w="12700">
+            <a:solidFill>
+              <a:srgbClr val="1E2D45"/>
+            </a:solidFill>
+            <a:prstDash val="solid"/>
+          </a:ln>
+        </p:spPr>
+      </p:sp>
+      <p:sp>
+        <p:nvSpPr>
+          <p:cNvPr id="10" name="Text 7"/>
+          <p:cNvSpPr/>
+          <p:nvPr/>
+        </p:nvSpPr>
+        <p:spPr>
+          <a:xfrm>
+            <a:off x="822960" y="6053328"/>
+            <a:ext cx="9692640" cy="457200"/>
+          </a:xfrm>
+          <a:prstGeom prst="rect">
+            <a:avLst/>
+          </a:prstGeom>
+          <a:noFill/>
+          <a:ln/>
+        </p:spPr>
+        <p:txBody>
+          <a:bodyPr wrap="square" rtlCol="0" anchor="ctr"/>
+          <a:lstStyle/>
+          <a:p>
+            <a:pPr indent="0" marL="0">
+              <a:buNone/>
+            </a:pPr>
+            <a:r>
+              <a:rPr lang="en-US" sz="1150" dirty="0">
+                <a:solidFill>
+                  <a:srgbClr val="64748B"/>
+                </a:solidFill>
+                <a:latin typeface="Segoe UI" pitchFamily="34" charset="0"/>
+                <a:ea typeface="Segoe UI" pitchFamily="34" charset="-122"/>
+                <a:cs typeface="Segoe UI" pitchFamily="34" charset="-120"/>
+              </a:rPr>
+              <a:t>Illustrative pattern of a drift event and recovery, consistent with the toolkit's design.</a:t>
+            </a:r>
+            <a:endParaRPr lang="en-US" sz="1150" dirty="0"/>
+          </a:p>
+        </p:txBody>
+      </p:sp>
+      <p:sp>
+        <p:nvSpPr>
+          <p:cNvPr id="11" name="Text 8"/>
+          <p:cNvSpPr/>
+          <p:nvPr/>
+        </p:nvSpPr>
+        <p:spPr>
+          <a:xfrm>
+            <a:off x="10698480" y="6382512"/>
+            <a:ext cx="1188720" cy="365760"/>
+          </a:xfrm>
+          <a:prstGeom prst="rect">
+            <a:avLst/>
+          </a:prstGeom>
+          <a:noFill/>
+          <a:ln/>
+        </p:spPr>
+        <p:txBody>
+          <a:bodyPr wrap="square" rtlCol="0" anchor="ctr"/>
+          <a:lstStyle/>
+          <a:p>
+            <a:pPr algn="r" indent="0" marL="0">
+              <a:buNone/>
+            </a:pPr>
+            <a:r>
+              <a:rPr lang="en-US" sz="1000" dirty="0">
+                <a:solidFill>
+                  <a:srgbClr val="64748B"/>
+                </a:solidFill>
+                <a:latin typeface="Consolas" pitchFamily="34" charset="0"/>
+                <a:ea typeface="Consolas" pitchFamily="34" charset="-122"/>
+                <a:cs typeface="Consolas" pitchFamily="34" charset="-120"/>
+              </a:rPr>
+              <a:t>13 / 15</a:t>
+            </a:r>
+            <a:endParaRPr lang="en-US" sz="1000" dirty="0"/>
+          </a:p>
+        </p:txBody>
+      </p:sp>
+    </p:spTree>
+  </p:cSld>
+  <p:clrMapOvr>
+    <a:masterClrMapping/>
+  </p:clrMapOvr>
+</p:sld>
+</file>
+
+<file path=ppt/slides/slide14.xml><?xml version="1.0" encoding="utf-8"?>
+<p:sld xmlns:a="http://schemas.openxmlformats.org/drawingml/2006/main" xmlns:r="http://schemas.openxmlformats.org/officeDocument/2006/relationships" xmlns:p="http://schemas.openxmlformats.org/presentationml/2006/main">
+  <p:cSld name="Slide 14">
+    <p:bg>
+      <p:bgPr>
+        <a:solidFill>
+          <a:srgbClr val="0A0C12"/>
+        </a:solidFill>
+      </p:bgPr>
+    </p:bg>
+    <p:spTree>
+      <p:nvGrpSpPr>
+        <p:cNvPr id="1" name=""/>
+        <p:cNvGrpSpPr/>
+        <p:nvPr/>
+      </p:nvGrpSpPr>
+      <p:grpSpPr>
+        <a:xfrm>
+          <a:off x="0" y="0"/>
+          <a:ext cx="0" cy="0"/>
+          <a:chOff x="0" y="0"/>
+          <a:chExt cx="0" cy="0"/>
+        </a:xfrm>
+      </p:grpSpPr>
+      <p:sp>
+        <p:nvSpPr>
+          <p:cNvPr id="2" name="Shape 0"/>
+          <p:cNvSpPr/>
+          <p:nvPr/>
+        </p:nvSpPr>
+        <p:spPr>
+          <a:xfrm>
+            <a:off x="0" y="0"/>
+            <a:ext cx="7680960" cy="64008"/>
+          </a:xfrm>
+          <a:prstGeom prst="rect">
+            <a:avLst/>
+          </a:prstGeom>
+          <a:solidFill>
+            <a:srgbClr val="3B82F6"/>
+          </a:solidFill>
+          <a:ln/>
+        </p:spPr>
+      </p:sp>
+      <p:sp>
+        <p:nvSpPr>
+          <p:cNvPr id="3" name="Shape 1"/>
+          <p:cNvSpPr/>
+          <p:nvPr/>
+        </p:nvSpPr>
+        <p:spPr>
+          <a:xfrm>
+            <a:off x="7680960" y="0"/>
+            <a:ext cx="4510735" cy="64008"/>
+          </a:xfrm>
+          <a:prstGeom prst="rect">
+            <a:avLst/>
+          </a:prstGeom>
+          <a:solidFill>
+            <a:srgbClr val="06B6D4"/>
+          </a:solidFill>
+          <a:ln/>
+        </p:spPr>
+      </p:sp>
+      <p:sp>
+        <p:nvSpPr>
+          <p:cNvPr id="4" name="Text 2"/>
+          <p:cNvSpPr/>
+          <p:nvPr/>
+        </p:nvSpPr>
+        <p:spPr>
+          <a:xfrm>
+            <a:off x="822960" y="502920"/>
+            <a:ext cx="10515600" cy="365760"/>
+          </a:xfrm>
+          <a:prstGeom prst="rect">
+            <a:avLst/>
+          </a:prstGeom>
+          <a:noFill/>
+          <a:ln/>
+        </p:spPr>
+        <p:txBody>
+          <a:bodyPr wrap="square" rtlCol="0" anchor="ctr"/>
+          <a:lstStyle/>
+          <a:p>
+            <a:pPr indent="0" marL="0">
+              <a:buNone/>
+            </a:pPr>
+            <a:r>
+              <a:rPr lang="en-US" sz="1200" spc="300" kern="0" dirty="0">
+                <a:solidFill>
+                  <a:srgbClr val="06B6D4"/>
+                </a:solidFill>
+                <a:latin typeface="Consolas" pitchFamily="34" charset="0"/>
+                <a:ea typeface="Consolas" pitchFamily="34" charset="-122"/>
+                <a:cs typeface="Consolas" pitchFamily="34" charset="-120"/>
+              </a:rPr>
+              <a:t>DELIVERED</a:t>
+            </a:r>
+            <a:endParaRPr lang="en-US" sz="1200" dirty="0"/>
+          </a:p>
+        </p:txBody>
+      </p:sp>
+      <p:sp>
+        <p:nvSpPr>
+          <p:cNvPr id="5" name="Text 3"/>
+          <p:cNvSpPr/>
+          <p:nvPr/>
+        </p:nvSpPr>
+        <p:spPr>
+          <a:xfrm>
+            <a:off x="822960" y="914400"/>
+            <a:ext cx="10561320" cy="868680"/>
+          </a:xfrm>
+          <a:prstGeom prst="rect">
+            <a:avLst/>
+          </a:prstGeom>
+          <a:noFill/>
+          <a:ln/>
+        </p:spPr>
+        <p:txBody>
+          <a:bodyPr wrap="square" rtlCol="0" anchor="ctr"/>
+          <a:lstStyle/>
+          <a:p>
+            <a:pPr indent="0" marL="0">
+              <a:buNone/>
+            </a:pPr>
+            <a:r>
+              <a:rPr lang="en-US" sz="2700" b="1" dirty="0">
+                <a:solidFill>
+                  <a:srgbClr val="FFFFFF"/>
+                </a:solidFill>
+                <a:latin typeface="Segoe UI" pitchFamily="34" charset="0"/>
+                <a:ea typeface="Segoe UI" pitchFamily="34" charset="-122"/>
+                <a:cs typeface="Segoe UI" pitchFamily="34" charset="-120"/>
+              </a:rPr>
+              <a:t>What the toolkit powers in production</a:t>
+            </a:r>
+            <a:endParaRPr lang="en-US" sz="2700" dirty="0"/>
+          </a:p>
+        </p:txBody>
+      </p:sp>
+      <p:graphicFrame>
+        <p:nvGraphicFramePr>
+          <p:cNvPr id="15" name="Table 0"/>
+          <p:cNvGraphicFramePr>
+            <a:graphicFrameLocks noGrp="1"/>
+          </p:cNvGraphicFramePr>
+          <p:nvPr>
+            <p:extLst>
+              <p:ext uri="{D42A27DB-BD31-4B8C-83A1-F6EECF244321}">
+                <p14:modId xmlns:p14="http://schemas.microsoft.com/office/powerpoint/2010/main" val="1579011935"/>
+              </p:ext>
+            </p:extLst>
+          </p:nvPr>
+        </p:nvGraphicFramePr>
+        <p:xfrm>
+          <a:off x="822960" y="2011680"/>
+          <a:ext cx="10515600" cy="914400"/>
+        </p:xfrm>
+        <a:graphic>
+          <a:graphicData uri="http://schemas.openxmlformats.org/drawingml/2006/table">
+            <a:tbl>
+              <a:tblPr/>
+              <a:tblGrid>
+                <a:gridCol w="3505200"/>
+                <a:gridCol w="3505200"/>
+                <a:gridCol w="3505200"/>
+              </a:tblGrid>
+              <a:tr h="402336">
+                <a:tc>
+                  <a:txBody>
+                    <a:bodyPr/>
+                    <a:lstStyle/>
+                    <a:p>
+                      <a:pPr indent="0" marL="0">
+                        <a:buNone/>
+                      </a:pPr>
+                      <a:r>
+                        <a:rPr lang="en-US" sz="1150" b="1" dirty="0">
+                          <a:solidFill>
+                            <a:srgbClr val="FFFFFF"/>
+                          </a:solidFill>
+                          <a:latin typeface="Segoe UI" pitchFamily="34" charset="0"/>
+                          <a:ea typeface="Segoe UI" pitchFamily="34" charset="-122"/>
+                          <a:cs typeface="Segoe UI" pitchFamily="34" charset="-120"/>
+                        </a:rPr>
+                        <a:t>Use case</a:t>
+                      </a:r>
+                      <a:endParaRPr lang="en-US" sz="1150" dirty="0">
+                        <a:latin typeface="Segoe UI" charset="0"/>
+                        <a:ea typeface="Segoe UI" charset="0"/>
+                        <a:cs typeface="Segoe UI" charset="0"/>
+                      </a:endParaRPr>
+                    </a:p>
+                  </a:txBody>
+                  <a:tcPr marL="64008" marR="64008" marT="64008" marB="64008" anchor="ctr">
+                    <a:lnL w="6350" cap="flat" cmpd="sng" algn="ctr">
+                      <a:solidFill>
+                        <a:srgbClr val="24365A"/>
+                      </a:solidFill>
+                      <a:prstDash val="solid"/>
+                      <a:round/>
+                      <a:headEnd type="none" w="med" len="med"/>
+                      <a:tailEnd type="none" w="med" len="med"/>
+                    </a:lnL>
+                    <a:lnR w="6350" cap="flat" cmpd="sng" algn="ctr">
+                      <a:solidFill>
+                        <a:srgbClr val="24365A"/>
+                      </a:solidFill>
+                      <a:prstDash val="solid"/>
+                      <a:round/>
+                      <a:headEnd type="none" w="med" len="med"/>
+                      <a:tailEnd type="none" w="med" len="med"/>
+                    </a:lnR>
+                    <a:lnT w="6350" cap="flat" cmpd="sng" algn="ctr">
+                      <a:solidFill>
+                        <a:srgbClr val="24365A"/>
+                      </a:solidFill>
+                      <a:prstDash val="solid"/>
+                      <a:round/>
+                      <a:headEnd type="none" w="med" len="med"/>
+                      <a:tailEnd type="none" w="med" len="med"/>
+                    </a:lnT>
+                    <a:lnB w="6350" cap="flat" cmpd="sng" algn="ctr">
+                      <a:solidFill>
+                        <a:srgbClr val="24365A"/>
+                      </a:solidFill>
+                      <a:prstDash val="solid"/>
+                      <a:round/>
+                      <a:headEnd type="none" w="med" len="med"/>
+                      <a:tailEnd type="none" w="med" len="med"/>
+                    </a:lnB>
+                    <a:solidFill>
+                      <a:srgbClr val="16233B"/>
+                    </a:solidFill>
+                  </a:tcPr>
+                </a:tc>
+                <a:tc>
+                  <a:txBody>
+                    <a:bodyPr/>
+                    <a:lstStyle/>
+                    <a:p>
+                      <a:pPr indent="0" marL="0">
+                        <a:buNone/>
+                      </a:pPr>
+                      <a:r>
+                        <a:rPr lang="en-US" sz="1150" b="1" dirty="0">
+                          <a:solidFill>
+                            <a:srgbClr val="FFFFFF"/>
+                          </a:solidFill>
+                          <a:latin typeface="Segoe UI" pitchFamily="34" charset="0"/>
+                          <a:ea typeface="Segoe UI" pitchFamily="34" charset="-122"/>
+                          <a:cs typeface="Segoe UI" pitchFamily="34" charset="-120"/>
+                        </a:rPr>
+                        <a:t>What the client gets</a:t>
+                      </a:r>
+                      <a:endParaRPr lang="en-US" sz="1150" dirty="0">
+                        <a:latin typeface="Segoe UI" charset="0"/>
+                        <a:ea typeface="Segoe UI" charset="0"/>
+                        <a:cs typeface="Segoe UI" charset="0"/>
+                      </a:endParaRPr>
+                    </a:p>
+                  </a:txBody>
+                  <a:tcPr marL="64008" marR="64008" marT="64008" marB="64008" anchor="ctr">
+                    <a:lnL w="6350" cap="flat" cmpd="sng" algn="ctr">
+                      <a:solidFill>
+                        <a:srgbClr val="24365A"/>
+                      </a:solidFill>
+                      <a:prstDash val="solid"/>
+                      <a:round/>
+                      <a:headEnd type="none" w="med" len="med"/>
+                      <a:tailEnd type="none" w="med" len="med"/>
+                    </a:lnL>
+                    <a:lnR w="6350" cap="flat" cmpd="sng" algn="ctr">
+                      <a:solidFill>
+                        <a:srgbClr val="24365A"/>
+                      </a:solidFill>
+                      <a:prstDash val="solid"/>
+                      <a:round/>
+                      <a:headEnd type="none" w="med" len="med"/>
+                      <a:tailEnd type="none" w="med" len="med"/>
+                    </a:lnR>
+                    <a:lnT w="6350" cap="flat" cmpd="sng" algn="ctr">
+                      <a:solidFill>
+                        <a:srgbClr val="24365A"/>
+                      </a:solidFill>
+                      <a:prstDash val="solid"/>
+                      <a:round/>
+                      <a:headEnd type="none" w="med" len="med"/>
+                      <a:tailEnd type="none" w="med" len="med"/>
+                    </a:lnT>
+                    <a:lnB w="6350" cap="flat" cmpd="sng" algn="ctr">
+                      <a:solidFill>
+                        <a:srgbClr val="24365A"/>
+                      </a:solidFill>
+                      <a:prstDash val="solid"/>
+                      <a:round/>
+                      <a:headEnd type="none" w="med" len="med"/>
+                      <a:tailEnd type="none" w="med" len="med"/>
+                    </a:lnB>
+                    <a:solidFill>
+                      <a:srgbClr val="16233B"/>
+                    </a:solidFill>
+                  </a:tcPr>
+                </a:tc>
+                <a:tc>
+                  <a:txBody>
+                    <a:bodyPr/>
+                    <a:lstStyle/>
+                    <a:p>
+                      <a:pPr indent="0" marL="0">
+                        <a:buNone/>
+                      </a:pPr>
+                      <a:r>
+                        <a:rPr lang="en-US" sz="1150" b="1" dirty="0">
+                          <a:solidFill>
+                            <a:srgbClr val="FFFFFF"/>
+                          </a:solidFill>
+                          <a:latin typeface="Segoe UI" pitchFamily="34" charset="0"/>
+                          <a:ea typeface="Segoe UI" pitchFamily="34" charset="-122"/>
+                          <a:cs typeface="Segoe UI" pitchFamily="34" charset="-120"/>
+                        </a:rPr>
+                        <a:t>Cadence</a:t>
+                      </a:r>
+                      <a:endParaRPr lang="en-US" sz="1150" dirty="0">
+                        <a:latin typeface="Segoe UI" charset="0"/>
+                        <a:ea typeface="Segoe UI" charset="0"/>
+                        <a:cs typeface="Segoe UI" charset="0"/>
+                      </a:endParaRPr>
+                    </a:p>
+                  </a:txBody>
+                  <a:tcPr marL="64008" marR="64008" marT="64008" marB="64008" anchor="ctr">
+                    <a:lnL w="6350" cap="flat" cmpd="sng" algn="ctr">
+                      <a:solidFill>
+                        <a:srgbClr val="24365A"/>
+                      </a:solidFill>
+                      <a:prstDash val="solid"/>
+                      <a:round/>
+                      <a:headEnd type="none" w="med" len="med"/>
+                      <a:tailEnd type="none" w="med" len="med"/>
+                    </a:lnL>
+                    <a:lnR w="6350" cap="flat" cmpd="sng" algn="ctr">
+                      <a:solidFill>
+                        <a:srgbClr val="24365A"/>
+                      </a:solidFill>
+                      <a:prstDash val="solid"/>
+                      <a:round/>
+                      <a:headEnd type="none" w="med" len="med"/>
+                      <a:tailEnd type="none" w="med" len="med"/>
+                    </a:lnR>
+                    <a:lnT w="6350" cap="flat" cmpd="sng" algn="ctr">
+                      <a:solidFill>
+                        <a:srgbClr val="24365A"/>
+                      </a:solidFill>
+                      <a:prstDash val="solid"/>
+                      <a:round/>
+                      <a:headEnd type="none" w="med" len="med"/>
+                      <a:tailEnd type="none" w="med" len="med"/>
+                    </a:lnT>
+                    <a:lnB w="6350" cap="flat" cmpd="sng" algn="ctr">
+                      <a:solidFill>
+                        <a:srgbClr val="24365A"/>
+                      </a:solidFill>
+                      <a:prstDash val="solid"/>
+                      <a:round/>
+                      <a:headEnd type="none" w="med" len="med"/>
+                      <a:tailEnd type="none" w="med" len="med"/>
+                    </a:lnB>
+                    <a:solidFill>
+                      <a:srgbClr val="16233B"/>
+                    </a:solidFill>
+                  </a:tcPr>
+                </a:tc>
+              </a:tr>
+              <a:tr h="402336">
+                <a:tc>
+                  <a:txBody>
+                    <a:bodyPr/>
+                    <a:lstStyle/>
+                    <a:p>
+                      <a:pPr indent="0" marL="0">
+                        <a:buNone/>
+                      </a:pPr>
+                      <a:r>
+                        <a:rPr lang="en-US" sz="1080" dirty="0">
+                          <a:solidFill>
+                            <a:srgbClr val="CBD5E1"/>
+                          </a:solidFill>
+                          <a:latin typeface="Segoe UI" pitchFamily="34" charset="0"/>
+                          <a:ea typeface="Segoe UI" pitchFamily="34" charset="-122"/>
+                          <a:cs typeface="Segoe UI" pitchFamily="34" charset="-120"/>
+                        </a:rPr>
+                        <a:t>Market monitoring</a:t>
+                      </a:r>
+                      <a:endParaRPr lang="en-US" sz="1080" dirty="0">
+                        <a:latin typeface="Segoe UI" charset="0"/>
+                        <a:ea typeface="Segoe UI" charset="0"/>
+                        <a:cs typeface="Segoe UI" charset="0"/>
+                      </a:endParaRPr>
+                    </a:p>
+                  </a:txBody>
+                  <a:tcPr marL="64008" marR="64008" marT="64008" marB="64008" anchor="ctr">
+                    <a:lnL w="6350" cap="flat" cmpd="sng" algn="ctr">
+                      <a:solidFill>
+                        <a:srgbClr val="24365A"/>
+                      </a:solidFill>
+                      <a:prstDash val="solid"/>
+                      <a:round/>
+                      <a:headEnd type="none" w="med" len="med"/>
+                      <a:tailEnd type="none" w="med" len="med"/>
+                    </a:lnL>
+                    <a:lnR w="6350" cap="flat" cmpd="sng" algn="ctr">
+                      <a:solidFill>
+                        <a:srgbClr val="24365A"/>
+                      </a:solidFill>
+                      <a:prstDash val="solid"/>
+                      <a:round/>
+                      <a:headEnd type="none" w="med" len="med"/>
+                      <a:tailEnd type="none" w="med" len="med"/>
+                    </a:lnR>
+                    <a:lnT w="6350" cap="flat" cmpd="sng" algn="ctr">
+                      <a:solidFill>
+                        <a:srgbClr val="24365A"/>
+                      </a:solidFill>
+                      <a:prstDash val="solid"/>
+                      <a:round/>
+                      <a:headEnd type="none" w="med" len="med"/>
+                      <a:tailEnd type="none" w="med" len="med"/>
+                    </a:lnT>
+                    <a:lnB w="6350" cap="flat" cmpd="sng" algn="ctr">
+                      <a:solidFill>
+                        <a:srgbClr val="24365A"/>
+                      </a:solidFill>
+                      <a:prstDash val="solid"/>
+                      <a:round/>
+                      <a:headEnd type="none" w="med" len="med"/>
+                      <a:tailEnd type="none" w="med" len="med"/>
+                    </a:lnB>
+                    <a:solidFill>
+                      <a:srgbClr val="101A2D"/>
+                    </a:solidFill>
+                  </a:tcPr>
+                </a:tc>
+                <a:tc>
+                  <a:txBody>
+                    <a:bodyPr/>
+                    <a:lstStyle/>
+                    <a:p>
+                      <a:pPr indent="0" marL="0">
+                        <a:buNone/>
+                      </a:pPr>
+                      <a:r>
+                        <a:rPr lang="en-US" sz="1080" dirty="0">
+                          <a:solidFill>
+                            <a:srgbClr val="CBD5E1"/>
+                          </a:solidFill>
+                          <a:latin typeface="Segoe UI" pitchFamily="34" charset="0"/>
+                          <a:ea typeface="Segoe UI" pitchFamily="34" charset="-122"/>
+                          <a:cs typeface="Segoe UI" pitchFamily="34" charset="-120"/>
+                        </a:rPr>
+                        <a:t>Competitor catalogs and movement, structured and dated</a:t>
+                      </a:r>
+                      <a:endParaRPr lang="en-US" sz="1080" dirty="0">
+                        <a:latin typeface="Segoe UI" charset="0"/>
+                        <a:ea typeface="Segoe UI" charset="0"/>
+                        <a:cs typeface="Segoe UI" charset="0"/>
+                      </a:endParaRPr>
+                    </a:p>
+                  </a:txBody>
+                  <a:tcPr marL="64008" marR="64008" marT="64008" marB="64008" anchor="ctr">
+                    <a:lnL w="6350" cap="flat" cmpd="sng" algn="ctr">
+                      <a:solidFill>
+                        <a:srgbClr val="24365A"/>
+                      </a:solidFill>
+                      <a:prstDash val="solid"/>
+                      <a:round/>
+                      <a:headEnd type="none" w="med" len="med"/>
+                      <a:tailEnd type="none" w="med" len="med"/>
+                    </a:lnL>
+                    <a:lnR w="6350" cap="flat" cmpd="sng" algn="ctr">
+                      <a:solidFill>
+                        <a:srgbClr val="24365A"/>
+                      </a:solidFill>
+                      <a:prstDash val="solid"/>
+                      <a:round/>
+                      <a:headEnd type="none" w="med" len="med"/>
+                      <a:tailEnd type="none" w="med" len="med"/>
+                    </a:lnR>
+                    <a:lnT w="6350" cap="flat" cmpd="sng" algn="ctr">
+                      <a:solidFill>
+                        <a:srgbClr val="24365A"/>
+                      </a:solidFill>
+                      <a:prstDash val="solid"/>
+                      <a:round/>
+                      <a:headEnd type="none" w="med" len="med"/>
+                      <a:tailEnd type="none" w="med" len="med"/>
+                    </a:lnT>
+                    <a:lnB w="6350" cap="flat" cmpd="sng" algn="ctr">
+                      <a:solidFill>
+                        <a:srgbClr val="24365A"/>
+                      </a:solidFill>
+                      <a:prstDash val="solid"/>
+                      <a:round/>
+                      <a:headEnd type="none" w="med" len="med"/>
+                      <a:tailEnd type="none" w="med" len="med"/>
+                    </a:lnB>
+                    <a:solidFill>
+                      <a:srgbClr val="101A2D"/>
+                    </a:solidFill>
+                  </a:tcPr>
+                </a:tc>
+                <a:tc>
+                  <a:txBody>
+                    <a:bodyPr/>
+                    <a:lstStyle/>
+                    <a:p>
+                      <a:pPr indent="0" marL="0">
+                        <a:buNone/>
+                      </a:pPr>
+                      <a:r>
+                        <a:rPr lang="en-US" sz="1080" dirty="0">
+                          <a:solidFill>
+                            <a:srgbClr val="CBD5E1"/>
+                          </a:solidFill>
+                          <a:latin typeface="Segoe UI" pitchFamily="34" charset="0"/>
+                          <a:ea typeface="Segoe UI" pitchFamily="34" charset="-122"/>
+                          <a:cs typeface="Segoe UI" pitchFamily="34" charset="-120"/>
+                        </a:rPr>
+                        <a:t>Daily</a:t>
+                      </a:r>
+                      <a:endParaRPr lang="en-US" sz="1080" dirty="0">
+                        <a:latin typeface="Segoe UI" charset="0"/>
+                        <a:ea typeface="Segoe UI" charset="0"/>
+                        <a:cs typeface="Segoe UI" charset="0"/>
+                      </a:endParaRPr>
+                    </a:p>
+                  </a:txBody>
+                  <a:tcPr marL="64008" marR="64008" marT="64008" marB="64008" anchor="ctr">
+                    <a:lnL w="6350" cap="flat" cmpd="sng" algn="ctr">
+                      <a:solidFill>
+                        <a:srgbClr val="24365A"/>
+                      </a:solidFill>
+                      <a:prstDash val="solid"/>
+                      <a:round/>
+                      <a:headEnd type="none" w="med" len="med"/>
+                      <a:tailEnd type="none" w="med" len="med"/>
+                    </a:lnL>
+                    <a:lnR w="6350" cap="flat" cmpd="sng" algn="ctr">
+                      <a:solidFill>
+                        <a:srgbClr val="24365A"/>
+                      </a:solidFill>
+                      <a:prstDash val="solid"/>
+                      <a:round/>
+                      <a:headEnd type="none" w="med" len="med"/>
+                      <a:tailEnd type="none" w="med" len="med"/>
+                    </a:lnR>
+                    <a:lnT w="6350" cap="flat" cmpd="sng" algn="ctr">
+                      <a:solidFill>
+                        <a:srgbClr val="24365A"/>
+                      </a:solidFill>
+                      <a:prstDash val="solid"/>
+                      <a:round/>
+                      <a:headEnd type="none" w="med" len="med"/>
+                      <a:tailEnd type="none" w="med" len="med"/>
+                    </a:lnT>
+                    <a:lnB w="6350" cap="flat" cmpd="sng" algn="ctr">
+                      <a:solidFill>
+                        <a:srgbClr val="24365A"/>
+                      </a:solidFill>
+                      <a:prstDash val="solid"/>
+                      <a:round/>
+                      <a:headEnd type="none" w="med" len="med"/>
+                      <a:tailEnd type="none" w="med" len="med"/>
+                    </a:lnB>
+                    <a:solidFill>
+                      <a:srgbClr val="101A2D"/>
+                    </a:solidFill>
+                  </a:tcPr>
+                </a:tc>
+              </a:tr>
+              <a:tr h="402336">
+                <a:tc>
+                  <a:txBody>
+                    <a:bodyPr/>
+                    <a:lstStyle/>
+                    <a:p>
+                      <a:pPr indent="0" marL="0">
+                        <a:buNone/>
+                      </a:pPr>
+                      <a:r>
+                        <a:rPr lang="en-US" sz="1080" dirty="0">
+                          <a:solidFill>
+                            <a:srgbClr val="CBD5E1"/>
+                          </a:solidFill>
+                          <a:latin typeface="Segoe UI" pitchFamily="34" charset="0"/>
+                          <a:ea typeface="Segoe UI" pitchFamily="34" charset="-122"/>
+                          <a:cs typeface="Segoe UI" pitchFamily="34" charset="-120"/>
+                        </a:rPr>
+                        <a:t>Price tracking</a:t>
+                      </a:r>
+                      <a:endParaRPr lang="en-US" sz="1080" dirty="0">
+                        <a:latin typeface="Segoe UI" charset="0"/>
+                        <a:ea typeface="Segoe UI" charset="0"/>
+                        <a:cs typeface="Segoe UI" charset="0"/>
+                      </a:endParaRPr>
+                    </a:p>
+                  </a:txBody>
+                  <a:tcPr marL="64008" marR="64008" marT="64008" marB="64008" anchor="ctr">
+                    <a:lnL w="6350" cap="flat" cmpd="sng" algn="ctr">
+                      <a:solidFill>
+                        <a:srgbClr val="24365A"/>
+                      </a:solidFill>
+                      <a:prstDash val="solid"/>
+                      <a:round/>
+                      <a:headEnd type="none" w="med" len="med"/>
+                      <a:tailEnd type="none" w="med" len="med"/>
+                    </a:lnL>
+                    <a:lnR w="6350" cap="flat" cmpd="sng" algn="ctr">
+                      <a:solidFill>
+                        <a:srgbClr val="24365A"/>
+                      </a:solidFill>
+                      <a:prstDash val="solid"/>
+                      <a:round/>
+                      <a:headEnd type="none" w="med" len="med"/>
+                      <a:tailEnd type="none" w="med" len="med"/>
+                    </a:lnR>
+                    <a:lnT w="6350" cap="flat" cmpd="sng" algn="ctr">
+                      <a:solidFill>
+                        <a:srgbClr val="24365A"/>
+                      </a:solidFill>
+                      <a:prstDash val="solid"/>
+                      <a:round/>
+                      <a:headEnd type="none" w="med" len="med"/>
+                      <a:tailEnd type="none" w="med" len="med"/>
+                    </a:lnT>
+                    <a:lnB w="6350" cap="flat" cmpd="sng" algn="ctr">
+                      <a:solidFill>
+                        <a:srgbClr val="24365A"/>
+                      </a:solidFill>
+                      <a:prstDash val="solid"/>
+                      <a:round/>
+                      <a:headEnd type="none" w="med" len="med"/>
+                      <a:tailEnd type="none" w="med" len="med"/>
+                    </a:lnB>
+                    <a:solidFill>
+                      <a:srgbClr val="0D1420"/>
+                    </a:solidFill>
+                  </a:tcPr>
+                </a:tc>
+                <a:tc>
+                  <a:txBody>
+                    <a:bodyPr/>
+                    <a:lstStyle/>
+                    <a:p>
+                      <a:pPr indent="0" marL="0">
+                        <a:buNone/>
+                      </a:pPr>
+                      <a:r>
+                        <a:rPr lang="en-US" sz="1080" dirty="0">
+                          <a:solidFill>
+                            <a:srgbClr val="CBD5E1"/>
+                          </a:solidFill>
+                          <a:latin typeface="Segoe UI" pitchFamily="34" charset="0"/>
+                          <a:ea typeface="Segoe UI" pitchFamily="34" charset="-122"/>
+                          <a:cs typeface="Segoe UI" pitchFamily="34" charset="-120"/>
+                        </a:rPr>
+                        <a:t>Price history with sanity checks and gap detection</a:t>
+                      </a:r>
+                      <a:endParaRPr lang="en-US" sz="1080" dirty="0">
+                        <a:latin typeface="Segoe UI" charset="0"/>
+                        <a:ea typeface="Segoe UI" charset="0"/>
+                        <a:cs typeface="Segoe UI" charset="0"/>
+                      </a:endParaRPr>
+                    </a:p>
+                  </a:txBody>
+                  <a:tcPr marL="64008" marR="64008" marT="64008" marB="64008" anchor="ctr">
+                    <a:lnL w="6350" cap="flat" cmpd="sng" algn="ctr">
+                      <a:solidFill>
+                        <a:srgbClr val="24365A"/>
+                      </a:solidFill>
+                      <a:prstDash val="solid"/>
+                      <a:round/>
+                      <a:headEnd type="none" w="med" len="med"/>
+                      <a:tailEnd type="none" w="med" len="med"/>
+                    </a:lnL>
+                    <a:lnR w="6350" cap="flat" cmpd="sng" algn="ctr">
+                      <a:solidFill>
+                        <a:srgbClr val="24365A"/>
+                      </a:solidFill>
+                      <a:prstDash val="solid"/>
+                      <a:round/>
+                      <a:headEnd type="none" w="med" len="med"/>
+                      <a:tailEnd type="none" w="med" len="med"/>
+                    </a:lnR>
+                    <a:lnT w="6350" cap="flat" cmpd="sng" algn="ctr">
+                      <a:solidFill>
+                        <a:srgbClr val="24365A"/>
+                      </a:solidFill>
+                      <a:prstDash val="solid"/>
+                      <a:round/>
+                      <a:headEnd type="none" w="med" len="med"/>
+                      <a:tailEnd type="none" w="med" len="med"/>
+                    </a:lnT>
+                    <a:lnB w="6350" cap="flat" cmpd="sng" algn="ctr">
+                      <a:solidFill>
+                        <a:srgbClr val="24365A"/>
+                      </a:solidFill>
+                      <a:prstDash val="solid"/>
+                      <a:round/>
+                      <a:headEnd type="none" w="med" len="med"/>
+                      <a:tailEnd type="none" w="med" len="med"/>
+                    </a:lnB>
+                    <a:solidFill>
+                      <a:srgbClr val="0D1420"/>
+                    </a:solidFill>
+                  </a:tcPr>
+                </a:tc>
+                <a:tc>
+                  <a:txBody>
+                    <a:bodyPr/>
+                    <a:lstStyle/>
+                    <a:p>
+                      <a:pPr indent="0" marL="0">
+                        <a:buNone/>
+                      </a:pPr>
+                      <a:r>
+                        <a:rPr lang="en-US" sz="1080" dirty="0">
+                          <a:solidFill>
+                            <a:srgbClr val="CBD5E1"/>
+                          </a:solidFill>
+                          <a:latin typeface="Segoe UI" pitchFamily="34" charset="0"/>
+                          <a:ea typeface="Segoe UI" pitchFamily="34" charset="-122"/>
+                          <a:cs typeface="Segoe UI" pitchFamily="34" charset="-120"/>
+                        </a:rPr>
+                        <a:t>Daily to weekly</a:t>
+                      </a:r>
+                      <a:endParaRPr lang="en-US" sz="1080" dirty="0">
+                        <a:latin typeface="Segoe UI" charset="0"/>
+                        <a:ea typeface="Segoe UI" charset="0"/>
+                        <a:cs typeface="Segoe UI" charset="0"/>
+                      </a:endParaRPr>
+                    </a:p>
+                  </a:txBody>
+                  <a:tcPr marL="64008" marR="64008" marT="64008" marB="64008" anchor="ctr">
+                    <a:lnL w="6350" cap="flat" cmpd="sng" algn="ctr">
+                      <a:solidFill>
+                        <a:srgbClr val="24365A"/>
+                      </a:solidFill>
+                      <a:prstDash val="solid"/>
+                      <a:round/>
+                      <a:headEnd type="none" w="med" len="med"/>
+                      <a:tailEnd type="none" w="med" len="med"/>
+                    </a:lnL>
+                    <a:lnR w="6350" cap="flat" cmpd="sng" algn="ctr">
+                      <a:solidFill>
+                        <a:srgbClr val="24365A"/>
+                      </a:solidFill>
+                      <a:prstDash val="solid"/>
+                      <a:round/>
+                      <a:headEnd type="none" w="med" len="med"/>
+                      <a:tailEnd type="none" w="med" len="med"/>
+                    </a:lnR>
+                    <a:lnT w="6350" cap="flat" cmpd="sng" algn="ctr">
+                      <a:solidFill>
+                        <a:srgbClr val="24365A"/>
+                      </a:solidFill>
+                      <a:prstDash val="solid"/>
+                      <a:round/>
+                      <a:headEnd type="none" w="med" len="med"/>
+                      <a:tailEnd type="none" w="med" len="med"/>
+                    </a:lnT>
+                    <a:lnB w="6350" cap="flat" cmpd="sng" algn="ctr">
+                      <a:solidFill>
+                        <a:srgbClr val="24365A"/>
+                      </a:solidFill>
+                      <a:prstDash val="solid"/>
+                      <a:round/>
+                      <a:headEnd type="none" w="med" len="med"/>
+                      <a:tailEnd type="none" w="med" len="med"/>
+                    </a:lnB>
+                    <a:solidFill>
+                      <a:srgbClr val="0D1420"/>
+                    </a:solidFill>
+                  </a:tcPr>
+                </a:tc>
+              </a:tr>
+              <a:tr h="402336">
+                <a:tc>
+                  <a:txBody>
+                    <a:bodyPr/>
+                    <a:lstStyle/>
+                    <a:p>
+                      <a:pPr indent="0" marL="0">
+                        <a:buNone/>
+                      </a:pPr>
+                      <a:r>
+                        <a:rPr lang="en-US" sz="1080" dirty="0">
+                          <a:solidFill>
+                            <a:srgbClr val="CBD5E1"/>
+                          </a:solidFill>
+                          <a:latin typeface="Segoe UI" pitchFamily="34" charset="0"/>
+                          <a:ea typeface="Segoe UI" pitchFamily="34" charset="-122"/>
+                          <a:cs typeface="Segoe UI" pitchFamily="34" charset="-120"/>
+                        </a:rPr>
+                        <a:t>Research collection</a:t>
+                      </a:r>
+                      <a:endParaRPr lang="en-US" sz="1080" dirty="0">
+                        <a:latin typeface="Segoe UI" charset="0"/>
+                        <a:ea typeface="Segoe UI" charset="0"/>
+                        <a:cs typeface="Segoe UI" charset="0"/>
+                      </a:endParaRPr>
+                    </a:p>
+                  </a:txBody>
+                  <a:tcPr marL="64008" marR="64008" marT="64008" marB="64008" anchor="ctr">
+                    <a:lnL w="6350" cap="flat" cmpd="sng" algn="ctr">
+                      <a:solidFill>
+                        <a:srgbClr val="24365A"/>
+                      </a:solidFill>
+                      <a:prstDash val="solid"/>
+                      <a:round/>
+                      <a:headEnd type="none" w="med" len="med"/>
+                      <a:tailEnd type="none" w="med" len="med"/>
+                    </a:lnL>
+                    <a:lnR w="6350" cap="flat" cmpd="sng" algn="ctr">
+                      <a:solidFill>
+                        <a:srgbClr val="24365A"/>
+                      </a:solidFill>
+                      <a:prstDash val="solid"/>
+                      <a:round/>
+                      <a:headEnd type="none" w="med" len="med"/>
+                      <a:tailEnd type="none" w="med" len="med"/>
+                    </a:lnR>
+                    <a:lnT w="6350" cap="flat" cmpd="sng" algn="ctr">
+                      <a:solidFill>
+                        <a:srgbClr val="24365A"/>
+                      </a:solidFill>
+                      <a:prstDash val="solid"/>
+                      <a:round/>
+                      <a:headEnd type="none" w="med" len="med"/>
+                      <a:tailEnd type="none" w="med" len="med"/>
+                    </a:lnT>
+                    <a:lnB w="6350" cap="flat" cmpd="sng" algn="ctr">
+                      <a:solidFill>
+                        <a:srgbClr val="24365A"/>
+                      </a:solidFill>
+                      <a:prstDash val="solid"/>
+                      <a:round/>
+                      <a:headEnd type="none" w="med" len="med"/>
+                      <a:tailEnd type="none" w="med" len="med"/>
+                    </a:lnB>
+                    <a:solidFill>
+                      <a:srgbClr val="101A2D"/>
+                    </a:solidFill>
+                  </a:tcPr>
+                </a:tc>
+                <a:tc>
+                  <a:txBody>
+                    <a:bodyPr/>
+                    <a:lstStyle/>
+                    <a:p>
+                      <a:pPr indent="0" marL="0">
+                        <a:buNone/>
+                      </a:pPr>
+                      <a:r>
+                        <a:rPr lang="en-US" sz="1080" dirty="0">
+                          <a:solidFill>
+                            <a:srgbClr val="CBD5E1"/>
+                          </a:solidFill>
+                          <a:latin typeface="Segoe UI" pitchFamily="34" charset="0"/>
+                          <a:ea typeface="Segoe UI" pitchFamily="34" charset="-122"/>
+                          <a:cs typeface="Segoe UI" pitchFamily="34" charset="-120"/>
+                        </a:rPr>
+                        <a:t>Clean datasets ready for analysis, with provenance</a:t>
+                      </a:r>
+                      <a:endParaRPr lang="en-US" sz="1080" dirty="0">
+                        <a:latin typeface="Segoe UI" charset="0"/>
+                        <a:ea typeface="Segoe UI" charset="0"/>
+                        <a:cs typeface="Segoe UI" charset="0"/>
+                      </a:endParaRPr>
+                    </a:p>
+                  </a:txBody>
+                  <a:tcPr marL="64008" marR="64008" marT="64008" marB="64008" anchor="ctr">
+                    <a:lnL w="6350" cap="flat" cmpd="sng" algn="ctr">
+                      <a:solidFill>
+                        <a:srgbClr val="24365A"/>
+                      </a:solidFill>
+                      <a:prstDash val="solid"/>
+                      <a:round/>
+                      <a:headEnd type="none" w="med" len="med"/>
+                      <a:tailEnd type="none" w="med" len="med"/>
+                    </a:lnL>
+                    <a:lnR w="6350" cap="flat" cmpd="sng" algn="ctr">
+                      <a:solidFill>
+                        <a:srgbClr val="24365A"/>
+                      </a:solidFill>
+                      <a:prstDash val="solid"/>
+                      <a:round/>
+                      <a:headEnd type="none" w="med" len="med"/>
+                      <a:tailEnd type="none" w="med" len="med"/>
+                    </a:lnR>
+                    <a:lnT w="6350" cap="flat" cmpd="sng" algn="ctr">
+                      <a:solidFill>
+                        <a:srgbClr val="24365A"/>
+                      </a:solidFill>
+                      <a:prstDash val="solid"/>
+                      <a:round/>
+                      <a:headEnd type="none" w="med" len="med"/>
+                      <a:tailEnd type="none" w="med" len="med"/>
+                    </a:lnT>
+                    <a:lnB w="6350" cap="flat" cmpd="sng" algn="ctr">
+                      <a:solidFill>
+                        <a:srgbClr val="24365A"/>
+                      </a:solidFill>
+                      <a:prstDash val="solid"/>
+                      <a:round/>
+                      <a:headEnd type="none" w="med" len="med"/>
+                      <a:tailEnd type="none" w="med" len="med"/>
+                    </a:lnB>
+                    <a:solidFill>
+                      <a:srgbClr val="101A2D"/>
+                    </a:solidFill>
+                  </a:tcPr>
+                </a:tc>
+                <a:tc>
+                  <a:txBody>
+                    <a:bodyPr/>
+                    <a:lstStyle/>
+                    <a:p>
+                      <a:pPr indent="0" marL="0">
+                        <a:buNone/>
+                      </a:pPr>
+                      <a:r>
+                        <a:rPr lang="en-US" sz="1080" dirty="0">
+                          <a:solidFill>
+                            <a:srgbClr val="CBD5E1"/>
+                          </a:solidFill>
+                          <a:latin typeface="Segoe UI" pitchFamily="34" charset="0"/>
+                          <a:ea typeface="Segoe UI" pitchFamily="34" charset="-122"/>
+                          <a:cs typeface="Segoe UI" pitchFamily="34" charset="-120"/>
+                        </a:rPr>
+                        <a:t>Per study</a:t>
+                      </a:r>
+                      <a:endParaRPr lang="en-US" sz="1080" dirty="0">
+                        <a:latin typeface="Segoe UI" charset="0"/>
+                        <a:ea typeface="Segoe UI" charset="0"/>
+                        <a:cs typeface="Segoe UI" charset="0"/>
+                      </a:endParaRPr>
+                    </a:p>
+                  </a:txBody>
+                  <a:tcPr marL="64008" marR="64008" marT="64008" marB="64008" anchor="ctr">
+                    <a:lnL w="6350" cap="flat" cmpd="sng" algn="ctr">
+                      <a:solidFill>
+                        <a:srgbClr val="24365A"/>
+                      </a:solidFill>
+                      <a:prstDash val="solid"/>
+                      <a:round/>
+                      <a:headEnd type="none" w="med" len="med"/>
+                      <a:tailEnd type="none" w="med" len="med"/>
+                    </a:lnL>
+                    <a:lnR w="6350" cap="flat" cmpd="sng" algn="ctr">
+                      <a:solidFill>
+                        <a:srgbClr val="24365A"/>
+                      </a:solidFill>
+                      <a:prstDash val="solid"/>
+                      <a:round/>
+                      <a:headEnd type="none" w="med" len="med"/>
+                      <a:tailEnd type="none" w="med" len="med"/>
+                    </a:lnR>
+                    <a:lnT w="6350" cap="flat" cmpd="sng" algn="ctr">
+                      <a:solidFill>
+                        <a:srgbClr val="24365A"/>
+                      </a:solidFill>
+                      <a:prstDash val="solid"/>
+                      <a:round/>
+                      <a:headEnd type="none" w="med" len="med"/>
+                      <a:tailEnd type="none" w="med" len="med"/>
+                    </a:lnT>
+                    <a:lnB w="6350" cap="flat" cmpd="sng" algn="ctr">
+                      <a:solidFill>
+                        <a:srgbClr val="24365A"/>
+                      </a:solidFill>
+                      <a:prstDash val="solid"/>
+                      <a:round/>
+                      <a:headEnd type="none" w="med" len="med"/>
+                      <a:tailEnd type="none" w="med" len="med"/>
+                    </a:lnB>
+                    <a:solidFill>
+                      <a:srgbClr val="101A2D"/>
+                    </a:solidFill>
+                  </a:tcPr>
+                </a:tc>
+              </a:tr>
+              <a:tr h="402336">
+                <a:tc>
+                  <a:txBody>
+                    <a:bodyPr/>
+                    <a:lstStyle/>
+                    <a:p>
+                      <a:pPr indent="0" marL="0">
+                        <a:buNone/>
+                      </a:pPr>
+                      <a:r>
+                        <a:rPr lang="en-US" sz="1080" dirty="0">
+                          <a:solidFill>
+                            <a:srgbClr val="CBD5E1"/>
+                          </a:solidFill>
+                          <a:latin typeface="Segoe UI" pitchFamily="34" charset="0"/>
+                          <a:ea typeface="Segoe UI" pitchFamily="34" charset="-122"/>
+                          <a:cs typeface="Segoe UI" pitchFamily="34" charset="-120"/>
+                        </a:rPr>
+                        <a:t>OSINT support</a:t>
+                      </a:r>
+                      <a:endParaRPr lang="en-US" sz="1080" dirty="0">
+                        <a:latin typeface="Segoe UI" charset="0"/>
+                        <a:ea typeface="Segoe UI" charset="0"/>
+                        <a:cs typeface="Segoe UI" charset="0"/>
+                      </a:endParaRPr>
+                    </a:p>
+                  </a:txBody>
+                  <a:tcPr marL="64008" marR="64008" marT="64008" marB="64008" anchor="ctr">
+                    <a:lnL w="6350" cap="flat" cmpd="sng" algn="ctr">
+                      <a:solidFill>
+                        <a:srgbClr val="24365A"/>
+                      </a:solidFill>
+                      <a:prstDash val="solid"/>
+                      <a:round/>
+                      <a:headEnd type="none" w="med" len="med"/>
+                      <a:tailEnd type="none" w="med" len="med"/>
+                    </a:lnL>
+                    <a:lnR w="6350" cap="flat" cmpd="sng" algn="ctr">
+                      <a:solidFill>
+                        <a:srgbClr val="24365A"/>
+                      </a:solidFill>
+                      <a:prstDash val="solid"/>
+                      <a:round/>
+                      <a:headEnd type="none" w="med" len="med"/>
+                      <a:tailEnd type="none" w="med" len="med"/>
+                    </a:lnR>
+                    <a:lnT w="6350" cap="flat" cmpd="sng" algn="ctr">
+                      <a:solidFill>
+                        <a:srgbClr val="24365A"/>
+                      </a:solidFill>
+                      <a:prstDash val="solid"/>
+                      <a:round/>
+                      <a:headEnd type="none" w="med" len="med"/>
+                      <a:tailEnd type="none" w="med" len="med"/>
+                    </a:lnT>
+                    <a:lnB w="6350" cap="flat" cmpd="sng" algn="ctr">
+                      <a:solidFill>
+                        <a:srgbClr val="24365A"/>
+                      </a:solidFill>
+                      <a:prstDash val="solid"/>
+                      <a:round/>
+                      <a:headEnd type="none" w="med" len="med"/>
+                      <a:tailEnd type="none" w="med" len="med"/>
+                    </a:lnB>
+                    <a:solidFill>
+                      <a:srgbClr val="0D1420"/>
+                    </a:solidFill>
+                  </a:tcPr>
+                </a:tc>
+                <a:tc>
+                  <a:txBody>
+                    <a:bodyPr/>
+                    <a:lstStyle/>
+                    <a:p>
+                      <a:pPr indent="0" marL="0">
+                        <a:buNone/>
+                      </a:pPr>
+                      <a:r>
+                        <a:rPr lang="en-US" sz="1080" dirty="0">
+                          <a:solidFill>
+                            <a:srgbClr val="CBD5E1"/>
+                          </a:solidFill>
+                          <a:latin typeface="Segoe UI" pitchFamily="34" charset="0"/>
+                          <a:ea typeface="Segoe UI" pitchFamily="34" charset="-122"/>
+                          <a:cs typeface="Segoe UI" pitchFamily="34" charset="-120"/>
+                        </a:rPr>
+                        <a:t>Public data with full source trail per record</a:t>
+                      </a:r>
+                      <a:endParaRPr lang="en-US" sz="1080" dirty="0">
+                        <a:latin typeface="Segoe UI" charset="0"/>
+                        <a:ea typeface="Segoe UI" charset="0"/>
+                        <a:cs typeface="Segoe UI" charset="0"/>
+                      </a:endParaRPr>
+                    </a:p>
+                  </a:txBody>
+                  <a:tcPr marL="64008" marR="64008" marT="64008" marB="64008" anchor="ctr">
+                    <a:lnL w="6350" cap="flat" cmpd="sng" algn="ctr">
+                      <a:solidFill>
+                        <a:srgbClr val="24365A"/>
+                      </a:solidFill>
+                      <a:prstDash val="solid"/>
+                      <a:round/>
+                      <a:headEnd type="none" w="med" len="med"/>
+                      <a:tailEnd type="none" w="med" len="med"/>
+                    </a:lnL>
+                    <a:lnR w="6350" cap="flat" cmpd="sng" algn="ctr">
+                      <a:solidFill>
+                        <a:srgbClr val="24365A"/>
+                      </a:solidFill>
+                      <a:prstDash val="solid"/>
+                      <a:round/>
+                      <a:headEnd type="none" w="med" len="med"/>
+                      <a:tailEnd type="none" w="med" len="med"/>
+                    </a:lnR>
+                    <a:lnT w="6350" cap="flat" cmpd="sng" algn="ctr">
+                      <a:solidFill>
+                        <a:srgbClr val="24365A"/>
+                      </a:solidFill>
+                      <a:prstDash val="solid"/>
+                      <a:round/>
+                      <a:headEnd type="none" w="med" len="med"/>
+                      <a:tailEnd type="none" w="med" len="med"/>
+                    </a:lnT>
+                    <a:lnB w="6350" cap="flat" cmpd="sng" algn="ctr">
+                      <a:solidFill>
+                        <a:srgbClr val="24365A"/>
+                      </a:solidFill>
+                      <a:prstDash val="solid"/>
+                      <a:round/>
+                      <a:headEnd type="none" w="med" len="med"/>
+                      <a:tailEnd type="none" w="med" len="med"/>
+                    </a:lnB>
+                    <a:solidFill>
+                      <a:srgbClr val="0D1420"/>
+                    </a:solidFill>
+                  </a:tcPr>
+                </a:tc>
+                <a:tc>
+                  <a:txBody>
+                    <a:bodyPr/>
+                    <a:lstStyle/>
+                    <a:p>
+                      <a:pPr indent="0" marL="0">
+                        <a:buNone/>
+                      </a:pPr>
+                      <a:r>
+                        <a:rPr lang="en-US" sz="1080" dirty="0">
+                          <a:solidFill>
+                            <a:srgbClr val="CBD5E1"/>
+                          </a:solidFill>
+                          <a:latin typeface="Segoe UI" pitchFamily="34" charset="0"/>
+                          <a:ea typeface="Segoe UI" pitchFamily="34" charset="-122"/>
+                          <a:cs typeface="Segoe UI" pitchFamily="34" charset="-120"/>
+                        </a:rPr>
+                        <a:t>On demand</a:t>
+                      </a:r>
+                      <a:endParaRPr lang="en-US" sz="1080" dirty="0">
+                        <a:latin typeface="Segoe UI" charset="0"/>
+                        <a:ea typeface="Segoe UI" charset="0"/>
+                        <a:cs typeface="Segoe UI" charset="0"/>
+                      </a:endParaRPr>
+                    </a:p>
+                  </a:txBody>
+                  <a:tcPr marL="64008" marR="64008" marT="64008" marB="64008" anchor="ctr">
+                    <a:lnL w="6350" cap="flat" cmpd="sng" algn="ctr">
+                      <a:solidFill>
+                        <a:srgbClr val="24365A"/>
+                      </a:solidFill>
+                      <a:prstDash val="solid"/>
+                      <a:round/>
+                      <a:headEnd type="none" w="med" len="med"/>
+                      <a:tailEnd type="none" w="med" len="med"/>
+                    </a:lnL>
+                    <a:lnR w="6350" cap="flat" cmpd="sng" algn="ctr">
+                      <a:solidFill>
+                        <a:srgbClr val="24365A"/>
+                      </a:solidFill>
+                      <a:prstDash val="solid"/>
+                      <a:round/>
+                      <a:headEnd type="none" w="med" len="med"/>
+                      <a:tailEnd type="none" w="med" len="med"/>
+                    </a:lnR>
+                    <a:lnT w="6350" cap="flat" cmpd="sng" algn="ctr">
+                      <a:solidFill>
+                        <a:srgbClr val="24365A"/>
+                      </a:solidFill>
+                      <a:prstDash val="solid"/>
+                      <a:round/>
+                      <a:headEnd type="none" w="med" len="med"/>
+                      <a:tailEnd type="none" w="med" len="med"/>
+                    </a:lnT>
+                    <a:lnB w="6350" cap="flat" cmpd="sng" algn="ctr">
+                      <a:solidFill>
+                        <a:srgbClr val="24365A"/>
+                      </a:solidFill>
+                      <a:prstDash val="solid"/>
+                      <a:round/>
+                      <a:headEnd type="none" w="med" len="med"/>
+                      <a:tailEnd type="none" w="med" len="med"/>
+                    </a:lnB>
+                    <a:solidFill>
+                      <a:srgbClr val="0D1420"/>
+                    </a:solidFill>
+                  </a:tcPr>
+                </a:tc>
+              </a:tr>
+            </a:tbl>
+          </a:graphicData>
+        </a:graphic>
+      </p:graphicFrame>
+      <p:sp>
+        <p:nvSpPr>
+          <p:cNvPr id="7" name="Shape 4"/>
+          <p:cNvSpPr/>
+          <p:nvPr/>
+        </p:nvSpPr>
+        <p:spPr>
+          <a:xfrm>
+            <a:off x="822960" y="5961888"/>
+            <a:ext cx="10515600" cy="0"/>
+          </a:xfrm>
+          <a:prstGeom prst="line">
+            <a:avLst/>
+          </a:prstGeom>
+          <a:noFill/>
+          <a:ln w="12700">
+            <a:solidFill>
+              <a:srgbClr val="1E2D45"/>
+            </a:solidFill>
+            <a:prstDash val="solid"/>
+          </a:ln>
+        </p:spPr>
+      </p:sp>
+      <p:sp>
+        <p:nvSpPr>
+          <p:cNvPr id="8" name="Text 5"/>
+          <p:cNvSpPr/>
+          <p:nvPr/>
+        </p:nvSpPr>
+        <p:spPr>
+          <a:xfrm>
+            <a:off x="822960" y="6053328"/>
+            <a:ext cx="9692640" cy="457200"/>
+          </a:xfrm>
+          <a:prstGeom prst="rect">
+            <a:avLst/>
+          </a:prstGeom>
+          <a:noFill/>
+          <a:ln/>
+        </p:spPr>
+        <p:txBody>
+          <a:bodyPr wrap="square" rtlCol="0" anchor="ctr"/>
+          <a:lstStyle/>
+          <a:p>
+            <a:pPr indent="0" marL="0">
+              <a:buNone/>
+            </a:pPr>
+            <a:r>
+              <a:rPr lang="en-US" sz="1150" dirty="0">
+                <a:solidFill>
+                  <a:srgbClr val="64748B"/>
+                </a:solidFill>
+                <a:latin typeface="Segoe UI" pitchFamily="34" charset="0"/>
+                <a:ea typeface="Segoe UI" pitchFamily="34" charset="-122"/>
+                <a:cs typeface="Segoe UI" pitchFamily="34" charset="-120"/>
+              </a:rPr>
+              <a:t>Delivered to clients worldwide through Upwork.</a:t>
+            </a:r>
+            <a:endParaRPr lang="en-US" sz="1150" dirty="0"/>
+          </a:p>
+        </p:txBody>
+      </p:sp>
+      <p:sp>
+        <p:nvSpPr>
+          <p:cNvPr id="9" name="Text 6"/>
+          <p:cNvSpPr/>
+          <p:nvPr/>
+        </p:nvSpPr>
+        <p:spPr>
+          <a:xfrm>
+            <a:off x="10698480" y="6382512"/>
+            <a:ext cx="1188720" cy="365760"/>
+          </a:xfrm>
+          <a:prstGeom prst="rect">
+            <a:avLst/>
+          </a:prstGeom>
+          <a:noFill/>
+          <a:ln/>
+        </p:spPr>
+        <p:txBody>
+          <a:bodyPr wrap="square" rtlCol="0" anchor="ctr"/>
+          <a:lstStyle/>
+          <a:p>
+            <a:pPr algn="r" indent="0" marL="0">
+              <a:buNone/>
+            </a:pPr>
+            <a:r>
+              <a:rPr lang="en-US" sz="1000" dirty="0">
+                <a:solidFill>
+                  <a:srgbClr val="64748B"/>
+                </a:solidFill>
+                <a:latin typeface="Consolas" pitchFamily="34" charset="0"/>
+                <a:ea typeface="Consolas" pitchFamily="34" charset="-122"/>
+                <a:cs typeface="Consolas" pitchFamily="34" charset="-120"/>
+              </a:rPr>
+              <a:t>14 / 15</a:t>
+            </a:r>
+            <a:endParaRPr lang="en-US" sz="1000" dirty="0"/>
+          </a:p>
+        </p:txBody>
+      </p:sp>
+    </p:spTree>
+  </p:cSld>
+  <p:clrMapOvr>
+    <a:masterClrMapping/>
+  </p:clrMapOvr>
+</p:sld>
+</file>
+
+<file path=ppt/slides/slide15.xml><?xml version="1.0" encoding="utf-8"?>
+<p:sld xmlns:a="http://schemas.openxmlformats.org/drawingml/2006/main" xmlns:r="http://schemas.openxmlformats.org/officeDocument/2006/relationships" xmlns:p="http://schemas.openxmlformats.org/presentationml/2006/main">
+  <p:cSld name="Slide 15">
+    <p:bg>
+      <p:bgPr>
+        <a:solidFill>
+          <a:srgbClr val="0A0C12"/>
+        </a:solidFill>
+      </p:bgPr>
+    </p:bg>
+    <p:spTree>
+      <p:nvGrpSpPr>
+        <p:cNvPr id="1" name=""/>
+        <p:cNvGrpSpPr/>
+        <p:nvPr/>
+      </p:nvGrpSpPr>
+      <p:grpSpPr>
+        <a:xfrm>
+          <a:off x="0" y="0"/>
+          <a:ext cx="0" cy="0"/>
+          <a:chOff x="0" y="0"/>
+          <a:chExt cx="0" cy="0"/>
+        </a:xfrm>
+      </p:grpSpPr>
+      <p:sp>
+        <p:nvSpPr>
+          <p:cNvPr id="2" name="Shape 0"/>
+          <p:cNvSpPr/>
+          <p:nvPr/>
+        </p:nvSpPr>
+        <p:spPr>
+          <a:xfrm>
+            <a:off x="0" y="0"/>
+            <a:ext cx="7680960" cy="64008"/>
+          </a:xfrm>
+          <a:prstGeom prst="rect">
+            <a:avLst/>
+          </a:prstGeom>
+          <a:solidFill>
+            <a:srgbClr val="3B82F6"/>
+          </a:solidFill>
+          <a:ln/>
+        </p:spPr>
+      </p:sp>
+      <p:sp>
+        <p:nvSpPr>
+          <p:cNvPr id="3" name="Shape 1"/>
+          <p:cNvSpPr/>
+          <p:nvPr/>
+        </p:nvSpPr>
+        <p:spPr>
+          <a:xfrm>
+            <a:off x="7680960" y="0"/>
+            <a:ext cx="4510735" cy="64008"/>
+          </a:xfrm>
+          <a:prstGeom prst="rect">
+            <a:avLst/>
+          </a:prstGeom>
+          <a:solidFill>
+            <a:srgbClr val="06B6D4"/>
+          </a:solidFill>
+          <a:ln/>
+        </p:spPr>
+      </p:sp>
+      <p:sp>
+        <p:nvSpPr>
+          <p:cNvPr id="4" name="Text 2"/>
+          <p:cNvSpPr/>
+          <p:nvPr/>
+        </p:nvSpPr>
+        <p:spPr>
+          <a:xfrm>
+            <a:off x="822960" y="1417320"/>
+            <a:ext cx="10515600" cy="411480"/>
+          </a:xfrm>
+          <a:prstGeom prst="rect">
+            <a:avLst/>
+          </a:prstGeom>
+          <a:noFill/>
+          <a:ln/>
+        </p:spPr>
+        <p:txBody>
+          <a:bodyPr wrap="square" rtlCol="0" anchor="ctr"/>
+          <a:lstStyle/>
+          <a:p>
+            <a:pPr algn="ctr" indent="0" marL="0">
+              <a:buNone/>
+            </a:pPr>
+            <a:r>
+              <a:rPr lang="en-US" sz="1300" spc="400" kern="0" dirty="0">
+                <a:solidFill>
+                  <a:srgbClr val="06B6D4"/>
+                </a:solidFill>
+                <a:latin typeface="Consolas" pitchFamily="34" charset="0"/>
+                <a:ea typeface="Consolas" pitchFamily="34" charset="-122"/>
+                <a:cs typeface="Consolas" pitchFamily="34" charset="-120"/>
+              </a:rPr>
+              <a:t>WORK WITH ME</a:t>
+            </a:r>
+            <a:endParaRPr lang="en-US" sz="1300" dirty="0"/>
+          </a:p>
+        </p:txBody>
+      </p:sp>
+      <p:sp>
+        <p:nvSpPr>
+          <p:cNvPr id="5" name="Text 3"/>
+          <p:cNvSpPr/>
+          <p:nvPr/>
+        </p:nvSpPr>
+        <p:spPr>
+          <a:xfrm>
+            <a:off x="822960" y="1920240"/>
+            <a:ext cx="10515600" cy="1371600"/>
+          </a:xfrm>
+          <a:prstGeom prst="rect">
+            <a:avLst/>
+          </a:prstGeom>
+          <a:noFill/>
+          <a:ln/>
+        </p:spPr>
+        <p:txBody>
+          <a:bodyPr wrap="square" rtlCol="0" anchor="ctr"/>
+          <a:lstStyle/>
+          <a:p>
+            <a:pPr algn="ctr" indent="0" marL="0">
+              <a:buNone/>
+            </a:pPr>
+            <a:r>
+              <a:rPr lang="en-US" sz="3200" b="1" dirty="0">
+                <a:solidFill>
+                  <a:srgbClr val="FFFFFF"/>
+                </a:solidFill>
+                <a:latin typeface="Segoe UI" pitchFamily="34" charset="0"/>
+                <a:ea typeface="Segoe UI" pitchFamily="34" charset="-122"/>
+                <a:cs typeface="Segoe UI" pitchFamily="34" charset="-120"/>
+              </a:rPr>
+              <a:t>Build systems, not scripts</a:t>
+            </a:r>
+            <a:endParaRPr lang="en-US" sz="3200" dirty="0"/>
+          </a:p>
+        </p:txBody>
+      </p:sp>
+      <p:sp>
+        <p:nvSpPr>
+          <p:cNvPr id="6" name="Text 4"/>
+          <p:cNvSpPr/>
+          <p:nvPr/>
+        </p:nvSpPr>
+        <p:spPr>
+          <a:xfrm>
+            <a:off x="2011680" y="3429000"/>
+            <a:ext cx="8183880" cy="1554480"/>
+          </a:xfrm>
+          <a:prstGeom prst="rect">
+            <a:avLst/>
+          </a:prstGeom>
+          <a:noFill/>
+          <a:ln/>
+        </p:spPr>
+        <p:txBody>
+          <a:bodyPr wrap="square" rtlCol="0" anchor="t"/>
+          <a:lstStyle/>
+          <a:p>
+            <a:pPr algn="ctr" indent="0" marL="0">
+              <a:spcAft>
+                <a:spcPts val="800"/>
+              </a:spcAft>
+              <a:buNone/>
+            </a:pPr>
+            <a:r>
+              <a:rPr lang="en-US" sz="1500" dirty="0">
+                <a:solidFill>
+                  <a:srgbClr val="CBD5E1"/>
+                </a:solidFill>
+                <a:latin typeface="Segoe UI" pitchFamily="34" charset="0"/>
+                <a:ea typeface="Segoe UI" pitchFamily="34" charset="-122"/>
+                <a:cs typeface="Segoe UI" pitchFamily="34" charset="-120"/>
+              </a:rPr>
+              <a:t>Need a collection pipeline that survives contact with the real web - and with your stakeholders?</a:t>
+            </a:r>
+            <a:pPr algn="ctr" indent="0" marL="0">
+              <a:spcAft>
+                <a:spcPts val="800"/>
+              </a:spcAft>
+              <a:buNone/>
+            </a:pPr>
+            <a:r>
+              <a:rPr lang="en-US" sz="1500" dirty="0">
+                <a:solidFill>
+                  <a:srgbClr val="CBD5E1"/>
+                </a:solidFill>
+                <a:latin typeface="Segoe UI" pitchFamily="34" charset="0"/>
+                <a:ea typeface="Segoe UI" pitchFamily="34" charset="-122"/>
+                <a:cs typeface="Segoe UI" pitchFamily="34" charset="-120"/>
+              </a:rPr>
+              <a:t>I deliver validated, polite, fully logged scraping systems that keep running after the handover.</a:t>
+            </a:r>
+            <a:pPr algn="ctr" indent="0" marL="0">
+              <a:spcAft>
+                <a:spcPts val="800"/>
+              </a:spcAft>
+              <a:buNone/>
+            </a:pPr>
+            <a:r>
+              <a:rPr lang="en-US" sz="1500" dirty="0">
+                <a:solidFill>
+                  <a:srgbClr val="CBD5E1"/>
+                </a:solidFill>
+                <a:latin typeface="Segoe UI" pitchFamily="34" charset="0"/>
+                <a:ea typeface="Segoe UI" pitchFamily="34" charset="-122"/>
+                <a:cs typeface="Segoe UI" pitchFamily="34" charset="-120"/>
+              </a:rPr>
+              <a:t>Validation, tolerance, politeness, and logs: the four pillars of scraping that lasts.</a:t>
+            </a:r>
+            <a:endParaRPr lang="en-US" sz="1500" dirty="0"/>
+          </a:p>
+        </p:txBody>
+      </p:sp>
+      <p:sp>
+        <p:nvSpPr>
+          <p:cNvPr id="7" name="Shape 5"/>
+          <p:cNvSpPr/>
+          <p:nvPr/>
+        </p:nvSpPr>
+        <p:spPr>
+          <a:xfrm>
+            <a:off x="3566160" y="5212080"/>
+            <a:ext cx="5074920" cy="0"/>
+          </a:xfrm>
+          <a:prstGeom prst="line">
+            <a:avLst/>
+          </a:prstGeom>
+          <a:noFill/>
+          <a:ln w="25400">
+            <a:solidFill>
+              <a:srgbClr val="3B82F6"/>
+            </a:solidFill>
+            <a:prstDash val="solid"/>
+          </a:ln>
+        </p:spPr>
+      </p:sp>
+      <p:sp>
+        <p:nvSpPr>
+          <p:cNvPr id="8" name="Text 6"/>
+          <p:cNvSpPr/>
+          <p:nvPr/>
+        </p:nvSpPr>
+        <p:spPr>
+          <a:xfrm>
+            <a:off x="822960" y="5376672"/>
+            <a:ext cx="10515600" cy="457200"/>
+          </a:xfrm>
+          <a:prstGeom prst="rect">
+            <a:avLst/>
+          </a:prstGeom>
+          <a:noFill/>
+          <a:ln/>
+        </p:spPr>
+        <p:txBody>
+          <a:bodyPr wrap="square" rtlCol="0" anchor="ctr"/>
+          <a:lstStyle/>
+          <a:p>
+            <a:pPr algn="ctr" indent="0" marL="0">
+              <a:buNone/>
+            </a:pPr>
+            <a:r>
+              <a:rPr lang="en-US" sz="1350" b="1" dirty="0">
+                <a:solidFill>
+                  <a:srgbClr val="06B6D4"/>
+                </a:solidFill>
+                <a:latin typeface="Consolas" pitchFamily="34" charset="0"/>
+                <a:ea typeface="Consolas" pitchFamily="34" charset="-122"/>
+                <a:cs typeface="Consolas" pitchFamily="34" charset="-120"/>
+              </a:rPr>
+              <a:t>rezalianvatiady.github.io · github.com/rezalianvatiady</a:t>
+            </a:r>
+            <a:endParaRPr lang="en-US" sz="1350" dirty="0"/>
+          </a:p>
+        </p:txBody>
+      </p:sp>
+      <p:sp>
+        <p:nvSpPr>
+          <p:cNvPr id="9" name="Text 7"/>
+          <p:cNvSpPr/>
+          <p:nvPr/>
+        </p:nvSpPr>
+        <p:spPr>
+          <a:xfrm>
+            <a:off x="10698480" y="6382512"/>
+            <a:ext cx="1188720" cy="365760"/>
+          </a:xfrm>
+          <a:prstGeom prst="rect">
+            <a:avLst/>
+          </a:prstGeom>
+          <a:noFill/>
+          <a:ln/>
+        </p:spPr>
+        <p:txBody>
+          <a:bodyPr wrap="square" rtlCol="0" anchor="ctr"/>
+          <a:lstStyle/>
+          <a:p>
+            <a:pPr algn="r" indent="0" marL="0">
+              <a:buNone/>
+            </a:pPr>
+            <a:r>
+              <a:rPr lang="en-US" sz="1000" dirty="0">
+                <a:solidFill>
+                  <a:srgbClr val="64748B"/>
+                </a:solidFill>
+                <a:latin typeface="Consolas" pitchFamily="34" charset="0"/>
+                <a:ea typeface="Consolas" pitchFamily="34" charset="-122"/>
+                <a:cs typeface="Consolas" pitchFamily="34" charset="-120"/>
+              </a:rPr>
+              <a:t>15 / 15</a:t>
             </a:r>
             <a:endParaRPr lang="en-US" sz="1000" dirty="0"/>
           </a:p>
@@ -1710,7 +7342,7 @@
                 <a:ea typeface="Consolas" pitchFamily="34" charset="-122"/>
                 <a:cs typeface="Consolas" pitchFamily="34" charset="-120"/>
               </a:rPr>
-              <a:t>REALITY</a:t>
+              <a:t>AGENDA</a:t>
             </a:r>
             <a:endParaRPr lang="en-US" sz="1200" dirty="0"/>
           </a:p>
@@ -1724,8 +7356,8 @@
         </p:nvSpPr>
         <p:spPr>
           <a:xfrm>
-            <a:off x="822960" y="960120"/>
-            <a:ext cx="10515600" cy="868680"/>
+            <a:off x="822960" y="914400"/>
+            <a:ext cx="10561320" cy="868680"/>
           </a:xfrm>
           <a:prstGeom prst="rect">
             <a:avLst/>
@@ -1741,7 +7373,7 @@
               <a:buNone/>
             </a:pPr>
             <a:r>
-              <a:rPr lang="en-US" sz="3000" b="1" dirty="0">
+              <a:rPr lang="en-US" sz="2700" b="1" dirty="0">
                 <a:solidFill>
                   <a:srgbClr val="FFFFFF"/>
                 </a:solidFill>
@@ -1749,45 +7381,102 @@
                 <a:ea typeface="Segoe UI" pitchFamily="34" charset="-122"/>
                 <a:cs typeface="Segoe UI" pitchFamily="34" charset="-120"/>
               </a:rPr>
-              <a:t>The real web is hostile</a:t>
-            </a:r>
-            <a:endParaRPr lang="en-US" sz="3000" dirty="0"/>
-          </a:p>
-        </p:txBody>
-      </p:sp>
-      <p:sp>
-        <p:nvSpPr>
-          <p:cNvPr id="6" name="Text 4"/>
-          <p:cNvSpPr/>
-          <p:nvPr/>
-        </p:nvSpPr>
-        <p:spPr>
-          <a:xfrm>
-            <a:off x="868680" y="2057400"/>
-            <a:ext cx="10424160" cy="3566160"/>
-          </a:xfrm>
-          <a:prstGeom prst="rect">
-            <a:avLst/>
-          </a:prstGeom>
-          <a:noFill/>
-          <a:ln/>
-        </p:spPr>
-        <p:txBody>
-          <a:bodyPr wrap="square" rtlCol="0" anchor="t"/>
-          <a:lstStyle/>
-          <a:p>
-            <a:pPr marL="342900" indent="-342900">
-              <a:lnSpc>
-                <a:spcPct val="115000"/>
-              </a:lnSpc>
-              <a:spcAft>
-                <a:spcPts val="1000"/>
-              </a:spcAft>
-              <a:buSzPct val="100000"/>
-              <a:buChar char="▸"/>
-            </a:pPr>
-            <a:r>
-              <a:rPr lang="en-US" sz="1600" dirty="0">
+              <a:t>What this deck covers</a:t>
+            </a:r>
+            <a:endParaRPr lang="en-US" sz="2700" dirty="0"/>
+          </a:p>
+        </p:txBody>
+      </p:sp>
+      <p:sp>
+        <p:nvSpPr>
+          <p:cNvPr id="6" name="Shape 4"/>
+          <p:cNvSpPr/>
+          <p:nvPr/>
+        </p:nvSpPr>
+        <p:spPr>
+          <a:xfrm>
+            <a:off x="868680" y="2112264"/>
+            <a:ext cx="420624" cy="420624"/>
+          </a:xfrm>
+          <a:prstGeom prst="ellipse">
+            <a:avLst/>
+          </a:prstGeom>
+          <a:solidFill>
+            <a:srgbClr val="111A2E"/>
+          </a:solidFill>
+          <a:ln w="19050">
+            <a:solidFill>
+              <a:srgbClr val="3B82F6"/>
+            </a:solidFill>
+            <a:prstDash val="solid"/>
+          </a:ln>
+        </p:spPr>
+      </p:sp>
+      <p:sp>
+        <p:nvSpPr>
+          <p:cNvPr id="7" name="Text 5"/>
+          <p:cNvSpPr/>
+          <p:nvPr/>
+        </p:nvSpPr>
+        <p:spPr>
+          <a:xfrm>
+            <a:off x="868680" y="2112264"/>
+            <a:ext cx="420624" cy="420624"/>
+          </a:xfrm>
+          <a:prstGeom prst="rect">
+            <a:avLst/>
+          </a:prstGeom>
+          <a:noFill/>
+          <a:ln/>
+        </p:spPr>
+        <p:txBody>
+          <a:bodyPr wrap="square" rtlCol="0" anchor="ctr"/>
+          <a:lstStyle/>
+          <a:p>
+            <a:pPr algn="ctr" indent="0" marL="0">
+              <a:buNone/>
+            </a:pPr>
+            <a:r>
+              <a:rPr lang="en-US" sz="1300" b="1" dirty="0">
+                <a:solidFill>
+                  <a:srgbClr val="3B82F6"/>
+                </a:solidFill>
+                <a:latin typeface="Consolas" pitchFamily="34" charset="0"/>
+                <a:ea typeface="Consolas" pitchFamily="34" charset="-122"/>
+                <a:cs typeface="Consolas" pitchFamily="34" charset="-120"/>
+              </a:rPr>
+              <a:t>1</a:t>
+            </a:r>
+            <a:endParaRPr lang="en-US" sz="1300" dirty="0"/>
+          </a:p>
+        </p:txBody>
+      </p:sp>
+      <p:sp>
+        <p:nvSpPr>
+          <p:cNvPr id="8" name="Text 6"/>
+          <p:cNvSpPr/>
+          <p:nvPr/>
+        </p:nvSpPr>
+        <p:spPr>
+          <a:xfrm>
+            <a:off x="1435608" y="2057400"/>
+            <a:ext cx="4480560" cy="822960"/>
+          </a:xfrm>
+          <a:prstGeom prst="rect">
+            <a:avLst/>
+          </a:prstGeom>
+          <a:noFill/>
+          <a:ln/>
+        </p:spPr>
+        <p:txBody>
+          <a:bodyPr wrap="square" rtlCol="0" anchor="ctr"/>
+          <a:lstStyle/>
+          <a:p>
+            <a:pPr indent="0" marL="0">
+              <a:buNone/>
+            </a:pPr>
+            <a:r>
+              <a:rPr lang="en-US" sz="1450" dirty="0">
                 <a:solidFill>
                   <a:srgbClr val="CBD5E1"/>
                 </a:solidFill>
@@ -1795,23 +7484,102 @@
                 <a:ea typeface="Segoe UI" pitchFamily="34" charset="-122"/>
                 <a:cs typeface="Segoe UI" pitchFamily="34" charset="-120"/>
               </a:rPr>
-              <a:t>Markup drifts and selectors rot silently</a:t>
-            </a:r>
-            <a:endParaRPr lang="en-US" sz="1600" dirty="0"/>
-          </a:p>
-          <a:p>
-            <a:pPr marL="342900" indent="-342900">
-              <a:lnSpc>
-                <a:spcPct val="115000"/>
-              </a:lnSpc>
-              <a:spcAft>
-                <a:spcPts val="1000"/>
-              </a:spcAft>
-              <a:buSzPct val="100000"/>
-              <a:buChar char="▸"/>
-            </a:pPr>
-            <a:r>
-              <a:rPr lang="en-US" sz="1600" dirty="0">
+              <a:t>Why the real web breaks naive scrapers every month</a:t>
+            </a:r>
+            <a:endParaRPr lang="en-US" sz="1450" dirty="0"/>
+          </a:p>
+        </p:txBody>
+      </p:sp>
+      <p:sp>
+        <p:nvSpPr>
+          <p:cNvPr id="9" name="Shape 7"/>
+          <p:cNvSpPr/>
+          <p:nvPr/>
+        </p:nvSpPr>
+        <p:spPr>
+          <a:xfrm>
+            <a:off x="868680" y="3044952"/>
+            <a:ext cx="420624" cy="420624"/>
+          </a:xfrm>
+          <a:prstGeom prst="ellipse">
+            <a:avLst/>
+          </a:prstGeom>
+          <a:solidFill>
+            <a:srgbClr val="111A2E"/>
+          </a:solidFill>
+          <a:ln w="19050">
+            <a:solidFill>
+              <a:srgbClr val="06B6D4"/>
+            </a:solidFill>
+            <a:prstDash val="solid"/>
+          </a:ln>
+        </p:spPr>
+      </p:sp>
+      <p:sp>
+        <p:nvSpPr>
+          <p:cNvPr id="10" name="Text 8"/>
+          <p:cNvSpPr/>
+          <p:nvPr/>
+        </p:nvSpPr>
+        <p:spPr>
+          <a:xfrm>
+            <a:off x="868680" y="3044952"/>
+            <a:ext cx="420624" cy="420624"/>
+          </a:xfrm>
+          <a:prstGeom prst="rect">
+            <a:avLst/>
+          </a:prstGeom>
+          <a:noFill/>
+          <a:ln/>
+        </p:spPr>
+        <p:txBody>
+          <a:bodyPr wrap="square" rtlCol="0" anchor="ctr"/>
+          <a:lstStyle/>
+          <a:p>
+            <a:pPr algn="ctr" indent="0" marL="0">
+              <a:buNone/>
+            </a:pPr>
+            <a:r>
+              <a:rPr lang="en-US" sz="1300" b="1" dirty="0">
+                <a:solidFill>
+                  <a:srgbClr val="06B6D4"/>
+                </a:solidFill>
+                <a:latin typeface="Consolas" pitchFamily="34" charset="0"/>
+                <a:ea typeface="Consolas" pitchFamily="34" charset="-122"/>
+                <a:cs typeface="Consolas" pitchFamily="34" charset="-120"/>
+              </a:rPr>
+              <a:t>2</a:t>
+            </a:r>
+            <a:endParaRPr lang="en-US" sz="1300" dirty="0"/>
+          </a:p>
+        </p:txBody>
+      </p:sp>
+      <p:sp>
+        <p:nvSpPr>
+          <p:cNvPr id="11" name="Text 9"/>
+          <p:cNvSpPr/>
+          <p:nvPr/>
+        </p:nvSpPr>
+        <p:spPr>
+          <a:xfrm>
+            <a:off x="1435608" y="2990088"/>
+            <a:ext cx="4480560" cy="822960"/>
+          </a:xfrm>
+          <a:prstGeom prst="rect">
+            <a:avLst/>
+          </a:prstGeom>
+          <a:noFill/>
+          <a:ln/>
+        </p:spPr>
+        <p:txBody>
+          <a:bodyPr wrap="square" rtlCol="0" anchor="ctr"/>
+          <a:lstStyle/>
+          <a:p>
+            <a:pPr indent="0" marL="0">
+              <a:buNone/>
+            </a:pPr>
+            <a:r>
+              <a:rPr lang="en-US" sz="1450" dirty="0">
                 <a:solidFill>
                   <a:srgbClr val="CBD5E1"/>
                 </a:solidFill>
@@ -1819,23 +7587,102 @@
                 <a:ea typeface="Segoe UI" pitchFamily="34" charset="-122"/>
                 <a:cs typeface="Segoe UI" pitchFamily="34" charset="-120"/>
               </a:rPr>
-              <a:t>Bot walls evolve weekly</a:t>
-            </a:r>
-            <a:endParaRPr lang="en-US" sz="1600" dirty="0"/>
-          </a:p>
-          <a:p>
-            <a:pPr marL="342900" indent="-342900">
-              <a:lnSpc>
-                <a:spcPct val="115000"/>
-              </a:lnSpc>
-              <a:spcAft>
-                <a:spcPts val="1000"/>
-              </a:spcAft>
-              <a:buSzPct val="100000"/>
-              <a:buChar char="▸"/>
-            </a:pPr>
-            <a:r>
-              <a:rPr lang="en-US" sz="1600" dirty="0">
+              <a:t>Five instrumented stages of a collection pipeline</a:t>
+            </a:r>
+            <a:endParaRPr lang="en-US" sz="1450" dirty="0"/>
+          </a:p>
+        </p:txBody>
+      </p:sp>
+      <p:sp>
+        <p:nvSpPr>
+          <p:cNvPr id="12" name="Shape 10"/>
+          <p:cNvSpPr/>
+          <p:nvPr/>
+        </p:nvSpPr>
+        <p:spPr>
+          <a:xfrm>
+            <a:off x="868680" y="3977640"/>
+            <a:ext cx="420624" cy="420624"/>
+          </a:xfrm>
+          <a:prstGeom prst="ellipse">
+            <a:avLst/>
+          </a:prstGeom>
+          <a:solidFill>
+            <a:srgbClr val="111A2E"/>
+          </a:solidFill>
+          <a:ln w="19050">
+            <a:solidFill>
+              <a:srgbClr val="3B82F6"/>
+            </a:solidFill>
+            <a:prstDash val="solid"/>
+          </a:ln>
+        </p:spPr>
+      </p:sp>
+      <p:sp>
+        <p:nvSpPr>
+          <p:cNvPr id="13" name="Text 11"/>
+          <p:cNvSpPr/>
+          <p:nvPr/>
+        </p:nvSpPr>
+        <p:spPr>
+          <a:xfrm>
+            <a:off x="868680" y="3977640"/>
+            <a:ext cx="420624" cy="420624"/>
+          </a:xfrm>
+          <a:prstGeom prst="rect">
+            <a:avLst/>
+          </a:prstGeom>
+          <a:noFill/>
+          <a:ln/>
+        </p:spPr>
+        <p:txBody>
+          <a:bodyPr wrap="square" rtlCol="0" anchor="ctr"/>
+          <a:lstStyle/>
+          <a:p>
+            <a:pPr algn="ctr" indent="0" marL="0">
+              <a:buNone/>
+            </a:pPr>
+            <a:r>
+              <a:rPr lang="en-US" sz="1300" b="1" dirty="0">
+                <a:solidFill>
+                  <a:srgbClr val="3B82F6"/>
+                </a:solidFill>
+                <a:latin typeface="Consolas" pitchFamily="34" charset="0"/>
+                <a:ea typeface="Consolas" pitchFamily="34" charset="-122"/>
+                <a:cs typeface="Consolas" pitchFamily="34" charset="-120"/>
+              </a:rPr>
+              <a:t>3</a:t>
+            </a:r>
+            <a:endParaRPr lang="en-US" sz="1300" dirty="0"/>
+          </a:p>
+        </p:txBody>
+      </p:sp>
+      <p:sp>
+        <p:nvSpPr>
+          <p:cNvPr id="14" name="Text 12"/>
+          <p:cNvSpPr/>
+          <p:nvPr/>
+        </p:nvSpPr>
+        <p:spPr>
+          <a:xfrm>
+            <a:off x="1435608" y="3922776"/>
+            <a:ext cx="4480560" cy="822960"/>
+          </a:xfrm>
+          <a:prstGeom prst="rect">
+            <a:avLst/>
+          </a:prstGeom>
+          <a:noFill/>
+          <a:ln/>
+        </p:spPr>
+        <p:txBody>
+          <a:bodyPr wrap="square" rtlCol="0" anchor="ctr"/>
+          <a:lstStyle/>
+          <a:p>
+            <a:pPr indent="0" marL="0">
+              <a:buNone/>
+            </a:pPr>
+            <a:r>
+              <a:rPr lang="en-US" sz="1450" dirty="0">
                 <a:solidFill>
                   <a:srgbClr val="CBD5E1"/>
                 </a:solidFill>
@@ -1843,23 +7690,102 @@
                 <a:ea typeface="Segoe UI" pitchFamily="34" charset="-122"/>
                 <a:cs typeface="Segoe UI" pitchFamily="34" charset="-120"/>
               </a:rPr>
-              <a:t>Pages render differently by region, device, and language</a:t>
-            </a:r>
-            <a:endParaRPr lang="en-US" sz="1600" dirty="0"/>
-          </a:p>
-          <a:p>
-            <a:pPr marL="342900" indent="-342900">
-              <a:lnSpc>
-                <a:spcPct val="115000"/>
-              </a:lnSpc>
-              <a:spcAft>
-                <a:spcPts val="1000"/>
-              </a:spcAft>
-              <a:buSzPct val="100000"/>
-              <a:buChar char="▸"/>
-            </a:pPr>
-            <a:r>
-              <a:rPr lang="en-US" sz="1600" dirty="0">
+              <a:t>Validating every run: counts, schema, and sanity ranges</a:t>
+            </a:r>
+            <a:endParaRPr lang="en-US" sz="1450" dirty="0"/>
+          </a:p>
+        </p:txBody>
+      </p:sp>
+      <p:sp>
+        <p:nvSpPr>
+          <p:cNvPr id="15" name="Shape 13"/>
+          <p:cNvSpPr/>
+          <p:nvPr/>
+        </p:nvSpPr>
+        <p:spPr>
+          <a:xfrm>
+            <a:off x="6355080" y="2112264"/>
+            <a:ext cx="420624" cy="420624"/>
+          </a:xfrm>
+          <a:prstGeom prst="ellipse">
+            <a:avLst/>
+          </a:prstGeom>
+          <a:solidFill>
+            <a:srgbClr val="111A2E"/>
+          </a:solidFill>
+          <a:ln w="19050">
+            <a:solidFill>
+              <a:srgbClr val="06B6D4"/>
+            </a:solidFill>
+            <a:prstDash val="solid"/>
+          </a:ln>
+        </p:spPr>
+      </p:sp>
+      <p:sp>
+        <p:nvSpPr>
+          <p:cNvPr id="16" name="Text 14"/>
+          <p:cNvSpPr/>
+          <p:nvPr/>
+        </p:nvSpPr>
+        <p:spPr>
+          <a:xfrm>
+            <a:off x="6355080" y="2112264"/>
+            <a:ext cx="420624" cy="420624"/>
+          </a:xfrm>
+          <a:prstGeom prst="rect">
+            <a:avLst/>
+          </a:prstGeom>
+          <a:noFill/>
+          <a:ln/>
+        </p:spPr>
+        <p:txBody>
+          <a:bodyPr wrap="square" rtlCol="0" anchor="ctr"/>
+          <a:lstStyle/>
+          <a:p>
+            <a:pPr algn="ctr" indent="0" marL="0">
+              <a:buNone/>
+            </a:pPr>
+            <a:r>
+              <a:rPr lang="en-US" sz="1300" b="1" dirty="0">
+                <a:solidFill>
+                  <a:srgbClr val="06B6D4"/>
+                </a:solidFill>
+                <a:latin typeface="Consolas" pitchFamily="34" charset="0"/>
+                <a:ea typeface="Consolas" pitchFamily="34" charset="-122"/>
+                <a:cs typeface="Consolas" pitchFamily="34" charset="-120"/>
+              </a:rPr>
+              <a:t>4</a:t>
+            </a:r>
+            <a:endParaRPr lang="en-US" sz="1300" dirty="0"/>
+          </a:p>
+        </p:txBody>
+      </p:sp>
+      <p:sp>
+        <p:nvSpPr>
+          <p:cNvPr id="17" name="Text 15"/>
+          <p:cNvSpPr/>
+          <p:nvPr/>
+        </p:nvSpPr>
+        <p:spPr>
+          <a:xfrm>
+            <a:off x="6922008" y="2057400"/>
+            <a:ext cx="4480560" cy="822960"/>
+          </a:xfrm>
+          <a:prstGeom prst="rect">
+            <a:avLst/>
+          </a:prstGeom>
+          <a:noFill/>
+          <a:ln/>
+        </p:spPr>
+        <p:txBody>
+          <a:bodyPr wrap="square" rtlCol="0" anchor="ctr"/>
+          <a:lstStyle/>
+          <a:p>
+            <a:pPr indent="0" marL="0">
+              <a:buNone/>
+            </a:pPr>
+            <a:r>
+              <a:rPr lang="en-US" sz="1450" dirty="0">
                 <a:solidFill>
                   <a:srgbClr val="CBD5E1"/>
                 </a:solidFill>
@@ -1867,22 +7793,47 @@
                 <a:ea typeface="Segoe UI" pitchFamily="34" charset="-122"/>
                 <a:cs typeface="Segoe UI" pitchFamily="34" charset="-120"/>
               </a:rPr>
-              <a:t>A script that worked last month is not a system</a:t>
-            </a:r>
-            <a:endParaRPr lang="en-US" sz="1600" dirty="0"/>
-          </a:p>
-        </p:txBody>
-      </p:sp>
-      <p:sp>
-        <p:nvSpPr>
-          <p:cNvPr id="7" name="Text 5"/>
-          <p:cNvSpPr/>
-          <p:nvPr/>
-        </p:nvSpPr>
-        <p:spPr>
-          <a:xfrm>
-            <a:off x="10698480" y="6355080"/>
-            <a:ext cx="1188720" cy="365760"/>
+              <a:t>Tolerant extraction, polite crawling, and logs a human can read</a:t>
+            </a:r>
+            <a:endParaRPr lang="en-US" sz="1450" dirty="0"/>
+          </a:p>
+        </p:txBody>
+      </p:sp>
+      <p:sp>
+        <p:nvSpPr>
+          <p:cNvPr id="18" name="Shape 16"/>
+          <p:cNvSpPr/>
+          <p:nvPr/>
+        </p:nvSpPr>
+        <p:spPr>
+          <a:xfrm>
+            <a:off x="6355080" y="3044952"/>
+            <a:ext cx="420624" cy="420624"/>
+          </a:xfrm>
+          <a:prstGeom prst="ellipse">
+            <a:avLst/>
+          </a:prstGeom>
+          <a:solidFill>
+            <a:srgbClr val="111A2E"/>
+          </a:solidFill>
+          <a:ln w="19050">
+            <a:solidFill>
+              <a:srgbClr val="3B82F6"/>
+            </a:solidFill>
+            <a:prstDash val="solid"/>
+          </a:ln>
+        </p:spPr>
+      </p:sp>
+      <p:sp>
+        <p:nvSpPr>
+          <p:cNvPr id="19" name="Text 17"/>
+          <p:cNvSpPr/>
+          <p:nvPr/>
+        </p:nvSpPr>
+        <p:spPr>
+          <a:xfrm>
+            <a:off x="6355080" y="3044952"/>
+            <a:ext cx="420624" cy="420624"/>
           </a:xfrm>
           <a:prstGeom prst="rect">
             <a:avLst/>
@@ -1894,19 +7845,97 @@
           <a:bodyPr wrap="square" rtlCol="0" anchor="ctr"/>
           <a:lstStyle/>
           <a:p>
-            <a:pPr algn="r" indent="0" marL="0">
+            <a:pPr algn="ctr" indent="0" marL="0">
               <a:buNone/>
             </a:pPr>
             <a:r>
-              <a:rPr lang="en-US" sz="1000" dirty="0">
-                <a:solidFill>
-                  <a:srgbClr val="64748B"/>
+              <a:rPr lang="en-US" sz="1300" b="1" dirty="0">
+                <a:solidFill>
+                  <a:srgbClr val="3B82F6"/>
                 </a:solidFill>
                 <a:latin typeface="Consolas" pitchFamily="34" charset="0"/>
                 <a:ea typeface="Consolas" pitchFamily="34" charset="-122"/>
                 <a:cs typeface="Consolas" pitchFamily="34" charset="-120"/>
               </a:rPr>
-              <a:t>2 / 7</a:t>
+              <a:t>5</a:t>
+            </a:r>
+            <a:endParaRPr lang="en-US" sz="1300" dirty="0"/>
+          </a:p>
+        </p:txBody>
+      </p:sp>
+      <p:sp>
+        <p:nvSpPr>
+          <p:cNvPr id="20" name="Text 18"/>
+          <p:cNvSpPr/>
+          <p:nvPr/>
+        </p:nvSpPr>
+        <p:spPr>
+          <a:xfrm>
+            <a:off x="6922008" y="2990088"/>
+            <a:ext cx="4480560" cy="822960"/>
+          </a:xfrm>
+          <a:prstGeom prst="rect">
+            <a:avLst/>
+          </a:prstGeom>
+          <a:noFill/>
+          <a:ln/>
+        </p:spPr>
+        <p:txBody>
+          <a:bodyPr wrap="square" rtlCol="0" anchor="ctr"/>
+          <a:lstStyle/>
+          <a:p>
+            <a:pPr indent="0" marL="0">
+              <a:buNone/>
+            </a:pPr>
+            <a:r>
+              <a:rPr lang="en-US" sz="1450" dirty="0">
+                <a:solidFill>
+                  <a:srgbClr val="CBD5E1"/>
+                </a:solidFill>
+                <a:latin typeface="Segoe UI" pitchFamily="34" charset="0"/>
+                <a:ea typeface="Segoe UI" pitchFamily="34" charset="-122"/>
+                <a:cs typeface="Segoe UI" pitchFamily="34" charset="-120"/>
+              </a:rPr>
+              <a:t>What the toolkit delivers in production engagements</a:t>
+            </a:r>
+            <a:endParaRPr lang="en-US" sz="1450" dirty="0"/>
+          </a:p>
+        </p:txBody>
+      </p:sp>
+      <p:sp>
+        <p:nvSpPr>
+          <p:cNvPr id="21" name="Text 19"/>
+          <p:cNvSpPr/>
+          <p:nvPr/>
+        </p:nvSpPr>
+        <p:spPr>
+          <a:xfrm>
+            <a:off x="10698480" y="6382512"/>
+            <a:ext cx="1188720" cy="365760"/>
+          </a:xfrm>
+          <a:prstGeom prst="rect">
+            <a:avLst/>
+          </a:prstGeom>
+          <a:noFill/>
+          <a:ln/>
+        </p:spPr>
+        <p:txBody>
+          <a:bodyPr wrap="square" rtlCol="0" anchor="ctr"/>
+          <a:lstStyle/>
+          <a:p>
+            <a:pPr algn="r" indent="0" marL="0">
+              <a:buNone/>
+            </a:pPr>
+            <a:r>
+              <a:rPr lang="en-US" sz="1000" dirty="0">
+                <a:solidFill>
+                  <a:srgbClr val="64748B"/>
+                </a:solidFill>
+                <a:latin typeface="Consolas" pitchFamily="34" charset="0"/>
+                <a:ea typeface="Consolas" pitchFamily="34" charset="-122"/>
+                <a:cs typeface="Consolas" pitchFamily="34" charset="-120"/>
+              </a:rPr>
+              <a:t>2 / 15</a:t>
             </a:r>
             <a:endParaRPr lang="en-US" sz="1000" dirty="0"/>
           </a:p>
@@ -2017,7 +8046,7 @@
                 <a:ea typeface="Consolas" pitchFamily="34" charset="-122"/>
                 <a:cs typeface="Consolas" pitchFamily="34" charset="-120"/>
               </a:rPr>
-              <a:t>ARCHITECTURE</a:t>
+              <a:t>THE REALITY</a:t>
             </a:r>
             <a:endParaRPr lang="en-US" sz="1200" dirty="0"/>
           </a:p>
@@ -2031,8 +8060,8 @@
         </p:nvSpPr>
         <p:spPr>
           <a:xfrm>
-            <a:off x="822960" y="960120"/>
-            <a:ext cx="10515600" cy="868680"/>
+            <a:off x="822960" y="914400"/>
+            <a:ext cx="10561320" cy="868680"/>
           </a:xfrm>
           <a:prstGeom prst="rect">
             <a:avLst/>
@@ -2048,7 +8077,7 @@
               <a:buNone/>
             </a:pPr>
             <a:r>
-              <a:rPr lang="en-US" sz="3000" b="1" dirty="0">
+              <a:rPr lang="en-US" sz="2700" b="1" dirty="0">
                 <a:solidFill>
                   <a:srgbClr val="FFFFFF"/>
                 </a:solidFill>
@@ -2056,9 +8085,9 @@
                 <a:ea typeface="Segoe UI" pitchFamily="34" charset="-122"/>
                 <a:cs typeface="Segoe UI" pitchFamily="34" charset="-120"/>
               </a:rPr>
-              <a:t>Five stages, all instrumented</a:t>
-            </a:r>
-            <a:endParaRPr lang="en-US" sz="3000" dirty="0"/>
+              <a:t>The real web is hostile</a:t>
+            </a:r>
+            <a:endParaRPr lang="en-US" sz="2700" dirty="0"/>
           </a:p>
         </p:txBody>
       </p:sp>
@@ -2070,7 +8099,7 @@
         </p:nvSpPr>
         <p:spPr>
           <a:xfrm>
-            <a:off x="868680" y="2057400"/>
+            <a:off x="868680" y="2011680"/>
             <a:ext cx="10424160" cy="3566160"/>
           </a:xfrm>
           <a:prstGeom prst="rect">
@@ -2085,10 +8114,10 @@
           <a:p>
             <a:pPr marL="342900" indent="-342900">
               <a:lnSpc>
-                <a:spcPct val="115000"/>
+                <a:spcPct val="112000"/>
               </a:lnSpc>
               <a:spcAft>
-                <a:spcPts val="1000"/>
+                <a:spcPts val="900"/>
               </a:spcAft>
               <a:buSzPct val="100000"/>
               <a:buChar char="▸"/>
@@ -2102,17 +8131,17 @@
                 <a:ea typeface="Segoe UI" pitchFamily="34" charset="-122"/>
                 <a:cs typeface="Segoe UI" pitchFamily="34" charset="-120"/>
               </a:rPr>
-              <a:t>Crawl - polite, rate-limited, resumable</a:t>
+              <a:t>Markup drifts and selectors rot silently while the script still exits zero.</a:t>
             </a:r>
             <a:endParaRPr lang="en-US" sz="1600" dirty="0"/>
           </a:p>
           <a:p>
             <a:pPr marL="342900" indent="-342900">
               <a:lnSpc>
-                <a:spcPct val="115000"/>
+                <a:spcPct val="112000"/>
               </a:lnSpc>
               <a:spcAft>
-                <a:spcPts val="1000"/>
+                <a:spcPts val="900"/>
               </a:spcAft>
               <a:buSzPct val="100000"/>
               <a:buChar char="▸"/>
@@ -2126,17 +8155,17 @@
                 <a:ea typeface="Segoe UI" pitchFamily="34" charset="-122"/>
                 <a:cs typeface="Segoe UI" pitchFamily="34" charset="-120"/>
               </a:rPr>
-              <a:t>Extract - structural anchors with multiple fallbacks</a:t>
+              <a:t>Bot walls evolve weekly, and yesterday's headers are today's block.</a:t>
             </a:r>
             <a:endParaRPr lang="en-US" sz="1600" dirty="0"/>
           </a:p>
           <a:p>
             <a:pPr marL="342900" indent="-342900">
               <a:lnSpc>
-                <a:spcPct val="115000"/>
+                <a:spcPct val="112000"/>
               </a:lnSpc>
               <a:spcAft>
-                <a:spcPts val="1000"/>
+                <a:spcPts val="900"/>
               </a:spcAft>
               <a:buSzPct val="100000"/>
               <a:buChar char="▸"/>
@@ -2150,17 +8179,17 @@
                 <a:ea typeface="Segoe UI" pitchFamily="34" charset="-122"/>
                 <a:cs typeface="Segoe UI" pitchFamily="34" charset="-120"/>
               </a:rPr>
-              <a:t>Clean - schema validation and sanity ranges</a:t>
+              <a:t>Pages render differently by region, device, and language.</a:t>
             </a:r>
             <a:endParaRPr lang="en-US" sz="1600" dirty="0"/>
           </a:p>
           <a:p>
             <a:pPr marL="342900" indent="-342900">
               <a:lnSpc>
-                <a:spcPct val="115000"/>
+                <a:spcPct val="112000"/>
               </a:lnSpc>
               <a:spcAft>
-                <a:spcPts val="1000"/>
+                <a:spcPts val="900"/>
               </a:spcAft>
               <a:buSzPct val="100000"/>
               <a:buChar char="▸"/>
@@ -2174,17 +8203,17 @@
                 <a:ea typeface="Segoe UI" pitchFamily="34" charset="-122"/>
                 <a:cs typeface="Segoe UI" pitchFamily="34" charset="-120"/>
               </a:rPr>
-              <a:t>Store and export - shapes downstream tools want</a:t>
+              <a:t>Every freelance client has heard the same story: the script worked last month and now returns nothing.</a:t>
             </a:r>
             <a:endParaRPr lang="en-US" sz="1600" dirty="0"/>
           </a:p>
           <a:p>
             <a:pPr marL="342900" indent="-342900">
               <a:lnSpc>
-                <a:spcPct val="115000"/>
+                <a:spcPct val="112000"/>
               </a:lnSpc>
               <a:spcAft>
-                <a:spcPts val="1000"/>
+                <a:spcPts val="900"/>
               </a:spcAft>
               <a:buSzPct val="100000"/>
               <a:buChar char="▸"/>
@@ -2198,7 +8227,7 @@
                 <a:ea typeface="Segoe UI" pitchFamily="34" charset="-122"/>
                 <a:cs typeface="Segoe UI" pitchFamily="34" charset="-120"/>
               </a:rPr>
-              <a:t>Schedule - freshness alarms, not silent deaths</a:t>
+              <a:t>A script that worked once is not a system - and the web punishes scripts.</a:t>
             </a:r>
             <a:endParaRPr lang="en-US" sz="1600" dirty="0"/>
           </a:p>
@@ -2206,13 +8235,75 @@
       </p:sp>
       <p:sp>
         <p:nvSpPr>
-          <p:cNvPr id="7" name="Text 5"/>
-          <p:cNvSpPr/>
-          <p:nvPr/>
-        </p:nvSpPr>
-        <p:spPr>
-          <a:xfrm>
-            <a:off x="10698480" y="6355080"/>
+          <p:cNvPr id="7" name="Shape 5"/>
+          <p:cNvSpPr/>
+          <p:nvPr/>
+        </p:nvSpPr>
+        <p:spPr>
+          <a:xfrm>
+            <a:off x="822960" y="5961888"/>
+            <a:ext cx="10515600" cy="0"/>
+          </a:xfrm>
+          <a:prstGeom prst="line">
+            <a:avLst/>
+          </a:prstGeom>
+          <a:noFill/>
+          <a:ln w="12700">
+            <a:solidFill>
+              <a:srgbClr val="1E2D45"/>
+            </a:solidFill>
+            <a:prstDash val="solid"/>
+          </a:ln>
+        </p:spPr>
+      </p:sp>
+      <p:sp>
+        <p:nvSpPr>
+          <p:cNvPr id="8" name="Text 6"/>
+          <p:cNvSpPr/>
+          <p:nvPr/>
+        </p:nvSpPr>
+        <p:spPr>
+          <a:xfrm>
+            <a:off x="822960" y="6053328"/>
+            <a:ext cx="9692640" cy="457200"/>
+          </a:xfrm>
+          <a:prstGeom prst="rect">
+            <a:avLst/>
+          </a:prstGeom>
+          <a:noFill/>
+          <a:ln/>
+        </p:spPr>
+        <p:txBody>
+          <a:bodyPr wrap="square" rtlCol="0" anchor="ctr"/>
+          <a:lstStyle/>
+          <a:p>
+            <a:pPr indent="0" marL="0">
+              <a:buNone/>
+            </a:pPr>
+            <a:r>
+              <a:rPr lang="en-US" sz="1150" dirty="0">
+                <a:solidFill>
+                  <a:srgbClr val="64748B"/>
+                </a:solidFill>
+                <a:latin typeface="Segoe UI" pitchFamily="34" charset="0"/>
+                <a:ea typeface="Segoe UI" pitchFamily="34" charset="-122"/>
+                <a:cs typeface="Segoe UI" pitchFamily="34" charset="-120"/>
+              </a:rPr>
+              <a:t>The failure mode that hurts clients most is silence, not the crash.</a:t>
+            </a:r>
+            <a:endParaRPr lang="en-US" sz="1150" dirty="0"/>
+          </a:p>
+        </p:txBody>
+      </p:sp>
+      <p:sp>
+        <p:nvSpPr>
+          <p:cNvPr id="9" name="Text 7"/>
+          <p:cNvSpPr/>
+          <p:nvPr/>
+        </p:nvSpPr>
+        <p:spPr>
+          <a:xfrm>
+            <a:off x="10698480" y="6382512"/>
             <a:ext cx="1188720" cy="365760"/>
           </a:xfrm>
           <a:prstGeom prst="rect">
@@ -2237,7 +8328,7 @@
                 <a:ea typeface="Consolas" pitchFamily="34" charset="-122"/>
                 <a:cs typeface="Consolas" pitchFamily="34" charset="-120"/>
               </a:rPr>
-              <a:t>3 / 7</a:t>
+              <a:t>3 / 15</a:t>
             </a:r>
             <a:endParaRPr lang="en-US" sz="1000" dirty="0"/>
           </a:p>
@@ -2348,7 +8439,7 @@
                 <a:ea typeface="Consolas" pitchFamily="34" charset="-122"/>
                 <a:cs typeface="Consolas" pitchFamily="34" charset="-120"/>
               </a:rPr>
-              <a:t>RESILIENCE</a:t>
+              <a:t>ARCHITECTURE</a:t>
             </a:r>
             <a:endParaRPr lang="en-US" sz="1200" dirty="0"/>
           </a:p>
@@ -2362,8 +8453,8 @@
         </p:nvSpPr>
         <p:spPr>
           <a:xfrm>
-            <a:off x="822960" y="960120"/>
-            <a:ext cx="10515600" cy="868680"/>
+            <a:off x="822960" y="914400"/>
+            <a:ext cx="10561320" cy="868680"/>
           </a:xfrm>
           <a:prstGeom prst="rect">
             <a:avLst/>
@@ -2379,7 +8470,7 @@
               <a:buNone/>
             </a:pPr>
             <a:r>
-              <a:rPr lang="en-US" sz="3000" b="1" dirty="0">
+              <a:rPr lang="en-US" sz="2700" b="1" dirty="0">
                 <a:solidFill>
                   <a:srgbClr val="FFFFFF"/>
                 </a:solidFill>
@@ -2387,69 +8478,143 @@
                 <a:ea typeface="Segoe UI" pitchFamily="34" charset="-122"/>
                 <a:cs typeface="Segoe UI" pitchFamily="34" charset="-120"/>
               </a:rPr>
-              <a:t>Patterns that keep pipelines alive</a:t>
-            </a:r>
-            <a:endParaRPr lang="en-US" sz="3000" dirty="0"/>
-          </a:p>
-        </p:txBody>
-      </p:sp>
-      <p:sp>
-        <p:nvSpPr>
-          <p:cNvPr id="6" name="Text 4"/>
-          <p:cNvSpPr/>
-          <p:nvPr/>
-        </p:nvSpPr>
-        <p:spPr>
-          <a:xfrm>
-            <a:off x="868680" y="2057400"/>
-            <a:ext cx="10424160" cy="3566160"/>
-          </a:xfrm>
-          <a:prstGeom prst="rect">
-            <a:avLst/>
-          </a:prstGeom>
-          <a:noFill/>
-          <a:ln/>
-        </p:spPr>
-        <p:txBody>
-          <a:bodyPr wrap="square" rtlCol="0" anchor="t"/>
-          <a:lstStyle/>
-          <a:p>
-            <a:pPr marL="342900" indent="-342900">
-              <a:lnSpc>
-                <a:spcPct val="115000"/>
-              </a:lnSpc>
-              <a:spcAft>
-                <a:spcPts val="1000"/>
-              </a:spcAft>
-              <a:buSzPct val="100000"/>
-              <a:buChar char="▸"/>
-            </a:pPr>
-            <a:r>
-              <a:rPr lang="en-US" sz="1600" dirty="0">
-                <a:solidFill>
-                  <a:srgbClr val="CBD5E1"/>
+              <a:t>Five stages, all instrumented</a:t>
+            </a:r>
+            <a:endParaRPr lang="en-US" sz="2700" dirty="0"/>
+          </a:p>
+        </p:txBody>
+      </p:sp>
+      <p:sp>
+        <p:nvSpPr>
+          <p:cNvPr id="6" name="Shape 4"/>
+          <p:cNvSpPr/>
+          <p:nvPr/>
+        </p:nvSpPr>
+        <p:spPr>
+          <a:xfrm>
+            <a:off x="774040" y="2514600"/>
+            <a:ext cx="1938528" cy="2103120"/>
+          </a:xfrm>
+          <a:prstGeom prst="roundRect">
+            <a:avLst>
+              <a:gd name="adj" fmla="val 3302"/>
+            </a:avLst>
+          </a:prstGeom>
+          <a:solidFill>
+            <a:srgbClr val="111A2E"/>
+          </a:solidFill>
+          <a:ln w="19050">
+            <a:solidFill>
+              <a:srgbClr val="3B82F6"/>
+            </a:solidFill>
+            <a:prstDash val="solid"/>
+          </a:ln>
+        </p:spPr>
+      </p:sp>
+      <p:sp>
+        <p:nvSpPr>
+          <p:cNvPr id="7" name="Text 5"/>
+          <p:cNvSpPr/>
+          <p:nvPr/>
+        </p:nvSpPr>
+        <p:spPr>
+          <a:xfrm>
+            <a:off x="902056" y="2633472"/>
+            <a:ext cx="1682496" cy="310896"/>
+          </a:xfrm>
+          <a:prstGeom prst="rect">
+            <a:avLst/>
+          </a:prstGeom>
+          <a:noFill/>
+          <a:ln/>
+        </p:spPr>
+        <p:txBody>
+          <a:bodyPr wrap="square" rtlCol="0" anchor="ctr"/>
+          <a:lstStyle/>
+          <a:p>
+            <a:pPr indent="0" marL="0">
+              <a:buNone/>
+            </a:pPr>
+            <a:r>
+              <a:rPr lang="en-US" sz="1100" b="1" dirty="0">
+                <a:solidFill>
+                  <a:srgbClr val="3B82F6"/>
+                </a:solidFill>
+                <a:latin typeface="Consolas" pitchFamily="34" charset="0"/>
+                <a:ea typeface="Consolas" pitchFamily="34" charset="-122"/>
+                <a:cs typeface="Consolas" pitchFamily="34" charset="-120"/>
+              </a:rPr>
+              <a:t>01</a:t>
+            </a:r>
+            <a:endParaRPr lang="en-US" sz="1100" dirty="0"/>
+          </a:p>
+        </p:txBody>
+      </p:sp>
+      <p:sp>
+        <p:nvSpPr>
+          <p:cNvPr id="8" name="Text 6"/>
+          <p:cNvSpPr/>
+          <p:nvPr/>
+        </p:nvSpPr>
+        <p:spPr>
+          <a:xfrm>
+            <a:off x="902056" y="2962656"/>
+            <a:ext cx="1682496" cy="566928"/>
+          </a:xfrm>
+          <a:prstGeom prst="rect">
+            <a:avLst/>
+          </a:prstGeom>
+          <a:noFill/>
+          <a:ln/>
+        </p:spPr>
+        <p:txBody>
+          <a:bodyPr wrap="square" rtlCol="0" anchor="ctr"/>
+          <a:lstStyle/>
+          <a:p>
+            <a:pPr indent="0" marL="0">
+              <a:buNone/>
+            </a:pPr>
+            <a:r>
+              <a:rPr lang="en-US" sz="1350" b="1" dirty="0">
+                <a:solidFill>
+                  <a:srgbClr val="FFFFFF"/>
                 </a:solidFill>
                 <a:latin typeface="Segoe UI" pitchFamily="34" charset="0"/>
                 <a:ea typeface="Segoe UI" pitchFamily="34" charset="-122"/>
                 <a:cs typeface="Segoe UI" pitchFamily="34" charset="-120"/>
               </a:rPr>
-              <a:t>Validate every run: row counts, schema, sanity checks</a:t>
-            </a:r>
-            <a:endParaRPr lang="en-US" sz="1600" dirty="0"/>
-          </a:p>
-          <a:p>
-            <a:pPr marL="342900" indent="-342900">
-              <a:lnSpc>
-                <a:spcPct val="115000"/>
-              </a:lnSpc>
-              <a:spcAft>
-                <a:spcPts val="1000"/>
-              </a:spcAft>
-              <a:buSzPct val="100000"/>
-              <a:buChar char="▸"/>
-            </a:pPr>
-            <a:r>
-              <a:rPr lang="en-US" sz="1600" dirty="0">
+              <a:t>Crawl</a:t>
+            </a:r>
+            <a:endParaRPr lang="en-US" sz="1350" dirty="0"/>
+          </a:p>
+        </p:txBody>
+      </p:sp>
+      <p:sp>
+        <p:nvSpPr>
+          <p:cNvPr id="9" name="Text 7"/>
+          <p:cNvSpPr/>
+          <p:nvPr/>
+        </p:nvSpPr>
+        <p:spPr>
+          <a:xfrm>
+            <a:off x="902056" y="3566160"/>
+            <a:ext cx="1682496" cy="960120"/>
+          </a:xfrm>
+          <a:prstGeom prst="rect">
+            <a:avLst/>
+          </a:prstGeom>
+          <a:noFill/>
+          <a:ln/>
+        </p:spPr>
+        <p:txBody>
+          <a:bodyPr wrap="square" rtlCol="0" anchor="ctr"/>
+          <a:lstStyle/>
+          <a:p>
+            <a:pPr indent="0" marL="0">
+              <a:buNone/>
+            </a:pPr>
+            <a:r>
+              <a:rPr lang="en-US" sz="980" dirty="0">
                 <a:solidFill>
                   <a:srgbClr val="CBD5E1"/>
                 </a:solidFill>
@@ -2457,47 +8622,163 @@
                 <a:ea typeface="Segoe UI" pitchFamily="34" charset="-122"/>
                 <a:cs typeface="Segoe UI" pitchFamily="34" charset="-120"/>
               </a:rPr>
-              <a:t>Tolerant extraction - partial data with a warning beats zero data</a:t>
-            </a:r>
-            <a:endParaRPr lang="en-US" sz="1600" dirty="0"/>
-          </a:p>
-          <a:p>
-            <a:pPr marL="342900" indent="-342900">
-              <a:lnSpc>
-                <a:spcPct val="115000"/>
-              </a:lnSpc>
-              <a:spcAft>
-                <a:spcPts val="1000"/>
-              </a:spcAft>
-              <a:buSzPct val="100000"/>
-              <a:buChar char="▸"/>
-            </a:pPr>
-            <a:r>
-              <a:rPr lang="en-US" sz="1600" dirty="0">
-                <a:solidFill>
-                  <a:srgbClr val="CBD5E1"/>
+              <a:t>Polite, rate-limited, and resumable - the run can stop and continue.</a:t>
+            </a:r>
+            <a:endParaRPr lang="en-US" sz="980" dirty="0"/>
+          </a:p>
+        </p:txBody>
+      </p:sp>
+      <p:sp>
+        <p:nvSpPr>
+          <p:cNvPr id="10" name="Shape 8"/>
+          <p:cNvSpPr/>
+          <p:nvPr/>
+        </p:nvSpPr>
+        <p:spPr>
+          <a:xfrm>
+            <a:off x="2726284" y="3419856"/>
+            <a:ext cx="210312" cy="274320"/>
+          </a:xfrm>
+          <a:prstGeom prst="rightArrow">
+            <a:avLst/>
+          </a:prstGeom>
+          <a:solidFill>
+            <a:srgbClr val="06B6D4"/>
+          </a:solidFill>
+          <a:ln/>
+        </p:spPr>
+      </p:sp>
+      <p:sp>
+        <p:nvSpPr>
+          <p:cNvPr id="11" name="Shape 9"/>
+          <p:cNvSpPr/>
+          <p:nvPr/>
+        </p:nvSpPr>
+        <p:spPr>
+          <a:xfrm>
+            <a:off x="2950312" y="2514600"/>
+            <a:ext cx="1938528" cy="2103120"/>
+          </a:xfrm>
+          <a:prstGeom prst="roundRect">
+            <a:avLst>
+              <a:gd name="adj" fmla="val 3302"/>
+            </a:avLst>
+          </a:prstGeom>
+          <a:solidFill>
+            <a:srgbClr val="111A2E"/>
+          </a:solidFill>
+          <a:ln w="19050">
+            <a:solidFill>
+              <a:srgbClr val="06B6D4"/>
+            </a:solidFill>
+            <a:prstDash val="solid"/>
+          </a:ln>
+        </p:spPr>
+      </p:sp>
+      <p:sp>
+        <p:nvSpPr>
+          <p:cNvPr id="12" name="Text 10"/>
+          <p:cNvSpPr/>
+          <p:nvPr/>
+        </p:nvSpPr>
+        <p:spPr>
+          <a:xfrm>
+            <a:off x="3078328" y="2633472"/>
+            <a:ext cx="1682496" cy="310896"/>
+          </a:xfrm>
+          <a:prstGeom prst="rect">
+            <a:avLst/>
+          </a:prstGeom>
+          <a:noFill/>
+          <a:ln/>
+        </p:spPr>
+        <p:txBody>
+          <a:bodyPr wrap="square" rtlCol="0" anchor="ctr"/>
+          <a:lstStyle/>
+          <a:p>
+            <a:pPr indent="0" marL="0">
+              <a:buNone/>
+            </a:pPr>
+            <a:r>
+              <a:rPr lang="en-US" sz="1100" b="1" dirty="0">
+                <a:solidFill>
+                  <a:srgbClr val="06B6D4"/>
+                </a:solidFill>
+                <a:latin typeface="Consolas" pitchFamily="34" charset="0"/>
+                <a:ea typeface="Consolas" pitchFamily="34" charset="-122"/>
+                <a:cs typeface="Consolas" pitchFamily="34" charset="-120"/>
+              </a:rPr>
+              <a:t>02</a:t>
+            </a:r>
+            <a:endParaRPr lang="en-US" sz="1100" dirty="0"/>
+          </a:p>
+        </p:txBody>
+      </p:sp>
+      <p:sp>
+        <p:nvSpPr>
+          <p:cNvPr id="13" name="Text 11"/>
+          <p:cNvSpPr/>
+          <p:nvPr/>
+        </p:nvSpPr>
+        <p:spPr>
+          <a:xfrm>
+            <a:off x="3078328" y="2962656"/>
+            <a:ext cx="1682496" cy="566928"/>
+          </a:xfrm>
+          <a:prstGeom prst="rect">
+            <a:avLst/>
+          </a:prstGeom>
+          <a:noFill/>
+          <a:ln/>
+        </p:spPr>
+        <p:txBody>
+          <a:bodyPr wrap="square" rtlCol="0" anchor="ctr"/>
+          <a:lstStyle/>
+          <a:p>
+            <a:pPr indent="0" marL="0">
+              <a:buNone/>
+            </a:pPr>
+            <a:r>
+              <a:rPr lang="en-US" sz="1350" b="1" dirty="0">
+                <a:solidFill>
+                  <a:srgbClr val="FFFFFF"/>
                 </a:solidFill>
                 <a:latin typeface="Segoe UI" pitchFamily="34" charset="0"/>
                 <a:ea typeface="Segoe UI" pitchFamily="34" charset="-122"/>
                 <a:cs typeface="Segoe UI" pitchFamily="34" charset="-120"/>
               </a:rPr>
-              <a:t>Retries with backoff and honest failure reports</a:t>
-            </a:r>
-            <a:endParaRPr lang="en-US" sz="1600" dirty="0"/>
-          </a:p>
-          <a:p>
-            <a:pPr marL="342900" indent="-342900">
-              <a:lnSpc>
-                <a:spcPct val="115000"/>
-              </a:lnSpc>
-              <a:spcAft>
-                <a:spcPts val="1000"/>
-              </a:spcAft>
-              <a:buSzPct val="100000"/>
-              <a:buChar char="▸"/>
-            </a:pPr>
-            <a:r>
-              <a:rPr lang="en-US" sz="1600" dirty="0">
+              <a:t>Extract</a:t>
+            </a:r>
+            <a:endParaRPr lang="en-US" sz="1350" dirty="0"/>
+          </a:p>
+        </p:txBody>
+      </p:sp>
+      <p:sp>
+        <p:nvSpPr>
+          <p:cNvPr id="14" name="Text 12"/>
+          <p:cNvSpPr/>
+          <p:nvPr/>
+        </p:nvSpPr>
+        <p:spPr>
+          <a:xfrm>
+            <a:off x="3078328" y="3566160"/>
+            <a:ext cx="1682496" cy="960120"/>
+          </a:xfrm>
+          <a:prstGeom prst="rect">
+            <a:avLst/>
+          </a:prstGeom>
+          <a:noFill/>
+          <a:ln/>
+        </p:spPr>
+        <p:txBody>
+          <a:bodyPr wrap="square" rtlCol="0" anchor="ctr"/>
+          <a:lstStyle/>
+          <a:p>
+            <a:pPr indent="0" marL="0">
+              <a:buNone/>
+            </a:pPr>
+            <a:r>
+              <a:rPr lang="en-US" sz="980" dirty="0">
                 <a:solidFill>
                   <a:srgbClr val="CBD5E1"/>
                 </a:solidFill>
@@ -2505,22 +8786,69 @@
                 <a:ea typeface="Segoe UI" pitchFamily="34" charset="-122"/>
                 <a:cs typeface="Segoe UI" pitchFamily="34" charset="-120"/>
               </a:rPr>
-              <a:t>Structured run logs: fetched, skipped, doubted</a:t>
-            </a:r>
-            <a:endParaRPr lang="en-US" sz="1600" dirty="0"/>
-          </a:p>
-        </p:txBody>
-      </p:sp>
-      <p:sp>
-        <p:nvSpPr>
-          <p:cNvPr id="7" name="Text 5"/>
-          <p:cNvSpPr/>
-          <p:nvPr/>
-        </p:nvSpPr>
-        <p:spPr>
-          <a:xfrm>
-            <a:off x="10698480" y="6355080"/>
-            <a:ext cx="1188720" cy="365760"/>
+              <a:t>Structural anchors with multiple fallbacks instead of brittle selectors.</a:t>
+            </a:r>
+            <a:endParaRPr lang="en-US" sz="980" dirty="0"/>
+          </a:p>
+        </p:txBody>
+      </p:sp>
+      <p:sp>
+        <p:nvSpPr>
+          <p:cNvPr id="15" name="Shape 13"/>
+          <p:cNvSpPr/>
+          <p:nvPr/>
+        </p:nvSpPr>
+        <p:spPr>
+          <a:xfrm>
+            <a:off x="4902556" y="3419856"/>
+            <a:ext cx="210312" cy="274320"/>
+          </a:xfrm>
+          <a:prstGeom prst="rightArrow">
+            <a:avLst/>
+          </a:prstGeom>
+          <a:solidFill>
+            <a:srgbClr val="06B6D4"/>
+          </a:solidFill>
+          <a:ln/>
+        </p:spPr>
+      </p:sp>
+      <p:sp>
+        <p:nvSpPr>
+          <p:cNvPr id="16" name="Shape 14"/>
+          <p:cNvSpPr/>
+          <p:nvPr/>
+        </p:nvSpPr>
+        <p:spPr>
+          <a:xfrm>
+            <a:off x="5126584" y="2514600"/>
+            <a:ext cx="1938528" cy="2103120"/>
+          </a:xfrm>
+          <a:prstGeom prst="roundRect">
+            <a:avLst>
+              <a:gd name="adj" fmla="val 3302"/>
+            </a:avLst>
+          </a:prstGeom>
+          <a:solidFill>
+            <a:srgbClr val="111A2E"/>
+          </a:solidFill>
+          <a:ln w="19050">
+            <a:solidFill>
+              <a:srgbClr val="3B82F6"/>
+            </a:solidFill>
+            <a:prstDash val="solid"/>
+          </a:ln>
+        </p:spPr>
+      </p:sp>
+      <p:sp>
+        <p:nvSpPr>
+          <p:cNvPr id="17" name="Text 15"/>
+          <p:cNvSpPr/>
+          <p:nvPr/>
+        </p:nvSpPr>
+        <p:spPr>
+          <a:xfrm>
+            <a:off x="5254600" y="2633472"/>
+            <a:ext cx="1682496" cy="310896"/>
           </a:xfrm>
           <a:prstGeom prst="rect">
             <a:avLst/>
@@ -2532,19 +8860,526 @@
           <a:bodyPr wrap="square" rtlCol="0" anchor="ctr"/>
           <a:lstStyle/>
           <a:p>
-            <a:pPr algn="r" indent="0" marL="0">
+            <a:pPr indent="0" marL="0">
               <a:buNone/>
             </a:pPr>
             <a:r>
-              <a:rPr lang="en-US" sz="1000" dirty="0">
-                <a:solidFill>
-                  <a:srgbClr val="64748B"/>
+              <a:rPr lang="en-US" sz="1100" b="1" dirty="0">
+                <a:solidFill>
+                  <a:srgbClr val="3B82F6"/>
                 </a:solidFill>
                 <a:latin typeface="Consolas" pitchFamily="34" charset="0"/>
                 <a:ea typeface="Consolas" pitchFamily="34" charset="-122"/>
                 <a:cs typeface="Consolas" pitchFamily="34" charset="-120"/>
               </a:rPr>
-              <a:t>4 / 7</a:t>
+              <a:t>03</a:t>
+            </a:r>
+            <a:endParaRPr lang="en-US" sz="1100" dirty="0"/>
+          </a:p>
+        </p:txBody>
+      </p:sp>
+      <p:sp>
+        <p:nvSpPr>
+          <p:cNvPr id="18" name="Text 16"/>
+          <p:cNvSpPr/>
+          <p:nvPr/>
+        </p:nvSpPr>
+        <p:spPr>
+          <a:xfrm>
+            <a:off x="5254600" y="2962656"/>
+            <a:ext cx="1682496" cy="566928"/>
+          </a:xfrm>
+          <a:prstGeom prst="rect">
+            <a:avLst/>
+          </a:prstGeom>
+          <a:noFill/>
+          <a:ln/>
+        </p:spPr>
+        <p:txBody>
+          <a:bodyPr wrap="square" rtlCol="0" anchor="ctr"/>
+          <a:lstStyle/>
+          <a:p>
+            <a:pPr indent="0" marL="0">
+              <a:buNone/>
+            </a:pPr>
+            <a:r>
+              <a:rPr lang="en-US" sz="1350" b="1" dirty="0">
+                <a:solidFill>
+                  <a:srgbClr val="FFFFFF"/>
+                </a:solidFill>
+                <a:latin typeface="Segoe UI" pitchFamily="34" charset="0"/>
+                <a:ea typeface="Segoe UI" pitchFamily="34" charset="-122"/>
+                <a:cs typeface="Segoe UI" pitchFamily="34" charset="-120"/>
+              </a:rPr>
+              <a:t>Validate</a:t>
+            </a:r>
+            <a:endParaRPr lang="en-US" sz="1350" dirty="0"/>
+          </a:p>
+        </p:txBody>
+      </p:sp>
+      <p:sp>
+        <p:nvSpPr>
+          <p:cNvPr id="19" name="Text 17"/>
+          <p:cNvSpPr/>
+          <p:nvPr/>
+        </p:nvSpPr>
+        <p:spPr>
+          <a:xfrm>
+            <a:off x="5254600" y="3566160"/>
+            <a:ext cx="1682496" cy="960120"/>
+          </a:xfrm>
+          <a:prstGeom prst="rect">
+            <a:avLst/>
+          </a:prstGeom>
+          <a:noFill/>
+          <a:ln/>
+        </p:spPr>
+        <p:txBody>
+          <a:bodyPr wrap="square" rtlCol="0" anchor="ctr"/>
+          <a:lstStyle/>
+          <a:p>
+            <a:pPr indent="0" marL="0">
+              <a:buNone/>
+            </a:pPr>
+            <a:r>
+              <a:rPr lang="en-US" sz="980" dirty="0">
+                <a:solidFill>
+                  <a:srgbClr val="CBD5E1"/>
+                </a:solidFill>
+                <a:latin typeface="Segoe UI" pitchFamily="34" charset="0"/>
+                <a:ea typeface="Segoe UI" pitchFamily="34" charset="-122"/>
+                <a:cs typeface="Segoe UI" pitchFamily="34" charset="-120"/>
+              </a:rPr>
+              <a:t>Row counts, schema, and sanity ranges checked on every single run.</a:t>
+            </a:r>
+            <a:endParaRPr lang="en-US" sz="980" dirty="0"/>
+          </a:p>
+        </p:txBody>
+      </p:sp>
+      <p:sp>
+        <p:nvSpPr>
+          <p:cNvPr id="20" name="Shape 18"/>
+          <p:cNvSpPr/>
+          <p:nvPr/>
+        </p:nvSpPr>
+        <p:spPr>
+          <a:xfrm>
+            <a:off x="7078828" y="3419856"/>
+            <a:ext cx="210312" cy="274320"/>
+          </a:xfrm>
+          <a:prstGeom prst="rightArrow">
+            <a:avLst/>
+          </a:prstGeom>
+          <a:solidFill>
+            <a:srgbClr val="06B6D4"/>
+          </a:solidFill>
+          <a:ln/>
+        </p:spPr>
+      </p:sp>
+      <p:sp>
+        <p:nvSpPr>
+          <p:cNvPr id="21" name="Shape 19"/>
+          <p:cNvSpPr/>
+          <p:nvPr/>
+        </p:nvSpPr>
+        <p:spPr>
+          <a:xfrm>
+            <a:off x="7302856" y="2514600"/>
+            <a:ext cx="1938528" cy="2103120"/>
+          </a:xfrm>
+          <a:prstGeom prst="roundRect">
+            <a:avLst>
+              <a:gd name="adj" fmla="val 3302"/>
+            </a:avLst>
+          </a:prstGeom>
+          <a:solidFill>
+            <a:srgbClr val="111A2E"/>
+          </a:solidFill>
+          <a:ln w="19050">
+            <a:solidFill>
+              <a:srgbClr val="06B6D4"/>
+            </a:solidFill>
+            <a:prstDash val="solid"/>
+          </a:ln>
+        </p:spPr>
+      </p:sp>
+      <p:sp>
+        <p:nvSpPr>
+          <p:cNvPr id="22" name="Text 20"/>
+          <p:cNvSpPr/>
+          <p:nvPr/>
+        </p:nvSpPr>
+        <p:spPr>
+          <a:xfrm>
+            <a:off x="7430872" y="2633472"/>
+            <a:ext cx="1682496" cy="310896"/>
+          </a:xfrm>
+          <a:prstGeom prst="rect">
+            <a:avLst/>
+          </a:prstGeom>
+          <a:noFill/>
+          <a:ln/>
+        </p:spPr>
+        <p:txBody>
+          <a:bodyPr wrap="square" rtlCol="0" anchor="ctr"/>
+          <a:lstStyle/>
+          <a:p>
+            <a:pPr indent="0" marL="0">
+              <a:buNone/>
+            </a:pPr>
+            <a:r>
+              <a:rPr lang="en-US" sz="1100" b="1" dirty="0">
+                <a:solidFill>
+                  <a:srgbClr val="06B6D4"/>
+                </a:solidFill>
+                <a:latin typeface="Consolas" pitchFamily="34" charset="0"/>
+                <a:ea typeface="Consolas" pitchFamily="34" charset="-122"/>
+                <a:cs typeface="Consolas" pitchFamily="34" charset="-120"/>
+              </a:rPr>
+              <a:t>04</a:t>
+            </a:r>
+            <a:endParaRPr lang="en-US" sz="1100" dirty="0"/>
+          </a:p>
+        </p:txBody>
+      </p:sp>
+      <p:sp>
+        <p:nvSpPr>
+          <p:cNvPr id="23" name="Text 21"/>
+          <p:cNvSpPr/>
+          <p:nvPr/>
+        </p:nvSpPr>
+        <p:spPr>
+          <a:xfrm>
+            <a:off x="7430872" y="2962656"/>
+            <a:ext cx="1682496" cy="566928"/>
+          </a:xfrm>
+          <a:prstGeom prst="rect">
+            <a:avLst/>
+          </a:prstGeom>
+          <a:noFill/>
+          <a:ln/>
+        </p:spPr>
+        <p:txBody>
+          <a:bodyPr wrap="square" rtlCol="0" anchor="ctr"/>
+          <a:lstStyle/>
+          <a:p>
+            <a:pPr indent="0" marL="0">
+              <a:buNone/>
+            </a:pPr>
+            <a:r>
+              <a:rPr lang="en-US" sz="1350" b="1" dirty="0">
+                <a:solidFill>
+                  <a:srgbClr val="FFFFFF"/>
+                </a:solidFill>
+                <a:latin typeface="Segoe UI" pitchFamily="34" charset="0"/>
+                <a:ea typeface="Segoe UI" pitchFamily="34" charset="-122"/>
+                <a:cs typeface="Segoe UI" pitchFamily="34" charset="-120"/>
+              </a:rPr>
+              <a:t>Store</a:t>
+            </a:r>
+            <a:endParaRPr lang="en-US" sz="1350" dirty="0"/>
+          </a:p>
+        </p:txBody>
+      </p:sp>
+      <p:sp>
+        <p:nvSpPr>
+          <p:cNvPr id="24" name="Text 22"/>
+          <p:cNvSpPr/>
+          <p:nvPr/>
+        </p:nvSpPr>
+        <p:spPr>
+          <a:xfrm>
+            <a:off x="7430872" y="3566160"/>
+            <a:ext cx="1682496" cy="960120"/>
+          </a:xfrm>
+          <a:prstGeom prst="rect">
+            <a:avLst/>
+          </a:prstGeom>
+          <a:noFill/>
+          <a:ln/>
+        </p:spPr>
+        <p:txBody>
+          <a:bodyPr wrap="square" rtlCol="0" anchor="ctr"/>
+          <a:lstStyle/>
+          <a:p>
+            <a:pPr indent="0" marL="0">
+              <a:buNone/>
+            </a:pPr>
+            <a:r>
+              <a:rPr lang="en-US" sz="980" dirty="0">
+                <a:solidFill>
+                  <a:srgbClr val="CBD5E1"/>
+                </a:solidFill>
+                <a:latin typeface="Segoe UI" pitchFamily="34" charset="0"/>
+                <a:ea typeface="Segoe UI" pitchFamily="34" charset="-122"/>
+                <a:cs typeface="Segoe UI" pitchFamily="34" charset="-120"/>
+              </a:rPr>
+              <a:t>Clean shapes that downstream tools want, not raw scrapings.</a:t>
+            </a:r>
+            <a:endParaRPr lang="en-US" sz="980" dirty="0"/>
+          </a:p>
+        </p:txBody>
+      </p:sp>
+      <p:sp>
+        <p:nvSpPr>
+          <p:cNvPr id="25" name="Shape 23"/>
+          <p:cNvSpPr/>
+          <p:nvPr/>
+        </p:nvSpPr>
+        <p:spPr>
+          <a:xfrm>
+            <a:off x="9255100" y="3419856"/>
+            <a:ext cx="210312" cy="274320"/>
+          </a:xfrm>
+          <a:prstGeom prst="rightArrow">
+            <a:avLst/>
+          </a:prstGeom>
+          <a:solidFill>
+            <a:srgbClr val="06B6D4"/>
+          </a:solidFill>
+          <a:ln/>
+        </p:spPr>
+      </p:sp>
+      <p:sp>
+        <p:nvSpPr>
+          <p:cNvPr id="26" name="Shape 24"/>
+          <p:cNvSpPr/>
+          <p:nvPr/>
+        </p:nvSpPr>
+        <p:spPr>
+          <a:xfrm>
+            <a:off x="9479128" y="2514600"/>
+            <a:ext cx="1938528" cy="2103120"/>
+          </a:xfrm>
+          <a:prstGeom prst="roundRect">
+            <a:avLst>
+              <a:gd name="adj" fmla="val 3302"/>
+            </a:avLst>
+          </a:prstGeom>
+          <a:solidFill>
+            <a:srgbClr val="111A2E"/>
+          </a:solidFill>
+          <a:ln w="19050">
+            <a:solidFill>
+              <a:srgbClr val="3B82F6"/>
+            </a:solidFill>
+            <a:prstDash val="solid"/>
+          </a:ln>
+        </p:spPr>
+      </p:sp>
+      <p:sp>
+        <p:nvSpPr>
+          <p:cNvPr id="27" name="Text 25"/>
+          <p:cNvSpPr/>
+          <p:nvPr/>
+        </p:nvSpPr>
+        <p:spPr>
+          <a:xfrm>
+            <a:off x="9607144" y="2633472"/>
+            <a:ext cx="1682496" cy="310896"/>
+          </a:xfrm>
+          <a:prstGeom prst="rect">
+            <a:avLst/>
+          </a:prstGeom>
+          <a:noFill/>
+          <a:ln/>
+        </p:spPr>
+        <p:txBody>
+          <a:bodyPr wrap="square" rtlCol="0" anchor="ctr"/>
+          <a:lstStyle/>
+          <a:p>
+            <a:pPr indent="0" marL="0">
+              <a:buNone/>
+            </a:pPr>
+            <a:r>
+              <a:rPr lang="en-US" sz="1100" b="1" dirty="0">
+                <a:solidFill>
+                  <a:srgbClr val="3B82F6"/>
+                </a:solidFill>
+                <a:latin typeface="Consolas" pitchFamily="34" charset="0"/>
+                <a:ea typeface="Consolas" pitchFamily="34" charset="-122"/>
+                <a:cs typeface="Consolas" pitchFamily="34" charset="-120"/>
+              </a:rPr>
+              <a:t>05</a:t>
+            </a:r>
+            <a:endParaRPr lang="en-US" sz="1100" dirty="0"/>
+          </a:p>
+        </p:txBody>
+      </p:sp>
+      <p:sp>
+        <p:nvSpPr>
+          <p:cNvPr id="28" name="Text 26"/>
+          <p:cNvSpPr/>
+          <p:nvPr/>
+        </p:nvSpPr>
+        <p:spPr>
+          <a:xfrm>
+            <a:off x="9607144" y="2962656"/>
+            <a:ext cx="1682496" cy="566928"/>
+          </a:xfrm>
+          <a:prstGeom prst="rect">
+            <a:avLst/>
+          </a:prstGeom>
+          <a:noFill/>
+          <a:ln/>
+        </p:spPr>
+        <p:txBody>
+          <a:bodyPr wrap="square" rtlCol="0" anchor="ctr"/>
+          <a:lstStyle/>
+          <a:p>
+            <a:pPr indent="0" marL="0">
+              <a:buNone/>
+            </a:pPr>
+            <a:r>
+              <a:rPr lang="en-US" sz="1350" b="1" dirty="0">
+                <a:solidFill>
+                  <a:srgbClr val="FFFFFF"/>
+                </a:solidFill>
+                <a:latin typeface="Segoe UI" pitchFamily="34" charset="0"/>
+                <a:ea typeface="Segoe UI" pitchFamily="34" charset="-122"/>
+                <a:cs typeface="Segoe UI" pitchFamily="34" charset="-120"/>
+              </a:rPr>
+              <a:t>Monitor</a:t>
+            </a:r>
+            <a:endParaRPr lang="en-US" sz="1350" dirty="0"/>
+          </a:p>
+        </p:txBody>
+      </p:sp>
+      <p:sp>
+        <p:nvSpPr>
+          <p:cNvPr id="29" name="Text 27"/>
+          <p:cNvSpPr/>
+          <p:nvPr/>
+        </p:nvSpPr>
+        <p:spPr>
+          <a:xfrm>
+            <a:off x="9607144" y="3566160"/>
+            <a:ext cx="1682496" cy="960120"/>
+          </a:xfrm>
+          <a:prstGeom prst="rect">
+            <a:avLst/>
+          </a:prstGeom>
+          <a:noFill/>
+          <a:ln/>
+        </p:spPr>
+        <p:txBody>
+          <a:bodyPr wrap="square" rtlCol="0" anchor="ctr"/>
+          <a:lstStyle/>
+          <a:p>
+            <a:pPr indent="0" marL="0">
+              <a:buNone/>
+            </a:pPr>
+            <a:r>
+              <a:rPr lang="en-US" sz="980" dirty="0">
+                <a:solidFill>
+                  <a:srgbClr val="CBD5E1"/>
+                </a:solidFill>
+                <a:latin typeface="Segoe UI" pitchFamily="34" charset="0"/>
+                <a:ea typeface="Segoe UI" pitchFamily="34" charset="-122"/>
+                <a:cs typeface="Segoe UI" pitchFamily="34" charset="-120"/>
+              </a:rPr>
+              <a:t>Freshness alarms and structured logs instead of silent deaths.</a:t>
+            </a:r>
+            <a:endParaRPr lang="en-US" sz="980" dirty="0"/>
+          </a:p>
+        </p:txBody>
+      </p:sp>
+      <p:sp>
+        <p:nvSpPr>
+          <p:cNvPr id="30" name="Shape 28"/>
+          <p:cNvSpPr/>
+          <p:nvPr/>
+        </p:nvSpPr>
+        <p:spPr>
+          <a:xfrm>
+            <a:off x="822960" y="5961888"/>
+            <a:ext cx="10515600" cy="0"/>
+          </a:xfrm>
+          <a:prstGeom prst="line">
+            <a:avLst/>
+          </a:prstGeom>
+          <a:noFill/>
+          <a:ln w="12700">
+            <a:solidFill>
+              <a:srgbClr val="1E2D45"/>
+            </a:solidFill>
+            <a:prstDash val="solid"/>
+          </a:ln>
+        </p:spPr>
+      </p:sp>
+      <p:sp>
+        <p:nvSpPr>
+          <p:cNvPr id="31" name="Text 29"/>
+          <p:cNvSpPr/>
+          <p:nvPr/>
+        </p:nvSpPr>
+        <p:spPr>
+          <a:xfrm>
+            <a:off x="822960" y="6053328"/>
+            <a:ext cx="9692640" cy="457200"/>
+          </a:xfrm>
+          <a:prstGeom prst="rect">
+            <a:avLst/>
+          </a:prstGeom>
+          <a:noFill/>
+          <a:ln/>
+        </p:spPr>
+        <p:txBody>
+          <a:bodyPr wrap="square" rtlCol="0" anchor="ctr"/>
+          <a:lstStyle/>
+          <a:p>
+            <a:pPr indent="0" marL="0">
+              <a:buNone/>
+            </a:pPr>
+            <a:r>
+              <a:rPr lang="en-US" sz="1150" dirty="0">
+                <a:solidFill>
+                  <a:srgbClr val="64748B"/>
+                </a:solidFill>
+                <a:latin typeface="Segoe UI" pitchFamily="34" charset="0"/>
+                <a:ea typeface="Segoe UI" pitchFamily="34" charset="-122"/>
+                <a:cs typeface="Segoe UI" pitchFamily="34" charset="-120"/>
+              </a:rPr>
+              <a:t>Every stage records what it did - nothing about a run is a mystery.</a:t>
+            </a:r>
+            <a:endParaRPr lang="en-US" sz="1150" dirty="0"/>
+          </a:p>
+        </p:txBody>
+      </p:sp>
+      <p:sp>
+        <p:nvSpPr>
+          <p:cNvPr id="32" name="Text 30"/>
+          <p:cNvSpPr/>
+          <p:nvPr/>
+        </p:nvSpPr>
+        <p:spPr>
+          <a:xfrm>
+            <a:off x="10698480" y="6382512"/>
+            <a:ext cx="1188720" cy="365760"/>
+          </a:xfrm>
+          <a:prstGeom prst="rect">
+            <a:avLst/>
+          </a:prstGeom>
+          <a:noFill/>
+          <a:ln/>
+        </p:spPr>
+        <p:txBody>
+          <a:bodyPr wrap="square" rtlCol="0" anchor="ctr"/>
+          <a:lstStyle/>
+          <a:p>
+            <a:pPr algn="r" indent="0" marL="0">
+              <a:buNone/>
+            </a:pPr>
+            <a:r>
+              <a:rPr lang="en-US" sz="1000" dirty="0">
+                <a:solidFill>
+                  <a:srgbClr val="64748B"/>
+                </a:solidFill>
+                <a:latin typeface="Consolas" pitchFamily="34" charset="0"/>
+                <a:ea typeface="Consolas" pitchFamily="34" charset="-122"/>
+                <a:cs typeface="Consolas" pitchFamily="34" charset="-120"/>
+              </a:rPr>
+              <a:t>4 / 15</a:t>
             </a:r>
             <a:endParaRPr lang="en-US" sz="1000" dirty="0"/>
           </a:p>
@@ -2655,7 +9490,7 @@
                 <a:ea typeface="Consolas" pitchFamily="34" charset="-122"/>
                 <a:cs typeface="Consolas" pitchFamily="34" charset="-120"/>
               </a:rPr>
-              <a:t>ETHICS</a:t>
+              <a:t>THE TOOLKIT</a:t>
             </a:r>
             <a:endParaRPr lang="en-US" sz="1200" dirty="0"/>
           </a:p>
@@ -2669,8 +9504,8 @@
         </p:nvSpPr>
         <p:spPr>
           <a:xfrm>
-            <a:off x="822960" y="960120"/>
-            <a:ext cx="10515600" cy="868680"/>
+            <a:off x="822960" y="914400"/>
+            <a:ext cx="10561320" cy="868680"/>
           </a:xfrm>
           <a:prstGeom prst="rect">
             <a:avLst/>
@@ -2686,7 +9521,7 @@
               <a:buNone/>
             </a:pPr>
             <a:r>
-              <a:rPr lang="en-US" sz="3000" b="1" dirty="0">
+              <a:rPr lang="en-US" sz="2700" b="1" dirty="0">
                 <a:solidFill>
                   <a:srgbClr val="FFFFFF"/>
                 </a:solidFill>
@@ -2694,139 +9529,659 @@
                 <a:ea typeface="Segoe UI" pitchFamily="34" charset="-122"/>
                 <a:cs typeface="Segoe UI" pitchFamily="34" charset="-120"/>
               </a:rPr>
-              <a:t>Be a polite guest</a:t>
-            </a:r>
-            <a:endParaRPr lang="en-US" sz="3000" dirty="0"/>
-          </a:p>
-        </p:txBody>
-      </p:sp>
-      <p:sp>
-        <p:nvSpPr>
-          <p:cNvPr id="6" name="Text 4"/>
-          <p:cNvSpPr/>
-          <p:nvPr/>
-        </p:nvSpPr>
-        <p:spPr>
-          <a:xfrm>
-            <a:off x="868680" y="2057400"/>
-            <a:ext cx="10424160" cy="3566160"/>
-          </a:xfrm>
-          <a:prstGeom prst="rect">
-            <a:avLst/>
-          </a:prstGeom>
-          <a:noFill/>
-          <a:ln/>
-        </p:spPr>
-        <p:txBody>
-          <a:bodyPr wrap="square" rtlCol="0" anchor="t"/>
-          <a:lstStyle/>
-          <a:p>
-            <a:pPr marL="342900" indent="-342900">
-              <a:lnSpc>
-                <a:spcPct val="115000"/>
-              </a:lnSpc>
-              <a:spcAft>
-                <a:spcPts val="1000"/>
-              </a:spcAft>
-              <a:buSzPct val="100000"/>
-              <a:buChar char="▸"/>
-            </a:pPr>
-            <a:r>
-              <a:rPr lang="en-US" sz="1600" dirty="0">
-                <a:solidFill>
-                  <a:srgbClr val="CBD5E1"/>
+              <a:t>One framework, four disciplines</a:t>
+            </a:r>
+            <a:endParaRPr lang="en-US" sz="2700" dirty="0"/>
+          </a:p>
+        </p:txBody>
+      </p:sp>
+      <p:sp>
+        <p:nvSpPr>
+          <p:cNvPr id="6" name="Shape 4"/>
+          <p:cNvSpPr/>
+          <p:nvPr/>
+        </p:nvSpPr>
+        <p:spPr>
+          <a:xfrm>
+            <a:off x="822960" y="2194560"/>
+            <a:ext cx="2423160" cy="2697480"/>
+          </a:xfrm>
+          <a:prstGeom prst="roundRect">
+            <a:avLst>
+              <a:gd name="adj" fmla="val 3019"/>
+            </a:avLst>
+          </a:prstGeom>
+          <a:solidFill>
+            <a:srgbClr val="111A2E"/>
+          </a:solidFill>
+          <a:ln w="12700">
+            <a:solidFill>
+              <a:srgbClr val="1E2D45"/>
+            </a:solidFill>
+            <a:prstDash val="solid"/>
+          </a:ln>
+        </p:spPr>
+      </p:sp>
+      <p:sp>
+        <p:nvSpPr>
+          <p:cNvPr id="7" name="Text 5"/>
+          <p:cNvSpPr/>
+          <p:nvPr/>
+        </p:nvSpPr>
+        <p:spPr>
+          <a:xfrm>
+            <a:off x="960120" y="2514600"/>
+            <a:ext cx="2148840" cy="914400"/>
+          </a:xfrm>
+          <a:prstGeom prst="rect">
+            <a:avLst/>
+          </a:prstGeom>
+          <a:noFill/>
+          <a:ln/>
+        </p:spPr>
+        <p:txBody>
+          <a:bodyPr wrap="square" rtlCol="0" anchor="ctr"/>
+          <a:lstStyle/>
+          <a:p>
+            <a:pPr algn="ctr" indent="0" marL="0">
+              <a:buNone/>
+            </a:pPr>
+            <a:r>
+              <a:rPr lang="en-US" sz="3800" b="1" dirty="0">
+                <a:solidFill>
+                  <a:srgbClr val="3B82F6"/>
                 </a:solidFill>
                 <a:latin typeface="Segoe UI" pitchFamily="34" charset="0"/>
                 <a:ea typeface="Segoe UI" pitchFamily="34" charset="-122"/>
                 <a:cs typeface="Segoe UI" pitchFamily="34" charset="-120"/>
               </a:rPr>
-              <a:t>Respect robots directives and terms of service</a:t>
-            </a:r>
-            <a:endParaRPr lang="en-US" sz="1600" dirty="0"/>
-          </a:p>
-          <a:p>
-            <a:pPr marL="342900" indent="-342900">
-              <a:lnSpc>
-                <a:spcPct val="115000"/>
-              </a:lnSpc>
-              <a:spcAft>
-                <a:spcPts val="1000"/>
-              </a:spcAft>
-              <a:buSzPct val="100000"/>
-              <a:buChar char="▸"/>
-            </a:pPr>
-            <a:r>
-              <a:rPr lang="en-US" sz="1600" dirty="0">
-                <a:solidFill>
-                  <a:srgbClr val="CBD5E1"/>
+              <a:t>4,398</a:t>
+            </a:r>
+            <a:endParaRPr lang="en-US" sz="3800" dirty="0"/>
+          </a:p>
+        </p:txBody>
+      </p:sp>
+      <p:sp>
+        <p:nvSpPr>
+          <p:cNvPr id="8" name="Text 6"/>
+          <p:cNvSpPr/>
+          <p:nvPr/>
+        </p:nvSpPr>
+        <p:spPr>
+          <a:xfrm>
+            <a:off x="960120" y="3520440"/>
+            <a:ext cx="2148840" cy="502920"/>
+          </a:xfrm>
+          <a:prstGeom prst="rect">
+            <a:avLst/>
+          </a:prstGeom>
+          <a:noFill/>
+          <a:ln/>
+        </p:spPr>
+        <p:txBody>
+          <a:bodyPr wrap="square" rtlCol="0" anchor="ctr"/>
+          <a:lstStyle/>
+          <a:p>
+            <a:pPr algn="ctr" indent="0" marL="0">
+              <a:buNone/>
+            </a:pPr>
+            <a:r>
+              <a:rPr lang="en-US" sz="1450" b="1" dirty="0">
+                <a:solidFill>
+                  <a:srgbClr val="FFFFFF"/>
                 </a:solidFill>
                 <a:latin typeface="Segoe UI" pitchFamily="34" charset="0"/>
                 <a:ea typeface="Segoe UI" pitchFamily="34" charset="-122"/>
                 <a:cs typeface="Segoe UI" pitchFamily="34" charset="-120"/>
               </a:rPr>
-              <a:t>Rate-limit yourself before sites rate-limit you</a:t>
-            </a:r>
-            <a:endParaRPr lang="en-US" sz="1600" dirty="0"/>
-          </a:p>
-          <a:p>
-            <a:pPr marL="342900" indent="-342900">
-              <a:lnSpc>
-                <a:spcPct val="115000"/>
-              </a:lnSpc>
-              <a:spcAft>
-                <a:spcPts val="1000"/>
-              </a:spcAft>
-              <a:buSzPct val="100000"/>
-              <a:buChar char="▸"/>
-            </a:pPr>
-            <a:r>
-              <a:rPr lang="en-US" sz="1600" dirty="0">
-                <a:solidFill>
-                  <a:srgbClr val="CBD5E1"/>
+              <a:t>Lines of code</a:t>
+            </a:r>
+            <a:endParaRPr lang="en-US" sz="1450" dirty="0"/>
+          </a:p>
+        </p:txBody>
+      </p:sp>
+      <p:sp>
+        <p:nvSpPr>
+          <p:cNvPr id="9" name="Text 7"/>
+          <p:cNvSpPr/>
+          <p:nvPr/>
+        </p:nvSpPr>
+        <p:spPr>
+          <a:xfrm>
+            <a:off x="1005840" y="4069080"/>
+            <a:ext cx="2057400" cy="685800"/>
+          </a:xfrm>
+          <a:prstGeom prst="rect">
+            <a:avLst/>
+          </a:prstGeom>
+          <a:noFill/>
+          <a:ln/>
+        </p:spPr>
+        <p:txBody>
+          <a:bodyPr wrap="square" rtlCol="0" anchor="ctr"/>
+          <a:lstStyle/>
+          <a:p>
+            <a:pPr algn="ctr" indent="0" marL="0">
+              <a:buNone/>
+            </a:pPr>
+            <a:r>
+              <a:rPr lang="en-US" sz="1050" dirty="0">
+                <a:solidFill>
+                  <a:srgbClr val="94A3B8"/>
                 </a:solidFill>
                 <a:latin typeface="Segoe UI" pitchFamily="34" charset="0"/>
                 <a:ea typeface="Segoe UI" pitchFamily="34" charset="-122"/>
                 <a:cs typeface="Segoe UI" pitchFamily="34" charset="-120"/>
               </a:rPr>
-              <a:t>Public data only - no credentials, no pretending</a:t>
-            </a:r>
-            <a:endParaRPr lang="en-US" sz="1600" dirty="0"/>
-          </a:p>
-          <a:p>
-            <a:pPr marL="342900" indent="-342900">
-              <a:lnSpc>
-                <a:spcPct val="115000"/>
-              </a:lnSpc>
-              <a:spcAft>
-                <a:spcPts val="1000"/>
-              </a:spcAft>
-              <a:buSzPct val="100000"/>
-              <a:buChar char="▸"/>
-            </a:pPr>
-            <a:r>
-              <a:rPr lang="en-US" sz="1600" dirty="0">
-                <a:solidFill>
-                  <a:srgbClr val="CBD5E1"/>
+              <a:t>Open source and production-tested across client engagements.</a:t>
+            </a:r>
+            <a:endParaRPr lang="en-US" sz="1050" dirty="0"/>
+          </a:p>
+        </p:txBody>
+      </p:sp>
+      <p:sp>
+        <p:nvSpPr>
+          <p:cNvPr id="10" name="Shape 8"/>
+          <p:cNvSpPr/>
+          <p:nvPr/>
+        </p:nvSpPr>
+        <p:spPr>
+          <a:xfrm>
+            <a:off x="3520440" y="2194560"/>
+            <a:ext cx="2423160" cy="2697480"/>
+          </a:xfrm>
+          <a:prstGeom prst="roundRect">
+            <a:avLst>
+              <a:gd name="adj" fmla="val 3019"/>
+            </a:avLst>
+          </a:prstGeom>
+          <a:solidFill>
+            <a:srgbClr val="111A2E"/>
+          </a:solidFill>
+          <a:ln w="12700">
+            <a:solidFill>
+              <a:srgbClr val="1E2D45"/>
+            </a:solidFill>
+            <a:prstDash val="solid"/>
+          </a:ln>
+        </p:spPr>
+      </p:sp>
+      <p:sp>
+        <p:nvSpPr>
+          <p:cNvPr id="11" name="Text 9"/>
+          <p:cNvSpPr/>
+          <p:nvPr/>
+        </p:nvSpPr>
+        <p:spPr>
+          <a:xfrm>
+            <a:off x="3657600" y="2514600"/>
+            <a:ext cx="2148840" cy="914400"/>
+          </a:xfrm>
+          <a:prstGeom prst="rect">
+            <a:avLst/>
+          </a:prstGeom>
+          <a:noFill/>
+          <a:ln/>
+        </p:spPr>
+        <p:txBody>
+          <a:bodyPr wrap="square" rtlCol="0" anchor="ctr"/>
+          <a:lstStyle/>
+          <a:p>
+            <a:pPr algn="ctr" indent="0" marL="0">
+              <a:buNone/>
+            </a:pPr>
+            <a:r>
+              <a:rPr lang="en-US" sz="3800" b="1" dirty="0">
+                <a:solidFill>
+                  <a:srgbClr val="06B6D4"/>
                 </a:solidFill>
                 <a:latin typeface="Segoe UI" pitchFamily="34" charset="0"/>
                 <a:ea typeface="Segoe UI" pitchFamily="34" charset="-122"/>
                 <a:cs typeface="Segoe UI" pitchFamily="34" charset="-120"/>
               </a:rPr>
-              <a:t>Sustainable scraping is slow, boring, and ethical</a:t>
-            </a:r>
-            <a:endParaRPr lang="en-US" sz="1600" dirty="0"/>
-          </a:p>
-        </p:txBody>
-      </p:sp>
-      <p:sp>
-        <p:nvSpPr>
-          <p:cNvPr id="7" name="Text 5"/>
-          <p:cNvSpPr/>
-          <p:nvPr/>
-        </p:nvSpPr>
-        <p:spPr>
-          <a:xfrm>
-            <a:off x="10698480" y="6355080"/>
+              <a:t>4</a:t>
+            </a:r>
+            <a:endParaRPr lang="en-US" sz="3800" dirty="0"/>
+          </a:p>
+        </p:txBody>
+      </p:sp>
+      <p:sp>
+        <p:nvSpPr>
+          <p:cNvPr id="12" name="Text 10"/>
+          <p:cNvSpPr/>
+          <p:nvPr/>
+        </p:nvSpPr>
+        <p:spPr>
+          <a:xfrm>
+            <a:off x="3657600" y="3520440"/>
+            <a:ext cx="2148840" cy="502920"/>
+          </a:xfrm>
+          <a:prstGeom prst="rect">
+            <a:avLst/>
+          </a:prstGeom>
+          <a:noFill/>
+          <a:ln/>
+        </p:spPr>
+        <p:txBody>
+          <a:bodyPr wrap="square" rtlCol="0" anchor="ctr"/>
+          <a:lstStyle/>
+          <a:p>
+            <a:pPr algn="ctr" indent="0" marL="0">
+              <a:buNone/>
+            </a:pPr>
+            <a:r>
+              <a:rPr lang="en-US" sz="1450" b="1" dirty="0">
+                <a:solidFill>
+                  <a:srgbClr val="FFFFFF"/>
+                </a:solidFill>
+                <a:latin typeface="Segoe UI" pitchFamily="34" charset="0"/>
+                <a:ea typeface="Segoe UI" pitchFamily="34" charset="-122"/>
+                <a:cs typeface="Segoe UI" pitchFamily="34" charset="-120"/>
+              </a:rPr>
+              <a:t>Core principles</a:t>
+            </a:r>
+            <a:endParaRPr lang="en-US" sz="1450" dirty="0"/>
+          </a:p>
+        </p:txBody>
+      </p:sp>
+      <p:sp>
+        <p:nvSpPr>
+          <p:cNvPr id="13" name="Text 11"/>
+          <p:cNvSpPr/>
+          <p:nvPr/>
+        </p:nvSpPr>
+        <p:spPr>
+          <a:xfrm>
+            <a:off x="3703320" y="4069080"/>
+            <a:ext cx="2057400" cy="685800"/>
+          </a:xfrm>
+          <a:prstGeom prst="rect">
+            <a:avLst/>
+          </a:prstGeom>
+          <a:noFill/>
+          <a:ln/>
+        </p:spPr>
+        <p:txBody>
+          <a:bodyPr wrap="square" rtlCol="0" anchor="ctr"/>
+          <a:lstStyle/>
+          <a:p>
+            <a:pPr algn="ctr" indent="0" marL="0">
+              <a:buNone/>
+            </a:pPr>
+            <a:r>
+              <a:rPr lang="en-US" sz="1050" dirty="0">
+                <a:solidFill>
+                  <a:srgbClr val="94A3B8"/>
+                </a:solidFill>
+                <a:latin typeface="Segoe UI" pitchFamily="34" charset="0"/>
+                <a:ea typeface="Segoe UI" pitchFamily="34" charset="-122"/>
+                <a:cs typeface="Segoe UI" pitchFamily="34" charset="-120"/>
+              </a:rPr>
+              <a:t>Validate every run, tolerate extraction, stay polite, log for humans.</a:t>
+            </a:r>
+            <a:endParaRPr lang="en-US" sz="1050" dirty="0"/>
+          </a:p>
+        </p:txBody>
+      </p:sp>
+      <p:sp>
+        <p:nvSpPr>
+          <p:cNvPr id="14" name="Shape 12"/>
+          <p:cNvSpPr/>
+          <p:nvPr/>
+        </p:nvSpPr>
+        <p:spPr>
+          <a:xfrm>
+            <a:off x="6217920" y="2194560"/>
+            <a:ext cx="2423160" cy="2697480"/>
+          </a:xfrm>
+          <a:prstGeom prst="roundRect">
+            <a:avLst>
+              <a:gd name="adj" fmla="val 3019"/>
+            </a:avLst>
+          </a:prstGeom>
+          <a:solidFill>
+            <a:srgbClr val="111A2E"/>
+          </a:solidFill>
+          <a:ln w="12700">
+            <a:solidFill>
+              <a:srgbClr val="1E2D45"/>
+            </a:solidFill>
+            <a:prstDash val="solid"/>
+          </a:ln>
+        </p:spPr>
+      </p:sp>
+      <p:sp>
+        <p:nvSpPr>
+          <p:cNvPr id="15" name="Text 13"/>
+          <p:cNvSpPr/>
+          <p:nvPr/>
+        </p:nvSpPr>
+        <p:spPr>
+          <a:xfrm>
+            <a:off x="6355080" y="2514600"/>
+            <a:ext cx="2148840" cy="914400"/>
+          </a:xfrm>
+          <a:prstGeom prst="rect">
+            <a:avLst/>
+          </a:prstGeom>
+          <a:noFill/>
+          <a:ln/>
+        </p:spPr>
+        <p:txBody>
+          <a:bodyPr wrap="square" rtlCol="0" anchor="ctr"/>
+          <a:lstStyle/>
+          <a:p>
+            <a:pPr algn="ctr" indent="0" marL="0">
+              <a:buNone/>
+            </a:pPr>
+            <a:r>
+              <a:rPr lang="en-US" sz="3800" b="1" dirty="0">
+                <a:solidFill>
+                  <a:srgbClr val="22D3A0"/>
+                </a:solidFill>
+                <a:latin typeface="Segoe UI" pitchFamily="34" charset="0"/>
+                <a:ea typeface="Segoe UI" pitchFamily="34" charset="-122"/>
+                <a:cs typeface="Segoe UI" pitchFamily="34" charset="-120"/>
+              </a:rPr>
+              <a:t>100%</a:t>
+            </a:r>
+            <a:endParaRPr lang="en-US" sz="3800" dirty="0"/>
+          </a:p>
+        </p:txBody>
+      </p:sp>
+      <p:sp>
+        <p:nvSpPr>
+          <p:cNvPr id="16" name="Text 14"/>
+          <p:cNvSpPr/>
+          <p:nvPr/>
+        </p:nvSpPr>
+        <p:spPr>
+          <a:xfrm>
+            <a:off x="6355080" y="3520440"/>
+            <a:ext cx="2148840" cy="502920"/>
+          </a:xfrm>
+          <a:prstGeom prst="rect">
+            <a:avLst/>
+          </a:prstGeom>
+          <a:noFill/>
+          <a:ln/>
+        </p:spPr>
+        <p:txBody>
+          <a:bodyPr wrap="square" rtlCol="0" anchor="ctr"/>
+          <a:lstStyle/>
+          <a:p>
+            <a:pPr algn="ctr" indent="0" marL="0">
+              <a:buNone/>
+            </a:pPr>
+            <a:r>
+              <a:rPr lang="en-US" sz="1450" b="1" dirty="0">
+                <a:solidFill>
+                  <a:srgbClr val="FFFFFF"/>
+                </a:solidFill>
+                <a:latin typeface="Segoe UI" pitchFamily="34" charset="0"/>
+                <a:ea typeface="Segoe UI" pitchFamily="34" charset="-122"/>
+                <a:cs typeface="Segoe UI" pitchFamily="34" charset="-120"/>
+              </a:rPr>
+              <a:t>Runs validated</a:t>
+            </a:r>
+            <a:endParaRPr lang="en-US" sz="1450" dirty="0"/>
+          </a:p>
+        </p:txBody>
+      </p:sp>
+      <p:sp>
+        <p:nvSpPr>
+          <p:cNvPr id="17" name="Text 15"/>
+          <p:cNvSpPr/>
+          <p:nvPr/>
+        </p:nvSpPr>
+        <p:spPr>
+          <a:xfrm>
+            <a:off x="6400800" y="4069080"/>
+            <a:ext cx="2057400" cy="685800"/>
+          </a:xfrm>
+          <a:prstGeom prst="rect">
+            <a:avLst/>
+          </a:prstGeom>
+          <a:noFill/>
+          <a:ln/>
+        </p:spPr>
+        <p:txBody>
+          <a:bodyPr wrap="square" rtlCol="0" anchor="ctr"/>
+          <a:lstStyle/>
+          <a:p>
+            <a:pPr algn="ctr" indent="0" marL="0">
+              <a:buNone/>
+            </a:pPr>
+            <a:r>
+              <a:rPr lang="en-US" sz="1050" dirty="0">
+                <a:solidFill>
+                  <a:srgbClr val="94A3B8"/>
+                </a:solidFill>
+                <a:latin typeface="Segoe UI" pitchFamily="34" charset="0"/>
+                <a:ea typeface="Segoe UI" pitchFamily="34" charset="-122"/>
+                <a:cs typeface="Segoe UI" pitchFamily="34" charset="-120"/>
+              </a:rPr>
+              <a:t>No run is trusted just because it exited zero.</a:t>
+            </a:r>
+            <a:endParaRPr lang="en-US" sz="1050" dirty="0"/>
+          </a:p>
+        </p:txBody>
+      </p:sp>
+      <p:sp>
+        <p:nvSpPr>
+          <p:cNvPr id="18" name="Shape 16"/>
+          <p:cNvSpPr/>
+          <p:nvPr/>
+        </p:nvSpPr>
+        <p:spPr>
+          <a:xfrm>
+            <a:off x="8915400" y="2194560"/>
+            <a:ext cx="2423160" cy="2697480"/>
+          </a:xfrm>
+          <a:prstGeom prst="roundRect">
+            <a:avLst>
+              <a:gd name="adj" fmla="val 3019"/>
+            </a:avLst>
+          </a:prstGeom>
+          <a:solidFill>
+            <a:srgbClr val="111A2E"/>
+          </a:solidFill>
+          <a:ln w="12700">
+            <a:solidFill>
+              <a:srgbClr val="1E2D45"/>
+            </a:solidFill>
+            <a:prstDash val="solid"/>
+          </a:ln>
+        </p:spPr>
+      </p:sp>
+      <p:sp>
+        <p:nvSpPr>
+          <p:cNvPr id="19" name="Text 17"/>
+          <p:cNvSpPr/>
+          <p:nvPr/>
+        </p:nvSpPr>
+        <p:spPr>
+          <a:xfrm>
+            <a:off x="9052560" y="2514600"/>
+            <a:ext cx="2148840" cy="914400"/>
+          </a:xfrm>
+          <a:prstGeom prst="rect">
+            <a:avLst/>
+          </a:prstGeom>
+          <a:noFill/>
+          <a:ln/>
+        </p:spPr>
+        <p:txBody>
+          <a:bodyPr wrap="square" rtlCol="0" anchor="ctr"/>
+          <a:lstStyle/>
+          <a:p>
+            <a:pPr algn="ctr" indent="0" marL="0">
+              <a:buNone/>
+            </a:pPr>
+            <a:r>
+              <a:rPr lang="en-US" sz="3800" b="1" dirty="0">
+                <a:solidFill>
+                  <a:srgbClr val="F59E0B"/>
+                </a:solidFill>
+                <a:latin typeface="Segoe UI" pitchFamily="34" charset="0"/>
+                <a:ea typeface="Segoe UI" pitchFamily="34" charset="-122"/>
+                <a:cs typeface="Segoe UI" pitchFamily="34" charset="-120"/>
+              </a:rPr>
+              <a:t>0</a:t>
+            </a:r>
+            <a:endParaRPr lang="en-US" sz="3800" dirty="0"/>
+          </a:p>
+        </p:txBody>
+      </p:sp>
+      <p:sp>
+        <p:nvSpPr>
+          <p:cNvPr id="20" name="Text 18"/>
+          <p:cNvSpPr/>
+          <p:nvPr/>
+        </p:nvSpPr>
+        <p:spPr>
+          <a:xfrm>
+            <a:off x="9052560" y="3520440"/>
+            <a:ext cx="2148840" cy="502920"/>
+          </a:xfrm>
+          <a:prstGeom prst="rect">
+            <a:avLst/>
+          </a:prstGeom>
+          <a:noFill/>
+          <a:ln/>
+        </p:spPr>
+        <p:txBody>
+          <a:bodyPr wrap="square" rtlCol="0" anchor="ctr"/>
+          <a:lstStyle/>
+          <a:p>
+            <a:pPr algn="ctr" indent="0" marL="0">
+              <a:buNone/>
+            </a:pPr>
+            <a:r>
+              <a:rPr lang="en-US" sz="1450" b="1" dirty="0">
+                <a:solidFill>
+                  <a:srgbClr val="FFFFFF"/>
+                </a:solidFill>
+                <a:latin typeface="Segoe UI" pitchFamily="34" charset="0"/>
+                <a:ea typeface="Segoe UI" pitchFamily="34" charset="-122"/>
+                <a:cs typeface="Segoe UI" pitchFamily="34" charset="-120"/>
+              </a:rPr>
+              <a:t>Credentials used</a:t>
+            </a:r>
+            <a:endParaRPr lang="en-US" sz="1450" dirty="0"/>
+          </a:p>
+        </p:txBody>
+      </p:sp>
+      <p:sp>
+        <p:nvSpPr>
+          <p:cNvPr id="21" name="Text 19"/>
+          <p:cNvSpPr/>
+          <p:nvPr/>
+        </p:nvSpPr>
+        <p:spPr>
+          <a:xfrm>
+            <a:off x="9098280" y="4069080"/>
+            <a:ext cx="2057400" cy="685800"/>
+          </a:xfrm>
+          <a:prstGeom prst="rect">
+            <a:avLst/>
+          </a:prstGeom>
+          <a:noFill/>
+          <a:ln/>
+        </p:spPr>
+        <p:txBody>
+          <a:bodyPr wrap="square" rtlCol="0" anchor="ctr"/>
+          <a:lstStyle/>
+          <a:p>
+            <a:pPr algn="ctr" indent="0" marL="0">
+              <a:buNone/>
+            </a:pPr>
+            <a:r>
+              <a:rPr lang="en-US" sz="1050" dirty="0">
+                <a:solidFill>
+                  <a:srgbClr val="94A3B8"/>
+                </a:solidFill>
+                <a:latin typeface="Segoe UI" pitchFamily="34" charset="0"/>
+                <a:ea typeface="Segoe UI" pitchFamily="34" charset="-122"/>
+                <a:cs typeface="Segoe UI" pitchFamily="34" charset="-120"/>
+              </a:rPr>
+              <a:t>Public data only - no logins, no pretending.</a:t>
+            </a:r>
+            <a:endParaRPr lang="en-US" sz="1050" dirty="0"/>
+          </a:p>
+        </p:txBody>
+      </p:sp>
+      <p:sp>
+        <p:nvSpPr>
+          <p:cNvPr id="22" name="Shape 20"/>
+          <p:cNvSpPr/>
+          <p:nvPr/>
+        </p:nvSpPr>
+        <p:spPr>
+          <a:xfrm>
+            <a:off x="822960" y="5413248"/>
+            <a:ext cx="10515600" cy="0"/>
+          </a:xfrm>
+          <a:prstGeom prst="line">
+            <a:avLst/>
+          </a:prstGeom>
+          <a:noFill/>
+          <a:ln w="12700">
+            <a:solidFill>
+              <a:srgbClr val="1E2D45"/>
+            </a:solidFill>
+            <a:prstDash val="solid"/>
+          </a:ln>
+        </p:spPr>
+      </p:sp>
+      <p:sp>
+        <p:nvSpPr>
+          <p:cNvPr id="23" name="Text 21"/>
+          <p:cNvSpPr/>
+          <p:nvPr/>
+        </p:nvSpPr>
+        <p:spPr>
+          <a:xfrm>
+            <a:off x="822960" y="5504688"/>
+            <a:ext cx="10424160" cy="411480"/>
+          </a:xfrm>
+          <a:prstGeom prst="rect">
+            <a:avLst/>
+          </a:prstGeom>
+          <a:noFill/>
+          <a:ln/>
+        </p:spPr>
+        <p:txBody>
+          <a:bodyPr wrap="square" rtlCol="0" anchor="ctr"/>
+          <a:lstStyle/>
+          <a:p>
+            <a:pPr indent="0" marL="0">
+              <a:buNone/>
+            </a:pPr>
+            <a:r>
+              <a:rPr lang="en-US" sz="1300" i="1" dirty="0">
+                <a:solidFill>
+                  <a:srgbClr val="06B6D4"/>
+                </a:solidFill>
+                <a:latin typeface="Segoe UI" pitchFamily="34" charset="0"/>
+                <a:ea typeface="Segoe UI" pitchFamily="34" charset="-122"/>
+                <a:cs typeface="Segoe UI" pitchFamily="34" charset="-120"/>
+              </a:rPr>
+              <a:t>→  Built for engagements where the data has to keep arriving, month after month.</a:t>
+            </a:r>
+            <a:endParaRPr lang="en-US" sz="1300" dirty="0"/>
+          </a:p>
+        </p:txBody>
+      </p:sp>
+      <p:sp>
+        <p:nvSpPr>
+          <p:cNvPr id="24" name="Text 22"/>
+          <p:cNvSpPr/>
+          <p:nvPr/>
+        </p:nvSpPr>
+        <p:spPr>
+          <a:xfrm>
+            <a:off x="10698480" y="6382512"/>
             <a:ext cx="1188720" cy="365760"/>
           </a:xfrm>
           <a:prstGeom prst="rect">
@@ -2851,7 +10206,7 @@
                 <a:ea typeface="Consolas" pitchFamily="34" charset="-122"/>
                 <a:cs typeface="Consolas" pitchFamily="34" charset="-120"/>
               </a:rPr>
-              <a:t>5 / 7</a:t>
+              <a:t>5 / 15</a:t>
             </a:r>
             <a:endParaRPr lang="en-US" sz="1000" dirty="0"/>
           </a:p>
@@ -2962,7 +10317,7 @@
                 <a:ea typeface="Consolas" pitchFamily="34" charset="-122"/>
                 <a:cs typeface="Consolas" pitchFamily="34" charset="-120"/>
               </a:rPr>
-              <a:t>DELIVERED</a:t>
+              <a:t>PRINCIPLE 1</a:t>
             </a:r>
             <a:endParaRPr lang="en-US" sz="1200" dirty="0"/>
           </a:p>
@@ -2976,8 +10331,8 @@
         </p:nvSpPr>
         <p:spPr>
           <a:xfrm>
-            <a:off x="822960" y="960120"/>
-            <a:ext cx="10515600" cy="868680"/>
+            <a:off x="822960" y="914400"/>
+            <a:ext cx="10561320" cy="868680"/>
           </a:xfrm>
           <a:prstGeom prst="rect">
             <a:avLst/>
@@ -2993,7 +10348,7 @@
               <a:buNone/>
             </a:pPr>
             <a:r>
-              <a:rPr lang="en-US" sz="3000" b="1" dirty="0">
+              <a:rPr lang="en-US" sz="2700" b="1" dirty="0">
                 <a:solidFill>
                   <a:srgbClr val="FFFFFF"/>
                 </a:solidFill>
@@ -3001,9 +10356,9 @@
                 <a:ea typeface="Segoe UI" pitchFamily="34" charset="-122"/>
                 <a:cs typeface="Segoe UI" pitchFamily="34" charset="-120"/>
               </a:rPr>
-              <a:t>Use cases in production</a:t>
-            </a:r>
-            <a:endParaRPr lang="en-US" sz="3000" dirty="0"/>
+              <a:t>Validate every run</a:t>
+            </a:r>
+            <a:endParaRPr lang="en-US" sz="2700" dirty="0"/>
           </a:p>
         </p:txBody>
       </p:sp>
@@ -3015,7 +10370,7 @@
         </p:nvSpPr>
         <p:spPr>
           <a:xfrm>
-            <a:off x="868680" y="2057400"/>
+            <a:off x="868680" y="2011680"/>
             <a:ext cx="10424160" cy="3566160"/>
           </a:xfrm>
           <a:prstGeom prst="rect">
@@ -3030,10 +10385,10 @@
           <a:p>
             <a:pPr marL="342900" indent="-342900">
               <a:lnSpc>
-                <a:spcPct val="115000"/>
+                <a:spcPct val="112000"/>
               </a:lnSpc>
               <a:spcAft>
-                <a:spcPts val="1000"/>
+                <a:spcPts val="900"/>
               </a:spcAft>
               <a:buSzPct val="100000"/>
               <a:buChar char="▸"/>
@@ -3047,17 +10402,17 @@
                 <a:ea typeface="Segoe UI" pitchFamily="34" charset="-122"/>
                 <a:cs typeface="Segoe UI" pitchFamily="34" charset="-120"/>
               </a:rPr>
-              <a:t>Market and price monitoring for clients</a:t>
+              <a:t>A scraper that silently returns empty data is worse than one that crashes loudly.</a:t>
             </a:r>
             <a:endParaRPr lang="en-US" sz="1600" dirty="0"/>
           </a:p>
           <a:p>
             <a:pPr marL="342900" indent="-342900">
               <a:lnSpc>
-                <a:spcPct val="115000"/>
+                <a:spcPct val="112000"/>
               </a:lnSpc>
               <a:spcAft>
-                <a:spcPts val="1000"/>
+                <a:spcPts val="900"/>
               </a:spcAft>
               <a:buSzPct val="100000"/>
               <a:buChar char="▸"/>
@@ -3071,17 +10426,17 @@
                 <a:ea typeface="Segoe UI" pitchFamily="34" charset="-122"/>
                 <a:cs typeface="Segoe UI" pitchFamily="34" charset="-120"/>
               </a:rPr>
-              <a:t>Research collection pipelines</a:t>
+              <a:t>Row counts are compared against expectations on every execution.</a:t>
             </a:r>
             <a:endParaRPr lang="en-US" sz="1600" dirty="0"/>
           </a:p>
           <a:p>
             <a:pPr marL="342900" indent="-342900">
               <a:lnSpc>
-                <a:spcPct val="115000"/>
+                <a:spcPct val="112000"/>
               </a:lnSpc>
               <a:spcAft>
-                <a:spcPts val="1000"/>
+                <a:spcPts val="900"/>
               </a:spcAft>
               <a:buSzPct val="100000"/>
               <a:buChar char="▸"/>
@@ -3095,17 +10450,17 @@
                 <a:ea typeface="Segoe UI" pitchFamily="34" charset="-122"/>
                 <a:cs typeface="Segoe UI" pitchFamily="34" charset="-120"/>
               </a:rPr>
-              <a:t>OSINT support with full provenance</a:t>
+              <a:t>Schema validation catches the column that quietly disappeared.</a:t>
             </a:r>
             <a:endParaRPr lang="en-US" sz="1600" dirty="0"/>
           </a:p>
           <a:p>
             <a:pPr marL="342900" indent="-342900">
               <a:lnSpc>
-                <a:spcPct val="115000"/>
+                <a:spcPct val="112000"/>
               </a:lnSpc>
               <a:spcAft>
-                <a:spcPts val="1000"/>
+                <a:spcPts val="900"/>
               </a:spcAft>
               <a:buSzPct val="100000"/>
               <a:buChar char="▸"/>
@@ -3119,21 +10474,107 @@
                 <a:ea typeface="Segoe UI" pitchFamily="34" charset="-122"/>
                 <a:cs typeface="Segoe UI" pitchFamily="34" charset="-120"/>
               </a:rPr>
-              <a:t>Freelance projects delivered worldwide via Upwork</a:t>
+              <a:t>Sanity ranges catch the price that came back as zero or a million.</a:t>
             </a:r>
             <a:endParaRPr lang="en-US" sz="1600" dirty="0"/>
           </a:p>
-        </p:txBody>
-      </p:sp>
-      <p:sp>
-        <p:nvSpPr>
-          <p:cNvPr id="7" name="Text 5"/>
-          <p:cNvSpPr/>
-          <p:nvPr/>
-        </p:nvSpPr>
-        <p:spPr>
-          <a:xfrm>
-            <a:off x="10698480" y="6355080"/>
+          <a:p>
+            <a:pPr marL="342900" indent="-342900">
+              <a:lnSpc>
+                <a:spcPct val="112000"/>
+              </a:lnSpc>
+              <a:spcAft>
+                <a:spcPts val="900"/>
+              </a:spcAft>
+              <a:buSzPct val="100000"/>
+              <a:buChar char="▸"/>
+            </a:pPr>
+            <a:r>
+              <a:rPr lang="en-US" sz="1600" dirty="0">
+                <a:solidFill>
+                  <a:srgbClr val="CBD5E1"/>
+                </a:solidFill>
+                <a:latin typeface="Segoe UI" pitchFamily="34" charset="0"/>
+                <a:ea typeface="Segoe UI" pitchFamily="34" charset="-122"/>
+                <a:cs typeface="Segoe UI" pitchFamily="34" charset="-120"/>
+              </a:rPr>
+              <a:t>Validation turns 'I think the data arrived' into evidence it did.</a:t>
+            </a:r>
+            <a:endParaRPr lang="en-US" sz="1600" dirty="0"/>
+          </a:p>
+        </p:txBody>
+      </p:sp>
+      <p:sp>
+        <p:nvSpPr>
+          <p:cNvPr id="7" name="Shape 5"/>
+          <p:cNvSpPr/>
+          <p:nvPr/>
+        </p:nvSpPr>
+        <p:spPr>
+          <a:xfrm>
+            <a:off x="822960" y="5961888"/>
+            <a:ext cx="10515600" cy="0"/>
+          </a:xfrm>
+          <a:prstGeom prst="line">
+            <a:avLst/>
+          </a:prstGeom>
+          <a:noFill/>
+          <a:ln w="12700">
+            <a:solidFill>
+              <a:srgbClr val="1E2D45"/>
+            </a:solidFill>
+            <a:prstDash val="solid"/>
+          </a:ln>
+        </p:spPr>
+      </p:sp>
+      <p:sp>
+        <p:nvSpPr>
+          <p:cNvPr id="8" name="Text 6"/>
+          <p:cNvSpPr/>
+          <p:nvPr/>
+        </p:nvSpPr>
+        <p:spPr>
+          <a:xfrm>
+            <a:off x="822960" y="6053328"/>
+            <a:ext cx="9692640" cy="457200"/>
+          </a:xfrm>
+          <a:prstGeom prst="rect">
+            <a:avLst/>
+          </a:prstGeom>
+          <a:noFill/>
+          <a:ln/>
+        </p:spPr>
+        <p:txBody>
+          <a:bodyPr wrap="square" rtlCol="0" anchor="ctr"/>
+          <a:lstStyle/>
+          <a:p>
+            <a:pPr indent="0" marL="0">
+              <a:buNone/>
+            </a:pPr>
+            <a:r>
+              <a:rPr lang="en-US" sz="1150" dirty="0">
+                <a:solidFill>
+                  <a:srgbClr val="64748B"/>
+                </a:solidFill>
+                <a:latin typeface="Segoe UI" pitchFamily="34" charset="0"/>
+                <a:ea typeface="Segoe UI" pitchFamily="34" charset="-122"/>
+                <a:cs typeface="Segoe UI" pitchFamily="34" charset="-120"/>
+              </a:rPr>
+              <a:t>Do not trust a run because it exited zero.</a:t>
+            </a:r>
+            <a:endParaRPr lang="en-US" sz="1150" dirty="0"/>
+          </a:p>
+        </p:txBody>
+      </p:sp>
+      <p:sp>
+        <p:nvSpPr>
+          <p:cNvPr id="9" name="Text 7"/>
+          <p:cNvSpPr/>
+          <p:nvPr/>
+        </p:nvSpPr>
+        <p:spPr>
+          <a:xfrm>
+            <a:off x="10698480" y="6382512"/>
             <a:ext cx="1188720" cy="365760"/>
           </a:xfrm>
           <a:prstGeom prst="rect">
@@ -3158,7 +10599,7 @@
                 <a:ea typeface="Consolas" pitchFamily="34" charset="-122"/>
                 <a:cs typeface="Consolas" pitchFamily="34" charset="-120"/>
               </a:rPr>
-              <a:t>6 / 7</a:t>
+              <a:t>6 / 15</a:t>
             </a:r>
             <a:endParaRPr lang="en-US" sz="1000" dirty="0"/>
           </a:p>
@@ -3244,8 +10685,8 @@
         </p:nvSpPr>
         <p:spPr>
           <a:xfrm>
-            <a:off x="822960" y="1554480"/>
-            <a:ext cx="10515600" cy="457200"/>
+            <a:off x="822960" y="502920"/>
+            <a:ext cx="10515600" cy="365760"/>
           </a:xfrm>
           <a:prstGeom prst="rect">
             <a:avLst/>
@@ -3261,7 +10702,7 @@
               <a:buNone/>
             </a:pPr>
             <a:r>
-              <a:rPr lang="en-US" sz="1400" spc="400" kern="0" dirty="0">
+              <a:rPr lang="en-US" sz="1200" spc="300" kern="0" dirty="0">
                 <a:solidFill>
                   <a:srgbClr val="06B6D4"/>
                 </a:solidFill>
@@ -3269,9 +10710,9 @@
                 <a:ea typeface="Consolas" pitchFamily="34" charset="-122"/>
                 <a:cs typeface="Consolas" pitchFamily="34" charset="-120"/>
               </a:rPr>
-              <a:t>TAKEAWAY</a:t>
-            </a:r>
-            <a:endParaRPr lang="en-US" sz="1400" dirty="0"/>
+              <a:t>VALIDATION</a:t>
+            </a:r>
+            <a:endParaRPr lang="en-US" sz="1200" dirty="0"/>
           </a:p>
         </p:txBody>
       </p:sp>
@@ -3283,8 +10724,8 @@
         </p:nvSpPr>
         <p:spPr>
           <a:xfrm>
-            <a:off x="822960" y="2286000"/>
-            <a:ext cx="10515600" cy="1737360"/>
+            <a:off x="822960" y="914400"/>
+            <a:ext cx="10561320" cy="868680"/>
           </a:xfrm>
           <a:prstGeom prst="rect">
             <a:avLst/>
@@ -3300,7 +10741,7 @@
               <a:buNone/>
             </a:pPr>
             <a:r>
-              <a:rPr lang="en-US" sz="4400" b="1" dirty="0">
+              <a:rPr lang="en-US" sz="2700" b="1" dirty="0">
                 <a:solidFill>
                   <a:srgbClr val="FFFFFF"/>
                 </a:solidFill>
@@ -3308,22 +10749,61 @@
                 <a:ea typeface="Segoe UI" pitchFamily="34" charset="-122"/>
                 <a:cs typeface="Segoe UI" pitchFamily="34" charset="-120"/>
               </a:rPr>
-              <a:t>Build systems, not scripts</a:t>
-            </a:r>
-            <a:endParaRPr lang="en-US" sz="4400" dirty="0"/>
-          </a:p>
-        </p:txBody>
-      </p:sp>
-      <p:sp>
-        <p:nvSpPr>
-          <p:cNvPr id="6" name="Text 4"/>
-          <p:cNvSpPr/>
-          <p:nvPr/>
-        </p:nvSpPr>
-        <p:spPr>
-          <a:xfrm>
-            <a:off x="822960" y="4206240"/>
-            <a:ext cx="10515600" cy="914400"/>
+              <a:t>What run validation catches before clients do</a:t>
+            </a:r>
+            <a:endParaRPr lang="en-US" sz="2700" dirty="0"/>
+          </a:p>
+        </p:txBody>
+      </p:sp>
+      <p:graphicFrame>
+        <p:nvGraphicFramePr>
+          <p:cNvPr id="6" name="Chart 0" descr=""/>
+          <p:cNvGraphicFramePr/>
+          <p:nvPr/>
+        </p:nvGraphicFramePr>
+        <p:xfrm>
+          <a:off x="822960" y="1874520"/>
+          <a:ext cx="10515600" cy="3337560"/>
+        </p:xfrm>
+        <a:graphic xmlns:a="http://schemas.openxmlformats.org/drawingml/2006/main">
+          <a:graphicData uri="http://schemas.openxmlformats.org/drawingml/2006/chart">
+            <c:chart xmlns:c="http://schemas.openxmlformats.org/drawingml/2006/chart" r:id="rId1"/>
+          </a:graphicData>
+        </a:graphic>
+      </p:graphicFrame>
+      <p:sp>
+        <p:nvSpPr>
+          <p:cNvPr id="7" name="Shape 4"/>
+          <p:cNvSpPr/>
+          <p:nvPr/>
+        </p:nvSpPr>
+        <p:spPr>
+          <a:xfrm>
+            <a:off x="822960" y="5413248"/>
+            <a:ext cx="10515600" cy="0"/>
+          </a:xfrm>
+          <a:prstGeom prst="line">
+            <a:avLst/>
+          </a:prstGeom>
+          <a:noFill/>
+          <a:ln w="12700">
+            <a:solidFill>
+              <a:srgbClr val="1E2D45"/>
+            </a:solidFill>
+            <a:prstDash val="solid"/>
+          </a:ln>
+        </p:spPr>
+      </p:sp>
+      <p:sp>
+        <p:nvSpPr>
+          <p:cNvPr id="8" name="Text 5"/>
+          <p:cNvSpPr/>
+          <p:nvPr/>
+        </p:nvSpPr>
+        <p:spPr>
+          <a:xfrm>
+            <a:off x="822960" y="5504688"/>
+            <a:ext cx="10424160" cy="411480"/>
           </a:xfrm>
           <a:prstGeom prst="rect">
             <a:avLst/>
@@ -3339,29 +10819,91 @@
               <a:buNone/>
             </a:pPr>
             <a:r>
-              <a:rPr lang="en-US" sz="1600" dirty="0">
-                <a:solidFill>
-                  <a:srgbClr val="94A3B8"/>
+              <a:rPr lang="en-US" sz="1300" i="1" dirty="0">
+                <a:solidFill>
+                  <a:srgbClr val="06B6D4"/>
                 </a:solidFill>
                 <a:latin typeface="Segoe UI" pitchFamily="34" charset="0"/>
                 <a:ea typeface="Segoe UI" pitchFamily="34" charset="-122"/>
                 <a:cs typeface="Segoe UI" pitchFamily="34" charset="-120"/>
               </a:rPr>
-              <a:t>Validation, tolerance, politeness, and logs - the four pillars of scraping that lasts. · rezalianvatiady.github.io</a:t>
-            </a:r>
-            <a:endParaRPr lang="en-US" sz="1600" dirty="0"/>
-          </a:p>
-        </p:txBody>
-      </p:sp>
-      <p:sp>
-        <p:nvSpPr>
-          <p:cNvPr id="7" name="Text 5"/>
-          <p:cNvSpPr/>
-          <p:nvPr/>
-        </p:nvSpPr>
-        <p:spPr>
-          <a:xfrm>
-            <a:off x="10698480" y="6355080"/>
+              <a:t>→  Validation catches the boring failures first - the ones that would otherwise become next week's emergency.</a:t>
+            </a:r>
+            <a:endParaRPr lang="en-US" sz="1300" dirty="0"/>
+          </a:p>
+        </p:txBody>
+      </p:sp>
+      <p:sp>
+        <p:nvSpPr>
+          <p:cNvPr id="9" name="Shape 6"/>
+          <p:cNvSpPr/>
+          <p:nvPr/>
+        </p:nvSpPr>
+        <p:spPr>
+          <a:xfrm>
+            <a:off x="822960" y="5961888"/>
+            <a:ext cx="10515600" cy="0"/>
+          </a:xfrm>
+          <a:prstGeom prst="line">
+            <a:avLst/>
+          </a:prstGeom>
+          <a:noFill/>
+          <a:ln w="12700">
+            <a:solidFill>
+              <a:srgbClr val="1E2D45"/>
+            </a:solidFill>
+            <a:prstDash val="solid"/>
+          </a:ln>
+        </p:spPr>
+      </p:sp>
+      <p:sp>
+        <p:nvSpPr>
+          <p:cNvPr id="10" name="Text 7"/>
+          <p:cNvSpPr/>
+          <p:nvPr/>
+        </p:nvSpPr>
+        <p:spPr>
+          <a:xfrm>
+            <a:off x="822960" y="6053328"/>
+            <a:ext cx="9692640" cy="457200"/>
+          </a:xfrm>
+          <a:prstGeom prst="rect">
+            <a:avLst/>
+          </a:prstGeom>
+          <a:noFill/>
+          <a:ln/>
+        </p:spPr>
+        <p:txBody>
+          <a:bodyPr wrap="square" rtlCol="0" anchor="ctr"/>
+          <a:lstStyle/>
+          <a:p>
+            <a:pPr indent="0" marL="0">
+              <a:buNone/>
+            </a:pPr>
+            <a:r>
+              <a:rPr lang="en-US" sz="1150" dirty="0">
+                <a:solidFill>
+                  <a:srgbClr val="64748B"/>
+                </a:solidFill>
+                <a:latin typeface="Segoe UI" pitchFamily="34" charset="0"/>
+                <a:ea typeface="Segoe UI" pitchFamily="34" charset="-122"/>
+                <a:cs typeface="Segoe UI" pitchFamily="34" charset="-120"/>
+              </a:rPr>
+              <a:t>Illustrative mix across monitored engagements; the point is the coverage, not the exact counts.</a:t>
+            </a:r>
+            <a:endParaRPr lang="en-US" sz="1150" dirty="0"/>
+          </a:p>
+        </p:txBody>
+      </p:sp>
+      <p:sp>
+        <p:nvSpPr>
+          <p:cNvPr id="11" name="Text 8"/>
+          <p:cNvSpPr/>
+          <p:nvPr/>
+        </p:nvSpPr>
+        <p:spPr>
+          <a:xfrm>
+            <a:off x="10698480" y="6382512"/>
             <a:ext cx="1188720" cy="365760"/>
           </a:xfrm>
           <a:prstGeom prst="rect">
@@ -3386,7 +10928,729 @@
                 <a:ea typeface="Consolas" pitchFamily="34" charset="-122"/>
                 <a:cs typeface="Consolas" pitchFamily="34" charset="-120"/>
               </a:rPr>
-              <a:t>7 / 7</a:t>
+              <a:t>7 / 15</a:t>
+            </a:r>
+            <a:endParaRPr lang="en-US" sz="1000" dirty="0"/>
+          </a:p>
+        </p:txBody>
+      </p:sp>
+    </p:spTree>
+  </p:cSld>
+  <p:clrMapOvr>
+    <a:masterClrMapping/>
+  </p:clrMapOvr>
+</p:sld>
+</file>
+
+<file path=ppt/slides/slide8.xml><?xml version="1.0" encoding="utf-8"?>
+<p:sld xmlns:a="http://schemas.openxmlformats.org/drawingml/2006/main" xmlns:r="http://schemas.openxmlformats.org/officeDocument/2006/relationships" xmlns:p="http://schemas.openxmlformats.org/presentationml/2006/main">
+  <p:cSld name="Slide 8">
+    <p:bg>
+      <p:bgPr>
+        <a:solidFill>
+          <a:srgbClr val="0A0C12"/>
+        </a:solidFill>
+      </p:bgPr>
+    </p:bg>
+    <p:spTree>
+      <p:nvGrpSpPr>
+        <p:cNvPr id="1" name=""/>
+        <p:cNvGrpSpPr/>
+        <p:nvPr/>
+      </p:nvGrpSpPr>
+      <p:grpSpPr>
+        <a:xfrm>
+          <a:off x="0" y="0"/>
+          <a:ext cx="0" cy="0"/>
+          <a:chOff x="0" y="0"/>
+          <a:chExt cx="0" cy="0"/>
+        </a:xfrm>
+      </p:grpSpPr>
+      <p:sp>
+        <p:nvSpPr>
+          <p:cNvPr id="2" name="Shape 0"/>
+          <p:cNvSpPr/>
+          <p:nvPr/>
+        </p:nvSpPr>
+        <p:spPr>
+          <a:xfrm>
+            <a:off x="0" y="0"/>
+            <a:ext cx="7680960" cy="64008"/>
+          </a:xfrm>
+          <a:prstGeom prst="rect">
+            <a:avLst/>
+          </a:prstGeom>
+          <a:solidFill>
+            <a:srgbClr val="3B82F6"/>
+          </a:solidFill>
+          <a:ln/>
+        </p:spPr>
+      </p:sp>
+      <p:sp>
+        <p:nvSpPr>
+          <p:cNvPr id="3" name="Shape 1"/>
+          <p:cNvSpPr/>
+          <p:nvPr/>
+        </p:nvSpPr>
+        <p:spPr>
+          <a:xfrm>
+            <a:off x="7680960" y="0"/>
+            <a:ext cx="4510735" cy="64008"/>
+          </a:xfrm>
+          <a:prstGeom prst="rect">
+            <a:avLst/>
+          </a:prstGeom>
+          <a:solidFill>
+            <a:srgbClr val="06B6D4"/>
+          </a:solidFill>
+          <a:ln/>
+        </p:spPr>
+      </p:sp>
+      <p:sp>
+        <p:nvSpPr>
+          <p:cNvPr id="4" name="Text 2"/>
+          <p:cNvSpPr/>
+          <p:nvPr/>
+        </p:nvSpPr>
+        <p:spPr>
+          <a:xfrm>
+            <a:off x="822960" y="502920"/>
+            <a:ext cx="10515600" cy="365760"/>
+          </a:xfrm>
+          <a:prstGeom prst="rect">
+            <a:avLst/>
+          </a:prstGeom>
+          <a:noFill/>
+          <a:ln/>
+        </p:spPr>
+        <p:txBody>
+          <a:bodyPr wrap="square" rtlCol="0" anchor="ctr"/>
+          <a:lstStyle/>
+          <a:p>
+            <a:pPr indent="0" marL="0">
+              <a:buNone/>
+            </a:pPr>
+            <a:r>
+              <a:rPr lang="en-US" sz="1200" spc="300" kern="0" dirty="0">
+                <a:solidFill>
+                  <a:srgbClr val="06B6D4"/>
+                </a:solidFill>
+                <a:latin typeface="Consolas" pitchFamily="34" charset="0"/>
+                <a:ea typeface="Consolas" pitchFamily="34" charset="-122"/>
+                <a:cs typeface="Consolas" pitchFamily="34" charset="-120"/>
+              </a:rPr>
+              <a:t>PRINCIPLE 2</a:t>
+            </a:r>
+            <a:endParaRPr lang="en-US" sz="1200" dirty="0"/>
+          </a:p>
+        </p:txBody>
+      </p:sp>
+      <p:sp>
+        <p:nvSpPr>
+          <p:cNvPr id="5" name="Text 3"/>
+          <p:cNvSpPr/>
+          <p:nvPr/>
+        </p:nvSpPr>
+        <p:spPr>
+          <a:xfrm>
+            <a:off x="822960" y="914400"/>
+            <a:ext cx="10561320" cy="868680"/>
+          </a:xfrm>
+          <a:prstGeom prst="rect">
+            <a:avLst/>
+          </a:prstGeom>
+          <a:noFill/>
+          <a:ln/>
+        </p:spPr>
+        <p:txBody>
+          <a:bodyPr wrap="square" rtlCol="0" anchor="ctr"/>
+          <a:lstStyle/>
+          <a:p>
+            <a:pPr indent="0" marL="0">
+              <a:buNone/>
+            </a:pPr>
+            <a:r>
+              <a:rPr lang="en-US" sz="2700" b="1" dirty="0">
+                <a:solidFill>
+                  <a:srgbClr val="FFFFFF"/>
+                </a:solidFill>
+                <a:latin typeface="Segoe UI" pitchFamily="34" charset="0"/>
+                <a:ea typeface="Segoe UI" pitchFamily="34" charset="-122"/>
+                <a:cs typeface="Segoe UI" pitchFamily="34" charset="-120"/>
+              </a:rPr>
+              <a:t>Tolerant extraction beats perfect selectors</a:t>
+            </a:r>
+            <a:endParaRPr lang="en-US" sz="2700" dirty="0"/>
+          </a:p>
+        </p:txBody>
+      </p:sp>
+      <p:sp>
+        <p:nvSpPr>
+          <p:cNvPr id="6" name="Text 4"/>
+          <p:cNvSpPr/>
+          <p:nvPr/>
+        </p:nvSpPr>
+        <p:spPr>
+          <a:xfrm>
+            <a:off x="868680" y="2011680"/>
+            <a:ext cx="10424160" cy="3566160"/>
+          </a:xfrm>
+          <a:prstGeom prst="rect">
+            <a:avLst/>
+          </a:prstGeom>
+          <a:noFill/>
+          <a:ln/>
+        </p:spPr>
+        <p:txBody>
+          <a:bodyPr wrap="square" rtlCol="0" anchor="t"/>
+          <a:lstStyle/>
+          <a:p>
+            <a:pPr marL="342900" indent="-342900">
+              <a:lnSpc>
+                <a:spcPct val="112000"/>
+              </a:lnSpc>
+              <a:spcAft>
+                <a:spcPts val="900"/>
+              </a:spcAft>
+              <a:buSzPct val="100000"/>
+              <a:buChar char="▸"/>
+            </a:pPr>
+            <a:r>
+              <a:rPr lang="en-US" sz="1600" dirty="0">
+                <a:solidFill>
+                  <a:srgbClr val="CBD5E1"/>
+                </a:solidFill>
+                <a:latin typeface="Segoe UI" pitchFamily="34" charset="0"/>
+                <a:ea typeface="Segoe UI" pitchFamily="34" charset="-122"/>
+                <a:cs typeface="Segoe UI" pitchFamily="34" charset="-120"/>
+              </a:rPr>
+              <a:t>Exact CSS selectors are a liability - they rot the first time a site redesigns.</a:t>
+            </a:r>
+            <a:endParaRPr lang="en-US" sz="1600" dirty="0"/>
+          </a:p>
+          <a:p>
+            <a:pPr marL="342900" indent="-342900">
+              <a:lnSpc>
+                <a:spcPct val="112000"/>
+              </a:lnSpc>
+              <a:spcAft>
+                <a:spcPts val="900"/>
+              </a:spcAft>
+              <a:buSzPct val="100000"/>
+              <a:buChar char="▸"/>
+            </a:pPr>
+            <a:r>
+              <a:rPr lang="en-US" sz="1600" dirty="0">
+                <a:solidFill>
+                  <a:srgbClr val="CBD5E1"/>
+                </a:solidFill>
+                <a:latin typeface="Segoe UI" pitchFamily="34" charset="0"/>
+                <a:ea typeface="Segoe UI" pitchFamily="34" charset="-122"/>
+                <a:cs typeface="Segoe UI" pitchFamily="34" charset="-120"/>
+              </a:rPr>
+              <a:t>Structural anchors survive markup changes that kill position-based paths.</a:t>
+            </a:r>
+            <a:endParaRPr lang="en-US" sz="1600" dirty="0"/>
+          </a:p>
+          <a:p>
+            <a:pPr marL="342900" indent="-342900">
+              <a:lnSpc>
+                <a:spcPct val="112000"/>
+              </a:lnSpc>
+              <a:spcAft>
+                <a:spcPts val="900"/>
+              </a:spcAft>
+              <a:buSzPct val="100000"/>
+              <a:buChar char="▸"/>
+            </a:pPr>
+            <a:r>
+              <a:rPr lang="en-US" sz="1600" dirty="0">
+                <a:solidFill>
+                  <a:srgbClr val="CBD5E1"/>
+                </a:solidFill>
+                <a:latin typeface="Segoe UI" pitchFamily="34" charset="0"/>
+                <a:ea typeface="Segoe UI" pitchFamily="34" charset="-122"/>
+                <a:cs typeface="Segoe UI" pitchFamily="34" charset="-120"/>
+              </a:rPr>
+              <a:t>Multiple fallbacks degrade gracefully instead of failing completely.</a:t>
+            </a:r>
+            <a:endParaRPr lang="en-US" sz="1600" dirty="0"/>
+          </a:p>
+          <a:p>
+            <a:pPr marL="342900" indent="-342900">
+              <a:lnSpc>
+                <a:spcPct val="112000"/>
+              </a:lnSpc>
+              <a:spcAft>
+                <a:spcPts val="900"/>
+              </a:spcAft>
+              <a:buSzPct val="100000"/>
+              <a:buChar char="▸"/>
+            </a:pPr>
+            <a:r>
+              <a:rPr lang="en-US" sz="1600" dirty="0">
+                <a:solidFill>
+                  <a:srgbClr val="CBD5E1"/>
+                </a:solidFill>
+                <a:latin typeface="Segoe UI" pitchFamily="34" charset="0"/>
+                <a:ea typeface="Segoe UI" pitchFamily="34" charset="-122"/>
+                <a:cs typeface="Segoe UI" pitchFamily="34" charset="-120"/>
+              </a:rPr>
+              <a:t>Partial data with a warning beats zero data with a shrug.</a:t>
+            </a:r>
+            <a:endParaRPr lang="en-US" sz="1600" dirty="0"/>
+          </a:p>
+          <a:p>
+            <a:pPr marL="342900" indent="-342900">
+              <a:lnSpc>
+                <a:spcPct val="112000"/>
+              </a:lnSpc>
+              <a:spcAft>
+                <a:spcPts val="900"/>
+              </a:spcAft>
+              <a:buSzPct val="100000"/>
+              <a:buChar char="▸"/>
+            </a:pPr>
+            <a:r>
+              <a:rPr lang="en-US" sz="1600" dirty="0">
+                <a:solidFill>
+                  <a:srgbClr val="CBD5E1"/>
+                </a:solidFill>
+                <a:latin typeface="Segoe UI" pitchFamily="34" charset="0"/>
+                <a:ea typeface="Segoe UI" pitchFamily="34" charset="-122"/>
+                <a:cs typeface="Segoe UI" pitchFamily="34" charset="-120"/>
+              </a:rPr>
+              <a:t>Every degraded run is flagged, so partial never masquerades as complete.</a:t>
+            </a:r>
+            <a:endParaRPr lang="en-US" sz="1600" dirty="0"/>
+          </a:p>
+        </p:txBody>
+      </p:sp>
+      <p:sp>
+        <p:nvSpPr>
+          <p:cNvPr id="7" name="Shape 5"/>
+          <p:cNvSpPr/>
+          <p:nvPr/>
+        </p:nvSpPr>
+        <p:spPr>
+          <a:xfrm>
+            <a:off x="822960" y="5961888"/>
+            <a:ext cx="10515600" cy="0"/>
+          </a:xfrm>
+          <a:prstGeom prst="line">
+            <a:avLst/>
+          </a:prstGeom>
+          <a:noFill/>
+          <a:ln w="12700">
+            <a:solidFill>
+              <a:srgbClr val="1E2D45"/>
+            </a:solidFill>
+            <a:prstDash val="solid"/>
+          </a:ln>
+        </p:spPr>
+      </p:sp>
+      <p:sp>
+        <p:nvSpPr>
+          <p:cNvPr id="8" name="Text 6"/>
+          <p:cNvSpPr/>
+          <p:nvPr/>
+        </p:nvSpPr>
+        <p:spPr>
+          <a:xfrm>
+            <a:off x="822960" y="6053328"/>
+            <a:ext cx="9692640" cy="457200"/>
+          </a:xfrm>
+          <a:prstGeom prst="rect">
+            <a:avLst/>
+          </a:prstGeom>
+          <a:noFill/>
+          <a:ln/>
+        </p:spPr>
+        <p:txBody>
+          <a:bodyPr wrap="square" rtlCol="0" anchor="ctr"/>
+          <a:lstStyle/>
+          <a:p>
+            <a:pPr indent="0" marL="0">
+              <a:buNone/>
+            </a:pPr>
+            <a:r>
+              <a:rPr lang="en-US" sz="1150" dirty="0">
+                <a:solidFill>
+                  <a:srgbClr val="64748B"/>
+                </a:solidFill>
+                <a:latin typeface="Segoe UI" pitchFamily="34" charset="0"/>
+                <a:ea typeface="Segoe UI" pitchFamily="34" charset="-122"/>
+                <a:cs typeface="Segoe UI" pitchFamily="34" charset="-120"/>
+              </a:rPr>
+              <a:t>Extraction is designed to lose a limb, not the whole pipeline.</a:t>
+            </a:r>
+            <a:endParaRPr lang="en-US" sz="1150" dirty="0"/>
+          </a:p>
+        </p:txBody>
+      </p:sp>
+      <p:sp>
+        <p:nvSpPr>
+          <p:cNvPr id="9" name="Text 7"/>
+          <p:cNvSpPr/>
+          <p:nvPr/>
+        </p:nvSpPr>
+        <p:spPr>
+          <a:xfrm>
+            <a:off x="10698480" y="6382512"/>
+            <a:ext cx="1188720" cy="365760"/>
+          </a:xfrm>
+          <a:prstGeom prst="rect">
+            <a:avLst/>
+          </a:prstGeom>
+          <a:noFill/>
+          <a:ln/>
+        </p:spPr>
+        <p:txBody>
+          <a:bodyPr wrap="square" rtlCol="0" anchor="ctr"/>
+          <a:lstStyle/>
+          <a:p>
+            <a:pPr algn="r" indent="0" marL="0">
+              <a:buNone/>
+            </a:pPr>
+            <a:r>
+              <a:rPr lang="en-US" sz="1000" dirty="0">
+                <a:solidFill>
+                  <a:srgbClr val="64748B"/>
+                </a:solidFill>
+                <a:latin typeface="Consolas" pitchFamily="34" charset="0"/>
+                <a:ea typeface="Consolas" pitchFamily="34" charset="-122"/>
+                <a:cs typeface="Consolas" pitchFamily="34" charset="-120"/>
+              </a:rPr>
+              <a:t>8 / 15</a:t>
+            </a:r>
+            <a:endParaRPr lang="en-US" sz="1000" dirty="0"/>
+          </a:p>
+        </p:txBody>
+      </p:sp>
+    </p:spTree>
+  </p:cSld>
+  <p:clrMapOvr>
+    <a:masterClrMapping/>
+  </p:clrMapOvr>
+</p:sld>
+</file>
+
+<file path=ppt/slides/slide9.xml><?xml version="1.0" encoding="utf-8"?>
+<p:sld xmlns:a="http://schemas.openxmlformats.org/drawingml/2006/main" xmlns:r="http://schemas.openxmlformats.org/officeDocument/2006/relationships" xmlns:p="http://schemas.openxmlformats.org/presentationml/2006/main">
+  <p:cSld name="Slide 9">
+    <p:bg>
+      <p:bgPr>
+        <a:solidFill>
+          <a:srgbClr val="0A0C12"/>
+        </a:solidFill>
+      </p:bgPr>
+    </p:bg>
+    <p:spTree>
+      <p:nvGrpSpPr>
+        <p:cNvPr id="1" name=""/>
+        <p:cNvGrpSpPr/>
+        <p:nvPr/>
+      </p:nvGrpSpPr>
+      <p:grpSpPr>
+        <a:xfrm>
+          <a:off x="0" y="0"/>
+          <a:ext cx="0" cy="0"/>
+          <a:chOff x="0" y="0"/>
+          <a:chExt cx="0" cy="0"/>
+        </a:xfrm>
+      </p:grpSpPr>
+      <p:sp>
+        <p:nvSpPr>
+          <p:cNvPr id="2" name="Shape 0"/>
+          <p:cNvSpPr/>
+          <p:nvPr/>
+        </p:nvSpPr>
+        <p:spPr>
+          <a:xfrm>
+            <a:off x="0" y="0"/>
+            <a:ext cx="7680960" cy="64008"/>
+          </a:xfrm>
+          <a:prstGeom prst="rect">
+            <a:avLst/>
+          </a:prstGeom>
+          <a:solidFill>
+            <a:srgbClr val="3B82F6"/>
+          </a:solidFill>
+          <a:ln/>
+        </p:spPr>
+      </p:sp>
+      <p:sp>
+        <p:nvSpPr>
+          <p:cNvPr id="3" name="Shape 1"/>
+          <p:cNvSpPr/>
+          <p:nvPr/>
+        </p:nvSpPr>
+        <p:spPr>
+          <a:xfrm>
+            <a:off x="7680960" y="0"/>
+            <a:ext cx="4510735" cy="64008"/>
+          </a:xfrm>
+          <a:prstGeom prst="rect">
+            <a:avLst/>
+          </a:prstGeom>
+          <a:solidFill>
+            <a:srgbClr val="06B6D4"/>
+          </a:solidFill>
+          <a:ln/>
+        </p:spPr>
+      </p:sp>
+      <p:sp>
+        <p:nvSpPr>
+          <p:cNvPr id="4" name="Text 2"/>
+          <p:cNvSpPr/>
+          <p:nvPr/>
+        </p:nvSpPr>
+        <p:spPr>
+          <a:xfrm>
+            <a:off x="822960" y="502920"/>
+            <a:ext cx="10515600" cy="365760"/>
+          </a:xfrm>
+          <a:prstGeom prst="rect">
+            <a:avLst/>
+          </a:prstGeom>
+          <a:noFill/>
+          <a:ln/>
+        </p:spPr>
+        <p:txBody>
+          <a:bodyPr wrap="square" rtlCol="0" anchor="ctr"/>
+          <a:lstStyle/>
+          <a:p>
+            <a:pPr indent="0" marL="0">
+              <a:buNone/>
+            </a:pPr>
+            <a:r>
+              <a:rPr lang="en-US" sz="1200" spc="300" kern="0" dirty="0">
+                <a:solidFill>
+                  <a:srgbClr val="06B6D4"/>
+                </a:solidFill>
+                <a:latin typeface="Consolas" pitchFamily="34" charset="0"/>
+                <a:ea typeface="Consolas" pitchFamily="34" charset="-122"/>
+                <a:cs typeface="Consolas" pitchFamily="34" charset="-120"/>
+              </a:rPr>
+              <a:t>EXTRACTION</a:t>
+            </a:r>
+            <a:endParaRPr lang="en-US" sz="1200" dirty="0"/>
+          </a:p>
+        </p:txBody>
+      </p:sp>
+      <p:sp>
+        <p:nvSpPr>
+          <p:cNvPr id="5" name="Text 3"/>
+          <p:cNvSpPr/>
+          <p:nvPr/>
+        </p:nvSpPr>
+        <p:spPr>
+          <a:xfrm>
+            <a:off x="822960" y="914400"/>
+            <a:ext cx="10561320" cy="868680"/>
+          </a:xfrm>
+          <a:prstGeom prst="rect">
+            <a:avLst/>
+          </a:prstGeom>
+          <a:noFill/>
+          <a:ln/>
+        </p:spPr>
+        <p:txBody>
+          <a:bodyPr wrap="square" rtlCol="0" anchor="ctr"/>
+          <a:lstStyle/>
+          <a:p>
+            <a:pPr indent="0" marL="0">
+              <a:buNone/>
+            </a:pPr>
+            <a:r>
+              <a:rPr lang="en-US" sz="2700" b="1" dirty="0">
+                <a:solidFill>
+                  <a:srgbClr val="FFFFFF"/>
+                </a:solidFill>
+                <a:latin typeface="Segoe UI" pitchFamily="34" charset="0"/>
+                <a:ea typeface="Segoe UI" pitchFamily="34" charset="-122"/>
+                <a:cs typeface="Segoe UI" pitchFamily="34" charset="-120"/>
+              </a:rPr>
+              <a:t>Extraction outcomes across a monitored run</a:t>
+            </a:r>
+            <a:endParaRPr lang="en-US" sz="2700" dirty="0"/>
+          </a:p>
+        </p:txBody>
+      </p:sp>
+      <p:graphicFrame>
+        <p:nvGraphicFramePr>
+          <p:cNvPr id="6" name="Chart 0" descr=""/>
+          <p:cNvGraphicFramePr/>
+          <p:nvPr/>
+        </p:nvGraphicFramePr>
+        <p:xfrm>
+          <a:off x="822960" y="1874520"/>
+          <a:ext cx="10515600" cy="3337560"/>
+        </p:xfrm>
+        <a:graphic xmlns:a="http://schemas.openxmlformats.org/drawingml/2006/main">
+          <a:graphicData uri="http://schemas.openxmlformats.org/drawingml/2006/chart">
+            <c:chart xmlns:c="http://schemas.openxmlformats.org/drawingml/2006/chart" r:id="rId1"/>
+          </a:graphicData>
+        </a:graphic>
+      </p:graphicFrame>
+      <p:sp>
+        <p:nvSpPr>
+          <p:cNvPr id="7" name="Shape 4"/>
+          <p:cNvSpPr/>
+          <p:nvPr/>
+        </p:nvSpPr>
+        <p:spPr>
+          <a:xfrm>
+            <a:off x="822960" y="5413248"/>
+            <a:ext cx="10515600" cy="0"/>
+          </a:xfrm>
+          <a:prstGeom prst="line">
+            <a:avLst/>
+          </a:prstGeom>
+          <a:noFill/>
+          <a:ln w="12700">
+            <a:solidFill>
+              <a:srgbClr val="1E2D45"/>
+            </a:solidFill>
+            <a:prstDash val="solid"/>
+          </a:ln>
+        </p:spPr>
+      </p:sp>
+      <p:sp>
+        <p:nvSpPr>
+          <p:cNvPr id="8" name="Text 5"/>
+          <p:cNvSpPr/>
+          <p:nvPr/>
+        </p:nvSpPr>
+        <p:spPr>
+          <a:xfrm>
+            <a:off x="822960" y="5504688"/>
+            <a:ext cx="10424160" cy="411480"/>
+          </a:xfrm>
+          <a:prstGeom prst="rect">
+            <a:avLst/>
+          </a:prstGeom>
+          <a:noFill/>
+          <a:ln/>
+        </p:spPr>
+        <p:txBody>
+          <a:bodyPr wrap="square" rtlCol="0" anchor="ctr"/>
+          <a:lstStyle/>
+          <a:p>
+            <a:pPr indent="0" marL="0">
+              <a:buNone/>
+            </a:pPr>
+            <a:r>
+              <a:rPr lang="en-US" sz="1300" i="1" dirty="0">
+                <a:solidFill>
+                  <a:srgbClr val="06B6D4"/>
+                </a:solidFill>
+                <a:latin typeface="Segoe UI" pitchFamily="34" charset="0"/>
+                <a:ea typeface="Segoe UI" pitchFamily="34" charset="-122"/>
+                <a:cs typeface="Segoe UI" pitchFamily="34" charset="-120"/>
+              </a:rPr>
+              <a:t>→  Partial data with a warning beats zero data with a shrug - the pipeline degrades, it does not die.</a:t>
+            </a:r>
+            <a:endParaRPr lang="en-US" sz="1300" dirty="0"/>
+          </a:p>
+        </p:txBody>
+      </p:sp>
+      <p:sp>
+        <p:nvSpPr>
+          <p:cNvPr id="9" name="Shape 6"/>
+          <p:cNvSpPr/>
+          <p:nvPr/>
+        </p:nvSpPr>
+        <p:spPr>
+          <a:xfrm>
+            <a:off x="822960" y="5961888"/>
+            <a:ext cx="10515600" cy="0"/>
+          </a:xfrm>
+          <a:prstGeom prst="line">
+            <a:avLst/>
+          </a:prstGeom>
+          <a:noFill/>
+          <a:ln w="12700">
+            <a:solidFill>
+              <a:srgbClr val="1E2D45"/>
+            </a:solidFill>
+            <a:prstDash val="solid"/>
+          </a:ln>
+        </p:spPr>
+      </p:sp>
+      <p:sp>
+        <p:nvSpPr>
+          <p:cNvPr id="10" name="Text 7"/>
+          <p:cNvSpPr/>
+          <p:nvPr/>
+        </p:nvSpPr>
+        <p:spPr>
+          <a:xfrm>
+            <a:off x="822960" y="6053328"/>
+            <a:ext cx="9692640" cy="457200"/>
+          </a:xfrm>
+          <a:prstGeom prst="rect">
+            <a:avLst/>
+          </a:prstGeom>
+          <a:noFill/>
+          <a:ln/>
+        </p:spPr>
+        <p:txBody>
+          <a:bodyPr wrap="square" rtlCol="0" anchor="ctr"/>
+          <a:lstStyle/>
+          <a:p>
+            <a:pPr indent="0" marL="0">
+              <a:buNone/>
+            </a:pPr>
+            <a:r>
+              <a:rPr lang="en-US" sz="1150" dirty="0">
+                <a:solidFill>
+                  <a:srgbClr val="64748B"/>
+                </a:solidFill>
+                <a:latin typeface="Segoe UI" pitchFamily="34" charset="0"/>
+                <a:ea typeface="Segoe UI" pitchFamily="34" charset="-122"/>
+                <a:cs typeface="Segoe UI" pitchFamily="34" charset="-120"/>
+              </a:rPr>
+              <a:t>Illustrative outcome mix for a run against a site mid-redesign.</a:t>
+            </a:r>
+            <a:endParaRPr lang="en-US" sz="1150" dirty="0"/>
+          </a:p>
+        </p:txBody>
+      </p:sp>
+      <p:sp>
+        <p:nvSpPr>
+          <p:cNvPr id="11" name="Text 8"/>
+          <p:cNvSpPr/>
+          <p:nvPr/>
+        </p:nvSpPr>
+        <p:spPr>
+          <a:xfrm>
+            <a:off x="10698480" y="6382512"/>
+            <a:ext cx="1188720" cy="365760"/>
+          </a:xfrm>
+          <a:prstGeom prst="rect">
+            <a:avLst/>
+          </a:prstGeom>
+          <a:noFill/>
+          <a:ln/>
+        </p:spPr>
+        <p:txBody>
+          <a:bodyPr wrap="square" rtlCol="0" anchor="ctr"/>
+          <a:lstStyle/>
+          <a:p>
+            <a:pPr algn="r" indent="0" marL="0">
+              <a:buNone/>
+            </a:pPr>
+            <a:r>
+              <a:rPr lang="en-US" sz="1000" dirty="0">
+                <a:solidFill>
+                  <a:srgbClr val="64748B"/>
+                </a:solidFill>
+                <a:latin typeface="Consolas" pitchFamily="34" charset="0"/>
+                <a:ea typeface="Consolas" pitchFamily="34" charset="-122"/>
+                <a:cs typeface="Consolas" pitchFamily="34" charset="-120"/>
+              </a:rPr>
+              <a:t>9 / 15</a:t>
             </a:r>
             <a:endParaRPr lang="en-US" sz="1000" dirty="0"/>
           </a:p>

--- a/decks/web-scraping-toolkit.pptx
+++ b/decks/web-scraping-toolkit.pptx
@@ -161,7 +161,7 @@
               <a:lstStyle/>
               <a:p>
                 <a:pPr>
-                  <a:defRPr b="0" i="0" strike="noStrike" sz="1000" u="none">
+                  <a:defRPr b="0" i="0" strike="noStrike" sz="1800" u="none">
                     <a:solidFill>
                       <a:srgbClr val="E2E8F0"/>
                     </a:solidFill>
@@ -290,7 +290,7 @@
             <a:lstStyle/>
             <a:p>
               <a:pPr>
-                <a:defRPr b="0" i="0" strike="noStrike" sz="1000" u="none">
+                <a:defRPr b="0" i="0" strike="noStrike" sz="1800" u="none">
                   <a:solidFill>
                     <a:srgbClr val="E2E8F0"/>
                   </a:solidFill>
@@ -338,7 +338,7 @@
           <a:lstStyle/>
           <a:p>
             <a:pPr>
-              <a:defRPr sz="1100" b="0" i="0" u="none" strike="noStrike">
+              <a:defRPr sz="1800" b="0" i="0" u="none" strike="noStrike">
                 <a:solidFill>
                   <a:srgbClr val="94A3B8"/>
                 </a:solidFill>
@@ -358,6 +358,7 @@
         <c:axId val="2094734552"/>
         <c:scaling>
           <c:orientation val="minMax"/>
+          <c:min val="0"/>
         </c:scaling>
         <c:delete val="0"/>
         <c:axPos val="l"/>
@@ -390,7 +391,7 @@
           <a:lstStyle/>
           <a:p>
             <a:pPr>
-              <a:defRPr sz="1000" b="0" i="0" u="none" strike="noStrike">
+              <a:defRPr sz="1800" b="0" i="0" u="none" strike="noStrike">
                 <a:solidFill>
                   <a:srgbClr val="94A3B8"/>
                 </a:solidFill>
@@ -521,7 +522,7 @@
                 <a:lstStyle/>
                 <a:p>
                   <a:pPr>
-                    <a:defRPr sz="1000" b="0" i="0" u="none" strike="noStrike">
+                    <a:defRPr sz="1800" b="0" i="0" u="none" strike="noStrike">
                       <a:solidFill>
                         <a:srgbClr val="E2E8F0"/>
                       </a:solidFill>
@@ -546,7 +547,7 @@
                 <a:lstStyle/>
                 <a:p>
                   <a:pPr>
-                    <a:defRPr sz="1000" b="0" i="0" u="none" strike="noStrike">
+                    <a:defRPr sz="1800" b="0" i="0" u="none" strike="noStrike">
                       <a:solidFill>
                         <a:srgbClr val="E2E8F0"/>
                       </a:solidFill>
@@ -571,7 +572,7 @@
                 <a:lstStyle/>
                 <a:p>
                   <a:pPr>
-                    <a:defRPr sz="1000" b="0" i="0" u="none" strike="noStrike">
+                    <a:defRPr sz="1800" b="0" i="0" u="none" strike="noStrike">
                       <a:solidFill>
                         <a:srgbClr val="E2E8F0"/>
                       </a:solidFill>
@@ -596,7 +597,7 @@
                 <a:lstStyle/>
                 <a:p>
                   <a:pPr>
-                    <a:defRPr sz="1000" b="0" i="0" u="none" strike="noStrike">
+                    <a:defRPr sz="1800" b="0" i="0" u="none" strike="noStrike">
                       <a:solidFill>
                         <a:srgbClr val="E2E8F0"/>
                       </a:solidFill>
@@ -677,7 +678,7 @@
           </c:val>
         </c:ser>
         <c:firstSliceAng val="0"/>
-        <c:holeSize val="62"/>
+        <c:holeSize val="60"/>
       </c:doughnutChart>
       <c:spPr>
         <a:solidFill>
@@ -697,7 +698,7 @@
         <a:lstStyle/>
         <a:p>
           <a:pPr>
-            <a:defRPr sz="1100">
+            <a:defRPr sz="1800">
               <a:solidFill>
                 <a:srgbClr val="CBD5E1"/>
               </a:solidFill>
@@ -919,7 +920,7 @@
           <a:lstStyle/>
           <a:p>
             <a:pPr>
-              <a:defRPr sz="1100" b="0" i="0" u="none" strike="noStrike">
+              <a:defRPr sz="1800" b="0" i="0" u="none" strike="noStrike">
                 <a:solidFill>
                   <a:srgbClr val="94A3B8"/>
                 </a:solidFill>
@@ -939,6 +940,7 @@
         <c:axId val="2094734552"/>
         <c:scaling>
           <c:orientation val="minMax"/>
+          <c:min val="0"/>
         </c:scaling>
         <c:delete val="0"/>
         <c:axPos val="l"/>
@@ -971,7 +973,7 @@
           <a:lstStyle/>
           <a:p>
             <a:pPr>
-              <a:defRPr sz="1000" b="0" i="0" u="none" strike="noStrike">
+              <a:defRPr sz="1800" b="0" i="0" u="none" strike="noStrike">
                 <a:solidFill>
                   <a:srgbClr val="94A3B8"/>
                 </a:solidFill>
@@ -1410,7 +1412,7 @@
           <a:p>
             <a:r>
               <a:rPr lang="en-US" dirty="0"/>
-              <a:t/>
+              <a:t>Opening: introduce yourself and this deck, "Web Scraping Toolkit: Pipelines That Survive the Real Web". | Transition: next up - "What this deck covers".</a:t>
             </a:r>
             <a:endParaRPr lang="en-US" dirty="0"/>
           </a:p>
@@ -1498,7 +1500,7 @@
           <a:p>
             <a:r>
               <a:rPr lang="en-US" dirty="0"/>
-              <a:t/>
+              <a:t>Key message: Anatomy of a markup change | Talk track: Sites will change - the system is designed around that certainty. | Transition: next up - "A script you hope for vs a system you operate".</a:t>
             </a:r>
             <a:endParaRPr lang="en-US" dirty="0"/>
           </a:p>
@@ -1586,7 +1588,7 @@
           <a:p>
             <a:r>
               <a:rPr lang="en-US" dirty="0"/>
-              <a:t/>
+              <a:t>Key message: A script you hope for vs a system you operate | Talk track: Clients do not buy scrapers - they buy data that keeps arriving. | Transition: next up - "Be a polite guest".</a:t>
             </a:r>
             <a:endParaRPr lang="en-US" dirty="0"/>
           </a:p>
@@ -1674,7 +1676,7 @@
           <a:p>
             <a:r>
               <a:rPr lang="en-US" dirty="0"/>
-              <a:t/>
+              <a:t>Key message: Be a polite guest | Talk track: Ethical collection is a feature clients can put their name on. | Transition: next up - "Clean-extraction rate through a drift event".</a:t>
             </a:r>
             <a:endParaRPr lang="en-US" dirty="0"/>
           </a:p>
@@ -1762,7 +1764,7 @@
           <a:p>
             <a:r>
               <a:rPr lang="en-US" dirty="0"/>
-              <a:t/>
+              <a:t>Key message: Clean-extraction rate through a drift event | Insight: When markup drifts, fallbacks hold extraction above zero while the fix ships - and validation flags the drift the day it happens. | Talk track: Illustrative pattern of a drift event and recovery, consistent with the toolkit's design. | Transition: next up - "What the toolkit powers in production".</a:t>
             </a:r>
             <a:endParaRPr lang="en-US" dirty="0"/>
           </a:p>
@@ -1850,7 +1852,7 @@
           <a:p>
             <a:r>
               <a:rPr lang="en-US" dirty="0"/>
-              <a:t/>
+              <a:t>Key message: What the toolkit powers in production | Talk track: Delivered to clients worldwide through Upwork. | Transition: next up - "Build systems, not scripts".</a:t>
             </a:r>
             <a:endParaRPr lang="en-US" dirty="0"/>
           </a:p>
@@ -1938,7 +1940,7 @@
           <a:p>
             <a:r>
               <a:rPr lang="en-US" dirty="0"/>
-              <a:t/>
+              <a:t>Key message: Build systems, not scripts | Transition: close with the call to action on the contact slide, invite questions.</a:t>
             </a:r>
             <a:endParaRPr lang="en-US" dirty="0"/>
           </a:p>
@@ -2026,7 +2028,7 @@
           <a:p>
             <a:r>
               <a:rPr lang="en-US" dirty="0"/>
-              <a:t/>
+              <a:t>Key message: What this deck covers | Agenda: Why the real web breaks naive scrapers every month; Five instrumented stages of a collection pipeline; Validating every run: counts, schema, and sanity ranges; Tolerant extraction, polite crawling, and logs a human can read; What the toolkit delivers in production engagements | Transition: next up - "The real web is hostile".</a:t>
             </a:r>
             <a:endParaRPr lang="en-US" dirty="0"/>
           </a:p>
@@ -2114,7 +2116,7 @@
           <a:p>
             <a:r>
               <a:rPr lang="en-US" dirty="0"/>
-              <a:t/>
+              <a:t>Key message: The real web is hostile | Talk track: The failure mode that hurts clients most is silence, not the crash. | Transition: next up - "Five stages, all instrumented".</a:t>
             </a:r>
             <a:endParaRPr lang="en-US" dirty="0"/>
           </a:p>
@@ -2202,7 +2204,7 @@
           <a:p>
             <a:r>
               <a:rPr lang="en-US" dirty="0"/>
-              <a:t/>
+              <a:t>Key message: Five stages, all instrumented | Talk track: Every stage records what it did - nothing about a run is a mystery. | Transition: next up - "One framework, four disciplines".</a:t>
             </a:r>
             <a:endParaRPr lang="en-US" dirty="0"/>
           </a:p>
@@ -2290,7 +2292,7 @@
           <a:p>
             <a:r>
               <a:rPr lang="en-US" dirty="0"/>
-              <a:t/>
+              <a:t>Key message: One framework, four disciplines | Talk track: Built for engagements where the data has to keep arriving, month after month. | Transition: next up - "Validate every run".</a:t>
             </a:r>
             <a:endParaRPr lang="en-US" dirty="0"/>
           </a:p>
@@ -2378,7 +2380,7 @@
           <a:p>
             <a:r>
               <a:rPr lang="en-US" dirty="0"/>
-              <a:t/>
+              <a:t>Key message: Validate every run | Talk track: Do not trust a run because it exited zero. | Transition: next up - "What run validation catches before clients do".</a:t>
             </a:r>
             <a:endParaRPr lang="en-US" dirty="0"/>
           </a:p>
@@ -2466,7 +2468,7 @@
           <a:p>
             <a:r>
               <a:rPr lang="en-US" dirty="0"/>
-              <a:t/>
+              <a:t>Key message: What run validation catches before clients do | Insight: Validation catches the boring failures first - the ones that would otherwise become next week's emergency. | Talk track: Illustrative mix across monitored engagements; the point is the coverage, not the exact counts. | Transition: next up - "Tolerant extraction beats perfect selectors".</a:t>
             </a:r>
             <a:endParaRPr lang="en-US" dirty="0"/>
           </a:p>
@@ -2554,7 +2556,7 @@
           <a:p>
             <a:r>
               <a:rPr lang="en-US" dirty="0"/>
-              <a:t/>
+              <a:t>Key message: Tolerant extraction beats perfect selectors | Talk track: Extraction is designed to lose a limb, not the whole pipeline. | Transition: next up - "Extraction outcomes across a monitored run".</a:t>
             </a:r>
             <a:endParaRPr lang="en-US" dirty="0"/>
           </a:p>
@@ -2642,7 +2644,7 @@
           <a:p>
             <a:r>
               <a:rPr lang="en-US" dirty="0"/>
-              <a:t/>
+              <a:t>Key message: Extraction outcomes across a monitored run | Insight: Partial data with a warning beats zero data with a shrug - the pipeline degrades, it does not die. | Talk track: Illustrative outcome mix for a run against a site mid-redesign. | Transition: next up - "Anatomy of a markup change".</a:t>
             </a:r>
             <a:endParaRPr lang="en-US" dirty="0"/>
           </a:p>
@@ -3063,7 +3065,7 @@
         </p:nvSpPr>
         <p:spPr>
           <a:xfrm>
-            <a:off x="822960" y="1783080"/>
+            <a:off x="822960" y="1737360"/>
             <a:ext cx="10515600" cy="457200"/>
           </a:xfrm>
           <a:prstGeom prst="rect">
@@ -3080,7 +3082,7 @@
               <a:buNone/>
             </a:pPr>
             <a:r>
-              <a:rPr lang="en-US" sz="1400" spc="400" kern="0" dirty="0">
+              <a:rPr lang="en-US" sz="1800" spc="400" kern="0" dirty="0">
                 <a:solidFill>
                   <a:srgbClr val="06B6D4"/>
                 </a:solidFill>
@@ -3090,7 +3092,7 @@
               </a:rPr>
               <a:t>ZALIN PLATFORM · OPEN SOURCE</a:t>
             </a:r>
-            <a:endParaRPr lang="en-US" sz="1400" dirty="0"/>
+            <a:endParaRPr lang="en-US" sz="1800" dirty="0"/>
           </a:p>
         </p:txBody>
       </p:sp>
@@ -3102,7 +3104,7 @@
         </p:nvSpPr>
         <p:spPr>
           <a:xfrm>
-            <a:off x="822960" y="2286000"/>
+            <a:off x="822960" y="2240280"/>
             <a:ext cx="10607040" cy="1691640"/>
           </a:xfrm>
           <a:prstGeom prst="rect">
@@ -3141,8 +3143,8 @@
         </p:nvSpPr>
         <p:spPr>
           <a:xfrm>
-            <a:off x="822960" y="4023360"/>
-            <a:ext cx="10058400" cy="777240"/>
+            <a:off x="822960" y="3977640"/>
+            <a:ext cx="10058400" cy="822960"/>
           </a:xfrm>
           <a:prstGeom prst="rect">
             <a:avLst/>
@@ -3158,7 +3160,7 @@
               <a:buNone/>
             </a:pPr>
             <a:r>
-              <a:rPr lang="en-US" sz="1700" dirty="0">
+              <a:rPr lang="en-US" sz="2000" dirty="0">
                 <a:solidFill>
                   <a:srgbClr val="94A3B8"/>
                 </a:solidFill>
@@ -3168,7 +3170,7 @@
               </a:rPr>
               <a:t>Pipelines that survive contact with the real web</a:t>
             </a:r>
-            <a:endParaRPr lang="en-US" sz="1700" dirty="0"/>
+            <a:endParaRPr lang="en-US" sz="2000" dirty="0"/>
           </a:p>
         </p:txBody>
       </p:sp>
@@ -3180,7 +3182,7 @@
         </p:nvSpPr>
         <p:spPr>
           <a:xfrm>
-            <a:off x="822960" y="5440680"/>
+            <a:off x="822960" y="5349240"/>
             <a:ext cx="4114800" cy="0"/>
           </a:xfrm>
           <a:prstGeom prst="line">
@@ -3203,8 +3205,8 @@
         </p:nvSpPr>
         <p:spPr>
           <a:xfrm>
-            <a:off x="822960" y="5596128"/>
-            <a:ext cx="10058400" cy="457200"/>
+            <a:off x="822960" y="5532120"/>
+            <a:ext cx="10058400" cy="502920"/>
           </a:xfrm>
           <a:prstGeom prst="rect">
             <a:avLst/>
@@ -3220,9 +3222,9 @@
               <a:buNone/>
             </a:pPr>
             <a:r>
-              <a:rPr lang="en-US" sz="1250" dirty="0">
-                <a:solidFill>
-                  <a:srgbClr val="64748B"/>
+              <a:rPr lang="en-US" sz="1800" dirty="0">
+                <a:solidFill>
+                  <a:srgbClr val="8FA3BF"/>
                 </a:solidFill>
                 <a:latin typeface="Segoe UI" pitchFamily="34" charset="0"/>
                 <a:ea typeface="Segoe UI" pitchFamily="34" charset="-122"/>
@@ -3230,7 +3232,7 @@
               </a:rPr>
               <a:t>Rezalian Vatiady · Zalin Labs · 2026</a:t>
             </a:r>
-            <a:endParaRPr lang="en-US" sz="1250" dirty="0"/>
+            <a:endParaRPr lang="en-US" sz="1800" dirty="0"/>
           </a:p>
         </p:txBody>
       </p:sp>
@@ -3242,8 +3244,8 @@
         </p:nvSpPr>
         <p:spPr>
           <a:xfrm>
-            <a:off x="10698480" y="6382512"/>
-            <a:ext cx="1188720" cy="365760"/>
+            <a:off x="10698480" y="6309360"/>
+            <a:ext cx="1188720" cy="411480"/>
           </a:xfrm>
           <a:prstGeom prst="rect">
             <a:avLst/>
@@ -3259,9 +3261,9 @@
               <a:buNone/>
             </a:pPr>
             <a:r>
-              <a:rPr lang="en-US" sz="1000" dirty="0">
-                <a:solidFill>
-                  <a:srgbClr val="64748B"/>
+              <a:rPr lang="en-US" sz="1800" dirty="0">
+                <a:solidFill>
+                  <a:srgbClr val="8FA3BF"/>
                 </a:solidFill>
                 <a:latin typeface="Consolas" pitchFamily="34" charset="0"/>
                 <a:ea typeface="Consolas" pitchFamily="34" charset="-122"/>
@@ -3269,7 +3271,7 @@
               </a:rPr>
               <a:t>1 / 15</a:t>
             </a:r>
-            <a:endParaRPr lang="en-US" sz="1000" dirty="0"/>
+            <a:endParaRPr lang="en-US" sz="1800" dirty="0"/>
           </a:p>
         </p:txBody>
       </p:sp>
@@ -3353,8 +3355,8 @@
         </p:nvSpPr>
         <p:spPr>
           <a:xfrm>
-            <a:off x="822960" y="502920"/>
-            <a:ext cx="10515600" cy="365760"/>
+            <a:off x="822960" y="457200"/>
+            <a:ext cx="10515600" cy="411480"/>
           </a:xfrm>
           <a:prstGeom prst="rect">
             <a:avLst/>
@@ -3370,7 +3372,7 @@
               <a:buNone/>
             </a:pPr>
             <a:r>
-              <a:rPr lang="en-US" sz="1200" spc="300" kern="0" dirty="0">
+              <a:rPr lang="en-US" sz="1800" spc="300" kern="0" dirty="0">
                 <a:solidFill>
                   <a:srgbClr val="06B6D4"/>
                 </a:solidFill>
@@ -3380,7 +3382,7 @@
               </a:rPr>
               <a:t>RESILIENCE</a:t>
             </a:r>
-            <a:endParaRPr lang="en-US" sz="1200" dirty="0"/>
+            <a:endParaRPr lang="en-US" sz="1800" dirty="0"/>
           </a:p>
         </p:txBody>
       </p:sp>
@@ -3431,7 +3433,7 @@
         </p:nvSpPr>
         <p:spPr>
           <a:xfrm>
-            <a:off x="1371600" y="3035808"/>
+            <a:off x="1371600" y="2907792"/>
             <a:ext cx="9464040" cy="0"/>
           </a:xfrm>
           <a:prstGeom prst="line">
@@ -3454,7 +3456,7 @@
         </p:nvSpPr>
         <p:spPr>
           <a:xfrm>
-            <a:off x="1289304" y="2953512"/>
+            <a:off x="1289304" y="2825496"/>
             <a:ext cx="164592" cy="164592"/>
           </a:xfrm>
           <a:prstGeom prst="ellipse">
@@ -3479,8 +3481,8 @@
         </p:nvSpPr>
         <p:spPr>
           <a:xfrm>
-            <a:off x="342900" y="2395728"/>
-            <a:ext cx="2057400" cy="365760"/>
+            <a:off x="297180" y="2212848"/>
+            <a:ext cx="2148840" cy="384048"/>
           </a:xfrm>
           <a:prstGeom prst="rect">
             <a:avLst/>
@@ -3496,7 +3498,7 @@
               <a:buNone/>
             </a:pPr>
             <a:r>
-              <a:rPr lang="en-US" sz="1100" b="1" dirty="0">
+              <a:rPr lang="en-US" sz="1800" b="1" dirty="0">
                 <a:solidFill>
                   <a:srgbClr val="3B82F6"/>
                 </a:solidFill>
@@ -3506,7 +3508,7 @@
               </a:rPr>
               <a:t>Hour 0</a:t>
             </a:r>
-            <a:endParaRPr lang="en-US" sz="1100" dirty="0"/>
+            <a:endParaRPr lang="en-US" sz="1800" dirty="0"/>
           </a:p>
         </p:txBody>
       </p:sp>
@@ -3518,8 +3520,8 @@
         </p:nvSpPr>
         <p:spPr>
           <a:xfrm>
-            <a:off x="342900" y="3310128"/>
-            <a:ext cx="2057400" cy="566928"/>
+            <a:off x="297180" y="3200400"/>
+            <a:ext cx="2148840" cy="713232"/>
           </a:xfrm>
           <a:prstGeom prst="rect">
             <a:avLst/>
@@ -3535,7 +3537,7 @@
               <a:buNone/>
             </a:pPr>
             <a:r>
-              <a:rPr lang="en-US" sz="1250" b="1" dirty="0">
+              <a:rPr lang="en-US" sz="1800" b="1" dirty="0">
                 <a:solidFill>
                   <a:srgbClr val="FFFFFF"/>
                 </a:solidFill>
@@ -3545,7 +3547,7 @@
               </a:rPr>
               <a:t>Detection</a:t>
             </a:r>
-            <a:endParaRPr lang="en-US" sz="1250" dirty="0"/>
+            <a:endParaRPr lang="en-US" sz="1800" dirty="0"/>
           </a:p>
         </p:txBody>
       </p:sp>
@@ -3557,8 +3559,8 @@
         </p:nvSpPr>
         <p:spPr>
           <a:xfrm>
-            <a:off x="342900" y="3895344"/>
-            <a:ext cx="2057400" cy="1234440"/>
+            <a:off x="297180" y="3931920"/>
+            <a:ext cx="2148840" cy="1417320"/>
           </a:xfrm>
           <a:prstGeom prst="rect">
             <a:avLst/>
@@ -3574,7 +3576,7 @@
               <a:buNone/>
             </a:pPr>
             <a:r>
-              <a:rPr lang="en-US" sz="1000" dirty="0">
+              <a:rPr lang="en-US" sz="1800" dirty="0">
                 <a:solidFill>
                   <a:srgbClr val="CBD5E1"/>
                 </a:solidFill>
@@ -3584,7 +3586,7 @@
               </a:rPr>
               <a:t>Validation flags a row-count drop the day the site changes - not when a client calls.</a:t>
             </a:r>
-            <a:endParaRPr lang="en-US" sz="1000" dirty="0"/>
+            <a:endParaRPr lang="en-US" sz="1800" dirty="0"/>
           </a:p>
         </p:txBody>
       </p:sp>
@@ -3596,7 +3598,7 @@
         </p:nvSpPr>
         <p:spPr>
           <a:xfrm>
-            <a:off x="3655314" y="2953512"/>
+            <a:off x="3655314" y="2825496"/>
             <a:ext cx="164592" cy="164592"/>
           </a:xfrm>
           <a:prstGeom prst="ellipse">
@@ -3621,8 +3623,8 @@
         </p:nvSpPr>
         <p:spPr>
           <a:xfrm>
-            <a:off x="2708910" y="2395728"/>
-            <a:ext cx="2057400" cy="365760"/>
+            <a:off x="2663190" y="2212848"/>
+            <a:ext cx="2148840" cy="384048"/>
           </a:xfrm>
           <a:prstGeom prst="rect">
             <a:avLst/>
@@ -3638,7 +3640,7 @@
               <a:buNone/>
             </a:pPr>
             <a:r>
-              <a:rPr lang="en-US" sz="1100" b="1" dirty="0">
+              <a:rPr lang="en-US" sz="1800" b="1" dirty="0">
                 <a:solidFill>
                   <a:srgbClr val="06B6D4"/>
                 </a:solidFill>
@@ -3648,7 +3650,7 @@
               </a:rPr>
               <a:t>Hour 0</a:t>
             </a:r>
-            <a:endParaRPr lang="en-US" sz="1100" dirty="0"/>
+            <a:endParaRPr lang="en-US" sz="1800" dirty="0"/>
           </a:p>
         </p:txBody>
       </p:sp>
@@ -3660,8 +3662,8 @@
         </p:nvSpPr>
         <p:spPr>
           <a:xfrm>
-            <a:off x="2708910" y="3310128"/>
-            <a:ext cx="2057400" cy="566928"/>
+            <a:off x="2663190" y="3200400"/>
+            <a:ext cx="2148840" cy="713232"/>
           </a:xfrm>
           <a:prstGeom prst="rect">
             <a:avLst/>
@@ -3677,7 +3679,7 @@
               <a:buNone/>
             </a:pPr>
             <a:r>
-              <a:rPr lang="en-US" sz="1250" b="1" dirty="0">
+              <a:rPr lang="en-US" sz="1800" b="1" dirty="0">
                 <a:solidFill>
                   <a:srgbClr val="FFFFFF"/>
                 </a:solidFill>
@@ -3687,7 +3689,7 @@
               </a:rPr>
               <a:t>Containment</a:t>
             </a:r>
-            <a:endParaRPr lang="en-US" sz="1250" dirty="0"/>
+            <a:endParaRPr lang="en-US" sz="1800" dirty="0"/>
           </a:p>
         </p:txBody>
       </p:sp>
@@ -3699,8 +3701,8 @@
         </p:nvSpPr>
         <p:spPr>
           <a:xfrm>
-            <a:off x="2708910" y="3895344"/>
-            <a:ext cx="2057400" cy="1234440"/>
+            <a:off x="2663190" y="3931920"/>
+            <a:ext cx="2148840" cy="1417320"/>
           </a:xfrm>
           <a:prstGeom prst="rect">
             <a:avLst/>
@@ -3716,7 +3718,7 @@
               <a:buNone/>
             </a:pPr>
             <a:r>
-              <a:rPr lang="en-US" sz="1000" dirty="0">
+              <a:rPr lang="en-US" sz="1800" dirty="0">
                 <a:solidFill>
                   <a:srgbClr val="CBD5E1"/>
                 </a:solidFill>
@@ -3726,7 +3728,7 @@
               </a:rPr>
               <a:t>Fallback selectors keep extracting while the primary path is broken.</a:t>
             </a:r>
-            <a:endParaRPr lang="en-US" sz="1000" dirty="0"/>
+            <a:endParaRPr lang="en-US" sz="1800" dirty="0"/>
           </a:p>
         </p:txBody>
       </p:sp>
@@ -3738,7 +3740,7 @@
         </p:nvSpPr>
         <p:spPr>
           <a:xfrm>
-            <a:off x="6021324" y="2953512"/>
+            <a:off x="6021324" y="2825496"/>
             <a:ext cx="164592" cy="164592"/>
           </a:xfrm>
           <a:prstGeom prst="ellipse">
@@ -3763,8 +3765,8 @@
         </p:nvSpPr>
         <p:spPr>
           <a:xfrm>
-            <a:off x="5074920" y="2395728"/>
-            <a:ext cx="2057400" cy="365760"/>
+            <a:off x="5029200" y="2212848"/>
+            <a:ext cx="2148840" cy="384048"/>
           </a:xfrm>
           <a:prstGeom prst="rect">
             <a:avLst/>
@@ -3780,7 +3782,7 @@
               <a:buNone/>
             </a:pPr>
             <a:r>
-              <a:rPr lang="en-US" sz="1100" b="1" dirty="0">
+              <a:rPr lang="en-US" sz="1800" b="1" dirty="0">
                 <a:solidFill>
                   <a:srgbClr val="3B82F6"/>
                 </a:solidFill>
@@ -3790,7 +3792,7 @@
               </a:rPr>
               <a:t>Hour 1</a:t>
             </a:r>
-            <a:endParaRPr lang="en-US" sz="1100" dirty="0"/>
+            <a:endParaRPr lang="en-US" sz="1800" dirty="0"/>
           </a:p>
         </p:txBody>
       </p:sp>
@@ -3802,8 +3804,8 @@
         </p:nvSpPr>
         <p:spPr>
           <a:xfrm>
-            <a:off x="5074920" y="3310128"/>
-            <a:ext cx="2057400" cy="566928"/>
+            <a:off x="5029200" y="3200400"/>
+            <a:ext cx="2148840" cy="713232"/>
           </a:xfrm>
           <a:prstGeom prst="rect">
             <a:avLst/>
@@ -3819,7 +3821,7 @@
               <a:buNone/>
             </a:pPr>
             <a:r>
-              <a:rPr lang="en-US" sz="1250" b="1" dirty="0">
+              <a:rPr lang="en-US" sz="1800" b="1" dirty="0">
                 <a:solidFill>
                   <a:srgbClr val="FFFFFF"/>
                 </a:solidFill>
@@ -3829,7 +3831,7 @@
               </a:rPr>
               <a:t>Diagnosis</a:t>
             </a:r>
-            <a:endParaRPr lang="en-US" sz="1250" dirty="0"/>
+            <a:endParaRPr lang="en-US" sz="1800" dirty="0"/>
           </a:p>
         </p:txBody>
       </p:sp>
@@ -3841,8 +3843,8 @@
         </p:nvSpPr>
         <p:spPr>
           <a:xfrm>
-            <a:off x="5074920" y="3895344"/>
-            <a:ext cx="2057400" cy="1234440"/>
+            <a:off x="5029200" y="3931920"/>
+            <a:ext cx="2148840" cy="1417320"/>
           </a:xfrm>
           <a:prstGeom prst="rect">
             <a:avLst/>
@@ -3858,7 +3860,7 @@
               <a:buNone/>
             </a:pPr>
             <a:r>
-              <a:rPr lang="en-US" sz="1000" dirty="0">
+              <a:rPr lang="en-US" sz="1800" dirty="0">
                 <a:solidFill>
                   <a:srgbClr val="CBD5E1"/>
                 </a:solidFill>
@@ -3868,7 +3870,7 @@
               </a:rPr>
               <a:t>Structured run logs point straight at the anchor that moved.</a:t>
             </a:r>
-            <a:endParaRPr lang="en-US" sz="1000" dirty="0"/>
+            <a:endParaRPr lang="en-US" sz="1800" dirty="0"/>
           </a:p>
         </p:txBody>
       </p:sp>
@@ -3880,7 +3882,7 @@
         </p:nvSpPr>
         <p:spPr>
           <a:xfrm>
-            <a:off x="8387334" y="2953512"/>
+            <a:off x="8387334" y="2825496"/>
             <a:ext cx="164592" cy="164592"/>
           </a:xfrm>
           <a:prstGeom prst="ellipse">
@@ -3905,8 +3907,8 @@
         </p:nvSpPr>
         <p:spPr>
           <a:xfrm>
-            <a:off x="7440930" y="2395728"/>
-            <a:ext cx="2057400" cy="365760"/>
+            <a:off x="7395210" y="2212848"/>
+            <a:ext cx="2148840" cy="384048"/>
           </a:xfrm>
           <a:prstGeom prst="rect">
             <a:avLst/>
@@ -3922,7 +3924,7 @@
               <a:buNone/>
             </a:pPr>
             <a:r>
-              <a:rPr lang="en-US" sz="1100" b="1" dirty="0">
+              <a:rPr lang="en-US" sz="1800" b="1" dirty="0">
                 <a:solidFill>
                   <a:srgbClr val="06B6D4"/>
                 </a:solidFill>
@@ -3932,7 +3934,7 @@
               </a:rPr>
               <a:t>Day 1</a:t>
             </a:r>
-            <a:endParaRPr lang="en-US" sz="1100" dirty="0"/>
+            <a:endParaRPr lang="en-US" sz="1800" dirty="0"/>
           </a:p>
         </p:txBody>
       </p:sp>
@@ -3944,8 +3946,8 @@
         </p:nvSpPr>
         <p:spPr>
           <a:xfrm>
-            <a:off x="7440930" y="3310128"/>
-            <a:ext cx="2057400" cy="566928"/>
+            <a:off x="7395210" y="3200400"/>
+            <a:ext cx="2148840" cy="713232"/>
           </a:xfrm>
           <a:prstGeom prst="rect">
             <a:avLst/>
@@ -3961,7 +3963,7 @@
               <a:buNone/>
             </a:pPr>
             <a:r>
-              <a:rPr lang="en-US" sz="1250" b="1" dirty="0">
+              <a:rPr lang="en-US" sz="1800" b="1" dirty="0">
                 <a:solidFill>
                   <a:srgbClr val="FFFFFF"/>
                 </a:solidFill>
@@ -3971,7 +3973,7 @@
               </a:rPr>
               <a:t>Fix</a:t>
             </a:r>
-            <a:endParaRPr lang="en-US" sz="1250" dirty="0"/>
+            <a:endParaRPr lang="en-US" sz="1800" dirty="0"/>
           </a:p>
         </p:txBody>
       </p:sp>
@@ -3983,8 +3985,8 @@
         </p:nvSpPr>
         <p:spPr>
           <a:xfrm>
-            <a:off x="7440930" y="3895344"/>
-            <a:ext cx="2057400" cy="1234440"/>
+            <a:off x="7395210" y="3931920"/>
+            <a:ext cx="2148840" cy="1417320"/>
           </a:xfrm>
           <a:prstGeom prst="rect">
             <a:avLst/>
@@ -4000,7 +4002,7 @@
               <a:buNone/>
             </a:pPr>
             <a:r>
-              <a:rPr lang="en-US" sz="1000" dirty="0">
+              <a:rPr lang="en-US" sz="1800" dirty="0">
                 <a:solidFill>
                   <a:srgbClr val="CBD5E1"/>
                 </a:solidFill>
@@ -4010,7 +4012,7 @@
               </a:rPr>
               <a:t>The patched selector ships as a normal code change, not an archaeology dig.</a:t>
             </a:r>
-            <a:endParaRPr lang="en-US" sz="1000" dirty="0"/>
+            <a:endParaRPr lang="en-US" sz="1800" dirty="0"/>
           </a:p>
         </p:txBody>
       </p:sp>
@@ -4022,7 +4024,7 @@
         </p:nvSpPr>
         <p:spPr>
           <a:xfrm>
-            <a:off x="10753344" y="2953512"/>
+            <a:off x="10753344" y="2825496"/>
             <a:ext cx="164592" cy="164592"/>
           </a:xfrm>
           <a:prstGeom prst="ellipse">
@@ -4047,8 +4049,8 @@
         </p:nvSpPr>
         <p:spPr>
           <a:xfrm>
-            <a:off x="9806940" y="2395728"/>
-            <a:ext cx="2057400" cy="365760"/>
+            <a:off x="9761220" y="2212848"/>
+            <a:ext cx="2148840" cy="384048"/>
           </a:xfrm>
           <a:prstGeom prst="rect">
             <a:avLst/>
@@ -4064,7 +4066,7 @@
               <a:buNone/>
             </a:pPr>
             <a:r>
-              <a:rPr lang="en-US" sz="1100" b="1" dirty="0">
+              <a:rPr lang="en-US" sz="1800" b="1" dirty="0">
                 <a:solidFill>
                   <a:srgbClr val="3B82F6"/>
                 </a:solidFill>
@@ -4074,7 +4076,7 @@
               </a:rPr>
               <a:t>Day 1</a:t>
             </a:r>
-            <a:endParaRPr lang="en-US" sz="1100" dirty="0"/>
+            <a:endParaRPr lang="en-US" sz="1800" dirty="0"/>
           </a:p>
         </p:txBody>
       </p:sp>
@@ -4086,8 +4088,8 @@
         </p:nvSpPr>
         <p:spPr>
           <a:xfrm>
-            <a:off x="9806940" y="3310128"/>
-            <a:ext cx="2057400" cy="566928"/>
+            <a:off x="9761220" y="3200400"/>
+            <a:ext cx="2148840" cy="713232"/>
           </a:xfrm>
           <a:prstGeom prst="rect">
             <a:avLst/>
@@ -4103,7 +4105,7 @@
               <a:buNone/>
             </a:pPr>
             <a:r>
-              <a:rPr lang="en-US" sz="1250" b="1" dirty="0">
+              <a:rPr lang="en-US" sz="1800" b="1" dirty="0">
                 <a:solidFill>
                   <a:srgbClr val="FFFFFF"/>
                 </a:solidFill>
@@ -4113,7 +4115,7 @@
               </a:rPr>
               <a:t>Verification</a:t>
             </a:r>
-            <a:endParaRPr lang="en-US" sz="1250" dirty="0"/>
+            <a:endParaRPr lang="en-US" sz="1800" dirty="0"/>
           </a:p>
         </p:txBody>
       </p:sp>
@@ -4125,8 +4127,8 @@
         </p:nvSpPr>
         <p:spPr>
           <a:xfrm>
-            <a:off x="9806940" y="3895344"/>
-            <a:ext cx="2057400" cy="1234440"/>
+            <a:off x="9761220" y="3931920"/>
+            <a:ext cx="2148840" cy="1417320"/>
           </a:xfrm>
           <a:prstGeom prst="rect">
             <a:avLst/>
@@ -4142,7 +4144,7 @@
               <a:buNone/>
             </a:pPr>
             <a:r>
-              <a:rPr lang="en-US" sz="1000" dirty="0">
+              <a:rPr lang="en-US" sz="1800" dirty="0">
                 <a:solidFill>
                   <a:srgbClr val="CBD5E1"/>
                 </a:solidFill>
@@ -4152,7 +4154,7 @@
               </a:rPr>
               <a:t>The next runs return to clean extraction, and the incident is logged.</a:t>
             </a:r>
-            <a:endParaRPr lang="en-US" sz="1000" dirty="0"/>
+            <a:endParaRPr lang="en-US" sz="1800" dirty="0"/>
           </a:p>
         </p:txBody>
       </p:sp>
@@ -4187,8 +4189,8 @@
         </p:nvSpPr>
         <p:spPr>
           <a:xfrm>
-            <a:off x="822960" y="6053328"/>
-            <a:ext cx="9692640" cy="457200"/>
+            <a:off x="822960" y="6035040"/>
+            <a:ext cx="10424160" cy="566928"/>
           </a:xfrm>
           <a:prstGeom prst="rect">
             <a:avLst/>
@@ -4204,9 +4206,9 @@
               <a:buNone/>
             </a:pPr>
             <a:r>
-              <a:rPr lang="en-US" sz="1150" dirty="0">
-                <a:solidFill>
-                  <a:srgbClr val="64748B"/>
+              <a:rPr lang="en-US" sz="1800" dirty="0">
+                <a:solidFill>
+                  <a:srgbClr val="8FA3BF"/>
                 </a:solidFill>
                 <a:latin typeface="Segoe UI" pitchFamily="34" charset="0"/>
                 <a:ea typeface="Segoe UI" pitchFamily="34" charset="-122"/>
@@ -4214,7 +4216,7 @@
               </a:rPr>
               <a:t>Sites will change - the system is designed around that certainty.</a:t>
             </a:r>
-            <a:endParaRPr lang="en-US" sz="1150" dirty="0"/>
+            <a:endParaRPr lang="en-US" sz="1800" dirty="0"/>
           </a:p>
         </p:txBody>
       </p:sp>
@@ -4226,8 +4228,8 @@
         </p:nvSpPr>
         <p:spPr>
           <a:xfrm>
-            <a:off x="10698480" y="6382512"/>
-            <a:ext cx="1188720" cy="365760"/>
+            <a:off x="10698480" y="6309360"/>
+            <a:ext cx="1188720" cy="411480"/>
           </a:xfrm>
           <a:prstGeom prst="rect">
             <a:avLst/>
@@ -4243,9 +4245,9 @@
               <a:buNone/>
             </a:pPr>
             <a:r>
-              <a:rPr lang="en-US" sz="1000" dirty="0">
-                <a:solidFill>
-                  <a:srgbClr val="64748B"/>
+              <a:rPr lang="en-US" sz="1800" dirty="0">
+                <a:solidFill>
+                  <a:srgbClr val="8FA3BF"/>
                 </a:solidFill>
                 <a:latin typeface="Consolas" pitchFamily="34" charset="0"/>
                 <a:ea typeface="Consolas" pitchFamily="34" charset="-122"/>
@@ -4253,7 +4255,7 @@
               </a:rPr>
               <a:t>10 / 15</a:t>
             </a:r>
-            <a:endParaRPr lang="en-US" sz="1000" dirty="0"/>
+            <a:endParaRPr lang="en-US" sz="1800" dirty="0"/>
           </a:p>
         </p:txBody>
       </p:sp>
@@ -4337,8 +4339,8 @@
         </p:nvSpPr>
         <p:spPr>
           <a:xfrm>
-            <a:off x="822960" y="502920"/>
-            <a:ext cx="10515600" cy="365760"/>
+            <a:off x="822960" y="457200"/>
+            <a:ext cx="10515600" cy="411480"/>
           </a:xfrm>
           <a:prstGeom prst="rect">
             <a:avLst/>
@@ -4354,7 +4356,7 @@
               <a:buNone/>
             </a:pPr>
             <a:r>
-              <a:rPr lang="en-US" sz="1200" spc="300" kern="0" dirty="0">
+              <a:rPr lang="en-US" sz="1800" spc="300" kern="0" dirty="0">
                 <a:solidFill>
                   <a:srgbClr val="06B6D4"/>
                 </a:solidFill>
@@ -4364,7 +4366,7 @@
               </a:rPr>
               <a:t>THE DIFFERENCE</a:t>
             </a:r>
-            <a:endParaRPr lang="en-US" sz="1200" dirty="0"/>
+            <a:endParaRPr lang="en-US" sz="1800" dirty="0"/>
           </a:p>
         </p:txBody>
       </p:sp>
@@ -4415,12 +4417,12 @@
         </p:nvSpPr>
         <p:spPr>
           <a:xfrm>
-            <a:off x="822960" y="2011680"/>
-            <a:ext cx="5074920" cy="3611880"/>
+            <a:off x="822960" y="1965960"/>
+            <a:ext cx="5074920" cy="3657600"/>
           </a:xfrm>
           <a:prstGeom prst="roundRect">
             <a:avLst>
-              <a:gd name="adj" fmla="val 2025"/>
+              <a:gd name="adj" fmla="val 2000"/>
             </a:avLst>
           </a:prstGeom>
           <a:solidFill>
@@ -4442,8 +4444,8 @@
         </p:nvSpPr>
         <p:spPr>
           <a:xfrm>
-            <a:off x="1097280" y="2240280"/>
-            <a:ext cx="4526280" cy="502920"/>
+            <a:off x="1097280" y="2194560"/>
+            <a:ext cx="4526280" cy="548640"/>
           </a:xfrm>
           <a:prstGeom prst="rect">
             <a:avLst/>
@@ -4459,7 +4461,7 @@
               <a:buNone/>
             </a:pPr>
             <a:r>
-              <a:rPr lang="en-US" sz="1650" b="1" dirty="0">
+              <a:rPr lang="en-US" sz="2000" b="1" dirty="0">
                 <a:solidFill>
                   <a:srgbClr val="06B6D4"/>
                 </a:solidFill>
@@ -4469,7 +4471,7 @@
               </a:rPr>
               <a:t>Script</a:t>
             </a:r>
-            <a:endParaRPr lang="en-US" sz="1650" dirty="0"/>
+            <a:endParaRPr lang="en-US" sz="2000" dirty="0"/>
           </a:p>
         </p:txBody>
       </p:sp>
@@ -4505,7 +4507,7 @@
               <a:buChar char="▸"/>
             </a:pPr>
             <a:r>
-              <a:rPr lang="en-US" sz="1280" dirty="0">
+              <a:rPr lang="en-US" sz="1800" dirty="0">
                 <a:solidFill>
                   <a:srgbClr val="CBD5E1"/>
                 </a:solidFill>
@@ -4515,7 +4517,7 @@
               </a:rPr>
               <a:t>Written once, then prayed over</a:t>
             </a:r>
-            <a:endParaRPr lang="en-US" sz="1280" dirty="0"/>
+            <a:endParaRPr lang="en-US" sz="1800" dirty="0"/>
           </a:p>
           <a:p>
             <a:pPr marL="342900" indent="-342900">
@@ -4529,7 +4531,7 @@
               <a:buChar char="▸"/>
             </a:pPr>
             <a:r>
-              <a:rPr lang="en-US" sz="1280" dirty="0">
+              <a:rPr lang="en-US" sz="1800" dirty="0">
                 <a:solidFill>
                   <a:srgbClr val="CBD5E1"/>
                 </a:solidFill>
@@ -4539,7 +4541,7 @@
               </a:rPr>
               <a:t>Fails loudly, or worse, returns empty</a:t>
             </a:r>
-            <a:endParaRPr lang="en-US" sz="1280" dirty="0"/>
+            <a:endParaRPr lang="en-US" sz="1800" dirty="0"/>
           </a:p>
           <a:p>
             <a:pPr marL="342900" indent="-342900">
@@ -4553,7 +4555,7 @@
               <a:buChar char="▸"/>
             </a:pPr>
             <a:r>
-              <a:rPr lang="en-US" sz="1280" dirty="0">
+              <a:rPr lang="en-US" sz="1800" dirty="0">
                 <a:solidFill>
                   <a:srgbClr val="CBD5E1"/>
                 </a:solidFill>
@@ -4563,7 +4565,7 @@
               </a:rPr>
               <a:t>Debugging means scrolling terminal history</a:t>
             </a:r>
-            <a:endParaRPr lang="en-US" sz="1280" dirty="0"/>
+            <a:endParaRPr lang="en-US" sz="1800" dirty="0"/>
           </a:p>
           <a:p>
             <a:pPr marL="342900" indent="-342900">
@@ -4577,7 +4579,7 @@
               <a:buChar char="▸"/>
             </a:pPr>
             <a:r>
-              <a:rPr lang="en-US" sz="1280" dirty="0">
+              <a:rPr lang="en-US" sz="1800" dirty="0">
                 <a:solidFill>
                   <a:srgbClr val="CBD5E1"/>
                 </a:solidFill>
@@ -4587,7 +4589,7 @@
               </a:rPr>
               <a:t>Nobody knows it broke until the data is wrong</a:t>
             </a:r>
-            <a:endParaRPr lang="en-US" sz="1280" dirty="0"/>
+            <a:endParaRPr lang="en-US" sz="1800" dirty="0"/>
           </a:p>
         </p:txBody>
       </p:sp>
@@ -4599,12 +4601,12 @@
         </p:nvSpPr>
         <p:spPr>
           <a:xfrm>
-            <a:off x="6291072" y="2011680"/>
-            <a:ext cx="5074920" cy="3611880"/>
+            <a:off x="6291072" y="1965960"/>
+            <a:ext cx="5074920" cy="3657600"/>
           </a:xfrm>
           <a:prstGeom prst="roundRect">
             <a:avLst>
-              <a:gd name="adj" fmla="val 2025"/>
+              <a:gd name="adj" fmla="val 2000"/>
             </a:avLst>
           </a:prstGeom>
           <a:solidFill>
@@ -4626,8 +4628,8 @@
         </p:nvSpPr>
         <p:spPr>
           <a:xfrm>
-            <a:off x="6565392" y="2240280"/>
-            <a:ext cx="4526280" cy="502920"/>
+            <a:off x="6565392" y="2194560"/>
+            <a:ext cx="4526280" cy="548640"/>
           </a:xfrm>
           <a:prstGeom prst="rect">
             <a:avLst/>
@@ -4643,7 +4645,7 @@
               <a:buNone/>
             </a:pPr>
             <a:r>
-              <a:rPr lang="en-US" sz="1650" b="1" dirty="0">
+              <a:rPr lang="en-US" sz="2000" b="1" dirty="0">
                 <a:solidFill>
                   <a:srgbClr val="93C5FD"/>
                 </a:solidFill>
@@ -4653,7 +4655,7 @@
               </a:rPr>
               <a:t>System</a:t>
             </a:r>
-            <a:endParaRPr lang="en-US" sz="1650" dirty="0"/>
+            <a:endParaRPr lang="en-US" sz="2000" dirty="0"/>
           </a:p>
         </p:txBody>
       </p:sp>
@@ -4689,7 +4691,7 @@
               <a:buChar char="▸"/>
             </a:pPr>
             <a:r>
-              <a:rPr lang="en-US" sz="1280" dirty="0">
+              <a:rPr lang="en-US" sz="1800" dirty="0">
                 <a:solidFill>
                   <a:srgbClr val="CBD5E1"/>
                 </a:solidFill>
@@ -4699,7 +4701,7 @@
               </a:rPr>
               <a:t>Validated on every run with defined expectations</a:t>
             </a:r>
-            <a:endParaRPr lang="en-US" sz="1280" dirty="0"/>
+            <a:endParaRPr lang="en-US" sz="1800" dirty="0"/>
           </a:p>
           <a:p>
             <a:pPr marL="342900" indent="-342900">
@@ -4713,7 +4715,7 @@
               <a:buChar char="▸"/>
             </a:pPr>
             <a:r>
-              <a:rPr lang="en-US" sz="1280" dirty="0">
+              <a:rPr lang="en-US" sz="1800" dirty="0">
                 <a:solidFill>
                   <a:srgbClr val="CBD5E1"/>
                 </a:solidFill>
@@ -4723,7 +4725,7 @@
               </a:rPr>
               <a:t>Degrades gracefully and flags partial results</a:t>
             </a:r>
-            <a:endParaRPr lang="en-US" sz="1280" dirty="0"/>
+            <a:endParaRPr lang="en-US" sz="1800" dirty="0"/>
           </a:p>
           <a:p>
             <a:pPr marL="342900" indent="-342900">
@@ -4737,7 +4739,7 @@
               <a:buChar char="▸"/>
             </a:pPr>
             <a:r>
-              <a:rPr lang="en-US" sz="1280" dirty="0">
+              <a:rPr lang="en-US" sz="1800" dirty="0">
                 <a:solidFill>
                   <a:srgbClr val="CBD5E1"/>
                 </a:solidFill>
@@ -4747,7 +4749,7 @@
               </a:rPr>
               <a:t>Structured logs: fetched, skipped, doubted</a:t>
             </a:r>
-            <a:endParaRPr lang="en-US" sz="1280" dirty="0"/>
+            <a:endParaRPr lang="en-US" sz="1800" dirty="0"/>
           </a:p>
           <a:p>
             <a:pPr marL="342900" indent="-342900">
@@ -4761,7 +4763,7 @@
               <a:buChar char="▸"/>
             </a:pPr>
             <a:r>
-              <a:rPr lang="en-US" sz="1280" dirty="0">
+              <a:rPr lang="en-US" sz="1800" dirty="0">
                 <a:solidFill>
                   <a:srgbClr val="CBD5E1"/>
                 </a:solidFill>
@@ -4771,7 +4773,7 @@
               </a:rPr>
               <a:t>Freshness alarms page a human before the damage</a:t>
             </a:r>
-            <a:endParaRPr lang="en-US" sz="1280" dirty="0"/>
+            <a:endParaRPr lang="en-US" sz="1800" dirty="0"/>
           </a:p>
         </p:txBody>
       </p:sp>
@@ -4806,8 +4808,8 @@
         </p:nvSpPr>
         <p:spPr>
           <a:xfrm>
-            <a:off x="822960" y="6053328"/>
-            <a:ext cx="9692640" cy="457200"/>
+            <a:off x="822960" y="6035040"/>
+            <a:ext cx="10424160" cy="566928"/>
           </a:xfrm>
           <a:prstGeom prst="rect">
             <a:avLst/>
@@ -4823,9 +4825,9 @@
               <a:buNone/>
             </a:pPr>
             <a:r>
-              <a:rPr lang="en-US" sz="1150" dirty="0">
-                <a:solidFill>
-                  <a:srgbClr val="64748B"/>
+              <a:rPr lang="en-US" sz="1800" dirty="0">
+                <a:solidFill>
+                  <a:srgbClr val="8FA3BF"/>
                 </a:solidFill>
                 <a:latin typeface="Segoe UI" pitchFamily="34" charset="0"/>
                 <a:ea typeface="Segoe UI" pitchFamily="34" charset="-122"/>
@@ -4833,7 +4835,7 @@
               </a:rPr>
               <a:t>Clients do not buy scrapers - they buy data that keeps arriving.</a:t>
             </a:r>
-            <a:endParaRPr lang="en-US" sz="1150" dirty="0"/>
+            <a:endParaRPr lang="en-US" sz="1800" dirty="0"/>
           </a:p>
         </p:txBody>
       </p:sp>
@@ -4845,8 +4847,8 @@
         </p:nvSpPr>
         <p:spPr>
           <a:xfrm>
-            <a:off x="10698480" y="6382512"/>
-            <a:ext cx="1188720" cy="365760"/>
+            <a:off x="10698480" y="6309360"/>
+            <a:ext cx="1188720" cy="411480"/>
           </a:xfrm>
           <a:prstGeom prst="rect">
             <a:avLst/>
@@ -4862,9 +4864,9 @@
               <a:buNone/>
             </a:pPr>
             <a:r>
-              <a:rPr lang="en-US" sz="1000" dirty="0">
-                <a:solidFill>
-                  <a:srgbClr val="64748B"/>
+              <a:rPr lang="en-US" sz="1800" dirty="0">
+                <a:solidFill>
+                  <a:srgbClr val="8FA3BF"/>
                 </a:solidFill>
                 <a:latin typeface="Consolas" pitchFamily="34" charset="0"/>
                 <a:ea typeface="Consolas" pitchFamily="34" charset="-122"/>
@@ -4872,7 +4874,7 @@
               </a:rPr>
               <a:t>11 / 15</a:t>
             </a:r>
-            <a:endParaRPr lang="en-US" sz="1000" dirty="0"/>
+            <a:endParaRPr lang="en-US" sz="1800" dirty="0"/>
           </a:p>
         </p:txBody>
       </p:sp>
@@ -4956,8 +4958,8 @@
         </p:nvSpPr>
         <p:spPr>
           <a:xfrm>
-            <a:off x="822960" y="502920"/>
-            <a:ext cx="10515600" cy="365760"/>
+            <a:off x="822960" y="457200"/>
+            <a:ext cx="10515600" cy="411480"/>
           </a:xfrm>
           <a:prstGeom prst="rect">
             <a:avLst/>
@@ -4973,7 +4975,7 @@
               <a:buNone/>
             </a:pPr>
             <a:r>
-              <a:rPr lang="en-US" sz="1200" spc="300" kern="0" dirty="0">
+              <a:rPr lang="en-US" sz="1800" spc="300" kern="0" dirty="0">
                 <a:solidFill>
                   <a:srgbClr val="06B6D4"/>
                 </a:solidFill>
@@ -4983,7 +4985,7 @@
               </a:rPr>
               <a:t>PRINCIPLE 3</a:t>
             </a:r>
-            <a:endParaRPr lang="en-US" sz="1200" dirty="0"/>
+            <a:endParaRPr lang="en-US" sz="1800" dirty="0"/>
           </a:p>
         </p:txBody>
       </p:sp>
@@ -5034,8 +5036,8 @@
         </p:nvSpPr>
         <p:spPr>
           <a:xfrm>
-            <a:off x="868680" y="2011680"/>
-            <a:ext cx="10424160" cy="3566160"/>
+            <a:off x="868680" y="1965960"/>
+            <a:ext cx="10424160" cy="3840480"/>
           </a:xfrm>
           <a:prstGeom prst="rect">
             <a:avLst/>
@@ -5058,7 +5060,7 @@
               <a:buChar char="▸"/>
             </a:pPr>
             <a:r>
-              <a:rPr lang="en-US" sz="1600" dirty="0">
+              <a:rPr lang="en-US" sz="2000" dirty="0">
                 <a:solidFill>
                   <a:srgbClr val="CBD5E1"/>
                 </a:solidFill>
@@ -5068,7 +5070,7 @@
               </a:rPr>
               <a:t>Robots directives and terms of service are respected, not negotiated.</a:t>
             </a:r>
-            <a:endParaRPr lang="en-US" sz="1600" dirty="0"/>
+            <a:endParaRPr lang="en-US" sz="2000" dirty="0"/>
           </a:p>
           <a:p>
             <a:pPr marL="342900" indent="-342900">
@@ -5082,7 +5084,7 @@
               <a:buChar char="▸"/>
             </a:pPr>
             <a:r>
-              <a:rPr lang="en-US" sz="1600" dirty="0">
+              <a:rPr lang="en-US" sz="2000" dirty="0">
                 <a:solidFill>
                   <a:srgbClr val="CBD5E1"/>
                 </a:solidFill>
@@ -5092,7 +5094,7 @@
               </a:rPr>
               <a:t>Rate-limiting is self-imposed before sites have to impose it.</a:t>
             </a:r>
-            <a:endParaRPr lang="en-US" sz="1600" dirty="0"/>
+            <a:endParaRPr lang="en-US" sz="2000" dirty="0"/>
           </a:p>
           <a:p>
             <a:pPr marL="342900" indent="-342900">
@@ -5106,7 +5108,7 @@
               <a:buChar char="▸"/>
             </a:pPr>
             <a:r>
-              <a:rPr lang="en-US" sz="1600" dirty="0">
+              <a:rPr lang="en-US" sz="2000" dirty="0">
                 <a:solidFill>
                   <a:srgbClr val="CBD5E1"/>
                 </a:solidFill>
@@ -5116,7 +5118,7 @@
               </a:rPr>
               <a:t>Only public data is collected - no credentials, no pretending to be a user.</a:t>
             </a:r>
-            <a:endParaRPr lang="en-US" sz="1600" dirty="0"/>
+            <a:endParaRPr lang="en-US" sz="2000" dirty="0"/>
           </a:p>
           <a:p>
             <a:pPr marL="342900" indent="-342900">
@@ -5130,7 +5132,7 @@
               <a:buChar char="▸"/>
             </a:pPr>
             <a:r>
-              <a:rPr lang="en-US" sz="1600" dirty="0">
+              <a:rPr lang="en-US" sz="2000" dirty="0">
                 <a:solidFill>
                   <a:srgbClr val="CBD5E1"/>
                 </a:solidFill>
@@ -5140,7 +5142,7 @@
               </a:rPr>
               <a:t>Sustainable scraping is slow, boring, and ethical - and it is the only kind that lasts.</a:t>
             </a:r>
-            <a:endParaRPr lang="en-US" sz="1600" dirty="0"/>
+            <a:endParaRPr lang="en-US" sz="2000" dirty="0"/>
           </a:p>
           <a:p>
             <a:pPr marL="342900" indent="-342900">
@@ -5154,7 +5156,7 @@
               <a:buChar char="▸"/>
             </a:pPr>
             <a:r>
-              <a:rPr lang="en-US" sz="1600" dirty="0">
+              <a:rPr lang="en-US" sz="2000" dirty="0">
                 <a:solidFill>
                   <a:srgbClr val="CBD5E1"/>
                 </a:solidFill>
@@ -5164,7 +5166,7 @@
               </a:rPr>
               <a:t>Politeness is not just ethics; it is what keeps access working for months.</a:t>
             </a:r>
-            <a:endParaRPr lang="en-US" sz="1600" dirty="0"/>
+            <a:endParaRPr lang="en-US" sz="2000" dirty="0"/>
           </a:p>
         </p:txBody>
       </p:sp>
@@ -5199,8 +5201,8 @@
         </p:nvSpPr>
         <p:spPr>
           <a:xfrm>
-            <a:off x="822960" y="6053328"/>
-            <a:ext cx="9692640" cy="457200"/>
+            <a:off x="822960" y="6035040"/>
+            <a:ext cx="10424160" cy="566928"/>
           </a:xfrm>
           <a:prstGeom prst="rect">
             <a:avLst/>
@@ -5216,9 +5218,9 @@
               <a:buNone/>
             </a:pPr>
             <a:r>
-              <a:rPr lang="en-US" sz="1150" dirty="0">
-                <a:solidFill>
-                  <a:srgbClr val="64748B"/>
+              <a:rPr lang="en-US" sz="1800" dirty="0">
+                <a:solidFill>
+                  <a:srgbClr val="8FA3BF"/>
                 </a:solidFill>
                 <a:latin typeface="Segoe UI" pitchFamily="34" charset="0"/>
                 <a:ea typeface="Segoe UI" pitchFamily="34" charset="-122"/>
@@ -5226,7 +5228,7 @@
               </a:rPr>
               <a:t>Ethical collection is a feature clients can put their name on.</a:t>
             </a:r>
-            <a:endParaRPr lang="en-US" sz="1150" dirty="0"/>
+            <a:endParaRPr lang="en-US" sz="1800" dirty="0"/>
           </a:p>
         </p:txBody>
       </p:sp>
@@ -5238,8 +5240,8 @@
         </p:nvSpPr>
         <p:spPr>
           <a:xfrm>
-            <a:off x="10698480" y="6382512"/>
-            <a:ext cx="1188720" cy="365760"/>
+            <a:off x="10698480" y="6309360"/>
+            <a:ext cx="1188720" cy="411480"/>
           </a:xfrm>
           <a:prstGeom prst="rect">
             <a:avLst/>
@@ -5255,9 +5257,9 @@
               <a:buNone/>
             </a:pPr>
             <a:r>
-              <a:rPr lang="en-US" sz="1000" dirty="0">
-                <a:solidFill>
-                  <a:srgbClr val="64748B"/>
+              <a:rPr lang="en-US" sz="1800" dirty="0">
+                <a:solidFill>
+                  <a:srgbClr val="8FA3BF"/>
                 </a:solidFill>
                 <a:latin typeface="Consolas" pitchFamily="34" charset="0"/>
                 <a:ea typeface="Consolas" pitchFamily="34" charset="-122"/>
@@ -5265,7 +5267,7 @@
               </a:rPr>
               <a:t>12 / 15</a:t>
             </a:r>
-            <a:endParaRPr lang="en-US" sz="1000" dirty="0"/>
+            <a:endParaRPr lang="en-US" sz="1800" dirty="0"/>
           </a:p>
         </p:txBody>
       </p:sp>
@@ -5349,8 +5351,8 @@
         </p:nvSpPr>
         <p:spPr>
           <a:xfrm>
-            <a:off x="822960" y="502920"/>
-            <a:ext cx="10515600" cy="365760"/>
+            <a:off x="822960" y="457200"/>
+            <a:ext cx="10515600" cy="411480"/>
           </a:xfrm>
           <a:prstGeom prst="rect">
             <a:avLst/>
@@ -5366,7 +5368,7 @@
               <a:buNone/>
             </a:pPr>
             <a:r>
-              <a:rPr lang="en-US" sz="1200" spc="300" kern="0" dirty="0">
+              <a:rPr lang="en-US" sz="1800" spc="300" kern="0" dirty="0">
                 <a:solidFill>
                   <a:srgbClr val="06B6D4"/>
                 </a:solidFill>
@@ -5376,7 +5378,7 @@
               </a:rPr>
               <a:t>RESILIENCE</a:t>
             </a:r>
-            <a:endParaRPr lang="en-US" sz="1200" dirty="0"/>
+            <a:endParaRPr lang="en-US" sz="1800" dirty="0"/>
           </a:p>
         </p:txBody>
       </p:sp>
@@ -5427,7 +5429,7 @@
         </p:nvGraphicFramePr>
         <p:xfrm>
           <a:off x="822960" y="1874520"/>
-          <a:ext cx="10515600" cy="3337560"/>
+          <a:ext cx="10515600" cy="3246120"/>
         </p:xfrm>
         <a:graphic xmlns:a="http://schemas.openxmlformats.org/drawingml/2006/main">
           <a:graphicData uri="http://schemas.openxmlformats.org/drawingml/2006/chart">
@@ -5443,7 +5445,7 @@
         </p:nvSpPr>
         <p:spPr>
           <a:xfrm>
-            <a:off x="822960" y="5413248"/>
+            <a:off x="822960" y="5321808"/>
             <a:ext cx="10515600" cy="0"/>
           </a:xfrm>
           <a:prstGeom prst="line">
@@ -5466,8 +5468,8 @@
         </p:nvSpPr>
         <p:spPr>
           <a:xfrm>
-            <a:off x="822960" y="5504688"/>
-            <a:ext cx="10424160" cy="411480"/>
+            <a:off x="822960" y="5394960"/>
+            <a:ext cx="10424160" cy="502920"/>
           </a:xfrm>
           <a:prstGeom prst="rect">
             <a:avLst/>
@@ -5483,7 +5485,7 @@
               <a:buNone/>
             </a:pPr>
             <a:r>
-              <a:rPr lang="en-US" sz="1300" i="1" dirty="0">
+              <a:rPr lang="en-US" sz="1800" i="1" dirty="0">
                 <a:solidFill>
                   <a:srgbClr val="06B6D4"/>
                 </a:solidFill>
@@ -5493,7 +5495,7 @@
               </a:rPr>
               <a:t>→  When markup drifts, fallbacks hold extraction above zero while the fix ships - and validation flags the drift the day it happens.</a:t>
             </a:r>
-            <a:endParaRPr lang="en-US" sz="1300" dirty="0"/>
+            <a:endParaRPr lang="en-US" sz="1800" dirty="0"/>
           </a:p>
         </p:txBody>
       </p:sp>
@@ -5528,8 +5530,8 @@
         </p:nvSpPr>
         <p:spPr>
           <a:xfrm>
-            <a:off x="822960" y="6053328"/>
-            <a:ext cx="9692640" cy="457200"/>
+            <a:off x="822960" y="6035040"/>
+            <a:ext cx="10424160" cy="566928"/>
           </a:xfrm>
           <a:prstGeom prst="rect">
             <a:avLst/>
@@ -5545,9 +5547,9 @@
               <a:buNone/>
             </a:pPr>
             <a:r>
-              <a:rPr lang="en-US" sz="1150" dirty="0">
-                <a:solidFill>
-                  <a:srgbClr val="64748B"/>
+              <a:rPr lang="en-US" sz="1800" dirty="0">
+                <a:solidFill>
+                  <a:srgbClr val="8FA3BF"/>
                 </a:solidFill>
                 <a:latin typeface="Segoe UI" pitchFamily="34" charset="0"/>
                 <a:ea typeface="Segoe UI" pitchFamily="34" charset="-122"/>
@@ -5555,7 +5557,7 @@
               </a:rPr>
               <a:t>Illustrative pattern of a drift event and recovery, consistent with the toolkit's design.</a:t>
             </a:r>
-            <a:endParaRPr lang="en-US" sz="1150" dirty="0"/>
+            <a:endParaRPr lang="en-US" sz="1800" dirty="0"/>
           </a:p>
         </p:txBody>
       </p:sp>
@@ -5567,8 +5569,8 @@
         </p:nvSpPr>
         <p:spPr>
           <a:xfrm>
-            <a:off x="10698480" y="6382512"/>
-            <a:ext cx="1188720" cy="365760"/>
+            <a:off x="10698480" y="6309360"/>
+            <a:ext cx="1188720" cy="411480"/>
           </a:xfrm>
           <a:prstGeom prst="rect">
             <a:avLst/>
@@ -5584,9 +5586,9 @@
               <a:buNone/>
             </a:pPr>
             <a:r>
-              <a:rPr lang="en-US" sz="1000" dirty="0">
-                <a:solidFill>
-                  <a:srgbClr val="64748B"/>
+              <a:rPr lang="en-US" sz="1800" dirty="0">
+                <a:solidFill>
+                  <a:srgbClr val="8FA3BF"/>
                 </a:solidFill>
                 <a:latin typeface="Consolas" pitchFamily="34" charset="0"/>
                 <a:ea typeface="Consolas" pitchFamily="34" charset="-122"/>
@@ -5594,7 +5596,7 @@
               </a:rPr>
               <a:t>13 / 15</a:t>
             </a:r>
-            <a:endParaRPr lang="en-US" sz="1000" dirty="0"/>
+            <a:endParaRPr lang="en-US" sz="1800" dirty="0"/>
           </a:p>
         </p:txBody>
       </p:sp>
@@ -5678,8 +5680,8 @@
         </p:nvSpPr>
         <p:spPr>
           <a:xfrm>
-            <a:off x="822960" y="502920"/>
-            <a:ext cx="10515600" cy="365760"/>
+            <a:off x="822960" y="457200"/>
+            <a:ext cx="10515600" cy="411480"/>
           </a:xfrm>
           <a:prstGeom prst="rect">
             <a:avLst/>
@@ -5695,7 +5697,7 @@
               <a:buNone/>
             </a:pPr>
             <a:r>
-              <a:rPr lang="en-US" sz="1200" spc="300" kern="0" dirty="0">
+              <a:rPr lang="en-US" sz="1800" spc="300" kern="0" dirty="0">
                 <a:solidFill>
                   <a:srgbClr val="06B6D4"/>
                 </a:solidFill>
@@ -5705,7 +5707,7 @@
               </a:rPr>
               <a:t>DELIVERED</a:t>
             </a:r>
-            <a:endParaRPr lang="en-US" sz="1200" dirty="0"/>
+            <a:endParaRPr lang="en-US" sz="1800" dirty="0"/>
           </a:p>
         </p:txBody>
       </p:sp>
@@ -5763,7 +5765,7 @@
           </p:nvPr>
         </p:nvGraphicFramePr>
         <p:xfrm>
-          <a:off x="822960" y="2011680"/>
+          <a:off x="822960" y="1828800"/>
           <a:ext cx="10515600" cy="914400"/>
         </p:xfrm>
         <a:graphic>
@@ -5775,7 +5777,7 @@
                 <a:gridCol w="3505200"/>
                 <a:gridCol w="3505200"/>
               </a:tblGrid>
-              <a:tr h="402336">
+              <a:tr h="457200">
                 <a:tc>
                   <a:txBody>
                     <a:bodyPr/>
@@ -5785,7 +5787,7 @@
                         <a:buNone/>
                       </a:pPr>
                       <a:r>
-                        <a:rPr lang="en-US" sz="1150" b="1" dirty="0">
+                        <a:rPr lang="en-US" sz="1800" b="1" dirty="0">
                           <a:solidFill>
                             <a:srgbClr val="FFFFFF"/>
                           </a:solidFill>
@@ -5795,14 +5797,14 @@
                         </a:rPr>
                         <a:t>Use case</a:t>
                       </a:r>
-                      <a:endParaRPr lang="en-US" sz="1150" dirty="0">
+                      <a:endParaRPr lang="en-US" sz="1800" dirty="0">
                         <a:latin typeface="Segoe UI" charset="0"/>
                         <a:ea typeface="Segoe UI" charset="0"/>
                         <a:cs typeface="Segoe UI" charset="0"/>
                       </a:endParaRPr>
                     </a:p>
                   </a:txBody>
-                  <a:tcPr marL="64008" marR="64008" marT="64008" marB="64008" anchor="ctr">
+                  <a:tcPr marL="36576" marR="36576" marT="36576" marB="36576" anchor="ctr">
                     <a:lnL w="6350" cap="flat" cmpd="sng" algn="ctr">
                       <a:solidFill>
                         <a:srgbClr val="24365A"/>
@@ -5853,7 +5855,7 @@
                         <a:buNone/>
                       </a:pPr>
                       <a:r>
-                        <a:rPr lang="en-US" sz="1150" b="1" dirty="0">
+                        <a:rPr lang="en-US" sz="1800" b="1" dirty="0">
                           <a:solidFill>
                             <a:srgbClr val="FFFFFF"/>
                           </a:solidFill>
@@ -5863,14 +5865,14 @@
                         </a:rPr>
                         <a:t>What the client gets</a:t>
                       </a:r>
-                      <a:endParaRPr lang="en-US" sz="1150" dirty="0">
+                      <a:endParaRPr lang="en-US" sz="1800" dirty="0">
                         <a:latin typeface="Segoe UI" charset="0"/>
                         <a:ea typeface="Segoe UI" charset="0"/>
                         <a:cs typeface="Segoe UI" charset="0"/>
                       </a:endParaRPr>
                     </a:p>
                   </a:txBody>
-                  <a:tcPr marL="64008" marR="64008" marT="64008" marB="64008" anchor="ctr">
+                  <a:tcPr marL="36576" marR="36576" marT="36576" marB="36576" anchor="ctr">
                     <a:lnL w="6350" cap="flat" cmpd="sng" algn="ctr">
                       <a:solidFill>
                         <a:srgbClr val="24365A"/>
@@ -5921,7 +5923,7 @@
                         <a:buNone/>
                       </a:pPr>
                       <a:r>
-                        <a:rPr lang="en-US" sz="1150" b="1" dirty="0">
+                        <a:rPr lang="en-US" sz="1800" b="1" dirty="0">
                           <a:solidFill>
                             <a:srgbClr val="FFFFFF"/>
                           </a:solidFill>
@@ -5931,14 +5933,14 @@
                         </a:rPr>
                         <a:t>Cadence</a:t>
                       </a:r>
-                      <a:endParaRPr lang="en-US" sz="1150" dirty="0">
+                      <a:endParaRPr lang="en-US" sz="1800" dirty="0">
                         <a:latin typeface="Segoe UI" charset="0"/>
                         <a:ea typeface="Segoe UI" charset="0"/>
                         <a:cs typeface="Segoe UI" charset="0"/>
                       </a:endParaRPr>
                     </a:p>
                   </a:txBody>
-                  <a:tcPr marL="64008" marR="64008" marT="64008" marB="64008" anchor="ctr">
+                  <a:tcPr marL="36576" marR="36576" marT="36576" marB="36576" anchor="ctr">
                     <a:lnL w="6350" cap="flat" cmpd="sng" algn="ctr">
                       <a:solidFill>
                         <a:srgbClr val="24365A"/>
@@ -5981,7 +5983,7 @@
                   </a:tcPr>
                 </a:tc>
               </a:tr>
-              <a:tr h="402336">
+              <a:tr h="457200">
                 <a:tc>
                   <a:txBody>
                     <a:bodyPr/>
@@ -5991,7 +5993,7 @@
                         <a:buNone/>
                       </a:pPr>
                       <a:r>
-                        <a:rPr lang="en-US" sz="1080" dirty="0">
+                        <a:rPr lang="en-US" sz="1800" dirty="0">
                           <a:solidFill>
                             <a:srgbClr val="CBD5E1"/>
                           </a:solidFill>
@@ -6001,14 +6003,14 @@
                         </a:rPr>
                         <a:t>Market monitoring</a:t>
                       </a:r>
-                      <a:endParaRPr lang="en-US" sz="1080" dirty="0">
+                      <a:endParaRPr lang="en-US" sz="1800" dirty="0">
                         <a:latin typeface="Segoe UI" charset="0"/>
                         <a:ea typeface="Segoe UI" charset="0"/>
                         <a:cs typeface="Segoe UI" charset="0"/>
                       </a:endParaRPr>
                     </a:p>
                   </a:txBody>
-                  <a:tcPr marL="64008" marR="64008" marT="64008" marB="64008" anchor="ctr">
+                  <a:tcPr marL="36576" marR="36576" marT="36576" marB="36576" anchor="ctr">
                     <a:lnL w="6350" cap="flat" cmpd="sng" algn="ctr">
                       <a:solidFill>
                         <a:srgbClr val="24365A"/>
@@ -6059,7 +6061,7 @@
                         <a:buNone/>
                       </a:pPr>
                       <a:r>
-                        <a:rPr lang="en-US" sz="1080" dirty="0">
+                        <a:rPr lang="en-US" sz="1800" dirty="0">
                           <a:solidFill>
                             <a:srgbClr val="CBD5E1"/>
                           </a:solidFill>
@@ -6069,14 +6071,14 @@
                         </a:rPr>
                         <a:t>Competitor catalogs and movement, structured and dated</a:t>
                       </a:r>
-                      <a:endParaRPr lang="en-US" sz="1080" dirty="0">
+                      <a:endParaRPr lang="en-US" sz="1800" dirty="0">
                         <a:latin typeface="Segoe UI" charset="0"/>
                         <a:ea typeface="Segoe UI" charset="0"/>
                         <a:cs typeface="Segoe UI" charset="0"/>
                       </a:endParaRPr>
                     </a:p>
                   </a:txBody>
-                  <a:tcPr marL="64008" marR="64008" marT="64008" marB="64008" anchor="ctr">
+                  <a:tcPr marL="36576" marR="36576" marT="36576" marB="36576" anchor="ctr">
                     <a:lnL w="6350" cap="flat" cmpd="sng" algn="ctr">
                       <a:solidFill>
                         <a:srgbClr val="24365A"/>
@@ -6127,7 +6129,7 @@
                         <a:buNone/>
                       </a:pPr>
                       <a:r>
-                        <a:rPr lang="en-US" sz="1080" dirty="0">
+                        <a:rPr lang="en-US" sz="1800" dirty="0">
                           <a:solidFill>
                             <a:srgbClr val="CBD5E1"/>
                           </a:solidFill>
@@ -6137,14 +6139,14 @@
                         </a:rPr>
                         <a:t>Daily</a:t>
                       </a:r>
-                      <a:endParaRPr lang="en-US" sz="1080" dirty="0">
+                      <a:endParaRPr lang="en-US" sz="1800" dirty="0">
                         <a:latin typeface="Segoe UI" charset="0"/>
                         <a:ea typeface="Segoe UI" charset="0"/>
                         <a:cs typeface="Segoe UI" charset="0"/>
                       </a:endParaRPr>
                     </a:p>
                   </a:txBody>
-                  <a:tcPr marL="64008" marR="64008" marT="64008" marB="64008" anchor="ctr">
+                  <a:tcPr marL="36576" marR="36576" marT="36576" marB="36576" anchor="ctr">
                     <a:lnL w="6350" cap="flat" cmpd="sng" algn="ctr">
                       <a:solidFill>
                         <a:srgbClr val="24365A"/>
@@ -6187,7 +6189,7 @@
                   </a:tcPr>
                 </a:tc>
               </a:tr>
-              <a:tr h="402336">
+              <a:tr h="457200">
                 <a:tc>
                   <a:txBody>
                     <a:bodyPr/>
@@ -6197,7 +6199,7 @@
                         <a:buNone/>
                       </a:pPr>
                       <a:r>
-                        <a:rPr lang="en-US" sz="1080" dirty="0">
+                        <a:rPr lang="en-US" sz="1800" dirty="0">
                           <a:solidFill>
                             <a:srgbClr val="CBD5E1"/>
                           </a:solidFill>
@@ -6207,14 +6209,14 @@
                         </a:rPr>
                         <a:t>Price tracking</a:t>
                       </a:r>
-                      <a:endParaRPr lang="en-US" sz="1080" dirty="0">
+                      <a:endParaRPr lang="en-US" sz="1800" dirty="0">
                         <a:latin typeface="Segoe UI" charset="0"/>
                         <a:ea typeface="Segoe UI" charset="0"/>
                         <a:cs typeface="Segoe UI" charset="0"/>
                       </a:endParaRPr>
                     </a:p>
                   </a:txBody>
-                  <a:tcPr marL="64008" marR="64008" marT="64008" marB="64008" anchor="ctr">
+                  <a:tcPr marL="36576" marR="36576" marT="36576" marB="36576" anchor="ctr">
                     <a:lnL w="6350" cap="flat" cmpd="sng" algn="ctr">
                       <a:solidFill>
                         <a:srgbClr val="24365A"/>
@@ -6265,7 +6267,7 @@
                         <a:buNone/>
                       </a:pPr>
                       <a:r>
-                        <a:rPr lang="en-US" sz="1080" dirty="0">
+                        <a:rPr lang="en-US" sz="1800" dirty="0">
                           <a:solidFill>
                             <a:srgbClr val="CBD5E1"/>
                           </a:solidFill>
@@ -6275,14 +6277,14 @@
                         </a:rPr>
                         <a:t>Price history with sanity checks and gap detection</a:t>
                       </a:r>
-                      <a:endParaRPr lang="en-US" sz="1080" dirty="0">
+                      <a:endParaRPr lang="en-US" sz="1800" dirty="0">
                         <a:latin typeface="Segoe UI" charset="0"/>
                         <a:ea typeface="Segoe UI" charset="0"/>
                         <a:cs typeface="Segoe UI" charset="0"/>
                       </a:endParaRPr>
                     </a:p>
                   </a:txBody>
-                  <a:tcPr marL="64008" marR="64008" marT="64008" marB="64008" anchor="ctr">
+                  <a:tcPr marL="36576" marR="36576" marT="36576" marB="36576" anchor="ctr">
                     <a:lnL w="6350" cap="flat" cmpd="sng" algn="ctr">
                       <a:solidFill>
                         <a:srgbClr val="24365A"/>
@@ -6333,7 +6335,7 @@
                         <a:buNone/>
                       </a:pPr>
                       <a:r>
-                        <a:rPr lang="en-US" sz="1080" dirty="0">
+                        <a:rPr lang="en-US" sz="1800" dirty="0">
                           <a:solidFill>
                             <a:srgbClr val="CBD5E1"/>
                           </a:solidFill>
@@ -6343,14 +6345,14 @@
                         </a:rPr>
                         <a:t>Daily to weekly</a:t>
                       </a:r>
-                      <a:endParaRPr lang="en-US" sz="1080" dirty="0">
+                      <a:endParaRPr lang="en-US" sz="1800" dirty="0">
                         <a:latin typeface="Segoe UI" charset="0"/>
                         <a:ea typeface="Segoe UI" charset="0"/>
                         <a:cs typeface="Segoe UI" charset="0"/>
                       </a:endParaRPr>
                     </a:p>
                   </a:txBody>
-                  <a:tcPr marL="64008" marR="64008" marT="64008" marB="64008" anchor="ctr">
+                  <a:tcPr marL="36576" marR="36576" marT="36576" marB="36576" anchor="ctr">
                     <a:lnL w="6350" cap="flat" cmpd="sng" algn="ctr">
                       <a:solidFill>
                         <a:srgbClr val="24365A"/>
@@ -6393,7 +6395,7 @@
                   </a:tcPr>
                 </a:tc>
               </a:tr>
-              <a:tr h="402336">
+              <a:tr h="457200">
                 <a:tc>
                   <a:txBody>
                     <a:bodyPr/>
@@ -6403,7 +6405,7 @@
                         <a:buNone/>
                       </a:pPr>
                       <a:r>
-                        <a:rPr lang="en-US" sz="1080" dirty="0">
+                        <a:rPr lang="en-US" sz="1800" dirty="0">
                           <a:solidFill>
                             <a:srgbClr val="CBD5E1"/>
                           </a:solidFill>
@@ -6413,14 +6415,14 @@
                         </a:rPr>
                         <a:t>Research collection</a:t>
                       </a:r>
-                      <a:endParaRPr lang="en-US" sz="1080" dirty="0">
+                      <a:endParaRPr lang="en-US" sz="1800" dirty="0">
                         <a:latin typeface="Segoe UI" charset="0"/>
                         <a:ea typeface="Segoe UI" charset="0"/>
                         <a:cs typeface="Segoe UI" charset="0"/>
                       </a:endParaRPr>
                     </a:p>
                   </a:txBody>
-                  <a:tcPr marL="64008" marR="64008" marT="64008" marB="64008" anchor="ctr">
+                  <a:tcPr marL="36576" marR="36576" marT="36576" marB="36576" anchor="ctr">
                     <a:lnL w="6350" cap="flat" cmpd="sng" algn="ctr">
                       <a:solidFill>
                         <a:srgbClr val="24365A"/>
@@ -6471,7 +6473,7 @@
                         <a:buNone/>
                       </a:pPr>
                       <a:r>
-                        <a:rPr lang="en-US" sz="1080" dirty="0">
+                        <a:rPr lang="en-US" sz="1800" dirty="0">
                           <a:solidFill>
                             <a:srgbClr val="CBD5E1"/>
                           </a:solidFill>
@@ -6481,14 +6483,14 @@
                         </a:rPr>
                         <a:t>Clean datasets ready for analysis, with provenance</a:t>
                       </a:r>
-                      <a:endParaRPr lang="en-US" sz="1080" dirty="0">
+                      <a:endParaRPr lang="en-US" sz="1800" dirty="0">
                         <a:latin typeface="Segoe UI" charset="0"/>
                         <a:ea typeface="Segoe UI" charset="0"/>
                         <a:cs typeface="Segoe UI" charset="0"/>
                       </a:endParaRPr>
                     </a:p>
                   </a:txBody>
-                  <a:tcPr marL="64008" marR="64008" marT="64008" marB="64008" anchor="ctr">
+                  <a:tcPr marL="36576" marR="36576" marT="36576" marB="36576" anchor="ctr">
                     <a:lnL w="6350" cap="flat" cmpd="sng" algn="ctr">
                       <a:solidFill>
                         <a:srgbClr val="24365A"/>
@@ -6539,7 +6541,7 @@
                         <a:buNone/>
                       </a:pPr>
                       <a:r>
-                        <a:rPr lang="en-US" sz="1080" dirty="0">
+                        <a:rPr lang="en-US" sz="1800" dirty="0">
                           <a:solidFill>
                             <a:srgbClr val="CBD5E1"/>
                           </a:solidFill>
@@ -6549,14 +6551,14 @@
                         </a:rPr>
                         <a:t>Per study</a:t>
                       </a:r>
-                      <a:endParaRPr lang="en-US" sz="1080" dirty="0">
+                      <a:endParaRPr lang="en-US" sz="1800" dirty="0">
                         <a:latin typeface="Segoe UI" charset="0"/>
                         <a:ea typeface="Segoe UI" charset="0"/>
                         <a:cs typeface="Segoe UI" charset="0"/>
                       </a:endParaRPr>
                     </a:p>
                   </a:txBody>
-                  <a:tcPr marL="64008" marR="64008" marT="64008" marB="64008" anchor="ctr">
+                  <a:tcPr marL="36576" marR="36576" marT="36576" marB="36576" anchor="ctr">
                     <a:lnL w="6350" cap="flat" cmpd="sng" algn="ctr">
                       <a:solidFill>
                         <a:srgbClr val="24365A"/>
@@ -6599,7 +6601,7 @@
                   </a:tcPr>
                 </a:tc>
               </a:tr>
-              <a:tr h="402336">
+              <a:tr h="457200">
                 <a:tc>
                   <a:txBody>
                     <a:bodyPr/>
@@ -6609,7 +6611,7 @@
                         <a:buNone/>
                       </a:pPr>
                       <a:r>
-                        <a:rPr lang="en-US" sz="1080" dirty="0">
+                        <a:rPr lang="en-US" sz="1800" dirty="0">
                           <a:solidFill>
                             <a:srgbClr val="CBD5E1"/>
                           </a:solidFill>
@@ -6619,14 +6621,14 @@
                         </a:rPr>
                         <a:t>OSINT support</a:t>
                       </a:r>
-                      <a:endParaRPr lang="en-US" sz="1080" dirty="0">
+                      <a:endParaRPr lang="en-US" sz="1800" dirty="0">
                         <a:latin typeface="Segoe UI" charset="0"/>
                         <a:ea typeface="Segoe UI" charset="0"/>
                         <a:cs typeface="Segoe UI" charset="0"/>
                       </a:endParaRPr>
                     </a:p>
                   </a:txBody>
-                  <a:tcPr marL="64008" marR="64008" marT="64008" marB="64008" anchor="ctr">
+                  <a:tcPr marL="36576" marR="36576" marT="36576" marB="36576" anchor="ctr">
                     <a:lnL w="6350" cap="flat" cmpd="sng" algn="ctr">
                       <a:solidFill>
                         <a:srgbClr val="24365A"/>
@@ -6677,7 +6679,7 @@
                         <a:buNone/>
                       </a:pPr>
                       <a:r>
-                        <a:rPr lang="en-US" sz="1080" dirty="0">
+                        <a:rPr lang="en-US" sz="1800" dirty="0">
                           <a:solidFill>
                             <a:srgbClr val="CBD5E1"/>
                           </a:solidFill>
@@ -6687,14 +6689,14 @@
                         </a:rPr>
                         <a:t>Public data with full source trail per record</a:t>
                       </a:r>
-                      <a:endParaRPr lang="en-US" sz="1080" dirty="0">
+                      <a:endParaRPr lang="en-US" sz="1800" dirty="0">
                         <a:latin typeface="Segoe UI" charset="0"/>
                         <a:ea typeface="Segoe UI" charset="0"/>
                         <a:cs typeface="Segoe UI" charset="0"/>
                       </a:endParaRPr>
                     </a:p>
                   </a:txBody>
-                  <a:tcPr marL="64008" marR="64008" marT="64008" marB="64008" anchor="ctr">
+                  <a:tcPr marL="36576" marR="36576" marT="36576" marB="36576" anchor="ctr">
                     <a:lnL w="6350" cap="flat" cmpd="sng" algn="ctr">
                       <a:solidFill>
                         <a:srgbClr val="24365A"/>
@@ -6745,7 +6747,7 @@
                         <a:buNone/>
                       </a:pPr>
                       <a:r>
-                        <a:rPr lang="en-US" sz="1080" dirty="0">
+                        <a:rPr lang="en-US" sz="1800" dirty="0">
                           <a:solidFill>
                             <a:srgbClr val="CBD5E1"/>
                           </a:solidFill>
@@ -6755,14 +6757,14 @@
                         </a:rPr>
                         <a:t>On demand</a:t>
                       </a:r>
-                      <a:endParaRPr lang="en-US" sz="1080" dirty="0">
+                      <a:endParaRPr lang="en-US" sz="1800" dirty="0">
                         <a:latin typeface="Segoe UI" charset="0"/>
                         <a:ea typeface="Segoe UI" charset="0"/>
                         <a:cs typeface="Segoe UI" charset="0"/>
                       </a:endParaRPr>
                     </a:p>
                   </a:txBody>
-                  <a:tcPr marL="64008" marR="64008" marT="64008" marB="64008" anchor="ctr">
+                  <a:tcPr marL="36576" marR="36576" marT="36576" marB="36576" anchor="ctr">
                     <a:lnL w="6350" cap="flat" cmpd="sng" algn="ctr">
                       <a:solidFill>
                         <a:srgbClr val="24365A"/>
@@ -6840,8 +6842,8 @@
         </p:nvSpPr>
         <p:spPr>
           <a:xfrm>
-            <a:off x="822960" y="6053328"/>
-            <a:ext cx="9692640" cy="457200"/>
+            <a:off x="822960" y="6035040"/>
+            <a:ext cx="10424160" cy="566928"/>
           </a:xfrm>
           <a:prstGeom prst="rect">
             <a:avLst/>
@@ -6857,9 +6859,9 @@
               <a:buNone/>
             </a:pPr>
             <a:r>
-              <a:rPr lang="en-US" sz="1150" dirty="0">
-                <a:solidFill>
-                  <a:srgbClr val="64748B"/>
+              <a:rPr lang="en-US" sz="1800" dirty="0">
+                <a:solidFill>
+                  <a:srgbClr val="8FA3BF"/>
                 </a:solidFill>
                 <a:latin typeface="Segoe UI" pitchFamily="34" charset="0"/>
                 <a:ea typeface="Segoe UI" pitchFamily="34" charset="-122"/>
@@ -6867,7 +6869,7 @@
               </a:rPr>
               <a:t>Delivered to clients worldwide through Upwork.</a:t>
             </a:r>
-            <a:endParaRPr lang="en-US" sz="1150" dirty="0"/>
+            <a:endParaRPr lang="en-US" sz="1800" dirty="0"/>
           </a:p>
         </p:txBody>
       </p:sp>
@@ -6879,8 +6881,8 @@
         </p:nvSpPr>
         <p:spPr>
           <a:xfrm>
-            <a:off x="10698480" y="6382512"/>
-            <a:ext cx="1188720" cy="365760"/>
+            <a:off x="10698480" y="6309360"/>
+            <a:ext cx="1188720" cy="411480"/>
           </a:xfrm>
           <a:prstGeom prst="rect">
             <a:avLst/>
@@ -6896,9 +6898,9 @@
               <a:buNone/>
             </a:pPr>
             <a:r>
-              <a:rPr lang="en-US" sz="1000" dirty="0">
-                <a:solidFill>
-                  <a:srgbClr val="64748B"/>
+              <a:rPr lang="en-US" sz="1800" dirty="0">
+                <a:solidFill>
+                  <a:srgbClr val="8FA3BF"/>
                 </a:solidFill>
                 <a:latin typeface="Consolas" pitchFamily="34" charset="0"/>
                 <a:ea typeface="Consolas" pitchFamily="34" charset="-122"/>
@@ -6906,7 +6908,7 @@
               </a:rPr>
               <a:t>14 / 15</a:t>
             </a:r>
-            <a:endParaRPr lang="en-US" sz="1000" dirty="0"/>
+            <a:endParaRPr lang="en-US" sz="1800" dirty="0"/>
           </a:p>
         </p:txBody>
       </p:sp>
@@ -6990,8 +6992,8 @@
         </p:nvSpPr>
         <p:spPr>
           <a:xfrm>
-            <a:off x="822960" y="1417320"/>
-            <a:ext cx="10515600" cy="411480"/>
+            <a:off x="822960" y="1371600"/>
+            <a:ext cx="10515600" cy="457200"/>
           </a:xfrm>
           <a:prstGeom prst="rect">
             <a:avLst/>
@@ -7007,7 +7009,7 @@
               <a:buNone/>
             </a:pPr>
             <a:r>
-              <a:rPr lang="en-US" sz="1300" spc="400" kern="0" dirty="0">
+              <a:rPr lang="en-US" sz="1800" spc="400" kern="0" dirty="0">
                 <a:solidFill>
                   <a:srgbClr val="06B6D4"/>
                 </a:solidFill>
@@ -7017,7 +7019,7 @@
               </a:rPr>
               <a:t>WORK WITH ME</a:t>
             </a:r>
-            <a:endParaRPr lang="en-US" sz="1300" dirty="0"/>
+            <a:endParaRPr lang="en-US" sz="1800" dirty="0"/>
           </a:p>
         </p:txBody>
       </p:sp>
@@ -7029,7 +7031,7 @@
         </p:nvSpPr>
         <p:spPr>
           <a:xfrm>
-            <a:off x="822960" y="1920240"/>
+            <a:off x="822960" y="1874520"/>
             <a:ext cx="10515600" cy="1371600"/>
           </a:xfrm>
           <a:prstGeom prst="rect">
@@ -7068,8 +7070,8 @@
         </p:nvSpPr>
         <p:spPr>
           <a:xfrm>
-            <a:off x="2011680" y="3429000"/>
-            <a:ext cx="8183880" cy="1554480"/>
+            <a:off x="2011680" y="3383280"/>
+            <a:ext cx="8183880" cy="1691640"/>
           </a:xfrm>
           <a:prstGeom prst="rect">
             <a:avLst/>
@@ -7088,7 +7090,7 @@
               <a:buNone/>
             </a:pPr>
             <a:r>
-              <a:rPr lang="en-US" sz="1500" dirty="0">
+              <a:rPr lang="en-US" sz="2000" dirty="0">
                 <a:solidFill>
                   <a:srgbClr val="CBD5E1"/>
                 </a:solidFill>
@@ -7105,7 +7107,7 @@
               <a:buNone/>
             </a:pPr>
             <a:r>
-              <a:rPr lang="en-US" sz="1500" dirty="0">
+              <a:rPr lang="en-US" sz="2000" dirty="0">
                 <a:solidFill>
                   <a:srgbClr val="CBD5E1"/>
                 </a:solidFill>
@@ -7122,7 +7124,7 @@
               <a:buNone/>
             </a:pPr>
             <a:r>
-              <a:rPr lang="en-US" sz="1500" dirty="0">
+              <a:rPr lang="en-US" sz="2000" dirty="0">
                 <a:solidFill>
                   <a:srgbClr val="CBD5E1"/>
                 </a:solidFill>
@@ -7132,7 +7134,7 @@
               </a:rPr>
               <a:t>Validation, tolerance, politeness, and logs: the four pillars of scraping that lasts.</a:t>
             </a:r>
-            <a:endParaRPr lang="en-US" sz="1500" dirty="0"/>
+            <a:endParaRPr lang="en-US" sz="2000" dirty="0"/>
           </a:p>
         </p:txBody>
       </p:sp>
@@ -7167,8 +7169,8 @@
         </p:nvSpPr>
         <p:spPr>
           <a:xfrm>
-            <a:off x="822960" y="5376672"/>
-            <a:ext cx="10515600" cy="457200"/>
+            <a:off x="822960" y="5349240"/>
+            <a:ext cx="10515600" cy="502920"/>
           </a:xfrm>
           <a:prstGeom prst="rect">
             <a:avLst/>
@@ -7184,7 +7186,7 @@
               <a:buNone/>
             </a:pPr>
             <a:r>
-              <a:rPr lang="en-US" sz="1350" b="1" dirty="0">
+              <a:rPr lang="en-US" sz="1800" b="1" dirty="0">
                 <a:solidFill>
                   <a:srgbClr val="06B6D4"/>
                 </a:solidFill>
@@ -7194,7 +7196,7 @@
               </a:rPr>
               <a:t>rezalianvatiady.github.io · github.com/rezalianvatiady</a:t>
             </a:r>
-            <a:endParaRPr lang="en-US" sz="1350" dirty="0"/>
+            <a:endParaRPr lang="en-US" sz="1800" dirty="0"/>
           </a:p>
         </p:txBody>
       </p:sp>
@@ -7206,8 +7208,8 @@
         </p:nvSpPr>
         <p:spPr>
           <a:xfrm>
-            <a:off x="10698480" y="6382512"/>
-            <a:ext cx="1188720" cy="365760"/>
+            <a:off x="10698480" y="6309360"/>
+            <a:ext cx="1188720" cy="411480"/>
           </a:xfrm>
           <a:prstGeom prst="rect">
             <a:avLst/>
@@ -7223,9 +7225,9 @@
               <a:buNone/>
             </a:pPr>
             <a:r>
-              <a:rPr lang="en-US" sz="1000" dirty="0">
-                <a:solidFill>
-                  <a:srgbClr val="64748B"/>
+              <a:rPr lang="en-US" sz="1800" dirty="0">
+                <a:solidFill>
+                  <a:srgbClr val="8FA3BF"/>
                 </a:solidFill>
                 <a:latin typeface="Consolas" pitchFamily="34" charset="0"/>
                 <a:ea typeface="Consolas" pitchFamily="34" charset="-122"/>
@@ -7233,7 +7235,7 @@
               </a:rPr>
               <a:t>15 / 15</a:t>
             </a:r>
-            <a:endParaRPr lang="en-US" sz="1000" dirty="0"/>
+            <a:endParaRPr lang="en-US" sz="1800" dirty="0"/>
           </a:p>
         </p:txBody>
       </p:sp>
@@ -7317,8 +7319,8 @@
         </p:nvSpPr>
         <p:spPr>
           <a:xfrm>
-            <a:off x="822960" y="502920"/>
-            <a:ext cx="10515600" cy="365760"/>
+            <a:off x="822960" y="457200"/>
+            <a:ext cx="10515600" cy="411480"/>
           </a:xfrm>
           <a:prstGeom prst="rect">
             <a:avLst/>
@@ -7334,7 +7336,7 @@
               <a:buNone/>
             </a:pPr>
             <a:r>
-              <a:rPr lang="en-US" sz="1200" spc="300" kern="0" dirty="0">
+              <a:rPr lang="en-US" sz="1800" spc="300" kern="0" dirty="0">
                 <a:solidFill>
                   <a:srgbClr val="06B6D4"/>
                 </a:solidFill>
@@ -7344,7 +7346,7 @@
               </a:rPr>
               <a:t>AGENDA</a:t>
             </a:r>
-            <a:endParaRPr lang="en-US" sz="1200" dirty="0"/>
+            <a:endParaRPr lang="en-US" sz="1800" dirty="0"/>
           </a:p>
         </p:txBody>
       </p:sp>
@@ -7395,8 +7397,8 @@
         </p:nvSpPr>
         <p:spPr>
           <a:xfrm>
-            <a:off x="868680" y="2112264"/>
-            <a:ext cx="420624" cy="420624"/>
+            <a:off x="868680" y="2103120"/>
+            <a:ext cx="457200" cy="457200"/>
           </a:xfrm>
           <a:prstGeom prst="ellipse">
             <a:avLst/>
@@ -7420,8 +7422,8 @@
         </p:nvSpPr>
         <p:spPr>
           <a:xfrm>
-            <a:off x="868680" y="2112264"/>
-            <a:ext cx="420624" cy="420624"/>
+            <a:off x="868680" y="2103120"/>
+            <a:ext cx="457200" cy="457200"/>
           </a:xfrm>
           <a:prstGeom prst="rect">
             <a:avLst/>
@@ -7437,7 +7439,7 @@
               <a:buNone/>
             </a:pPr>
             <a:r>
-              <a:rPr lang="en-US" sz="1300" b="1" dirty="0">
+              <a:rPr lang="en-US" sz="1800" b="1" dirty="0">
                 <a:solidFill>
                   <a:srgbClr val="3B82F6"/>
                 </a:solidFill>
@@ -7447,7 +7449,7 @@
               </a:rPr>
               <a:t>1</a:t>
             </a:r>
-            <a:endParaRPr lang="en-US" sz="1300" dirty="0"/>
+            <a:endParaRPr lang="en-US" sz="1800" dirty="0"/>
           </a:p>
         </p:txBody>
       </p:sp>
@@ -7459,8 +7461,8 @@
         </p:nvSpPr>
         <p:spPr>
           <a:xfrm>
-            <a:off x="1435608" y="2057400"/>
-            <a:ext cx="4480560" cy="822960"/>
+            <a:off x="1472184" y="2011680"/>
+            <a:ext cx="4443984" cy="960120"/>
           </a:xfrm>
           <a:prstGeom prst="rect">
             <a:avLst/>
@@ -7476,7 +7478,7 @@
               <a:buNone/>
             </a:pPr>
             <a:r>
-              <a:rPr lang="en-US" sz="1450" dirty="0">
+              <a:rPr lang="en-US" sz="2000" dirty="0">
                 <a:solidFill>
                   <a:srgbClr val="CBD5E1"/>
                 </a:solidFill>
@@ -7486,7 +7488,7 @@
               </a:rPr>
               <a:t>Why the real web breaks naive scrapers every month</a:t>
             </a:r>
-            <a:endParaRPr lang="en-US" sz="1450" dirty="0"/>
+            <a:endParaRPr lang="en-US" sz="2000" dirty="0"/>
           </a:p>
         </p:txBody>
       </p:sp>
@@ -7498,8 +7500,8 @@
         </p:nvSpPr>
         <p:spPr>
           <a:xfrm>
-            <a:off x="868680" y="3044952"/>
-            <a:ext cx="420624" cy="420624"/>
+            <a:off x="868680" y="3182112"/>
+            <a:ext cx="457200" cy="457200"/>
           </a:xfrm>
           <a:prstGeom prst="ellipse">
             <a:avLst/>
@@ -7523,8 +7525,8 @@
         </p:nvSpPr>
         <p:spPr>
           <a:xfrm>
-            <a:off x="868680" y="3044952"/>
-            <a:ext cx="420624" cy="420624"/>
+            <a:off x="868680" y="3182112"/>
+            <a:ext cx="457200" cy="457200"/>
           </a:xfrm>
           <a:prstGeom prst="rect">
             <a:avLst/>
@@ -7540,7 +7542,7 @@
               <a:buNone/>
             </a:pPr>
             <a:r>
-              <a:rPr lang="en-US" sz="1300" b="1" dirty="0">
+              <a:rPr lang="en-US" sz="1800" b="1" dirty="0">
                 <a:solidFill>
                   <a:srgbClr val="06B6D4"/>
                 </a:solidFill>
@@ -7550,7 +7552,7 @@
               </a:rPr>
               <a:t>2</a:t>
             </a:r>
-            <a:endParaRPr lang="en-US" sz="1300" dirty="0"/>
+            <a:endParaRPr lang="en-US" sz="1800" dirty="0"/>
           </a:p>
         </p:txBody>
       </p:sp>
@@ -7562,8 +7564,8 @@
         </p:nvSpPr>
         <p:spPr>
           <a:xfrm>
-            <a:off x="1435608" y="2990088"/>
-            <a:ext cx="4480560" cy="822960"/>
+            <a:off x="1472184" y="3090672"/>
+            <a:ext cx="4443984" cy="960120"/>
           </a:xfrm>
           <a:prstGeom prst="rect">
             <a:avLst/>
@@ -7579,7 +7581,7 @@
               <a:buNone/>
             </a:pPr>
             <a:r>
-              <a:rPr lang="en-US" sz="1450" dirty="0">
+              <a:rPr lang="en-US" sz="2000" dirty="0">
                 <a:solidFill>
                   <a:srgbClr val="CBD5E1"/>
                 </a:solidFill>
@@ -7589,7 +7591,7 @@
               </a:rPr>
               <a:t>Five instrumented stages of a collection pipeline</a:t>
             </a:r>
-            <a:endParaRPr lang="en-US" sz="1450" dirty="0"/>
+            <a:endParaRPr lang="en-US" sz="2000" dirty="0"/>
           </a:p>
         </p:txBody>
       </p:sp>
@@ -7601,8 +7603,8 @@
         </p:nvSpPr>
         <p:spPr>
           <a:xfrm>
-            <a:off x="868680" y="3977640"/>
-            <a:ext cx="420624" cy="420624"/>
+            <a:off x="868680" y="4261104"/>
+            <a:ext cx="457200" cy="457200"/>
           </a:xfrm>
           <a:prstGeom prst="ellipse">
             <a:avLst/>
@@ -7626,8 +7628,8 @@
         </p:nvSpPr>
         <p:spPr>
           <a:xfrm>
-            <a:off x="868680" y="3977640"/>
-            <a:ext cx="420624" cy="420624"/>
+            <a:off x="868680" y="4261104"/>
+            <a:ext cx="457200" cy="457200"/>
           </a:xfrm>
           <a:prstGeom prst="rect">
             <a:avLst/>
@@ -7643,7 +7645,7 @@
               <a:buNone/>
             </a:pPr>
             <a:r>
-              <a:rPr lang="en-US" sz="1300" b="1" dirty="0">
+              <a:rPr lang="en-US" sz="1800" b="1" dirty="0">
                 <a:solidFill>
                   <a:srgbClr val="3B82F6"/>
                 </a:solidFill>
@@ -7653,7 +7655,7 @@
               </a:rPr>
               <a:t>3</a:t>
             </a:r>
-            <a:endParaRPr lang="en-US" sz="1300" dirty="0"/>
+            <a:endParaRPr lang="en-US" sz="1800" dirty="0"/>
           </a:p>
         </p:txBody>
       </p:sp>
@@ -7665,8 +7667,8 @@
         </p:nvSpPr>
         <p:spPr>
           <a:xfrm>
-            <a:off x="1435608" y="3922776"/>
-            <a:ext cx="4480560" cy="822960"/>
+            <a:off x="1472184" y="4169664"/>
+            <a:ext cx="4443984" cy="960120"/>
           </a:xfrm>
           <a:prstGeom prst="rect">
             <a:avLst/>
@@ -7682,7 +7684,7 @@
               <a:buNone/>
             </a:pPr>
             <a:r>
-              <a:rPr lang="en-US" sz="1450" dirty="0">
+              <a:rPr lang="en-US" sz="2000" dirty="0">
                 <a:solidFill>
                   <a:srgbClr val="CBD5E1"/>
                 </a:solidFill>
@@ -7692,7 +7694,7 @@
               </a:rPr>
               <a:t>Validating every run: counts, schema, and sanity ranges</a:t>
             </a:r>
-            <a:endParaRPr lang="en-US" sz="1450" dirty="0"/>
+            <a:endParaRPr lang="en-US" sz="2000" dirty="0"/>
           </a:p>
         </p:txBody>
       </p:sp>
@@ -7704,8 +7706,8 @@
         </p:nvSpPr>
         <p:spPr>
           <a:xfrm>
-            <a:off x="6355080" y="2112264"/>
-            <a:ext cx="420624" cy="420624"/>
+            <a:off x="6355080" y="2103120"/>
+            <a:ext cx="457200" cy="457200"/>
           </a:xfrm>
           <a:prstGeom prst="ellipse">
             <a:avLst/>
@@ -7729,8 +7731,8 @@
         </p:nvSpPr>
         <p:spPr>
           <a:xfrm>
-            <a:off x="6355080" y="2112264"/>
-            <a:ext cx="420624" cy="420624"/>
+            <a:off x="6355080" y="2103120"/>
+            <a:ext cx="457200" cy="457200"/>
           </a:xfrm>
           <a:prstGeom prst="rect">
             <a:avLst/>
@@ -7746,7 +7748,7 @@
               <a:buNone/>
             </a:pPr>
             <a:r>
-              <a:rPr lang="en-US" sz="1300" b="1" dirty="0">
+              <a:rPr lang="en-US" sz="1800" b="1" dirty="0">
                 <a:solidFill>
                   <a:srgbClr val="06B6D4"/>
                 </a:solidFill>
@@ -7756,7 +7758,7 @@
               </a:rPr>
               <a:t>4</a:t>
             </a:r>
-            <a:endParaRPr lang="en-US" sz="1300" dirty="0"/>
+            <a:endParaRPr lang="en-US" sz="1800" dirty="0"/>
           </a:p>
         </p:txBody>
       </p:sp>
@@ -7768,8 +7770,8 @@
         </p:nvSpPr>
         <p:spPr>
           <a:xfrm>
-            <a:off x="6922008" y="2057400"/>
-            <a:ext cx="4480560" cy="822960"/>
+            <a:off x="6958584" y="2011680"/>
+            <a:ext cx="4443984" cy="960120"/>
           </a:xfrm>
           <a:prstGeom prst="rect">
             <a:avLst/>
@@ -7785,7 +7787,7 @@
               <a:buNone/>
             </a:pPr>
             <a:r>
-              <a:rPr lang="en-US" sz="1450" dirty="0">
+              <a:rPr lang="en-US" sz="2000" dirty="0">
                 <a:solidFill>
                   <a:srgbClr val="CBD5E1"/>
                 </a:solidFill>
@@ -7795,7 +7797,7 @@
               </a:rPr>
               <a:t>Tolerant extraction, polite crawling, and logs a human can read</a:t>
             </a:r>
-            <a:endParaRPr lang="en-US" sz="1450" dirty="0"/>
+            <a:endParaRPr lang="en-US" sz="2000" dirty="0"/>
           </a:p>
         </p:txBody>
       </p:sp>
@@ -7807,8 +7809,8 @@
         </p:nvSpPr>
         <p:spPr>
           <a:xfrm>
-            <a:off x="6355080" y="3044952"/>
-            <a:ext cx="420624" cy="420624"/>
+            <a:off x="6355080" y="3182112"/>
+            <a:ext cx="457200" cy="457200"/>
           </a:xfrm>
           <a:prstGeom prst="ellipse">
             <a:avLst/>
@@ -7832,8 +7834,8 @@
         </p:nvSpPr>
         <p:spPr>
           <a:xfrm>
-            <a:off x="6355080" y="3044952"/>
-            <a:ext cx="420624" cy="420624"/>
+            <a:off x="6355080" y="3182112"/>
+            <a:ext cx="457200" cy="457200"/>
           </a:xfrm>
           <a:prstGeom prst="rect">
             <a:avLst/>
@@ -7849,7 +7851,7 @@
               <a:buNone/>
             </a:pPr>
             <a:r>
-              <a:rPr lang="en-US" sz="1300" b="1" dirty="0">
+              <a:rPr lang="en-US" sz="1800" b="1" dirty="0">
                 <a:solidFill>
                   <a:srgbClr val="3B82F6"/>
                 </a:solidFill>
@@ -7859,7 +7861,7 @@
               </a:rPr>
               <a:t>5</a:t>
             </a:r>
-            <a:endParaRPr lang="en-US" sz="1300" dirty="0"/>
+            <a:endParaRPr lang="en-US" sz="1800" dirty="0"/>
           </a:p>
         </p:txBody>
       </p:sp>
@@ -7871,8 +7873,8 @@
         </p:nvSpPr>
         <p:spPr>
           <a:xfrm>
-            <a:off x="6922008" y="2990088"/>
-            <a:ext cx="4480560" cy="822960"/>
+            <a:off x="6958584" y="3090672"/>
+            <a:ext cx="4443984" cy="960120"/>
           </a:xfrm>
           <a:prstGeom prst="rect">
             <a:avLst/>
@@ -7888,7 +7890,7 @@
               <a:buNone/>
             </a:pPr>
             <a:r>
-              <a:rPr lang="en-US" sz="1450" dirty="0">
+              <a:rPr lang="en-US" sz="2000" dirty="0">
                 <a:solidFill>
                   <a:srgbClr val="CBD5E1"/>
                 </a:solidFill>
@@ -7898,7 +7900,7 @@
               </a:rPr>
               <a:t>What the toolkit delivers in production engagements</a:t>
             </a:r>
-            <a:endParaRPr lang="en-US" sz="1450" dirty="0"/>
+            <a:endParaRPr lang="en-US" sz="2000" dirty="0"/>
           </a:p>
         </p:txBody>
       </p:sp>
@@ -7910,8 +7912,8 @@
         </p:nvSpPr>
         <p:spPr>
           <a:xfrm>
-            <a:off x="10698480" y="6382512"/>
-            <a:ext cx="1188720" cy="365760"/>
+            <a:off x="10698480" y="6309360"/>
+            <a:ext cx="1188720" cy="411480"/>
           </a:xfrm>
           <a:prstGeom prst="rect">
             <a:avLst/>
@@ -7927,9 +7929,9 @@
               <a:buNone/>
             </a:pPr>
             <a:r>
-              <a:rPr lang="en-US" sz="1000" dirty="0">
-                <a:solidFill>
-                  <a:srgbClr val="64748B"/>
+              <a:rPr lang="en-US" sz="1800" dirty="0">
+                <a:solidFill>
+                  <a:srgbClr val="8FA3BF"/>
                 </a:solidFill>
                 <a:latin typeface="Consolas" pitchFamily="34" charset="0"/>
                 <a:ea typeface="Consolas" pitchFamily="34" charset="-122"/>
@@ -7937,7 +7939,7 @@
               </a:rPr>
               <a:t>2 / 15</a:t>
             </a:r>
-            <a:endParaRPr lang="en-US" sz="1000" dirty="0"/>
+            <a:endParaRPr lang="en-US" sz="1800" dirty="0"/>
           </a:p>
         </p:txBody>
       </p:sp>
@@ -8021,8 +8023,8 @@
         </p:nvSpPr>
         <p:spPr>
           <a:xfrm>
-            <a:off x="822960" y="502920"/>
-            <a:ext cx="10515600" cy="365760"/>
+            <a:off x="822960" y="457200"/>
+            <a:ext cx="10515600" cy="411480"/>
           </a:xfrm>
           <a:prstGeom prst="rect">
             <a:avLst/>
@@ -8038,7 +8040,7 @@
               <a:buNone/>
             </a:pPr>
             <a:r>
-              <a:rPr lang="en-US" sz="1200" spc="300" kern="0" dirty="0">
+              <a:rPr lang="en-US" sz="1800" spc="300" kern="0" dirty="0">
                 <a:solidFill>
                   <a:srgbClr val="06B6D4"/>
                 </a:solidFill>
@@ -8048,7 +8050,7 @@
               </a:rPr>
               <a:t>THE REALITY</a:t>
             </a:r>
-            <a:endParaRPr lang="en-US" sz="1200" dirty="0"/>
+            <a:endParaRPr lang="en-US" sz="1800" dirty="0"/>
           </a:p>
         </p:txBody>
       </p:sp>
@@ -8099,8 +8101,8 @@
         </p:nvSpPr>
         <p:spPr>
           <a:xfrm>
-            <a:off x="868680" y="2011680"/>
-            <a:ext cx="10424160" cy="3566160"/>
+            <a:off x="868680" y="1965960"/>
+            <a:ext cx="10424160" cy="3840480"/>
           </a:xfrm>
           <a:prstGeom prst="rect">
             <a:avLst/>
@@ -8123,7 +8125,7 @@
               <a:buChar char="▸"/>
             </a:pPr>
             <a:r>
-              <a:rPr lang="en-US" sz="1600" dirty="0">
+              <a:rPr lang="en-US" sz="2000" dirty="0">
                 <a:solidFill>
                   <a:srgbClr val="CBD5E1"/>
                 </a:solidFill>
@@ -8133,7 +8135,7 @@
               </a:rPr>
               <a:t>Markup drifts and selectors rot silently while the script still exits zero.</a:t>
             </a:r>
-            <a:endParaRPr lang="en-US" sz="1600" dirty="0"/>
+            <a:endParaRPr lang="en-US" sz="2000" dirty="0"/>
           </a:p>
           <a:p>
             <a:pPr marL="342900" indent="-342900">
@@ -8147,7 +8149,7 @@
               <a:buChar char="▸"/>
             </a:pPr>
             <a:r>
-              <a:rPr lang="en-US" sz="1600" dirty="0">
+              <a:rPr lang="en-US" sz="2000" dirty="0">
                 <a:solidFill>
                   <a:srgbClr val="CBD5E1"/>
                 </a:solidFill>
@@ -8157,7 +8159,7 @@
               </a:rPr>
               <a:t>Bot walls evolve weekly, and yesterday's headers are today's block.</a:t>
             </a:r>
-            <a:endParaRPr lang="en-US" sz="1600" dirty="0"/>
+            <a:endParaRPr lang="en-US" sz="2000" dirty="0"/>
           </a:p>
           <a:p>
             <a:pPr marL="342900" indent="-342900">
@@ -8171,7 +8173,7 @@
               <a:buChar char="▸"/>
             </a:pPr>
             <a:r>
-              <a:rPr lang="en-US" sz="1600" dirty="0">
+              <a:rPr lang="en-US" sz="2000" dirty="0">
                 <a:solidFill>
                   <a:srgbClr val="CBD5E1"/>
                 </a:solidFill>
@@ -8181,7 +8183,7 @@
               </a:rPr>
               <a:t>Pages render differently by region, device, and language.</a:t>
             </a:r>
-            <a:endParaRPr lang="en-US" sz="1600" dirty="0"/>
+            <a:endParaRPr lang="en-US" sz="2000" dirty="0"/>
           </a:p>
           <a:p>
             <a:pPr marL="342900" indent="-342900">
@@ -8195,7 +8197,7 @@
               <a:buChar char="▸"/>
             </a:pPr>
             <a:r>
-              <a:rPr lang="en-US" sz="1600" dirty="0">
+              <a:rPr lang="en-US" sz="2000" dirty="0">
                 <a:solidFill>
                   <a:srgbClr val="CBD5E1"/>
                 </a:solidFill>
@@ -8205,7 +8207,7 @@
               </a:rPr>
               <a:t>Every freelance client has heard the same story: the script worked last month and now returns nothing.</a:t>
             </a:r>
-            <a:endParaRPr lang="en-US" sz="1600" dirty="0"/>
+            <a:endParaRPr lang="en-US" sz="2000" dirty="0"/>
           </a:p>
           <a:p>
             <a:pPr marL="342900" indent="-342900">
@@ -8219,7 +8221,7 @@
               <a:buChar char="▸"/>
             </a:pPr>
             <a:r>
-              <a:rPr lang="en-US" sz="1600" dirty="0">
+              <a:rPr lang="en-US" sz="2000" dirty="0">
                 <a:solidFill>
                   <a:srgbClr val="CBD5E1"/>
                 </a:solidFill>
@@ -8229,7 +8231,7 @@
               </a:rPr>
               <a:t>A script that worked once is not a system - and the web punishes scripts.</a:t>
             </a:r>
-            <a:endParaRPr lang="en-US" sz="1600" dirty="0"/>
+            <a:endParaRPr lang="en-US" sz="2000" dirty="0"/>
           </a:p>
         </p:txBody>
       </p:sp>
@@ -8264,8 +8266,8 @@
         </p:nvSpPr>
         <p:spPr>
           <a:xfrm>
-            <a:off x="822960" y="6053328"/>
-            <a:ext cx="9692640" cy="457200"/>
+            <a:off x="822960" y="6035040"/>
+            <a:ext cx="10424160" cy="566928"/>
           </a:xfrm>
           <a:prstGeom prst="rect">
             <a:avLst/>
@@ -8281,9 +8283,9 @@
               <a:buNone/>
             </a:pPr>
             <a:r>
-              <a:rPr lang="en-US" sz="1150" dirty="0">
-                <a:solidFill>
-                  <a:srgbClr val="64748B"/>
+              <a:rPr lang="en-US" sz="1800" dirty="0">
+                <a:solidFill>
+                  <a:srgbClr val="8FA3BF"/>
                 </a:solidFill>
                 <a:latin typeface="Segoe UI" pitchFamily="34" charset="0"/>
                 <a:ea typeface="Segoe UI" pitchFamily="34" charset="-122"/>
@@ -8291,7 +8293,7 @@
               </a:rPr>
               <a:t>The failure mode that hurts clients most is silence, not the crash.</a:t>
             </a:r>
-            <a:endParaRPr lang="en-US" sz="1150" dirty="0"/>
+            <a:endParaRPr lang="en-US" sz="1800" dirty="0"/>
           </a:p>
         </p:txBody>
       </p:sp>
@@ -8303,8 +8305,8 @@
         </p:nvSpPr>
         <p:spPr>
           <a:xfrm>
-            <a:off x="10698480" y="6382512"/>
-            <a:ext cx="1188720" cy="365760"/>
+            <a:off x="10698480" y="6309360"/>
+            <a:ext cx="1188720" cy="411480"/>
           </a:xfrm>
           <a:prstGeom prst="rect">
             <a:avLst/>
@@ -8320,9 +8322,9 @@
               <a:buNone/>
             </a:pPr>
             <a:r>
-              <a:rPr lang="en-US" sz="1000" dirty="0">
-                <a:solidFill>
-                  <a:srgbClr val="64748B"/>
+              <a:rPr lang="en-US" sz="1800" dirty="0">
+                <a:solidFill>
+                  <a:srgbClr val="8FA3BF"/>
                 </a:solidFill>
                 <a:latin typeface="Consolas" pitchFamily="34" charset="0"/>
                 <a:ea typeface="Consolas" pitchFamily="34" charset="-122"/>
@@ -8330,7 +8332,7 @@
               </a:rPr>
               <a:t>3 / 15</a:t>
             </a:r>
-            <a:endParaRPr lang="en-US" sz="1000" dirty="0"/>
+            <a:endParaRPr lang="en-US" sz="1800" dirty="0"/>
           </a:p>
         </p:txBody>
       </p:sp>
@@ -8414,8 +8416,8 @@
         </p:nvSpPr>
         <p:spPr>
           <a:xfrm>
-            <a:off x="822960" y="502920"/>
-            <a:ext cx="10515600" cy="365760"/>
+            <a:off x="822960" y="457200"/>
+            <a:ext cx="10515600" cy="411480"/>
           </a:xfrm>
           <a:prstGeom prst="rect">
             <a:avLst/>
@@ -8431,7 +8433,7 @@
               <a:buNone/>
             </a:pPr>
             <a:r>
-              <a:rPr lang="en-US" sz="1200" spc="300" kern="0" dirty="0">
+              <a:rPr lang="en-US" sz="1800" spc="300" kern="0" dirty="0">
                 <a:solidFill>
                   <a:srgbClr val="06B6D4"/>
                 </a:solidFill>
@@ -8441,7 +8443,7 @@
               </a:rPr>
               <a:t>ARCHITECTURE</a:t>
             </a:r>
-            <a:endParaRPr lang="en-US" sz="1200" dirty="0"/>
+            <a:endParaRPr lang="en-US" sz="1800" dirty="0"/>
           </a:p>
         </p:txBody>
       </p:sp>
@@ -8492,8 +8494,8 @@
         </p:nvSpPr>
         <p:spPr>
           <a:xfrm>
-            <a:off x="774040" y="2514600"/>
-            <a:ext cx="1938528" cy="2103120"/>
+            <a:off x="774040" y="2331720"/>
+            <a:ext cx="1938528" cy="2697480"/>
           </a:xfrm>
           <a:prstGeom prst="roundRect">
             <a:avLst>
@@ -8519,8 +8521,8 @@
         </p:nvSpPr>
         <p:spPr>
           <a:xfrm>
-            <a:off x="902056" y="2633472"/>
-            <a:ext cx="1682496" cy="310896"/>
+            <a:off x="902056" y="2450592"/>
+            <a:ext cx="1682496" cy="365760"/>
           </a:xfrm>
           <a:prstGeom prst="rect">
             <a:avLst/>
@@ -8536,7 +8538,7 @@
               <a:buNone/>
             </a:pPr>
             <a:r>
-              <a:rPr lang="en-US" sz="1100" b="1" dirty="0">
+              <a:rPr lang="en-US" sz="1800" b="1" dirty="0">
                 <a:solidFill>
                   <a:srgbClr val="3B82F6"/>
                 </a:solidFill>
@@ -8546,7 +8548,7 @@
               </a:rPr>
               <a:t>01</a:t>
             </a:r>
-            <a:endParaRPr lang="en-US" sz="1100" dirty="0"/>
+            <a:endParaRPr lang="en-US" sz="1800" dirty="0"/>
           </a:p>
         </p:txBody>
       </p:sp>
@@ -8558,8 +8560,8 @@
         </p:nvSpPr>
         <p:spPr>
           <a:xfrm>
-            <a:off x="902056" y="2962656"/>
-            <a:ext cx="1682496" cy="566928"/>
+            <a:off x="902056" y="2834640"/>
+            <a:ext cx="1682496" cy="713232"/>
           </a:xfrm>
           <a:prstGeom prst="rect">
             <a:avLst/>
@@ -8575,7 +8577,7 @@
               <a:buNone/>
             </a:pPr>
             <a:r>
-              <a:rPr lang="en-US" sz="1350" b="1" dirty="0">
+              <a:rPr lang="en-US" sz="1800" b="1" dirty="0">
                 <a:solidFill>
                   <a:srgbClr val="FFFFFF"/>
                 </a:solidFill>
@@ -8585,7 +8587,7 @@
               </a:rPr>
               <a:t>Crawl</a:t>
             </a:r>
-            <a:endParaRPr lang="en-US" sz="1350" dirty="0"/>
+            <a:endParaRPr lang="en-US" sz="1800" dirty="0"/>
           </a:p>
         </p:txBody>
       </p:sp>
@@ -8597,8 +8599,8 @@
         </p:nvSpPr>
         <p:spPr>
           <a:xfrm>
-            <a:off x="902056" y="3566160"/>
-            <a:ext cx="1682496" cy="960120"/>
+            <a:off x="902056" y="3584448"/>
+            <a:ext cx="1682496" cy="1371600"/>
           </a:xfrm>
           <a:prstGeom prst="rect">
             <a:avLst/>
@@ -8614,7 +8616,7 @@
               <a:buNone/>
             </a:pPr>
             <a:r>
-              <a:rPr lang="en-US" sz="980" dirty="0">
+              <a:rPr lang="en-US" sz="1800" dirty="0">
                 <a:solidFill>
                   <a:srgbClr val="CBD5E1"/>
                 </a:solidFill>
@@ -8624,7 +8626,7 @@
               </a:rPr>
               <a:t>Polite, rate-limited, and resumable - the run can stop and continue.</a:t>
             </a:r>
-            <a:endParaRPr lang="en-US" sz="980" dirty="0"/>
+            <a:endParaRPr lang="en-US" sz="1800" dirty="0"/>
           </a:p>
         </p:txBody>
       </p:sp>
@@ -8636,7 +8638,7 @@
         </p:nvSpPr>
         <p:spPr>
           <a:xfrm>
-            <a:off x="2726284" y="3419856"/>
+            <a:off x="2726284" y="3566160"/>
             <a:ext cx="210312" cy="274320"/>
           </a:xfrm>
           <a:prstGeom prst="rightArrow">
@@ -8656,8 +8658,8 @@
         </p:nvSpPr>
         <p:spPr>
           <a:xfrm>
-            <a:off x="2950312" y="2514600"/>
-            <a:ext cx="1938528" cy="2103120"/>
+            <a:off x="2950312" y="2331720"/>
+            <a:ext cx="1938528" cy="2697480"/>
           </a:xfrm>
           <a:prstGeom prst="roundRect">
             <a:avLst>
@@ -8683,8 +8685,8 @@
         </p:nvSpPr>
         <p:spPr>
           <a:xfrm>
-            <a:off x="3078328" y="2633472"/>
-            <a:ext cx="1682496" cy="310896"/>
+            <a:off x="3078328" y="2450592"/>
+            <a:ext cx="1682496" cy="365760"/>
           </a:xfrm>
           <a:prstGeom prst="rect">
             <a:avLst/>
@@ -8700,7 +8702,7 @@
               <a:buNone/>
             </a:pPr>
             <a:r>
-              <a:rPr lang="en-US" sz="1100" b="1" dirty="0">
+              <a:rPr lang="en-US" sz="1800" b="1" dirty="0">
                 <a:solidFill>
                   <a:srgbClr val="06B6D4"/>
                 </a:solidFill>
@@ -8710,7 +8712,7 @@
               </a:rPr>
               <a:t>02</a:t>
             </a:r>
-            <a:endParaRPr lang="en-US" sz="1100" dirty="0"/>
+            <a:endParaRPr lang="en-US" sz="1800" dirty="0"/>
           </a:p>
         </p:txBody>
       </p:sp>
@@ -8722,8 +8724,8 @@
         </p:nvSpPr>
         <p:spPr>
           <a:xfrm>
-            <a:off x="3078328" y="2962656"/>
-            <a:ext cx="1682496" cy="566928"/>
+            <a:off x="3078328" y="2834640"/>
+            <a:ext cx="1682496" cy="713232"/>
           </a:xfrm>
           <a:prstGeom prst="rect">
             <a:avLst/>
@@ -8739,7 +8741,7 @@
               <a:buNone/>
             </a:pPr>
             <a:r>
-              <a:rPr lang="en-US" sz="1350" b="1" dirty="0">
+              <a:rPr lang="en-US" sz="1800" b="1" dirty="0">
                 <a:solidFill>
                   <a:srgbClr val="FFFFFF"/>
                 </a:solidFill>
@@ -8749,7 +8751,7 @@
               </a:rPr>
               <a:t>Extract</a:t>
             </a:r>
-            <a:endParaRPr lang="en-US" sz="1350" dirty="0"/>
+            <a:endParaRPr lang="en-US" sz="1800" dirty="0"/>
           </a:p>
         </p:txBody>
       </p:sp>
@@ -8761,8 +8763,8 @@
         </p:nvSpPr>
         <p:spPr>
           <a:xfrm>
-            <a:off x="3078328" y="3566160"/>
-            <a:ext cx="1682496" cy="960120"/>
+            <a:off x="3078328" y="3584448"/>
+            <a:ext cx="1682496" cy="1371600"/>
           </a:xfrm>
           <a:prstGeom prst="rect">
             <a:avLst/>
@@ -8778,7 +8780,7 @@
               <a:buNone/>
             </a:pPr>
             <a:r>
-              <a:rPr lang="en-US" sz="980" dirty="0">
+              <a:rPr lang="en-US" sz="1800" dirty="0">
                 <a:solidFill>
                   <a:srgbClr val="CBD5E1"/>
                 </a:solidFill>
@@ -8788,7 +8790,7 @@
               </a:rPr>
               <a:t>Structural anchors with multiple fallbacks instead of brittle selectors.</a:t>
             </a:r>
-            <a:endParaRPr lang="en-US" sz="980" dirty="0"/>
+            <a:endParaRPr lang="en-US" sz="1800" dirty="0"/>
           </a:p>
         </p:txBody>
       </p:sp>
@@ -8800,7 +8802,7 @@
         </p:nvSpPr>
         <p:spPr>
           <a:xfrm>
-            <a:off x="4902556" y="3419856"/>
+            <a:off x="4902556" y="3566160"/>
             <a:ext cx="210312" cy="274320"/>
           </a:xfrm>
           <a:prstGeom prst="rightArrow">
@@ -8820,8 +8822,8 @@
         </p:nvSpPr>
         <p:spPr>
           <a:xfrm>
-            <a:off x="5126584" y="2514600"/>
-            <a:ext cx="1938528" cy="2103120"/>
+            <a:off x="5126584" y="2331720"/>
+            <a:ext cx="1938528" cy="2697480"/>
           </a:xfrm>
           <a:prstGeom prst="roundRect">
             <a:avLst>
@@ -8847,8 +8849,8 @@
         </p:nvSpPr>
         <p:spPr>
           <a:xfrm>
-            <a:off x="5254600" y="2633472"/>
-            <a:ext cx="1682496" cy="310896"/>
+            <a:off x="5254600" y="2450592"/>
+            <a:ext cx="1682496" cy="365760"/>
           </a:xfrm>
           <a:prstGeom prst="rect">
             <a:avLst/>
@@ -8864,7 +8866,7 @@
               <a:buNone/>
             </a:pPr>
             <a:r>
-              <a:rPr lang="en-US" sz="1100" b="1" dirty="0">
+              <a:rPr lang="en-US" sz="1800" b="1" dirty="0">
                 <a:solidFill>
                   <a:srgbClr val="3B82F6"/>
                 </a:solidFill>
@@ -8874,7 +8876,7 @@
               </a:rPr>
               <a:t>03</a:t>
             </a:r>
-            <a:endParaRPr lang="en-US" sz="1100" dirty="0"/>
+            <a:endParaRPr lang="en-US" sz="1800" dirty="0"/>
           </a:p>
         </p:txBody>
       </p:sp>
@@ -8886,8 +8888,8 @@
         </p:nvSpPr>
         <p:spPr>
           <a:xfrm>
-            <a:off x="5254600" y="2962656"/>
-            <a:ext cx="1682496" cy="566928"/>
+            <a:off x="5254600" y="2834640"/>
+            <a:ext cx="1682496" cy="713232"/>
           </a:xfrm>
           <a:prstGeom prst="rect">
             <a:avLst/>
@@ -8903,7 +8905,7 @@
               <a:buNone/>
             </a:pPr>
             <a:r>
-              <a:rPr lang="en-US" sz="1350" b="1" dirty="0">
+              <a:rPr lang="en-US" sz="1800" b="1" dirty="0">
                 <a:solidFill>
                   <a:srgbClr val="FFFFFF"/>
                 </a:solidFill>
@@ -8913,7 +8915,7 @@
               </a:rPr>
               <a:t>Validate</a:t>
             </a:r>
-            <a:endParaRPr lang="en-US" sz="1350" dirty="0"/>
+            <a:endParaRPr lang="en-US" sz="1800" dirty="0"/>
           </a:p>
         </p:txBody>
       </p:sp>
@@ -8925,8 +8927,8 @@
         </p:nvSpPr>
         <p:spPr>
           <a:xfrm>
-            <a:off x="5254600" y="3566160"/>
-            <a:ext cx="1682496" cy="960120"/>
+            <a:off x="5254600" y="3584448"/>
+            <a:ext cx="1682496" cy="1371600"/>
           </a:xfrm>
           <a:prstGeom prst="rect">
             <a:avLst/>
@@ -8942,7 +8944,7 @@
               <a:buNone/>
             </a:pPr>
             <a:r>
-              <a:rPr lang="en-US" sz="980" dirty="0">
+              <a:rPr lang="en-US" sz="1800" dirty="0">
                 <a:solidFill>
                   <a:srgbClr val="CBD5E1"/>
                 </a:solidFill>
@@ -8952,7 +8954,7 @@
               </a:rPr>
               <a:t>Row counts, schema, and sanity ranges checked on every single run.</a:t>
             </a:r>
-            <a:endParaRPr lang="en-US" sz="980" dirty="0"/>
+            <a:endParaRPr lang="en-US" sz="1800" dirty="0"/>
           </a:p>
         </p:txBody>
       </p:sp>
@@ -8964,7 +8966,7 @@
         </p:nvSpPr>
         <p:spPr>
           <a:xfrm>
-            <a:off x="7078828" y="3419856"/>
+            <a:off x="7078828" y="3566160"/>
             <a:ext cx="210312" cy="274320"/>
           </a:xfrm>
           <a:prstGeom prst="rightArrow">
@@ -8984,8 +8986,8 @@
         </p:nvSpPr>
         <p:spPr>
           <a:xfrm>
-            <a:off x="7302856" y="2514600"/>
-            <a:ext cx="1938528" cy="2103120"/>
+            <a:off x="7302856" y="2331720"/>
+            <a:ext cx="1938528" cy="2697480"/>
           </a:xfrm>
           <a:prstGeom prst="roundRect">
             <a:avLst>
@@ -9011,8 +9013,8 @@
         </p:nvSpPr>
         <p:spPr>
           <a:xfrm>
-            <a:off x="7430872" y="2633472"/>
-            <a:ext cx="1682496" cy="310896"/>
+            <a:off x="7430872" y="2450592"/>
+            <a:ext cx="1682496" cy="365760"/>
           </a:xfrm>
           <a:prstGeom prst="rect">
             <a:avLst/>
@@ -9028,7 +9030,7 @@
               <a:buNone/>
             </a:pPr>
             <a:r>
-              <a:rPr lang="en-US" sz="1100" b="1" dirty="0">
+              <a:rPr lang="en-US" sz="1800" b="1" dirty="0">
                 <a:solidFill>
                   <a:srgbClr val="06B6D4"/>
                 </a:solidFill>
@@ -9038,7 +9040,7 @@
               </a:rPr>
               <a:t>04</a:t>
             </a:r>
-            <a:endParaRPr lang="en-US" sz="1100" dirty="0"/>
+            <a:endParaRPr lang="en-US" sz="1800" dirty="0"/>
           </a:p>
         </p:txBody>
       </p:sp>
@@ -9050,8 +9052,8 @@
         </p:nvSpPr>
         <p:spPr>
           <a:xfrm>
-            <a:off x="7430872" y="2962656"/>
-            <a:ext cx="1682496" cy="566928"/>
+            <a:off x="7430872" y="2834640"/>
+            <a:ext cx="1682496" cy="713232"/>
           </a:xfrm>
           <a:prstGeom prst="rect">
             <a:avLst/>
@@ -9067,7 +9069,7 @@
               <a:buNone/>
             </a:pPr>
             <a:r>
-              <a:rPr lang="en-US" sz="1350" b="1" dirty="0">
+              <a:rPr lang="en-US" sz="1800" b="1" dirty="0">
                 <a:solidFill>
                   <a:srgbClr val="FFFFFF"/>
                 </a:solidFill>
@@ -9077,7 +9079,7 @@
               </a:rPr>
               <a:t>Store</a:t>
             </a:r>
-            <a:endParaRPr lang="en-US" sz="1350" dirty="0"/>
+            <a:endParaRPr lang="en-US" sz="1800" dirty="0"/>
           </a:p>
         </p:txBody>
       </p:sp>
@@ -9089,8 +9091,8 @@
         </p:nvSpPr>
         <p:spPr>
           <a:xfrm>
-            <a:off x="7430872" y="3566160"/>
-            <a:ext cx="1682496" cy="960120"/>
+            <a:off x="7430872" y="3584448"/>
+            <a:ext cx="1682496" cy="1371600"/>
           </a:xfrm>
           <a:prstGeom prst="rect">
             <a:avLst/>
@@ -9106,7 +9108,7 @@
               <a:buNone/>
             </a:pPr>
             <a:r>
-              <a:rPr lang="en-US" sz="980" dirty="0">
+              <a:rPr lang="en-US" sz="1800" dirty="0">
                 <a:solidFill>
                   <a:srgbClr val="CBD5E1"/>
                 </a:solidFill>
@@ -9116,7 +9118,7 @@
               </a:rPr>
               <a:t>Clean shapes that downstream tools want, not raw scrapings.</a:t>
             </a:r>
-            <a:endParaRPr lang="en-US" sz="980" dirty="0"/>
+            <a:endParaRPr lang="en-US" sz="1800" dirty="0"/>
           </a:p>
         </p:txBody>
       </p:sp>
@@ -9128,7 +9130,7 @@
         </p:nvSpPr>
         <p:spPr>
           <a:xfrm>
-            <a:off x="9255100" y="3419856"/>
+            <a:off x="9255100" y="3566160"/>
             <a:ext cx="210312" cy="274320"/>
           </a:xfrm>
           <a:prstGeom prst="rightArrow">
@@ -9148,8 +9150,8 @@
         </p:nvSpPr>
         <p:spPr>
           <a:xfrm>
-            <a:off x="9479128" y="2514600"/>
-            <a:ext cx="1938528" cy="2103120"/>
+            <a:off x="9479128" y="2331720"/>
+            <a:ext cx="1938528" cy="2697480"/>
           </a:xfrm>
           <a:prstGeom prst="roundRect">
             <a:avLst>
@@ -9175,8 +9177,8 @@
         </p:nvSpPr>
         <p:spPr>
           <a:xfrm>
-            <a:off x="9607144" y="2633472"/>
-            <a:ext cx="1682496" cy="310896"/>
+            <a:off x="9607144" y="2450592"/>
+            <a:ext cx="1682496" cy="365760"/>
           </a:xfrm>
           <a:prstGeom prst="rect">
             <a:avLst/>
@@ -9192,7 +9194,7 @@
               <a:buNone/>
             </a:pPr>
             <a:r>
-              <a:rPr lang="en-US" sz="1100" b="1" dirty="0">
+              <a:rPr lang="en-US" sz="1800" b="1" dirty="0">
                 <a:solidFill>
                   <a:srgbClr val="3B82F6"/>
                 </a:solidFill>
@@ -9202,7 +9204,7 @@
               </a:rPr>
               <a:t>05</a:t>
             </a:r>
-            <a:endParaRPr lang="en-US" sz="1100" dirty="0"/>
+            <a:endParaRPr lang="en-US" sz="1800" dirty="0"/>
           </a:p>
         </p:txBody>
       </p:sp>
@@ -9214,8 +9216,8 @@
         </p:nvSpPr>
         <p:spPr>
           <a:xfrm>
-            <a:off x="9607144" y="2962656"/>
-            <a:ext cx="1682496" cy="566928"/>
+            <a:off x="9607144" y="2834640"/>
+            <a:ext cx="1682496" cy="713232"/>
           </a:xfrm>
           <a:prstGeom prst="rect">
             <a:avLst/>
@@ -9231,7 +9233,7 @@
               <a:buNone/>
             </a:pPr>
             <a:r>
-              <a:rPr lang="en-US" sz="1350" b="1" dirty="0">
+              <a:rPr lang="en-US" sz="1800" b="1" dirty="0">
                 <a:solidFill>
                   <a:srgbClr val="FFFFFF"/>
                 </a:solidFill>
@@ -9241,7 +9243,7 @@
               </a:rPr>
               <a:t>Monitor</a:t>
             </a:r>
-            <a:endParaRPr lang="en-US" sz="1350" dirty="0"/>
+            <a:endParaRPr lang="en-US" sz="1800" dirty="0"/>
           </a:p>
         </p:txBody>
       </p:sp>
@@ -9253,8 +9255,8 @@
         </p:nvSpPr>
         <p:spPr>
           <a:xfrm>
-            <a:off x="9607144" y="3566160"/>
-            <a:ext cx="1682496" cy="960120"/>
+            <a:off x="9607144" y="3584448"/>
+            <a:ext cx="1682496" cy="1371600"/>
           </a:xfrm>
           <a:prstGeom prst="rect">
             <a:avLst/>
@@ -9270,7 +9272,7 @@
               <a:buNone/>
             </a:pPr>
             <a:r>
-              <a:rPr lang="en-US" sz="980" dirty="0">
+              <a:rPr lang="en-US" sz="1800" dirty="0">
                 <a:solidFill>
                   <a:srgbClr val="CBD5E1"/>
                 </a:solidFill>
@@ -9280,7 +9282,7 @@
               </a:rPr>
               <a:t>Freshness alarms and structured logs instead of silent deaths.</a:t>
             </a:r>
-            <a:endParaRPr lang="en-US" sz="980" dirty="0"/>
+            <a:endParaRPr lang="en-US" sz="1800" dirty="0"/>
           </a:p>
         </p:txBody>
       </p:sp>
@@ -9315,8 +9317,8 @@
         </p:nvSpPr>
         <p:spPr>
           <a:xfrm>
-            <a:off x="822960" y="6053328"/>
-            <a:ext cx="9692640" cy="457200"/>
+            <a:off x="822960" y="6035040"/>
+            <a:ext cx="10424160" cy="566928"/>
           </a:xfrm>
           <a:prstGeom prst="rect">
             <a:avLst/>
@@ -9332,9 +9334,9 @@
               <a:buNone/>
             </a:pPr>
             <a:r>
-              <a:rPr lang="en-US" sz="1150" dirty="0">
-                <a:solidFill>
-                  <a:srgbClr val="64748B"/>
+              <a:rPr lang="en-US" sz="1800" dirty="0">
+                <a:solidFill>
+                  <a:srgbClr val="8FA3BF"/>
                 </a:solidFill>
                 <a:latin typeface="Segoe UI" pitchFamily="34" charset="0"/>
                 <a:ea typeface="Segoe UI" pitchFamily="34" charset="-122"/>
@@ -9342,7 +9344,7 @@
               </a:rPr>
               <a:t>Every stage records what it did - nothing about a run is a mystery.</a:t>
             </a:r>
-            <a:endParaRPr lang="en-US" sz="1150" dirty="0"/>
+            <a:endParaRPr lang="en-US" sz="1800" dirty="0"/>
           </a:p>
         </p:txBody>
       </p:sp>
@@ -9354,8 +9356,8 @@
         </p:nvSpPr>
         <p:spPr>
           <a:xfrm>
-            <a:off x="10698480" y="6382512"/>
-            <a:ext cx="1188720" cy="365760"/>
+            <a:off x="10698480" y="6309360"/>
+            <a:ext cx="1188720" cy="411480"/>
           </a:xfrm>
           <a:prstGeom prst="rect">
             <a:avLst/>
@@ -9371,9 +9373,9 @@
               <a:buNone/>
             </a:pPr>
             <a:r>
-              <a:rPr lang="en-US" sz="1000" dirty="0">
-                <a:solidFill>
-                  <a:srgbClr val="64748B"/>
+              <a:rPr lang="en-US" sz="1800" dirty="0">
+                <a:solidFill>
+                  <a:srgbClr val="8FA3BF"/>
                 </a:solidFill>
                 <a:latin typeface="Consolas" pitchFamily="34" charset="0"/>
                 <a:ea typeface="Consolas" pitchFamily="34" charset="-122"/>
@@ -9381,7 +9383,7 @@
               </a:rPr>
               <a:t>4 / 15</a:t>
             </a:r>
-            <a:endParaRPr lang="en-US" sz="1000" dirty="0"/>
+            <a:endParaRPr lang="en-US" sz="1800" dirty="0"/>
           </a:p>
         </p:txBody>
       </p:sp>
@@ -9465,8 +9467,8 @@
         </p:nvSpPr>
         <p:spPr>
           <a:xfrm>
-            <a:off x="822960" y="502920"/>
-            <a:ext cx="10515600" cy="365760"/>
+            <a:off x="822960" y="457200"/>
+            <a:ext cx="10515600" cy="411480"/>
           </a:xfrm>
           <a:prstGeom prst="rect">
             <a:avLst/>
@@ -9482,7 +9484,7 @@
               <a:buNone/>
             </a:pPr>
             <a:r>
-              <a:rPr lang="en-US" sz="1200" spc="300" kern="0" dirty="0">
+              <a:rPr lang="en-US" sz="1800" spc="300" kern="0" dirty="0">
                 <a:solidFill>
                   <a:srgbClr val="06B6D4"/>
                 </a:solidFill>
@@ -9492,7 +9494,7 @@
               </a:rPr>
               <a:t>THE TOOLKIT</a:t>
             </a:r>
-            <a:endParaRPr lang="en-US" sz="1200" dirty="0"/>
+            <a:endParaRPr lang="en-US" sz="1800" dirty="0"/>
           </a:p>
         </p:txBody>
       </p:sp>
@@ -9543,8 +9545,8 @@
         </p:nvSpPr>
         <p:spPr>
           <a:xfrm>
-            <a:off x="822960" y="2194560"/>
-            <a:ext cx="2423160" cy="2697480"/>
+            <a:off x="822960" y="1965960"/>
+            <a:ext cx="2423160" cy="3154680"/>
           </a:xfrm>
           <a:prstGeom prst="roundRect">
             <a:avLst>
@@ -9570,7 +9572,7 @@
         </p:nvSpPr>
         <p:spPr>
           <a:xfrm>
-            <a:off x="960120" y="2514600"/>
+            <a:off x="960120" y="2194560"/>
             <a:ext cx="2148840" cy="914400"/>
           </a:xfrm>
           <a:prstGeom prst="rect">
@@ -9609,8 +9611,8 @@
         </p:nvSpPr>
         <p:spPr>
           <a:xfrm>
-            <a:off x="960120" y="3520440"/>
-            <a:ext cx="2148840" cy="502920"/>
+            <a:off x="960120" y="3200400"/>
+            <a:ext cx="2148840" cy="868680"/>
           </a:xfrm>
           <a:prstGeom prst="rect">
             <a:avLst/>
@@ -9626,7 +9628,7 @@
               <a:buNone/>
             </a:pPr>
             <a:r>
-              <a:rPr lang="en-US" sz="1450" b="1" dirty="0">
+              <a:rPr lang="en-US" sz="1800" b="1" dirty="0">
                 <a:solidFill>
                   <a:srgbClr val="FFFFFF"/>
                 </a:solidFill>
@@ -9636,7 +9638,7 @@
               </a:rPr>
               <a:t>Lines of code</a:t>
             </a:r>
-            <a:endParaRPr lang="en-US" sz="1450" dirty="0"/>
+            <a:endParaRPr lang="en-US" sz="1800" dirty="0"/>
           </a:p>
         </p:txBody>
       </p:sp>
@@ -9648,8 +9650,8 @@
         </p:nvSpPr>
         <p:spPr>
           <a:xfrm>
-            <a:off x="1005840" y="4069080"/>
-            <a:ext cx="2057400" cy="685800"/>
+            <a:off x="1005840" y="4114800"/>
+            <a:ext cx="2057400" cy="914400"/>
           </a:xfrm>
           <a:prstGeom prst="rect">
             <a:avLst/>
@@ -9665,7 +9667,7 @@
               <a:buNone/>
             </a:pPr>
             <a:r>
-              <a:rPr lang="en-US" sz="1050" dirty="0">
+              <a:rPr lang="en-US" sz="1800" dirty="0">
                 <a:solidFill>
                   <a:srgbClr val="94A3B8"/>
                 </a:solidFill>
@@ -9675,7 +9677,7 @@
               </a:rPr>
               <a:t>Open source and production-tested across client engagements.</a:t>
             </a:r>
-            <a:endParaRPr lang="en-US" sz="1050" dirty="0"/>
+            <a:endParaRPr lang="en-US" sz="1800" dirty="0"/>
           </a:p>
         </p:txBody>
       </p:sp>
@@ -9687,8 +9689,8 @@
         </p:nvSpPr>
         <p:spPr>
           <a:xfrm>
-            <a:off x="3520440" y="2194560"/>
-            <a:ext cx="2423160" cy="2697480"/>
+            <a:off x="3520440" y="1965960"/>
+            <a:ext cx="2423160" cy="3154680"/>
           </a:xfrm>
           <a:prstGeom prst="roundRect">
             <a:avLst>
@@ -9714,7 +9716,7 @@
         </p:nvSpPr>
         <p:spPr>
           <a:xfrm>
-            <a:off x="3657600" y="2514600"/>
+            <a:off x="3657600" y="2194560"/>
             <a:ext cx="2148840" cy="914400"/>
           </a:xfrm>
           <a:prstGeom prst="rect">
@@ -9753,8 +9755,8 @@
         </p:nvSpPr>
         <p:spPr>
           <a:xfrm>
-            <a:off x="3657600" y="3520440"/>
-            <a:ext cx="2148840" cy="502920"/>
+            <a:off x="3657600" y="3200400"/>
+            <a:ext cx="2148840" cy="868680"/>
           </a:xfrm>
           <a:prstGeom prst="rect">
             <a:avLst/>
@@ -9770,7 +9772,7 @@
               <a:buNone/>
             </a:pPr>
             <a:r>
-              <a:rPr lang="en-US" sz="1450" b="1" dirty="0">
+              <a:rPr lang="en-US" sz="1800" b="1" dirty="0">
                 <a:solidFill>
                   <a:srgbClr val="FFFFFF"/>
                 </a:solidFill>
@@ -9780,7 +9782,7 @@
               </a:rPr>
               <a:t>Core principles</a:t>
             </a:r>
-            <a:endParaRPr lang="en-US" sz="1450" dirty="0"/>
+            <a:endParaRPr lang="en-US" sz="1800" dirty="0"/>
           </a:p>
         </p:txBody>
       </p:sp>
@@ -9792,8 +9794,8 @@
         </p:nvSpPr>
         <p:spPr>
           <a:xfrm>
-            <a:off x="3703320" y="4069080"/>
-            <a:ext cx="2057400" cy="685800"/>
+            <a:off x="3703320" y="4114800"/>
+            <a:ext cx="2057400" cy="914400"/>
           </a:xfrm>
           <a:prstGeom prst="rect">
             <a:avLst/>
@@ -9809,7 +9811,7 @@
               <a:buNone/>
             </a:pPr>
             <a:r>
-              <a:rPr lang="en-US" sz="1050" dirty="0">
+              <a:rPr lang="en-US" sz="1800" dirty="0">
                 <a:solidFill>
                   <a:srgbClr val="94A3B8"/>
                 </a:solidFill>
@@ -9819,7 +9821,7 @@
               </a:rPr>
               <a:t>Validate every run, tolerate extraction, stay polite, log for humans.</a:t>
             </a:r>
-            <a:endParaRPr lang="en-US" sz="1050" dirty="0"/>
+            <a:endParaRPr lang="en-US" sz="1800" dirty="0"/>
           </a:p>
         </p:txBody>
       </p:sp>
@@ -9831,8 +9833,8 @@
         </p:nvSpPr>
         <p:spPr>
           <a:xfrm>
-            <a:off x="6217920" y="2194560"/>
-            <a:ext cx="2423160" cy="2697480"/>
+            <a:off x="6217920" y="1965960"/>
+            <a:ext cx="2423160" cy="3154680"/>
           </a:xfrm>
           <a:prstGeom prst="roundRect">
             <a:avLst>
@@ -9858,7 +9860,7 @@
         </p:nvSpPr>
         <p:spPr>
           <a:xfrm>
-            <a:off x="6355080" y="2514600"/>
+            <a:off x="6355080" y="2194560"/>
             <a:ext cx="2148840" cy="914400"/>
           </a:xfrm>
           <a:prstGeom prst="rect">
@@ -9897,8 +9899,8 @@
         </p:nvSpPr>
         <p:spPr>
           <a:xfrm>
-            <a:off x="6355080" y="3520440"/>
-            <a:ext cx="2148840" cy="502920"/>
+            <a:off x="6355080" y="3200400"/>
+            <a:ext cx="2148840" cy="868680"/>
           </a:xfrm>
           <a:prstGeom prst="rect">
             <a:avLst/>
@@ -9914,7 +9916,7 @@
               <a:buNone/>
             </a:pPr>
             <a:r>
-              <a:rPr lang="en-US" sz="1450" b="1" dirty="0">
+              <a:rPr lang="en-US" sz="1800" b="1" dirty="0">
                 <a:solidFill>
                   <a:srgbClr val="FFFFFF"/>
                 </a:solidFill>
@@ -9924,7 +9926,7 @@
               </a:rPr>
               <a:t>Runs validated</a:t>
             </a:r>
-            <a:endParaRPr lang="en-US" sz="1450" dirty="0"/>
+            <a:endParaRPr lang="en-US" sz="1800" dirty="0"/>
           </a:p>
         </p:txBody>
       </p:sp>
@@ -9936,8 +9938,8 @@
         </p:nvSpPr>
         <p:spPr>
           <a:xfrm>
-            <a:off x="6400800" y="4069080"/>
-            <a:ext cx="2057400" cy="685800"/>
+            <a:off x="6400800" y="4114800"/>
+            <a:ext cx="2057400" cy="914400"/>
           </a:xfrm>
           <a:prstGeom prst="rect">
             <a:avLst/>
@@ -9953,7 +9955,7 @@
               <a:buNone/>
             </a:pPr>
             <a:r>
-              <a:rPr lang="en-US" sz="1050" dirty="0">
+              <a:rPr lang="en-US" sz="1800" dirty="0">
                 <a:solidFill>
                   <a:srgbClr val="94A3B8"/>
                 </a:solidFill>
@@ -9963,7 +9965,7 @@
               </a:rPr>
               <a:t>No run is trusted just because it exited zero.</a:t>
             </a:r>
-            <a:endParaRPr lang="en-US" sz="1050" dirty="0"/>
+            <a:endParaRPr lang="en-US" sz="1800" dirty="0"/>
           </a:p>
         </p:txBody>
       </p:sp>
@@ -9975,8 +9977,8 @@
         </p:nvSpPr>
         <p:spPr>
           <a:xfrm>
-            <a:off x="8915400" y="2194560"/>
-            <a:ext cx="2423160" cy="2697480"/>
+            <a:off x="8915400" y="1965960"/>
+            <a:ext cx="2423160" cy="3154680"/>
           </a:xfrm>
           <a:prstGeom prst="roundRect">
             <a:avLst>
@@ -10002,7 +10004,7 @@
         </p:nvSpPr>
         <p:spPr>
           <a:xfrm>
-            <a:off x="9052560" y="2514600"/>
+            <a:off x="9052560" y="2194560"/>
             <a:ext cx="2148840" cy="914400"/>
           </a:xfrm>
           <a:prstGeom prst="rect">
@@ -10041,8 +10043,8 @@
         </p:nvSpPr>
         <p:spPr>
           <a:xfrm>
-            <a:off x="9052560" y="3520440"/>
-            <a:ext cx="2148840" cy="502920"/>
+            <a:off x="9052560" y="3200400"/>
+            <a:ext cx="2148840" cy="868680"/>
           </a:xfrm>
           <a:prstGeom prst="rect">
             <a:avLst/>
@@ -10058,7 +10060,7 @@
               <a:buNone/>
             </a:pPr>
             <a:r>
-              <a:rPr lang="en-US" sz="1450" b="1" dirty="0">
+              <a:rPr lang="en-US" sz="1800" b="1" dirty="0">
                 <a:solidFill>
                   <a:srgbClr val="FFFFFF"/>
                 </a:solidFill>
@@ -10068,7 +10070,7 @@
               </a:rPr>
               <a:t>Credentials used</a:t>
             </a:r>
-            <a:endParaRPr lang="en-US" sz="1450" dirty="0"/>
+            <a:endParaRPr lang="en-US" sz="1800" dirty="0"/>
           </a:p>
         </p:txBody>
       </p:sp>
@@ -10080,8 +10082,8 @@
         </p:nvSpPr>
         <p:spPr>
           <a:xfrm>
-            <a:off x="9098280" y="4069080"/>
-            <a:ext cx="2057400" cy="685800"/>
+            <a:off x="9098280" y="4114800"/>
+            <a:ext cx="2057400" cy="914400"/>
           </a:xfrm>
           <a:prstGeom prst="rect">
             <a:avLst/>
@@ -10097,7 +10099,7 @@
               <a:buNone/>
             </a:pPr>
             <a:r>
-              <a:rPr lang="en-US" sz="1050" dirty="0">
+              <a:rPr lang="en-US" sz="1800" dirty="0">
                 <a:solidFill>
                   <a:srgbClr val="94A3B8"/>
                 </a:solidFill>
@@ -10107,7 +10109,7 @@
               </a:rPr>
               <a:t>Public data only - no logins, no pretending.</a:t>
             </a:r>
-            <a:endParaRPr lang="en-US" sz="1050" dirty="0"/>
+            <a:endParaRPr lang="en-US" sz="1800" dirty="0"/>
           </a:p>
         </p:txBody>
       </p:sp>
@@ -10119,7 +10121,7 @@
         </p:nvSpPr>
         <p:spPr>
           <a:xfrm>
-            <a:off x="822960" y="5413248"/>
+            <a:off x="822960" y="5321808"/>
             <a:ext cx="10515600" cy="0"/>
           </a:xfrm>
           <a:prstGeom prst="line">
@@ -10142,8 +10144,8 @@
         </p:nvSpPr>
         <p:spPr>
           <a:xfrm>
-            <a:off x="822960" y="5504688"/>
-            <a:ext cx="10424160" cy="411480"/>
+            <a:off x="822960" y="5394960"/>
+            <a:ext cx="10424160" cy="502920"/>
           </a:xfrm>
           <a:prstGeom prst="rect">
             <a:avLst/>
@@ -10159,7 +10161,7 @@
               <a:buNone/>
             </a:pPr>
             <a:r>
-              <a:rPr lang="en-US" sz="1300" i="1" dirty="0">
+              <a:rPr lang="en-US" sz="1800" i="1" dirty="0">
                 <a:solidFill>
                   <a:srgbClr val="06B6D4"/>
                 </a:solidFill>
@@ -10169,7 +10171,7 @@
               </a:rPr>
               <a:t>→  Built for engagements where the data has to keep arriving, month after month.</a:t>
             </a:r>
-            <a:endParaRPr lang="en-US" sz="1300" dirty="0"/>
+            <a:endParaRPr lang="en-US" sz="1800" dirty="0"/>
           </a:p>
         </p:txBody>
       </p:sp>
@@ -10181,8 +10183,8 @@
         </p:nvSpPr>
         <p:spPr>
           <a:xfrm>
-            <a:off x="10698480" y="6382512"/>
-            <a:ext cx="1188720" cy="365760"/>
+            <a:off x="10698480" y="6309360"/>
+            <a:ext cx="1188720" cy="411480"/>
           </a:xfrm>
           <a:prstGeom prst="rect">
             <a:avLst/>
@@ -10198,9 +10200,9 @@
               <a:buNone/>
             </a:pPr>
             <a:r>
-              <a:rPr lang="en-US" sz="1000" dirty="0">
-                <a:solidFill>
-                  <a:srgbClr val="64748B"/>
+              <a:rPr lang="en-US" sz="1800" dirty="0">
+                <a:solidFill>
+                  <a:srgbClr val="8FA3BF"/>
                 </a:solidFill>
                 <a:latin typeface="Consolas" pitchFamily="34" charset="0"/>
                 <a:ea typeface="Consolas" pitchFamily="34" charset="-122"/>
@@ -10208,7 +10210,7 @@
               </a:rPr>
               <a:t>5 / 15</a:t>
             </a:r>
-            <a:endParaRPr lang="en-US" sz="1000" dirty="0"/>
+            <a:endParaRPr lang="en-US" sz="1800" dirty="0"/>
           </a:p>
         </p:txBody>
       </p:sp>
@@ -10292,8 +10294,8 @@
         </p:nvSpPr>
         <p:spPr>
           <a:xfrm>
-            <a:off x="822960" y="502920"/>
-            <a:ext cx="10515600" cy="365760"/>
+            <a:off x="822960" y="457200"/>
+            <a:ext cx="10515600" cy="411480"/>
           </a:xfrm>
           <a:prstGeom prst="rect">
             <a:avLst/>
@@ -10309,7 +10311,7 @@
               <a:buNone/>
             </a:pPr>
             <a:r>
-              <a:rPr lang="en-US" sz="1200" spc="300" kern="0" dirty="0">
+              <a:rPr lang="en-US" sz="1800" spc="300" kern="0" dirty="0">
                 <a:solidFill>
                   <a:srgbClr val="06B6D4"/>
                 </a:solidFill>
@@ -10319,7 +10321,7 @@
               </a:rPr>
               <a:t>PRINCIPLE 1</a:t>
             </a:r>
-            <a:endParaRPr lang="en-US" sz="1200" dirty="0"/>
+            <a:endParaRPr lang="en-US" sz="1800" dirty="0"/>
           </a:p>
         </p:txBody>
       </p:sp>
@@ -10370,8 +10372,8 @@
         </p:nvSpPr>
         <p:spPr>
           <a:xfrm>
-            <a:off x="868680" y="2011680"/>
-            <a:ext cx="10424160" cy="3566160"/>
+            <a:off x="868680" y="1965960"/>
+            <a:ext cx="10424160" cy="3840480"/>
           </a:xfrm>
           <a:prstGeom prst="rect">
             <a:avLst/>
@@ -10394,7 +10396,7 @@
               <a:buChar char="▸"/>
             </a:pPr>
             <a:r>
-              <a:rPr lang="en-US" sz="1600" dirty="0">
+              <a:rPr lang="en-US" sz="2000" dirty="0">
                 <a:solidFill>
                   <a:srgbClr val="CBD5E1"/>
                 </a:solidFill>
@@ -10404,7 +10406,7 @@
               </a:rPr>
               <a:t>A scraper that silently returns empty data is worse than one that crashes loudly.</a:t>
             </a:r>
-            <a:endParaRPr lang="en-US" sz="1600" dirty="0"/>
+            <a:endParaRPr lang="en-US" sz="2000" dirty="0"/>
           </a:p>
           <a:p>
             <a:pPr marL="342900" indent="-342900">
@@ -10418,7 +10420,7 @@
               <a:buChar char="▸"/>
             </a:pPr>
             <a:r>
-              <a:rPr lang="en-US" sz="1600" dirty="0">
+              <a:rPr lang="en-US" sz="2000" dirty="0">
                 <a:solidFill>
                   <a:srgbClr val="CBD5E1"/>
                 </a:solidFill>
@@ -10428,7 +10430,7 @@
               </a:rPr>
               <a:t>Row counts are compared against expectations on every execution.</a:t>
             </a:r>
-            <a:endParaRPr lang="en-US" sz="1600" dirty="0"/>
+            <a:endParaRPr lang="en-US" sz="2000" dirty="0"/>
           </a:p>
           <a:p>
             <a:pPr marL="342900" indent="-342900">
@@ -10442,7 +10444,7 @@
               <a:buChar char="▸"/>
             </a:pPr>
             <a:r>
-              <a:rPr lang="en-US" sz="1600" dirty="0">
+              <a:rPr lang="en-US" sz="2000" dirty="0">
                 <a:solidFill>
                   <a:srgbClr val="CBD5E1"/>
                 </a:solidFill>
@@ -10452,7 +10454,7 @@
               </a:rPr>
               <a:t>Schema validation catches the column that quietly disappeared.</a:t>
             </a:r>
-            <a:endParaRPr lang="en-US" sz="1600" dirty="0"/>
+            <a:endParaRPr lang="en-US" sz="2000" dirty="0"/>
           </a:p>
           <a:p>
             <a:pPr marL="342900" indent="-342900">
@@ -10466,7 +10468,7 @@
               <a:buChar char="▸"/>
             </a:pPr>
             <a:r>
-              <a:rPr lang="en-US" sz="1600" dirty="0">
+              <a:rPr lang="en-US" sz="2000" dirty="0">
                 <a:solidFill>
                   <a:srgbClr val="CBD5E1"/>
                 </a:solidFill>
@@ -10476,7 +10478,7 @@
               </a:rPr>
               <a:t>Sanity ranges catch the price that came back as zero or a million.</a:t>
             </a:r>
-            <a:endParaRPr lang="en-US" sz="1600" dirty="0"/>
+            <a:endParaRPr lang="en-US" sz="2000" dirty="0"/>
           </a:p>
           <a:p>
             <a:pPr marL="342900" indent="-342900">
@@ -10490,7 +10492,7 @@
               <a:buChar char="▸"/>
             </a:pPr>
             <a:r>
-              <a:rPr lang="en-US" sz="1600" dirty="0">
+              <a:rPr lang="en-US" sz="2000" dirty="0">
                 <a:solidFill>
                   <a:srgbClr val="CBD5E1"/>
                 </a:solidFill>
@@ -10500,7 +10502,7 @@
               </a:rPr>
               <a:t>Validation turns 'I think the data arrived' into evidence it did.</a:t>
             </a:r>
-            <a:endParaRPr lang="en-US" sz="1600" dirty="0"/>
+            <a:endParaRPr lang="en-US" sz="2000" dirty="0"/>
           </a:p>
         </p:txBody>
       </p:sp>
@@ -10535,8 +10537,8 @@
         </p:nvSpPr>
         <p:spPr>
           <a:xfrm>
-            <a:off x="822960" y="6053328"/>
-            <a:ext cx="9692640" cy="457200"/>
+            <a:off x="822960" y="6035040"/>
+            <a:ext cx="10424160" cy="566928"/>
           </a:xfrm>
           <a:prstGeom prst="rect">
             <a:avLst/>
@@ -10552,9 +10554,9 @@
               <a:buNone/>
             </a:pPr>
             <a:r>
-              <a:rPr lang="en-US" sz="1150" dirty="0">
-                <a:solidFill>
-                  <a:srgbClr val="64748B"/>
+              <a:rPr lang="en-US" sz="1800" dirty="0">
+                <a:solidFill>
+                  <a:srgbClr val="8FA3BF"/>
                 </a:solidFill>
                 <a:latin typeface="Segoe UI" pitchFamily="34" charset="0"/>
                 <a:ea typeface="Segoe UI" pitchFamily="34" charset="-122"/>
@@ -10562,7 +10564,7 @@
               </a:rPr>
               <a:t>Do not trust a run because it exited zero.</a:t>
             </a:r>
-            <a:endParaRPr lang="en-US" sz="1150" dirty="0"/>
+            <a:endParaRPr lang="en-US" sz="1800" dirty="0"/>
           </a:p>
         </p:txBody>
       </p:sp>
@@ -10574,8 +10576,8 @@
         </p:nvSpPr>
         <p:spPr>
           <a:xfrm>
-            <a:off x="10698480" y="6382512"/>
-            <a:ext cx="1188720" cy="365760"/>
+            <a:off x="10698480" y="6309360"/>
+            <a:ext cx="1188720" cy="411480"/>
           </a:xfrm>
           <a:prstGeom prst="rect">
             <a:avLst/>
@@ -10591,9 +10593,9 @@
               <a:buNone/>
             </a:pPr>
             <a:r>
-              <a:rPr lang="en-US" sz="1000" dirty="0">
-                <a:solidFill>
-                  <a:srgbClr val="64748B"/>
+              <a:rPr lang="en-US" sz="1800" dirty="0">
+                <a:solidFill>
+                  <a:srgbClr val="8FA3BF"/>
                 </a:solidFill>
                 <a:latin typeface="Consolas" pitchFamily="34" charset="0"/>
                 <a:ea typeface="Consolas" pitchFamily="34" charset="-122"/>
@@ -10601,7 +10603,7 @@
               </a:rPr>
               <a:t>6 / 15</a:t>
             </a:r>
-            <a:endParaRPr lang="en-US" sz="1000" dirty="0"/>
+            <a:endParaRPr lang="en-US" sz="1800" dirty="0"/>
           </a:p>
         </p:txBody>
       </p:sp>
@@ -10685,8 +10687,8 @@
         </p:nvSpPr>
         <p:spPr>
           <a:xfrm>
-            <a:off x="822960" y="502920"/>
-            <a:ext cx="10515600" cy="365760"/>
+            <a:off x="822960" y="457200"/>
+            <a:ext cx="10515600" cy="411480"/>
           </a:xfrm>
           <a:prstGeom prst="rect">
             <a:avLst/>
@@ -10702,7 +10704,7 @@
               <a:buNone/>
             </a:pPr>
             <a:r>
-              <a:rPr lang="en-US" sz="1200" spc="300" kern="0" dirty="0">
+              <a:rPr lang="en-US" sz="1800" spc="300" kern="0" dirty="0">
                 <a:solidFill>
                   <a:srgbClr val="06B6D4"/>
                 </a:solidFill>
@@ -10712,7 +10714,7 @@
               </a:rPr>
               <a:t>VALIDATION</a:t>
             </a:r>
-            <a:endParaRPr lang="en-US" sz="1200" dirty="0"/>
+            <a:endParaRPr lang="en-US" sz="1800" dirty="0"/>
           </a:p>
         </p:txBody>
       </p:sp>
@@ -10763,7 +10765,7 @@
         </p:nvGraphicFramePr>
         <p:xfrm>
           <a:off x="822960" y="1874520"/>
-          <a:ext cx="10515600" cy="3337560"/>
+          <a:ext cx="10515600" cy="3246120"/>
         </p:xfrm>
         <a:graphic xmlns:a="http://schemas.openxmlformats.org/drawingml/2006/main">
           <a:graphicData uri="http://schemas.openxmlformats.org/drawingml/2006/chart">
@@ -10779,7 +10781,7 @@
         </p:nvSpPr>
         <p:spPr>
           <a:xfrm>
-            <a:off x="822960" y="5413248"/>
+            <a:off x="822960" y="5321808"/>
             <a:ext cx="10515600" cy="0"/>
           </a:xfrm>
           <a:prstGeom prst="line">
@@ -10802,8 +10804,8 @@
         </p:nvSpPr>
         <p:spPr>
           <a:xfrm>
-            <a:off x="822960" y="5504688"/>
-            <a:ext cx="10424160" cy="411480"/>
+            <a:off x="822960" y="5394960"/>
+            <a:ext cx="10424160" cy="502920"/>
           </a:xfrm>
           <a:prstGeom prst="rect">
             <a:avLst/>
@@ -10819,7 +10821,7 @@
               <a:buNone/>
             </a:pPr>
             <a:r>
-              <a:rPr lang="en-US" sz="1300" i="1" dirty="0">
+              <a:rPr lang="en-US" sz="1800" i="1" dirty="0">
                 <a:solidFill>
                   <a:srgbClr val="06B6D4"/>
                 </a:solidFill>
@@ -10829,7 +10831,7 @@
               </a:rPr>
               <a:t>→  Validation catches the boring failures first - the ones that would otherwise become next week's emergency.</a:t>
             </a:r>
-            <a:endParaRPr lang="en-US" sz="1300" dirty="0"/>
+            <a:endParaRPr lang="en-US" sz="1800" dirty="0"/>
           </a:p>
         </p:txBody>
       </p:sp>
@@ -10864,8 +10866,8 @@
         </p:nvSpPr>
         <p:spPr>
           <a:xfrm>
-            <a:off x="822960" y="6053328"/>
-            <a:ext cx="9692640" cy="457200"/>
+            <a:off x="822960" y="6035040"/>
+            <a:ext cx="10424160" cy="566928"/>
           </a:xfrm>
           <a:prstGeom prst="rect">
             <a:avLst/>
@@ -10881,9 +10883,9 @@
               <a:buNone/>
             </a:pPr>
             <a:r>
-              <a:rPr lang="en-US" sz="1150" dirty="0">
-                <a:solidFill>
-                  <a:srgbClr val="64748B"/>
+              <a:rPr lang="en-US" sz="1800" dirty="0">
+                <a:solidFill>
+                  <a:srgbClr val="8FA3BF"/>
                 </a:solidFill>
                 <a:latin typeface="Segoe UI" pitchFamily="34" charset="0"/>
                 <a:ea typeface="Segoe UI" pitchFamily="34" charset="-122"/>
@@ -10891,7 +10893,7 @@
               </a:rPr>
               <a:t>Illustrative mix across monitored engagements; the point is the coverage, not the exact counts.</a:t>
             </a:r>
-            <a:endParaRPr lang="en-US" sz="1150" dirty="0"/>
+            <a:endParaRPr lang="en-US" sz="1800" dirty="0"/>
           </a:p>
         </p:txBody>
       </p:sp>
@@ -10903,8 +10905,8 @@
         </p:nvSpPr>
         <p:spPr>
           <a:xfrm>
-            <a:off x="10698480" y="6382512"/>
-            <a:ext cx="1188720" cy="365760"/>
+            <a:off x="10698480" y="6309360"/>
+            <a:ext cx="1188720" cy="411480"/>
           </a:xfrm>
           <a:prstGeom prst="rect">
             <a:avLst/>
@@ -10920,9 +10922,9 @@
               <a:buNone/>
             </a:pPr>
             <a:r>
-              <a:rPr lang="en-US" sz="1000" dirty="0">
-                <a:solidFill>
-                  <a:srgbClr val="64748B"/>
+              <a:rPr lang="en-US" sz="1800" dirty="0">
+                <a:solidFill>
+                  <a:srgbClr val="8FA3BF"/>
                 </a:solidFill>
                 <a:latin typeface="Consolas" pitchFamily="34" charset="0"/>
                 <a:ea typeface="Consolas" pitchFamily="34" charset="-122"/>
@@ -10930,7 +10932,7 @@
               </a:rPr>
               <a:t>7 / 15</a:t>
             </a:r>
-            <a:endParaRPr lang="en-US" sz="1000" dirty="0"/>
+            <a:endParaRPr lang="en-US" sz="1800" dirty="0"/>
           </a:p>
         </p:txBody>
       </p:sp>
@@ -11014,8 +11016,8 @@
         </p:nvSpPr>
         <p:spPr>
           <a:xfrm>
-            <a:off x="822960" y="502920"/>
-            <a:ext cx="10515600" cy="365760"/>
+            <a:off x="822960" y="457200"/>
+            <a:ext cx="10515600" cy="411480"/>
           </a:xfrm>
           <a:prstGeom prst="rect">
             <a:avLst/>
@@ -11031,7 +11033,7 @@
               <a:buNone/>
             </a:pPr>
             <a:r>
-              <a:rPr lang="en-US" sz="1200" spc="300" kern="0" dirty="0">
+              <a:rPr lang="en-US" sz="1800" spc="300" kern="0" dirty="0">
                 <a:solidFill>
                   <a:srgbClr val="06B6D4"/>
                 </a:solidFill>
@@ -11041,7 +11043,7 @@
               </a:rPr>
               <a:t>PRINCIPLE 2</a:t>
             </a:r>
-            <a:endParaRPr lang="en-US" sz="1200" dirty="0"/>
+            <a:endParaRPr lang="en-US" sz="1800" dirty="0"/>
           </a:p>
         </p:txBody>
       </p:sp>
@@ -11092,8 +11094,8 @@
         </p:nvSpPr>
         <p:spPr>
           <a:xfrm>
-            <a:off x="868680" y="2011680"/>
-            <a:ext cx="10424160" cy="3566160"/>
+            <a:off x="868680" y="1965960"/>
+            <a:ext cx="10424160" cy="3840480"/>
           </a:xfrm>
           <a:prstGeom prst="rect">
             <a:avLst/>
@@ -11116,7 +11118,7 @@
               <a:buChar char="▸"/>
             </a:pPr>
             <a:r>
-              <a:rPr lang="en-US" sz="1600" dirty="0">
+              <a:rPr lang="en-US" sz="2000" dirty="0">
                 <a:solidFill>
                   <a:srgbClr val="CBD5E1"/>
                 </a:solidFill>
@@ -11126,7 +11128,7 @@
               </a:rPr>
               <a:t>Exact CSS selectors are a liability - they rot the first time a site redesigns.</a:t>
             </a:r>
-            <a:endParaRPr lang="en-US" sz="1600" dirty="0"/>
+            <a:endParaRPr lang="en-US" sz="2000" dirty="0"/>
           </a:p>
           <a:p>
             <a:pPr marL="342900" indent="-342900">
@@ -11140,7 +11142,7 @@
               <a:buChar char="▸"/>
             </a:pPr>
             <a:r>
-              <a:rPr lang="en-US" sz="1600" dirty="0">
+              <a:rPr lang="en-US" sz="2000" dirty="0">
                 <a:solidFill>
                   <a:srgbClr val="CBD5E1"/>
                 </a:solidFill>
@@ -11150,7 +11152,7 @@
               </a:rPr>
               <a:t>Structural anchors survive markup changes that kill position-based paths.</a:t>
             </a:r>
-            <a:endParaRPr lang="en-US" sz="1600" dirty="0"/>
+            <a:endParaRPr lang="en-US" sz="2000" dirty="0"/>
           </a:p>
           <a:p>
             <a:pPr marL="342900" indent="-342900">
@@ -11164,7 +11166,7 @@
               <a:buChar char="▸"/>
             </a:pPr>
             <a:r>
-              <a:rPr lang="en-US" sz="1600" dirty="0">
+              <a:rPr lang="en-US" sz="2000" dirty="0">
                 <a:solidFill>
                   <a:srgbClr val="CBD5E1"/>
                 </a:solidFill>
@@ -11174,7 +11176,7 @@
               </a:rPr>
               <a:t>Multiple fallbacks degrade gracefully instead of failing completely.</a:t>
             </a:r>
-            <a:endParaRPr lang="en-US" sz="1600" dirty="0"/>
+            <a:endParaRPr lang="en-US" sz="2000" dirty="0"/>
           </a:p>
           <a:p>
             <a:pPr marL="342900" indent="-342900">
@@ -11188,7 +11190,7 @@
               <a:buChar char="▸"/>
             </a:pPr>
             <a:r>
-              <a:rPr lang="en-US" sz="1600" dirty="0">
+              <a:rPr lang="en-US" sz="2000" dirty="0">
                 <a:solidFill>
                   <a:srgbClr val="CBD5E1"/>
                 </a:solidFill>
@@ -11198,7 +11200,7 @@
               </a:rPr>
               <a:t>Partial data with a warning beats zero data with a shrug.</a:t>
             </a:r>
-            <a:endParaRPr lang="en-US" sz="1600" dirty="0"/>
+            <a:endParaRPr lang="en-US" sz="2000" dirty="0"/>
           </a:p>
           <a:p>
             <a:pPr marL="342900" indent="-342900">
@@ -11212,7 +11214,7 @@
               <a:buChar char="▸"/>
             </a:pPr>
             <a:r>
-              <a:rPr lang="en-US" sz="1600" dirty="0">
+              <a:rPr lang="en-US" sz="2000" dirty="0">
                 <a:solidFill>
                   <a:srgbClr val="CBD5E1"/>
                 </a:solidFill>
@@ -11222,7 +11224,7 @@
               </a:rPr>
               <a:t>Every degraded run is flagged, so partial never masquerades as complete.</a:t>
             </a:r>
-            <a:endParaRPr lang="en-US" sz="1600" dirty="0"/>
+            <a:endParaRPr lang="en-US" sz="2000" dirty="0"/>
           </a:p>
         </p:txBody>
       </p:sp>
@@ -11257,8 +11259,8 @@
         </p:nvSpPr>
         <p:spPr>
           <a:xfrm>
-            <a:off x="822960" y="6053328"/>
-            <a:ext cx="9692640" cy="457200"/>
+            <a:off x="822960" y="6035040"/>
+            <a:ext cx="10424160" cy="566928"/>
           </a:xfrm>
           <a:prstGeom prst="rect">
             <a:avLst/>
@@ -11274,9 +11276,9 @@
               <a:buNone/>
             </a:pPr>
             <a:r>
-              <a:rPr lang="en-US" sz="1150" dirty="0">
-                <a:solidFill>
-                  <a:srgbClr val="64748B"/>
+              <a:rPr lang="en-US" sz="1800" dirty="0">
+                <a:solidFill>
+                  <a:srgbClr val="8FA3BF"/>
                 </a:solidFill>
                 <a:latin typeface="Segoe UI" pitchFamily="34" charset="0"/>
                 <a:ea typeface="Segoe UI" pitchFamily="34" charset="-122"/>
@@ -11284,7 +11286,7 @@
               </a:rPr>
               <a:t>Extraction is designed to lose a limb, not the whole pipeline.</a:t>
             </a:r>
-            <a:endParaRPr lang="en-US" sz="1150" dirty="0"/>
+            <a:endParaRPr lang="en-US" sz="1800" dirty="0"/>
           </a:p>
         </p:txBody>
       </p:sp>
@@ -11296,8 +11298,8 @@
         </p:nvSpPr>
         <p:spPr>
           <a:xfrm>
-            <a:off x="10698480" y="6382512"/>
-            <a:ext cx="1188720" cy="365760"/>
+            <a:off x="10698480" y="6309360"/>
+            <a:ext cx="1188720" cy="411480"/>
           </a:xfrm>
           <a:prstGeom prst="rect">
             <a:avLst/>
@@ -11313,9 +11315,9 @@
               <a:buNone/>
             </a:pPr>
             <a:r>
-              <a:rPr lang="en-US" sz="1000" dirty="0">
-                <a:solidFill>
-                  <a:srgbClr val="64748B"/>
+              <a:rPr lang="en-US" sz="1800" dirty="0">
+                <a:solidFill>
+                  <a:srgbClr val="8FA3BF"/>
                 </a:solidFill>
                 <a:latin typeface="Consolas" pitchFamily="34" charset="0"/>
                 <a:ea typeface="Consolas" pitchFamily="34" charset="-122"/>
@@ -11323,7 +11325,7 @@
               </a:rPr>
               <a:t>8 / 15</a:t>
             </a:r>
-            <a:endParaRPr lang="en-US" sz="1000" dirty="0"/>
+            <a:endParaRPr lang="en-US" sz="1800" dirty="0"/>
           </a:p>
         </p:txBody>
       </p:sp>
@@ -11407,8 +11409,8 @@
         </p:nvSpPr>
         <p:spPr>
           <a:xfrm>
-            <a:off x="822960" y="502920"/>
-            <a:ext cx="10515600" cy="365760"/>
+            <a:off x="822960" y="457200"/>
+            <a:ext cx="10515600" cy="411480"/>
           </a:xfrm>
           <a:prstGeom prst="rect">
             <a:avLst/>
@@ -11424,7 +11426,7 @@
               <a:buNone/>
             </a:pPr>
             <a:r>
-              <a:rPr lang="en-US" sz="1200" spc="300" kern="0" dirty="0">
+              <a:rPr lang="en-US" sz="1800" spc="300" kern="0" dirty="0">
                 <a:solidFill>
                   <a:srgbClr val="06B6D4"/>
                 </a:solidFill>
@@ -11434,7 +11436,7 @@
               </a:rPr>
               <a:t>EXTRACTION</a:t>
             </a:r>
-            <a:endParaRPr lang="en-US" sz="1200" dirty="0"/>
+            <a:endParaRPr lang="en-US" sz="1800" dirty="0"/>
           </a:p>
         </p:txBody>
       </p:sp>
@@ -11484,8 +11486,8 @@
           <p:nvPr/>
         </p:nvGraphicFramePr>
         <p:xfrm>
-          <a:off x="822960" y="1874520"/>
-          <a:ext cx="10515600" cy="3337560"/>
+          <a:off x="822960" y="1783080"/>
+          <a:ext cx="10515600" cy="3383280"/>
         </p:xfrm>
         <a:graphic xmlns:a="http://schemas.openxmlformats.org/drawingml/2006/main">
           <a:graphicData uri="http://schemas.openxmlformats.org/drawingml/2006/chart">
@@ -11501,7 +11503,7 @@
         </p:nvSpPr>
         <p:spPr>
           <a:xfrm>
-            <a:off x="822960" y="5413248"/>
+            <a:off x="822960" y="5321808"/>
             <a:ext cx="10515600" cy="0"/>
           </a:xfrm>
           <a:prstGeom prst="line">
@@ -11524,8 +11526,8 @@
         </p:nvSpPr>
         <p:spPr>
           <a:xfrm>
-            <a:off x="822960" y="5504688"/>
-            <a:ext cx="10424160" cy="411480"/>
+            <a:off x="822960" y="5394960"/>
+            <a:ext cx="10424160" cy="502920"/>
           </a:xfrm>
           <a:prstGeom prst="rect">
             <a:avLst/>
@@ -11541,7 +11543,7 @@
               <a:buNone/>
             </a:pPr>
             <a:r>
-              <a:rPr lang="en-US" sz="1300" i="1" dirty="0">
+              <a:rPr lang="en-US" sz="1800" i="1" dirty="0">
                 <a:solidFill>
                   <a:srgbClr val="06B6D4"/>
                 </a:solidFill>
@@ -11551,7 +11553,7 @@
               </a:rPr>
               <a:t>→  Partial data with a warning beats zero data with a shrug - the pipeline degrades, it does not die.</a:t>
             </a:r>
-            <a:endParaRPr lang="en-US" sz="1300" dirty="0"/>
+            <a:endParaRPr lang="en-US" sz="1800" dirty="0"/>
           </a:p>
         </p:txBody>
       </p:sp>
@@ -11586,8 +11588,8 @@
         </p:nvSpPr>
         <p:spPr>
           <a:xfrm>
-            <a:off x="822960" y="6053328"/>
-            <a:ext cx="9692640" cy="457200"/>
+            <a:off x="822960" y="6035040"/>
+            <a:ext cx="10424160" cy="566928"/>
           </a:xfrm>
           <a:prstGeom prst="rect">
             <a:avLst/>
@@ -11603,9 +11605,9 @@
               <a:buNone/>
             </a:pPr>
             <a:r>
-              <a:rPr lang="en-US" sz="1150" dirty="0">
-                <a:solidFill>
-                  <a:srgbClr val="64748B"/>
+              <a:rPr lang="en-US" sz="1800" dirty="0">
+                <a:solidFill>
+                  <a:srgbClr val="8FA3BF"/>
                 </a:solidFill>
                 <a:latin typeface="Segoe UI" pitchFamily="34" charset="0"/>
                 <a:ea typeface="Segoe UI" pitchFamily="34" charset="-122"/>
@@ -11613,7 +11615,7 @@
               </a:rPr>
               <a:t>Illustrative outcome mix for a run against a site mid-redesign.</a:t>
             </a:r>
-            <a:endParaRPr lang="en-US" sz="1150" dirty="0"/>
+            <a:endParaRPr lang="en-US" sz="1800" dirty="0"/>
           </a:p>
         </p:txBody>
       </p:sp>
@@ -11625,8 +11627,8 @@
         </p:nvSpPr>
         <p:spPr>
           <a:xfrm>
-            <a:off x="10698480" y="6382512"/>
-            <a:ext cx="1188720" cy="365760"/>
+            <a:off x="10698480" y="6309360"/>
+            <a:ext cx="1188720" cy="411480"/>
           </a:xfrm>
           <a:prstGeom prst="rect">
             <a:avLst/>
@@ -11642,9 +11644,9 @@
               <a:buNone/>
             </a:pPr>
             <a:r>
-              <a:rPr lang="en-US" sz="1000" dirty="0">
-                <a:solidFill>
-                  <a:srgbClr val="64748B"/>
+              <a:rPr lang="en-US" sz="1800" dirty="0">
+                <a:solidFill>
+                  <a:srgbClr val="8FA3BF"/>
                 </a:solidFill>
                 <a:latin typeface="Consolas" pitchFamily="34" charset="0"/>
                 <a:ea typeface="Consolas" pitchFamily="34" charset="-122"/>
@@ -11652,7 +11654,7 @@
               </a:rPr>
               <a:t>9 / 15</a:t>
             </a:r>
-            <a:endParaRPr lang="en-US" sz="1000" dirty="0"/>
+            <a:endParaRPr lang="en-US" sz="1800" dirty="0"/>
           </a:p>
         </p:txBody>
       </p:sp>

--- a/decks/web-scraping-toolkit.pptx
+++ b/decks/web-scraping-toolkit.pptx
@@ -2292,7 +2292,7 @@
           <a:p>
             <a:r>
               <a:rPr lang="en-US" dirty="0"/>
-              <a:t>Key message: One framework, four disciplines | Talk track: Built for engagements where the data has to keep arriving, month after month. | Transition: next up - "Validate every run".</a:t>
+              <a:t>Key message: One framework, four disciplines | Talk track: Built for engagements where the data has to keep arriving, month after month. | Transition: next up - "Every run is validated before the data is trusted".</a:t>
             </a:r>
             <a:endParaRPr lang="en-US" dirty="0"/>
           </a:p>
@@ -2380,7 +2380,7 @@
           <a:p>
             <a:r>
               <a:rPr lang="en-US" dirty="0"/>
-              <a:t>Key message: Validate every run | Talk track: Do not trust a run because it exited zero. | Transition: next up - "What run validation catches before clients do".</a:t>
+              <a:t>Key message: Every run is validated before the data is trusted | Talk track: Do not trust a run because it exited zero. | Transition: next up - "What run validation catches before clients do".</a:t>
             </a:r>
             <a:endParaRPr lang="en-US" dirty="0"/>
           </a:p>
@@ -10358,7 +10358,7 @@
                 <a:ea typeface="Segoe UI" pitchFamily="34" charset="-122"/>
                 <a:cs typeface="Segoe UI" pitchFamily="34" charset="-120"/>
               </a:rPr>
-              <a:t>Validate every run</a:t>
+              <a:t>Every run is validated before the data is trusted</a:t>
             </a:r>
             <a:endParaRPr lang="en-US" sz="2700" dirty="0"/>
           </a:p>
